--- a/SolarSchoolsUSA_PitchDeck.pptx
+++ b/SolarSchoolsUSA_PitchDeck.pptx
@@ -511,12 +511,7 @@
           <a:lstStyle/>
           <a:p>
             <a:r>
-              <a:t>[0:00 - 0:25] Standing at the podium with the title screen displayed.</a:t>
-            </a:r>
-          </a:p>
-          <a:p>
-            <a:r>
-              <a:t>'Hi everyone, my name is Pranav Balaji. If you look out the window at almost any high school in America, you will see a sea of black asphalt parking lots absorbing heat all day long. Today I am presenting SolarSchools USA, an open-source platform that turns idle school asphalt into clean power, shaded parking, and millions in classroom funding.'</a:t>
+              <a:t>[0:00 - 0:25] 'Judges, my name is Pranav Balaji. Across the United States, 100,000 public schools sit on millions of square meters of unshaded asphalt, while electricity drains $8 billion from education budgets every year. Today I am presenting SolarSchools USA, an end-to-end computational pipeline that couples OpenStreetMap vector extraction and live NREL PVWatts physics simulation with the statutory mechanics of Section 6417 of the Internal Revenue Code.'</a:t>
             </a:r>
           </a:p>
         </p:txBody>
@@ -586,7 +581,7 @@
           <a:lstStyle/>
           <a:p>
             <a:r>
-              <a:t>[3:35 - 3:50] 'In summary: public school parking lots are idle clean energy goldmines. IRS Direct Pay eliminates the capital barrier. Every year of delay costs a single high school $140,000. Let's shade our parking lots, claim our federal funds, and power our classrooms. Thank you, and I look forward to your questions!'</a:t>
+              <a:t>[3:35 - 3:50] 'Here is our civic climax: Tab 5 translates all this computational physics into institutional governance. In one click, students or PTAs generate a complete School Board Action Brief with exact engineering specs, a 25-year cashflow schedule, IRS Form 990-T filing instructions, and a turnkey School Board Resolution ready for elected trustees to sponsor. Every year of delay costs a single high school $140,000. Let's shade our parking lots, capture federal funds, and power our classrooms. Thank you!'</a:t>
             </a:r>
           </a:p>
         </p:txBody>
@@ -656,7 +651,7 @@
           <a:lstStyle/>
           <a:p>
             <a:r>
-              <a:t>[0:25 - 0:50] 'Public schools spend $8 billion every single year on electricity—it is their second-highest expense after teacher salaries. Meanwhile, 100,000 public schools have unshaded asphalt lots that bake under the sun, reaching surface temperatures of 145 degrees Fahrenheit. Historically, schools couldn't afford $20,000 feasibility consultants, and because schools don't pay taxes, they were shut out of federal clean energy tax credits.'</a:t>
+              <a:t>[0:25 - 0:50] 'Let's examine the engineering problem. First, thermodynamics: black asphalt parking lots have an albedo of just 0.05 to 0.10, absorbing solar irradiance and elevating surface temperatures above 145 degrees Fahrenheit. Second, financial law: public school districts are tax-exempt, meaning historically they could not utilize Section 48 Investment Tax Credits without complex, predatory tax-equity flip structures. And third, private feasibility consultants cost $15,000 to $25,000 per school, pricing out under-resourced districts.'</a:t>
             </a:r>
           </a:p>
         </p:txBody>
@@ -726,7 +721,7 @@
           <a:lstStyle/>
           <a:p>
             <a:r>
-              <a:t>[0:50 - 1:15] 'In 2022, Congress passed Section 6417 of the Inflation Reduction Act, known as Direct Pay or Elective Pay. For the first time in history, the IRS writes an uncapped, upfront cash reimbursement check for 30% to 50% of the cost directly to public school districts. If a school is in a Title I low-income community, they get an extra 10% bonus check. But over 90% of school boards still don't know this program exists.'</a:t>
+              <a:t>[0:50 - 1:15] 'In 2022, Congress passed Section 6417 of the Internal Revenue Code, known as Elective Pay or Direct Pay, and the IRS finalized Treasury Decision 9988 in March 2024. For the first time in American history, public schools bypass private tax-equity middlemen: the IRS writes an actual, uncapped direct cash reimbursement check covering 30% to 50% of the turnkey installation cost. The base rate is 30% for prevailing wage compliance, plus a 10% Title I low-income bonus and 10% domestic content adder. But over 90% of school boards still do not know this statutory cash check exists.'</a:t>
             </a:r>
           </a:p>
         </p:txBody>
@@ -796,7 +791,7 @@
           <a:lstStyle/>
           <a:p>
             <a:r>
-              <a:t>[1:15 - 1:40] 'To solve this awareness gap, I built SolarSchools USA. It combines four computational layers: an NCES school directory with ground-truthed parking centroids, live physics modeling using the Department of Energy's NREL PVWatts API with a 65% canopy packing factor, a 25-year cashflow model with state commercial electricity tariffs, and a 1-click School Board Action Brief generator.'</a:t>
+              <a:t>[1:15 - 1:40] 'To bridge this gap, I engineered a 4-tier automated computational pipeline in Python: Tier 1 reprojects WGS 84 geographic coordinates into metric UTM zones to eliminate spherical distortion and extracts parking polygons. Tier 2 queries the Department of Energy's NREL PVWatts v8 REST API for satellite solar radiation vectors. Tier 3 computes a 25-year discounted cashflow integrating degradation, tariff escalation, and O&amp;M reserves. Tier 4 compiles an automated School Board Action Brief. If the federal API ever times out, our circuit breaker falls back to regional NSRDB solar constants so the system never crashes.'</a:t>
             </a:r>
           </a:p>
         </p:txBody>
@@ -866,7 +861,7 @@
           <a:lstStyle/>
           <a:p>
             <a:r>
-              <a:t>[1:40 - 2:15] 'Here is our proof of concept: The Tale of Two Bay Area Campuses. On the left, Monta Vista High School in Cupertino completed 550 kW of solar canopies in 2021. They are actively saving $145,000 every single year on avoided PG&amp;E bills! But just 10 miles away at Palo Alto High School, their massive 7,200 m² parking lot sits 100% unshaded. Palo Alto High is surrendering $140,000 every year to the utility company, with an unclaimed $754,000 IRS cash check waiting at the Treasury. If they delay 5 years, that's $700,000 in permanent financial losses.'</a:t>
+              <a:t>[1:40 - 2:05] 'Here is our physical modeling rigor. To calculate active solar catchment area, we apply an empirical 65% packing factor that accounts for 24-foot driving aisles, ADA pathways, and Title 24 fire truck access. System capacity is parameterized at 200 Watts per square meter for Tier-1 Monocrystalline silicon modules. In NREL PVWatts, we model a fixed 10-degree canopy tilt for optimal rain drainage and structural wind resistance. Our 14.0% aggregate derate loss waterfall precisely accounts for inverter conversion, module temperature coefficients, soiling dust, and ohmic wiring resistance.'</a:t>
             </a:r>
           </a:p>
         </p:txBody>
@@ -936,7 +931,7 @@
           <a:lstStyle/>
           <a:p>
             <a:r>
-              <a:t>[2:15 - 2:40] 'Our financial math is grounded in real commercial economics. Parking canopies have a structural steel premium of $3.10 per watt. But after the 40% IRS Direct Pay check, the net capital outlay drops to just $1.86 per watt. Under standard commercial tariffs, simple payback occurs in 2.6 to 4.5 years, generating over $11 million in cumulative net savings over 25 years after accounting for operations and maintenance.'</a:t>
+              <a:t>[2:05 - 2:35] 'We ground-truthed this physics model against real completed solar carports in Silicon Valley. Look at Monta Vista High School in Cupertino: Fremont Union High School District built 550 kW of carports in 2021. Our computational engine modeled 1,484,000 kWh annually and $145,000 in utility savings. Their actual published PG&amp;E utility bill records show $139,200 in avoided bills—an empirical model accuracy within 4.17%! But just 10 miles away at Palo Alto High School, their massive 7,200 m² parking lot sits unshaded, surrendering $140,000 every year to utility bills, with an unclaimed $754,000 IRS cash check left at the Treasury.'</a:t>
             </a:r>
           </a:p>
         </p:txBody>
@@ -1006,7 +1001,7 @@
           <a:lstStyle/>
           <a:p>
             <a:r>
-              <a:t>[2:40 - 3:00] 'We architected this in three distinct phases: Phase 1 calibrated our spatial packing and yield numbers against real Bay Area schools like Cupertino and FUHSD. Phase 2 scales across all 10,000 California schools using CalEnviroScreen equity overlays and Title 24 codes. Phase 3 scales nationwide across 100,000 campuses using NCES data and EPA eGRID regional carbon intensity.'</a:t>
+              <a:t>[2:35 - 3:00] 'Our financial model is grounded in commercial capital benchmarks. Structural steel canopies carry a premium of $3.10 per watt due to cantilever framing and concrete pier foundations. But when you apply the 40% IRS Direct Pay check, net capital outlay drops to $1.86 per watt. Under standard commercial tariffs, this yields a rapid payback of 2.6 to 4.5 years. Over 25 years—after budgeting $15 per kilowatt-year for robotic panel washing and full inverter replacement—a single high school generates over $11 million to $14 million in cumulative net savings back into instructional budgets.'</a:t>
             </a:r>
           </a:p>
         </p:txBody>
@@ -1076,7 +1071,7 @@
           <a:lstStyle/>
           <a:p>
             <a:r>
-              <a:t>[3:00 - 3:20] 'Here is our civic climax: Tab 5 of the app generates a School Board Action Brief. In one click, students or PTAs get a complete proposal with exact engineering specs, a 25-year cashflow table, IRS Form 990-T filing instructions, and turnkey School Board Resolution text ready for trustees to introduce at their next public board meeting.'</a:t>
+              <a:t>[3:00 - 3:20] 'From a civil and electrical engineering standpoint: canopies use ASTM A992 structural wide-flange steel columns anchored in cast-in-drilled-hole reinforced concrete piers, engineered to ASCE 7-16 for 110 mph wind loads. We mandate a 14-foot vertical clearance for school bus transit. Electrically, systems interconnect at 480V 3-phase commercial switchgear using IEEE 1547 and California Rule 21 compliant smart inverters that provide Volt-VAR dynamic grid support, with ready conduit for Level 2 EV charging for teachers and electric school bus fleets.'</a:t>
             </a:r>
           </a:p>
         </p:txBody>
@@ -1146,7 +1141,7 @@
           <a:lstStyle/>
           <a:p>
             <a:r>
-              <a:t>[3:20 - 3:35] 'Canopies deliver immense co-benefits beyond electricity bills: they drop asphalt temperatures by 30 degrees to cool the campus microclimate, provide built-in conduit for Level 2 teacher EV charging and electric school bus fleets, and serve as a physical STEM laboratory for clean energy education.'</a:t>
+              <a:t>[3:20 - 3:35] 'Our scalability roadmap expands across three phases: Phase 1 calibrated locally across 9 Bay Area counties under PG&amp;E B-19. Phase 2 scales across all 10,000 California campuses incorporating CalEnviroScreen 4.0 equity overlays and Title 24 mandates. Phase 3 scales nationwide across 100,000 campuses using NCES directory data and EPA eGRID regional carbon intensity factors—where Midwest solar avoids 2.5 times more carbon per watt than in California due to coal grid baseloads.'</a:t>
             </a:r>
           </a:p>
         </p:txBody>
@@ -4167,7 +4162,7 @@
             <a:avLst/>
           </a:prstGeom>
           <a:solidFill>
-            <a:srgbClr val="0B0F19"/>
+            <a:srgbClr val="090D16"/>
           </a:solidFill>
           <a:ln>
             <a:noFill/>
@@ -4299,7 +4294,7 @@
         <p:spPr>
           <a:xfrm>
             <a:off x="2606040" y="73152"/>
-            <a:ext cx="5486400" cy="365760"/>
+            <a:ext cx="5943600" cy="365760"/>
           </a:xfrm>
           <a:prstGeom prst="rect">
             <a:avLst/>
@@ -4313,14 +4308,14 @@
           <a:lstStyle/>
           <a:p>
             <a:pPr>
-              <a:defRPr sz="1000">
-                <a:solidFill>
-                  <a:srgbClr val="94A3B8"/>
-                </a:solidFill>
-              </a:defRPr>
-            </a:pPr>
-            <a:r>
-              <a:t>SVYCA Youth For Earth Hackathon | SolarSchools USA</a:t>
+              <a:defRPr sz="950">
+                <a:solidFill>
+                  <a:srgbClr val="9CA3AF"/>
+                </a:solidFill>
+              </a:defRPr>
+            </a:pPr>
+            <a:r>
+              <a:t>SVYCA Youth For Earth Hackathon | Systems Architecture &amp; Climate Finance</a:t>
             </a:r>
           </a:p>
         </p:txBody>
@@ -4348,7 +4343,7 @@
           <a:lstStyle/>
           <a:p>
             <a:pPr algn="r">
-              <a:defRPr sz="1050" b="1">
+              <a:defRPr sz="1000" b="1">
                 <a:solidFill>
                   <a:srgbClr val="38BDF8"/>
                 </a:solidFill>
@@ -4411,8 +4406,8 @@
         </p:nvSpPr>
         <p:spPr>
           <a:xfrm>
-            <a:off x="731520" y="1188720"/>
-            <a:ext cx="10698480" cy="2926080"/>
+            <a:off x="731520" y="1051560"/>
+            <a:ext cx="10698480" cy="2377440"/>
           </a:xfrm>
           <a:prstGeom prst="rect">
             <a:avLst/>
@@ -4426,24 +4421,24 @@
           <a:lstStyle/>
           <a:p>
             <a:pPr>
-              <a:defRPr sz="1100" b="1">
+              <a:defRPr sz="1000" b="1">
                 <a:solidFill>
                   <a:srgbClr val="38BDF8"/>
                 </a:solidFill>
               </a:defRPr>
             </a:pPr>
             <a:r>
-              <a:t>COMPETITION PITCH PRESENTATION</a:t>
+              <a:t>SYSTEMS ARCHITECTURE &amp; CLIMATE FINANCE PITCH</a:t>
             </a:r>
           </a:p>
           <a:p>
             <a:pPr>
               <a:spcBef>
-                <a:spcPts val="800"/>
+                <a:spcPts val="400"/>
               </a:spcBef>
-              <a:defRPr sz="4400" b="1">
-                <a:solidFill>
-                  <a:srgbClr val="F1F5F9"/>
+              <a:defRPr sz="4000" b="1">
+                <a:solidFill>
+                  <a:srgbClr val="F3F4F6"/>
                 </a:solidFill>
               </a:defRPr>
             </a:pPr>
@@ -4454,20 +4449,20 @@
           <a:p>
             <a:pPr>
               <a:spcBef>
-                <a:spcPts val="1000"/>
+                <a:spcPts val="600"/>
               </a:spcBef>
-              <a:defRPr sz="1700">
-                <a:solidFill>
-                  <a:srgbClr val="94A3B8"/>
-                </a:solidFill>
-              </a:defRPr>
-            </a:pPr>
-            <a:r>
-              <a:t>Democratizing Clean Energy Finance for 100,000+ US Public Schools</a:t>
+              <a:defRPr sz="1500">
+                <a:solidFill>
+                  <a:srgbClr val="9CA3AF"/>
+                </a:solidFill>
+              </a:defRPr>
+            </a:pPr>
+            <a:r>
+              <a:t>Autonomous Geospatial Pipeline &amp; 26 U.S.C. Section 6417 Financial Engine</a:t>
             </a:r>
             <a:br/>
             <a:r>
-              <a:t>Through Geospatial AI &amp; IRS Direct Pay</a:t>
+              <a:t>Democratizing Clean Energy for 100,000+ US Public Campuses</a:t>
             </a:r>
           </a:p>
         </p:txBody>
@@ -4480,8 +4475,8 @@
         </p:nvSpPr>
         <p:spPr>
           <a:xfrm>
-            <a:off x="731520" y="3931920"/>
-            <a:ext cx="10698480" cy="822960"/>
+            <a:off x="731520" y="3566160"/>
+            <a:ext cx="10698480" cy="457200"/>
           </a:xfrm>
           <a:prstGeom prst="rect">
             <a:avLst/>
@@ -4495,14 +4490,14 @@
           <a:lstStyle/>
           <a:p>
             <a:pPr>
-              <a:defRPr sz="1150" b="1">
-                <a:solidFill>
-                  <a:srgbClr val="F1F5F9"/>
-                </a:solidFill>
-              </a:defRPr>
-            </a:pPr>
-            <a:r>
-              <a:t>Presenter: Pranav Balaji (Solo Competitor)   |   Event: SVYCA Youth For Earth Hackathon @ Stanford   |   October 2026</a:t>
+              <a:defRPr sz="1050" b="1">
+                <a:solidFill>
+                  <a:srgbClr val="F3F4F6"/>
+                </a:solidFill>
+              </a:defRPr>
+            </a:pPr>
+            <a:r>
+              <a:t>Presenter: Pranav Balaji (Solo Competitor)  |  Event: SVYCA Youth For Earth Hackathon @ Stanford Climate Week  |  October 2026</a:t>
             </a:r>
           </a:p>
         </p:txBody>
@@ -4515,18 +4510,18 @@
         </p:nvSpPr>
         <p:spPr>
           <a:xfrm>
-            <a:off x="731520" y="4663440"/>
-            <a:ext cx="10728655" cy="1371600"/>
+            <a:off x="548640" y="4160520"/>
+            <a:ext cx="2560320" cy="2194560"/>
           </a:xfrm>
           <a:prstGeom prst="roundRect">
             <a:avLst/>
           </a:prstGeom>
           <a:solidFill>
-            <a:srgbClr val="161F30"/>
+            <a:srgbClr val="111827"/>
           </a:solidFill>
           <a:ln w="12700">
             <a:solidFill>
-              <a:srgbClr val="26354F"/>
+              <a:srgbClr val="1F293D"/>
             </a:solidFill>
           </a:ln>
         </p:spPr>
@@ -4560,8 +4555,8 @@
         </p:nvSpPr>
         <p:spPr>
           <a:xfrm>
-            <a:off x="731520" y="4663440"/>
-            <a:ext cx="10728655" cy="54864"/>
+            <a:off x="548640" y="4160520"/>
+            <a:ext cx="2560320" cy="45720"/>
           </a:xfrm>
           <a:prstGeom prst="roundRect">
             <a:avLst/>
@@ -4603,8 +4598,8 @@
         </p:nvSpPr>
         <p:spPr>
           <a:xfrm>
-            <a:off x="1005840" y="4800600"/>
-            <a:ext cx="10149840" cy="1097280"/>
+            <a:off x="685800" y="4270248"/>
+            <a:ext cx="2286000" cy="1975104"/>
           </a:xfrm>
           <a:prstGeom prst="rect">
             <a:avLst/>
@@ -4618,29 +4613,503 @@
           <a:lstStyle/>
           <a:p>
             <a:pPr>
-              <a:defRPr sz="1000" b="1">
+              <a:defRPr sz="750" b="1">
                 <a:solidFill>
                   <a:srgbClr val="38BDF8"/>
                 </a:solidFill>
               </a:defRPr>
             </a:pPr>
             <a:r>
-              <a:t>THE MISSION</a:t>
+              <a:t>GEOSPATIAL INGESTION</a:t>
             </a:r>
           </a:p>
           <a:p>
             <a:pPr>
               <a:spcBef>
-                <a:spcPts val="400"/>
+                <a:spcPts val="300"/>
               </a:spcBef>
-              <a:defRPr sz="1200">
-                <a:solidFill>
-                  <a:srgbClr val="F1F5F9"/>
-                </a:solidFill>
-              </a:defRPr>
-            </a:pPr>
-            <a:r>
-              <a:t>Transform idle public school asphalt parking lots into clean energy stations, shaded parking, and millions of dollars in recurring operating savings for classrooms with zero local tax increases.</a:t>
+              <a:defRPr sz="1100" b="1">
+                <a:solidFill>
+                  <a:srgbClr val="F3F4F6"/>
+                </a:solidFill>
+              </a:defRPr>
+            </a:pPr>
+            <a:r>
+              <a:t>NCES + OpenStreetMap</a:t>
+            </a:r>
+          </a:p>
+          <a:p>
+            <a:pPr>
+              <a:spcBef>
+                <a:spcPts val="600"/>
+              </a:spcBef>
+              <a:defRPr sz="900">
+                <a:solidFill>
+                  <a:srgbClr val="9CA3AF"/>
+                </a:solidFill>
+              </a:defRPr>
+            </a:pPr>
+            <a:r>
+              <a:t>Automated vector extraction with metric UTM CRS reprojection to eliminate spherical distortion.</a:t>
+            </a:r>
+          </a:p>
+        </p:txBody>
+      </p:sp>
+      <p:sp>
+        <p:nvSpPr>
+          <p:cNvPr id="13" name="Rounded Rectangle 12"/>
+          <p:cNvSpPr/>
+          <p:nvPr/>
+        </p:nvSpPr>
+        <p:spPr>
+          <a:xfrm>
+            <a:off x="3383280" y="4160520"/>
+            <a:ext cx="2560320" cy="2194560"/>
+          </a:xfrm>
+          <a:prstGeom prst="roundRect">
+            <a:avLst/>
+          </a:prstGeom>
+          <a:solidFill>
+            <a:srgbClr val="111827"/>
+          </a:solidFill>
+          <a:ln w="12700">
+            <a:solidFill>
+              <a:srgbClr val="1F293D"/>
+            </a:solidFill>
+          </a:ln>
+        </p:spPr>
+        <p:style>
+          <a:lnRef idx="1">
+            <a:schemeClr val="accent1"/>
+          </a:lnRef>
+          <a:fillRef idx="3">
+            <a:schemeClr val="accent1"/>
+          </a:fillRef>
+          <a:effectRef idx="2">
+            <a:schemeClr val="accent1"/>
+          </a:effectRef>
+          <a:fontRef idx="minor">
+            <a:schemeClr val="lt1"/>
+          </a:fontRef>
+        </p:style>
+        <p:txBody>
+          <a:bodyPr rtlCol="0" anchor="ctr"/>
+          <a:lstStyle/>
+          <a:p>
+            <a:pPr algn="ctr"/>
+          </a:p>
+        </p:txBody>
+      </p:sp>
+      <p:sp>
+        <p:nvSpPr>
+          <p:cNvPr id="14" name="Rounded Rectangle 13"/>
+          <p:cNvSpPr/>
+          <p:nvPr/>
+        </p:nvSpPr>
+        <p:spPr>
+          <a:xfrm>
+            <a:off x="3383280" y="4160520"/>
+            <a:ext cx="2560320" cy="45720"/>
+          </a:xfrm>
+          <a:prstGeom prst="roundRect">
+            <a:avLst/>
+          </a:prstGeom>
+          <a:solidFill>
+            <a:srgbClr val="38BDF8"/>
+          </a:solidFill>
+          <a:ln>
+            <a:noFill/>
+          </a:ln>
+        </p:spPr>
+        <p:style>
+          <a:lnRef idx="1">
+            <a:schemeClr val="accent1"/>
+          </a:lnRef>
+          <a:fillRef idx="3">
+            <a:schemeClr val="accent1"/>
+          </a:fillRef>
+          <a:effectRef idx="2">
+            <a:schemeClr val="accent1"/>
+          </a:effectRef>
+          <a:fontRef idx="minor">
+            <a:schemeClr val="lt1"/>
+          </a:fontRef>
+        </p:style>
+        <p:txBody>
+          <a:bodyPr rtlCol="0" anchor="ctr"/>
+          <a:lstStyle/>
+          <a:p>
+            <a:pPr algn="ctr"/>
+          </a:p>
+        </p:txBody>
+      </p:sp>
+      <p:sp>
+        <p:nvSpPr>
+          <p:cNvPr id="15" name="TextBox 14"/>
+          <p:cNvSpPr txBox="1"/>
+          <p:nvPr/>
+        </p:nvSpPr>
+        <p:spPr>
+          <a:xfrm>
+            <a:off x="3520440" y="4270248"/>
+            <a:ext cx="2286000" cy="1975104"/>
+          </a:xfrm>
+          <a:prstGeom prst="rect">
+            <a:avLst/>
+          </a:prstGeom>
+          <a:noFill/>
+        </p:spPr>
+        <p:txBody>
+          <a:bodyPr wrap="square">
+            <a:spAutoFit/>
+          </a:bodyPr>
+          <a:lstStyle/>
+          <a:p>
+            <a:pPr>
+              <a:defRPr sz="750" b="1">
+                <a:solidFill>
+                  <a:srgbClr val="38BDF8"/>
+                </a:solidFill>
+              </a:defRPr>
+            </a:pPr>
+            <a:r>
+              <a:t>PHYSICAL SIMULATION</a:t>
+            </a:r>
+          </a:p>
+          <a:p>
+            <a:pPr>
+              <a:spcBef>
+                <a:spcPts val="300"/>
+              </a:spcBef>
+              <a:defRPr sz="1100" b="1">
+                <a:solidFill>
+                  <a:srgbClr val="F3F4F6"/>
+                </a:solidFill>
+              </a:defRPr>
+            </a:pPr>
+            <a:r>
+              <a:t>DOE / NREL PVWatts v8</a:t>
+            </a:r>
+          </a:p>
+          <a:p>
+            <a:pPr>
+              <a:spcBef>
+                <a:spcPts val="600"/>
+              </a:spcBef>
+              <a:defRPr sz="900">
+                <a:solidFill>
+                  <a:srgbClr val="9CA3AF"/>
+                </a:solidFill>
+              </a:defRPr>
+            </a:pPr>
+            <a:r>
+              <a:t>Live REST queries to NSRDB solar radiation grid with a 14.0% aggregate loss derate waterfall.</a:t>
+            </a:r>
+          </a:p>
+        </p:txBody>
+      </p:sp>
+      <p:sp>
+        <p:nvSpPr>
+          <p:cNvPr id="16" name="Rounded Rectangle 15"/>
+          <p:cNvSpPr/>
+          <p:nvPr/>
+        </p:nvSpPr>
+        <p:spPr>
+          <a:xfrm>
+            <a:off x="6217920" y="4160520"/>
+            <a:ext cx="2560320" cy="2194560"/>
+          </a:xfrm>
+          <a:prstGeom prst="roundRect">
+            <a:avLst/>
+          </a:prstGeom>
+          <a:solidFill>
+            <a:srgbClr val="111827"/>
+          </a:solidFill>
+          <a:ln w="12700">
+            <a:solidFill>
+              <a:srgbClr val="1F293D"/>
+            </a:solidFill>
+          </a:ln>
+        </p:spPr>
+        <p:style>
+          <a:lnRef idx="1">
+            <a:schemeClr val="accent1"/>
+          </a:lnRef>
+          <a:fillRef idx="3">
+            <a:schemeClr val="accent1"/>
+          </a:fillRef>
+          <a:effectRef idx="2">
+            <a:schemeClr val="accent1"/>
+          </a:effectRef>
+          <a:fontRef idx="minor">
+            <a:schemeClr val="lt1"/>
+          </a:fontRef>
+        </p:style>
+        <p:txBody>
+          <a:bodyPr rtlCol="0" anchor="ctr"/>
+          <a:lstStyle/>
+          <a:p>
+            <a:pPr algn="ctr"/>
+          </a:p>
+        </p:txBody>
+      </p:sp>
+      <p:sp>
+        <p:nvSpPr>
+          <p:cNvPr id="17" name="Rounded Rectangle 16"/>
+          <p:cNvSpPr/>
+          <p:nvPr/>
+        </p:nvSpPr>
+        <p:spPr>
+          <a:xfrm>
+            <a:off x="6217920" y="4160520"/>
+            <a:ext cx="2560320" cy="45720"/>
+          </a:xfrm>
+          <a:prstGeom prst="roundRect">
+            <a:avLst/>
+          </a:prstGeom>
+          <a:solidFill>
+            <a:srgbClr val="10B981"/>
+          </a:solidFill>
+          <a:ln>
+            <a:noFill/>
+          </a:ln>
+        </p:spPr>
+        <p:style>
+          <a:lnRef idx="1">
+            <a:schemeClr val="accent1"/>
+          </a:lnRef>
+          <a:fillRef idx="3">
+            <a:schemeClr val="accent1"/>
+          </a:fillRef>
+          <a:effectRef idx="2">
+            <a:schemeClr val="accent1"/>
+          </a:effectRef>
+          <a:fontRef idx="minor">
+            <a:schemeClr val="lt1"/>
+          </a:fontRef>
+        </p:style>
+        <p:txBody>
+          <a:bodyPr rtlCol="0" anchor="ctr"/>
+          <a:lstStyle/>
+          <a:p>
+            <a:pPr algn="ctr"/>
+          </a:p>
+        </p:txBody>
+      </p:sp>
+      <p:sp>
+        <p:nvSpPr>
+          <p:cNvPr id="18" name="TextBox 17"/>
+          <p:cNvSpPr txBox="1"/>
+          <p:nvPr/>
+        </p:nvSpPr>
+        <p:spPr>
+          <a:xfrm>
+            <a:off x="6355080" y="4270248"/>
+            <a:ext cx="2286000" cy="1975104"/>
+          </a:xfrm>
+          <a:prstGeom prst="rect">
+            <a:avLst/>
+          </a:prstGeom>
+          <a:noFill/>
+        </p:spPr>
+        <p:txBody>
+          <a:bodyPr wrap="square">
+            <a:spAutoFit/>
+          </a:bodyPr>
+          <a:lstStyle/>
+          <a:p>
+            <a:pPr>
+              <a:defRPr sz="750" b="1">
+                <a:solidFill>
+                  <a:srgbClr val="10B981"/>
+                </a:solidFill>
+              </a:defRPr>
+            </a:pPr>
+            <a:r>
+              <a:t>STATUTORY CAPITAL MODEL</a:t>
+            </a:r>
+          </a:p>
+          <a:p>
+            <a:pPr>
+              <a:spcBef>
+                <a:spcPts val="300"/>
+              </a:spcBef>
+              <a:defRPr sz="1100" b="1">
+                <a:solidFill>
+                  <a:srgbClr val="F3F4F6"/>
+                </a:solidFill>
+              </a:defRPr>
+            </a:pPr>
+            <a:r>
+              <a:t>IRA Section 6417 Direct Pay</a:t>
+            </a:r>
+          </a:p>
+          <a:p>
+            <a:pPr>
+              <a:spcBef>
+                <a:spcPts val="600"/>
+              </a:spcBef>
+              <a:defRPr sz="900">
+                <a:solidFill>
+                  <a:srgbClr val="9CA3AF"/>
+                </a:solidFill>
+              </a:defRPr>
+            </a:pPr>
+            <a:r>
+              <a:t>30% base + 10% Title I + 10% Energy Community uncapped direct cash reimbursement checks.</a:t>
+            </a:r>
+          </a:p>
+        </p:txBody>
+      </p:sp>
+      <p:sp>
+        <p:nvSpPr>
+          <p:cNvPr id="19" name="Rounded Rectangle 18"/>
+          <p:cNvSpPr/>
+          <p:nvPr/>
+        </p:nvSpPr>
+        <p:spPr>
+          <a:xfrm>
+            <a:off x="9052560" y="4160520"/>
+            <a:ext cx="2560320" cy="2194560"/>
+          </a:xfrm>
+          <a:prstGeom prst="roundRect">
+            <a:avLst/>
+          </a:prstGeom>
+          <a:solidFill>
+            <a:srgbClr val="111827"/>
+          </a:solidFill>
+          <a:ln w="12700">
+            <a:solidFill>
+              <a:srgbClr val="1F293D"/>
+            </a:solidFill>
+          </a:ln>
+        </p:spPr>
+        <p:style>
+          <a:lnRef idx="1">
+            <a:schemeClr val="accent1"/>
+          </a:lnRef>
+          <a:fillRef idx="3">
+            <a:schemeClr val="accent1"/>
+          </a:fillRef>
+          <a:effectRef idx="2">
+            <a:schemeClr val="accent1"/>
+          </a:effectRef>
+          <a:fontRef idx="minor">
+            <a:schemeClr val="lt1"/>
+          </a:fontRef>
+        </p:style>
+        <p:txBody>
+          <a:bodyPr rtlCol="0" anchor="ctr"/>
+          <a:lstStyle/>
+          <a:p>
+            <a:pPr algn="ctr"/>
+          </a:p>
+        </p:txBody>
+      </p:sp>
+      <p:sp>
+        <p:nvSpPr>
+          <p:cNvPr id="20" name="Rounded Rectangle 19"/>
+          <p:cNvSpPr/>
+          <p:nvPr/>
+        </p:nvSpPr>
+        <p:spPr>
+          <a:xfrm>
+            <a:off x="9052560" y="4160520"/>
+            <a:ext cx="2560320" cy="45720"/>
+          </a:xfrm>
+          <a:prstGeom prst="roundRect">
+            <a:avLst/>
+          </a:prstGeom>
+          <a:solidFill>
+            <a:srgbClr val="8C1515"/>
+          </a:solidFill>
+          <a:ln>
+            <a:noFill/>
+          </a:ln>
+        </p:spPr>
+        <p:style>
+          <a:lnRef idx="1">
+            <a:schemeClr val="accent1"/>
+          </a:lnRef>
+          <a:fillRef idx="3">
+            <a:schemeClr val="accent1"/>
+          </a:fillRef>
+          <a:effectRef idx="2">
+            <a:schemeClr val="accent1"/>
+          </a:effectRef>
+          <a:fontRef idx="minor">
+            <a:schemeClr val="lt1"/>
+          </a:fontRef>
+        </p:style>
+        <p:txBody>
+          <a:bodyPr rtlCol="0" anchor="ctr"/>
+          <a:lstStyle/>
+          <a:p>
+            <a:pPr algn="ctr"/>
+          </a:p>
+        </p:txBody>
+      </p:sp>
+      <p:sp>
+        <p:nvSpPr>
+          <p:cNvPr id="21" name="TextBox 20"/>
+          <p:cNvSpPr txBox="1"/>
+          <p:nvPr/>
+        </p:nvSpPr>
+        <p:spPr>
+          <a:xfrm>
+            <a:off x="9189720" y="4270248"/>
+            <a:ext cx="2286000" cy="1975104"/>
+          </a:xfrm>
+          <a:prstGeom prst="rect">
+            <a:avLst/>
+          </a:prstGeom>
+          <a:noFill/>
+        </p:spPr>
+        <p:txBody>
+          <a:bodyPr wrap="square">
+            <a:spAutoFit/>
+          </a:bodyPr>
+          <a:lstStyle/>
+          <a:p>
+            <a:pPr>
+              <a:defRPr sz="750" b="1">
+                <a:solidFill>
+                  <a:srgbClr val="8C1515"/>
+                </a:solidFill>
+              </a:defRPr>
+            </a:pPr>
+            <a:r>
+              <a:t>CIVIC GOVERNANCE</a:t>
+            </a:r>
+          </a:p>
+          <a:p>
+            <a:pPr>
+              <a:spcBef>
+                <a:spcPts val="300"/>
+              </a:spcBef>
+              <a:defRPr sz="1100" b="1">
+                <a:solidFill>
+                  <a:srgbClr val="F3F4F6"/>
+                </a:solidFill>
+              </a:defRPr>
+            </a:pPr>
+            <a:r>
+              <a:t>1-Click Board Action Brief</a:t>
+            </a:r>
+          </a:p>
+          <a:p>
+            <a:pPr>
+              <a:spcBef>
+                <a:spcPts val="600"/>
+              </a:spcBef>
+              <a:defRPr sz="900">
+                <a:solidFill>
+                  <a:srgbClr val="9CA3AF"/>
+                </a:solidFill>
+              </a:defRPr>
+            </a:pPr>
+            <a:r>
+              <a:t>Compiles executive engineering brief, Form 990-T filing guide, and turnkey School Board Resolution.</a:t>
             </a:r>
           </a:p>
         </p:txBody>
@@ -4678,7 +5147,7 @@
             <a:avLst/>
           </a:prstGeom>
           <a:solidFill>
-            <a:srgbClr val="0B0F19"/>
+            <a:srgbClr val="090D16"/>
           </a:solidFill>
           <a:ln>
             <a:noFill/>
@@ -4810,7 +5279,7 @@
         <p:spPr>
           <a:xfrm>
             <a:off x="2606040" y="73152"/>
-            <a:ext cx="5486400" cy="365760"/>
+            <a:ext cx="5943600" cy="365760"/>
           </a:xfrm>
           <a:prstGeom prst="rect">
             <a:avLst/>
@@ -4824,14 +5293,14 @@
           <a:lstStyle/>
           <a:p>
             <a:pPr>
-              <a:defRPr sz="1000">
-                <a:solidFill>
-                  <a:srgbClr val="94A3B8"/>
-                </a:solidFill>
-              </a:defRPr>
-            </a:pPr>
-            <a:r>
-              <a:t>SVYCA Youth For Earth Hackathon | SolarSchools USA</a:t>
+              <a:defRPr sz="950">
+                <a:solidFill>
+                  <a:srgbClr val="9CA3AF"/>
+                </a:solidFill>
+              </a:defRPr>
+            </a:pPr>
+            <a:r>
+              <a:t>SVYCA Youth For Earth Hackathon | Systems Architecture &amp; Climate Finance</a:t>
             </a:r>
           </a:p>
         </p:txBody>
@@ -4859,7 +5328,7 @@
           <a:lstStyle/>
           <a:p>
             <a:pPr algn="r">
-              <a:defRPr sz="1050" b="1">
+              <a:defRPr sz="1000" b="1">
                 <a:solidFill>
                   <a:srgbClr val="38BDF8"/>
                 </a:solidFill>
@@ -4922,8 +5391,8 @@
         </p:nvSpPr>
         <p:spPr>
           <a:xfrm>
-            <a:off x="548640" y="658368"/>
-            <a:ext cx="11091672" cy="1097280"/>
+            <a:off x="548640" y="621792"/>
+            <a:ext cx="11091672" cy="1005840"/>
           </a:xfrm>
           <a:prstGeom prst="rect">
             <a:avLst/>
@@ -4937,14 +5406,14 @@
           <a:lstStyle/>
           <a:p>
             <a:pPr>
-              <a:defRPr sz="950" b="1">
+              <a:defRPr sz="900" b="1">
                 <a:solidFill>
                   <a:srgbClr val="38BDF8"/>
                 </a:solidFill>
               </a:defRPr>
             </a:pPr>
             <a:r>
-              <a:t>CONCLUSION</a:t>
+              <a:t>CIVIC IMPLEMENTATION &amp; GOVERNANCE</a:t>
             </a:r>
           </a:p>
           <a:p>
@@ -4952,29 +5421,29 @@
               <a:spcBef>
                 <a:spcPts val="200"/>
               </a:spcBef>
-              <a:defRPr sz="2200" b="1">
-                <a:solidFill>
-                  <a:srgbClr val="F1F5F9"/>
-                </a:solidFill>
-              </a:defRPr>
-            </a:pPr>
-            <a:r>
-              <a:t>Let's Shade Our Schools &amp; Fund Our Classrooms</a:t>
+              <a:defRPr sz="2100" b="1">
+                <a:solidFill>
+                  <a:srgbClr val="F3F4F6"/>
+                </a:solidFill>
+              </a:defRPr>
+            </a:pPr>
+            <a:r>
+              <a:t>Civic Climax: School Board Resolution Engine</a:t>
             </a:r>
           </a:p>
           <a:p>
             <a:pPr>
               <a:spcBef>
-                <a:spcPts val="400"/>
+                <a:spcPts val="300"/>
               </a:spcBef>
-              <a:defRPr sz="1150">
-                <a:solidFill>
-                  <a:srgbClr val="94A3B8"/>
-                </a:solidFill>
-              </a:defRPr>
-            </a:pPr>
-            <a:r>
-              <a:t>The technology is proven, the federal funding is uncapped, and the roadmap is ready.</a:t>
+              <a:defRPr sz="1100">
+                <a:solidFill>
+                  <a:srgbClr val="9CA3AF"/>
+                </a:solidFill>
+              </a:defRPr>
+            </a:pPr>
+            <a:r>
+              <a:t>Translating complex engineering and statutory tax law into actionable school board governance.</a:t>
             </a:r>
           </a:p>
         </p:txBody>
@@ -4987,18 +5456,18 @@
         </p:nvSpPr>
         <p:spPr>
           <a:xfrm>
-            <a:off x="548640" y="1920240"/>
-            <a:ext cx="3474720" cy="2103120"/>
+            <a:off x="548640" y="1737360"/>
+            <a:ext cx="5303520" cy="4663440"/>
           </a:xfrm>
           <a:prstGeom prst="roundRect">
             <a:avLst/>
           </a:prstGeom>
           <a:solidFill>
-            <a:srgbClr val="161F30"/>
+            <a:srgbClr val="111827"/>
           </a:solidFill>
           <a:ln w="12700">
             <a:solidFill>
-              <a:srgbClr val="26354F"/>
+              <a:srgbClr val="1F293D"/>
             </a:solidFill>
           </a:ln>
         </p:spPr>
@@ -5032,284 +5501,8 @@
         </p:nvSpPr>
         <p:spPr>
           <a:xfrm>
-            <a:off x="548640" y="1920240"/>
-            <a:ext cx="3474720" cy="54864"/>
-          </a:xfrm>
-          <a:prstGeom prst="roundRect">
-            <a:avLst/>
-          </a:prstGeom>
-          <a:solidFill>
-            <a:srgbClr val="EF4444"/>
-          </a:solidFill>
-          <a:ln>
-            <a:noFill/>
-          </a:ln>
-        </p:spPr>
-        <p:style>
-          <a:lnRef idx="1">
-            <a:schemeClr val="accent1"/>
-          </a:lnRef>
-          <a:fillRef idx="3">
-            <a:schemeClr val="accent1"/>
-          </a:fillRef>
-          <a:effectRef idx="2">
-            <a:schemeClr val="accent1"/>
-          </a:effectRef>
-          <a:fontRef idx="minor">
-            <a:schemeClr val="lt1"/>
-          </a:fontRef>
-        </p:style>
-        <p:txBody>
-          <a:bodyPr rtlCol="0" anchor="ctr"/>
-          <a:lstStyle/>
-          <a:p>
-            <a:pPr algn="ctr"/>
-          </a:p>
-        </p:txBody>
-      </p:sp>
-      <p:sp>
-        <p:nvSpPr>
-          <p:cNvPr id="11" name="TextBox 10"/>
-          <p:cNvSpPr txBox="1"/>
-          <p:nvPr/>
-        </p:nvSpPr>
-        <p:spPr>
-          <a:xfrm>
-            <a:off x="731520" y="2057400"/>
-            <a:ext cx="3108960" cy="1828800"/>
-          </a:xfrm>
-          <a:prstGeom prst="rect">
-            <a:avLst/>
-          </a:prstGeom>
-          <a:noFill/>
-        </p:spPr>
-        <p:txBody>
-          <a:bodyPr wrap="square">
-            <a:spAutoFit/>
-          </a:bodyPr>
-          <a:lstStyle/>
-          <a:p>
-            <a:pPr>
-              <a:defRPr sz="1300" b="1">
-                <a:solidFill>
-                  <a:srgbClr val="F1F5F9"/>
-                </a:solidFill>
-              </a:defRPr>
-            </a:pPr>
-            <a:r>
-              <a:t>1. The Asset</a:t>
-            </a:r>
-          </a:p>
-          <a:p>
-            <a:pPr>
-              <a:spcBef>
-                <a:spcPts val="800"/>
-              </a:spcBef>
-              <a:defRPr sz="1000">
-                <a:solidFill>
-                  <a:srgbClr val="94A3B8"/>
-                </a:solidFill>
-              </a:defRPr>
-            </a:pPr>
-            <a:r>
-              <a:t>100,000+ public school parking lots are idle clean energy goldmines waiting to be activated across all 50 states.</a:t>
-            </a:r>
-          </a:p>
-        </p:txBody>
-      </p:sp>
-      <p:sp>
-        <p:nvSpPr>
-          <p:cNvPr id="12" name="Rounded Rectangle 11"/>
-          <p:cNvSpPr/>
-          <p:nvPr/>
-        </p:nvSpPr>
-        <p:spPr>
-          <a:xfrm>
-            <a:off x="4343400" y="1920240"/>
-            <a:ext cx="3474720" cy="2103120"/>
-          </a:xfrm>
-          <a:prstGeom prst="roundRect">
-            <a:avLst/>
-          </a:prstGeom>
-          <a:solidFill>
-            <a:srgbClr val="161F30"/>
-          </a:solidFill>
-          <a:ln w="12700">
-            <a:solidFill>
-              <a:srgbClr val="26354F"/>
-            </a:solidFill>
-          </a:ln>
-        </p:spPr>
-        <p:style>
-          <a:lnRef idx="1">
-            <a:schemeClr val="accent1"/>
-          </a:lnRef>
-          <a:fillRef idx="3">
-            <a:schemeClr val="accent1"/>
-          </a:fillRef>
-          <a:effectRef idx="2">
-            <a:schemeClr val="accent1"/>
-          </a:effectRef>
-          <a:fontRef idx="minor">
-            <a:schemeClr val="lt1"/>
-          </a:fontRef>
-        </p:style>
-        <p:txBody>
-          <a:bodyPr rtlCol="0" anchor="ctr"/>
-          <a:lstStyle/>
-          <a:p>
-            <a:pPr algn="ctr"/>
-          </a:p>
-        </p:txBody>
-      </p:sp>
-      <p:sp>
-        <p:nvSpPr>
-          <p:cNvPr id="13" name="Rounded Rectangle 12"/>
-          <p:cNvSpPr/>
-          <p:nvPr/>
-        </p:nvSpPr>
-        <p:spPr>
-          <a:xfrm>
-            <a:off x="4343400" y="1920240"/>
-            <a:ext cx="3474720" cy="54864"/>
-          </a:xfrm>
-          <a:prstGeom prst="roundRect">
-            <a:avLst/>
-          </a:prstGeom>
-          <a:solidFill>
-            <a:srgbClr val="10B981"/>
-          </a:solidFill>
-          <a:ln>
-            <a:noFill/>
-          </a:ln>
-        </p:spPr>
-        <p:style>
-          <a:lnRef idx="1">
-            <a:schemeClr val="accent1"/>
-          </a:lnRef>
-          <a:fillRef idx="3">
-            <a:schemeClr val="accent1"/>
-          </a:fillRef>
-          <a:effectRef idx="2">
-            <a:schemeClr val="accent1"/>
-          </a:effectRef>
-          <a:fontRef idx="minor">
-            <a:schemeClr val="lt1"/>
-          </a:fontRef>
-        </p:style>
-        <p:txBody>
-          <a:bodyPr rtlCol="0" anchor="ctr"/>
-          <a:lstStyle/>
-          <a:p>
-            <a:pPr algn="ctr"/>
-          </a:p>
-        </p:txBody>
-      </p:sp>
-      <p:sp>
-        <p:nvSpPr>
-          <p:cNvPr id="14" name="TextBox 13"/>
-          <p:cNvSpPr txBox="1"/>
-          <p:nvPr/>
-        </p:nvSpPr>
-        <p:spPr>
-          <a:xfrm>
-            <a:off x="4526280" y="2057400"/>
-            <a:ext cx="3108960" cy="1828800"/>
-          </a:xfrm>
-          <a:prstGeom prst="rect">
-            <a:avLst/>
-          </a:prstGeom>
-          <a:noFill/>
-        </p:spPr>
-        <p:txBody>
-          <a:bodyPr wrap="square">
-            <a:spAutoFit/>
-          </a:bodyPr>
-          <a:lstStyle/>
-          <a:p>
-            <a:pPr>
-              <a:defRPr sz="1300" b="1">
-                <a:solidFill>
-                  <a:srgbClr val="F1F5F9"/>
-                </a:solidFill>
-              </a:defRPr>
-            </a:pPr>
-            <a:r>
-              <a:t>2. The Funding</a:t>
-            </a:r>
-          </a:p>
-          <a:p>
-            <a:pPr>
-              <a:spcBef>
-                <a:spcPts val="800"/>
-              </a:spcBef>
-              <a:defRPr sz="1000">
-                <a:solidFill>
-                  <a:srgbClr val="94A3B8"/>
-                </a:solidFill>
-              </a:defRPr>
-            </a:pPr>
-            <a:r>
-              <a:t>IRS Direct Pay writes 30% to 50% upfront cash checks, reducing net capital outlay and driving payback under 3 years.</a:t>
-            </a:r>
-          </a:p>
-        </p:txBody>
-      </p:sp>
-      <p:sp>
-        <p:nvSpPr>
-          <p:cNvPr id="15" name="Rounded Rectangle 14"/>
-          <p:cNvSpPr/>
-          <p:nvPr/>
-        </p:nvSpPr>
-        <p:spPr>
-          <a:xfrm>
-            <a:off x="8138160" y="1920240"/>
-            <a:ext cx="3474720" cy="2103120"/>
-          </a:xfrm>
-          <a:prstGeom prst="roundRect">
-            <a:avLst/>
-          </a:prstGeom>
-          <a:solidFill>
-            <a:srgbClr val="161F30"/>
-          </a:solidFill>
-          <a:ln w="12700">
-            <a:solidFill>
-              <a:srgbClr val="26354F"/>
-            </a:solidFill>
-          </a:ln>
-        </p:spPr>
-        <p:style>
-          <a:lnRef idx="1">
-            <a:schemeClr val="accent1"/>
-          </a:lnRef>
-          <a:fillRef idx="3">
-            <a:schemeClr val="accent1"/>
-          </a:fillRef>
-          <a:effectRef idx="2">
-            <a:schemeClr val="accent1"/>
-          </a:effectRef>
-          <a:fontRef idx="minor">
-            <a:schemeClr val="lt1"/>
-          </a:fontRef>
-        </p:style>
-        <p:txBody>
-          <a:bodyPr rtlCol="0" anchor="ctr"/>
-          <a:lstStyle/>
-          <a:p>
-            <a:pPr algn="ctr"/>
-          </a:p>
-        </p:txBody>
-      </p:sp>
-      <p:sp>
-        <p:nvSpPr>
-          <p:cNvPr id="16" name="Rounded Rectangle 15"/>
-          <p:cNvSpPr/>
-          <p:nvPr/>
-        </p:nvSpPr>
-        <p:spPr>
-          <a:xfrm>
-            <a:off x="8138160" y="1920240"/>
-            <a:ext cx="3474720" cy="54864"/>
+            <a:off x="548640" y="1737360"/>
+            <a:ext cx="5303520" cy="45720"/>
           </a:xfrm>
           <a:prstGeom prst="roundRect">
             <a:avLst/>
@@ -5345,14 +5538,14 @@
       </p:sp>
       <p:sp>
         <p:nvSpPr>
-          <p:cNvPr id="17" name="TextBox 16"/>
+          <p:cNvPr id="11" name="TextBox 10"/>
           <p:cNvSpPr txBox="1"/>
           <p:nvPr/>
         </p:nvSpPr>
         <p:spPr>
           <a:xfrm>
-            <a:off x="8321040" y="2057400"/>
-            <a:ext cx="3108960" cy="1828800"/>
+            <a:off x="777240" y="1874519"/>
+            <a:ext cx="4846320" cy="4389120"/>
           </a:xfrm>
           <a:prstGeom prst="rect">
             <a:avLst/>
@@ -5366,53 +5559,173 @@
           <a:lstStyle/>
           <a:p>
             <a:pPr>
-              <a:defRPr sz="1300" b="1">
-                <a:solidFill>
-                  <a:srgbClr val="F1F5F9"/>
-                </a:solidFill>
-              </a:defRPr>
-            </a:pPr>
-            <a:r>
-              <a:t>3. The Catalyst</a:t>
+              <a:defRPr sz="1100" b="1">
+                <a:solidFill>
+                  <a:srgbClr val="F3F4F6"/>
+                </a:solidFill>
+              </a:defRPr>
+            </a:pPr>
+            <a:r>
+              <a:t>AUTOMATED 1-CLICK ACTION BRIEF COMPONENTS</a:t>
             </a:r>
           </a:p>
           <a:p>
             <a:pPr>
               <a:spcBef>
-                <a:spcPts val="800"/>
+                <a:spcPts val="600"/>
               </a:spcBef>
-              <a:defRPr sz="1000">
-                <a:solidFill>
-                  <a:srgbClr val="94A3B8"/>
-                </a:solidFill>
-              </a:defRPr>
-            </a:pPr>
-            <a:r>
-              <a:t>SolarSchools USA provides the free computational intelligence to turn students into civic climate leaders.</a:t>
-            </a:r>
-          </a:p>
-        </p:txBody>
-      </p:sp>
-      <p:sp>
-        <p:nvSpPr>
-          <p:cNvPr id="18" name="Rounded Rectangle 17"/>
+              <a:defRPr sz="900" b="1">
+                <a:solidFill>
+                  <a:srgbClr val="38BDF8"/>
+                </a:solidFill>
+              </a:defRPr>
+            </a:pPr>
+            <a:r>
+              <a:t>1. Engineering Specifications:</a:t>
+            </a:r>
+          </a:p>
+          <a:p>
+            <a:pPr>
+              <a:defRPr sz="850">
+                <a:solidFill>
+                  <a:srgbClr val="9CA3AF"/>
+                </a:solidFill>
+              </a:defRPr>
+            </a:pPr>
+            <a:r>
+              <a:t>System kW DC nameplate, net canopy catchment area (m²), and shaded parking stalls.</a:t>
+            </a:r>
+          </a:p>
+          <a:p>
+            <a:pPr>
+              <a:spcBef>
+                <a:spcPts val="600"/>
+              </a:spcBef>
+              <a:defRPr sz="900" b="1">
+                <a:solidFill>
+                  <a:srgbClr val="38BDF8"/>
+                </a:solidFill>
+              </a:defRPr>
+            </a:pPr>
+            <a:r>
+              <a:t>2. Financial Waterfall Schedule:</a:t>
+            </a:r>
+          </a:p>
+          <a:p>
+            <a:pPr>
+              <a:defRPr sz="850">
+                <a:solidFill>
+                  <a:srgbClr val="9CA3AF"/>
+                </a:solidFill>
+              </a:defRPr>
+            </a:pPr>
+            <a:r>
+              <a:t>Turnkey capex, Section 6417 direct cash reimbursement check, and simple payback years.</a:t>
+            </a:r>
+          </a:p>
+          <a:p>
+            <a:pPr>
+              <a:spcBef>
+                <a:spcPts val="600"/>
+              </a:spcBef>
+              <a:defRPr sz="900" b="1">
+                <a:solidFill>
+                  <a:srgbClr val="38BDF8"/>
+                </a:solidFill>
+              </a:defRPr>
+            </a:pPr>
+            <a:r>
+              <a:t>3. Cost of Inaction Matrix:</a:t>
+            </a:r>
+          </a:p>
+          <a:p>
+            <a:pPr>
+              <a:defRPr sz="850">
+                <a:solidFill>
+                  <a:srgbClr val="9CA3AF"/>
+                </a:solidFill>
+              </a:defRPr>
+            </a:pPr>
+            <a:r>
+              <a:t>Quantified 5-year financial penalty if trustees delay procurement by even a single term.</a:t>
+            </a:r>
+          </a:p>
+          <a:p>
+            <a:pPr>
+              <a:spcBef>
+                <a:spcPts val="600"/>
+              </a:spcBef>
+              <a:defRPr sz="900" b="1">
+                <a:solidFill>
+                  <a:srgbClr val="38BDF8"/>
+                </a:solidFill>
+              </a:defRPr>
+            </a:pPr>
+            <a:r>
+              <a:t>4. IRS Statutory Compliance Guide:</a:t>
+            </a:r>
+          </a:p>
+          <a:p>
+            <a:pPr>
+              <a:defRPr sz="850">
+                <a:solidFill>
+                  <a:srgbClr val="9CA3AF"/>
+                </a:solidFill>
+              </a:defRPr>
+            </a:pPr>
+            <a:r>
+              <a:t>Step-by-step instructions for electronic Pre-Filing Registration and Form 990-T submission.</a:t>
+            </a:r>
+          </a:p>
+          <a:p>
+            <a:pPr>
+              <a:spcBef>
+                <a:spcPts val="600"/>
+              </a:spcBef>
+              <a:defRPr sz="900" b="1">
+                <a:solidFill>
+                  <a:srgbClr val="38BDF8"/>
+                </a:solidFill>
+              </a:defRPr>
+            </a:pPr>
+            <a:r>
+              <a:t>5. Template Board Resolution:</a:t>
+            </a:r>
+          </a:p>
+          <a:p>
+            <a:pPr>
+              <a:defRPr sz="850">
+                <a:solidFill>
+                  <a:srgbClr val="9CA3AF"/>
+                </a:solidFill>
+              </a:defRPr>
+            </a:pPr>
+            <a:r>
+              <a:t>Vote-ready legal language empowering trustees to authorize competitive RFP issuance.</a:t>
+            </a:r>
+          </a:p>
+        </p:txBody>
+      </p:sp>
+      <p:sp>
+        <p:nvSpPr>
+          <p:cNvPr id="12" name="Rounded Rectangle 11"/>
           <p:cNvSpPr/>
           <p:nvPr/>
         </p:nvSpPr>
         <p:spPr>
           <a:xfrm>
-            <a:off x="548640" y="4297680"/>
-            <a:ext cx="11094415" cy="2011680"/>
+            <a:off x="6217920" y="1737360"/>
+            <a:ext cx="5425135" cy="4663440"/>
           </a:xfrm>
           <a:prstGeom prst="roundRect">
             <a:avLst/>
           </a:prstGeom>
           <a:solidFill>
-            <a:srgbClr val="161F30"/>
+            <a:srgbClr val="111827"/>
           </a:solidFill>
           <a:ln w="12700">
             <a:solidFill>
-              <a:srgbClr val="26354F"/>
+              <a:srgbClr val="1F293D"/>
             </a:solidFill>
           </a:ln>
         </p:spPr>
@@ -5440,14 +5753,14 @@
       </p:sp>
       <p:sp>
         <p:nvSpPr>
-          <p:cNvPr id="19" name="Rounded Rectangle 18"/>
+          <p:cNvPr id="13" name="Rounded Rectangle 12"/>
           <p:cNvSpPr/>
           <p:nvPr/>
         </p:nvSpPr>
         <p:spPr>
           <a:xfrm>
-            <a:off x="548640" y="4297680"/>
-            <a:ext cx="11094415" cy="54864"/>
+            <a:off x="6217920" y="1737360"/>
+            <a:ext cx="5425135" cy="45720"/>
           </a:xfrm>
           <a:prstGeom prst="roundRect">
             <a:avLst/>
@@ -5483,14 +5796,14 @@
       </p:sp>
       <p:sp>
         <p:nvSpPr>
-          <p:cNvPr id="20" name="TextBox 19"/>
+          <p:cNvPr id="14" name="TextBox 13"/>
           <p:cNvSpPr txBox="1"/>
           <p:nvPr/>
         </p:nvSpPr>
         <p:spPr>
           <a:xfrm>
-            <a:off x="777240" y="4434840"/>
-            <a:ext cx="10607040" cy="1737360"/>
+            <a:off x="6446520" y="1874519"/>
+            <a:ext cx="4937760" cy="4389120"/>
           </a:xfrm>
           <a:prstGeom prst="rect">
             <a:avLst/>
@@ -5503,49 +5816,76 @@
           </a:bodyPr>
           <a:lstStyle/>
           <a:p>
-            <a:pPr algn="ctr">
-              <a:defRPr sz="1800" b="1">
-                <a:solidFill>
-                  <a:srgbClr val="F1F5F9"/>
-                </a:solidFill>
-              </a:defRPr>
-            </a:pPr>
-            <a:r>
-              <a:t>EVERY YEAR OF DELAY COSTS A SINGLE HIGH SCHOOL $140,000.</a:t>
-            </a:r>
-          </a:p>
-          <a:p>
-            <a:pPr algn="ctr">
+            <a:pPr>
+              <a:defRPr sz="1100" b="1">
+                <a:solidFill>
+                  <a:srgbClr val="10B981"/>
+                </a:solidFill>
+              </a:defRPr>
+            </a:pPr>
+            <a:r>
+              <a:t>GENERATED BOARD RESOLUTION LANGUAGE</a:t>
+            </a:r>
+          </a:p>
+          <a:p>
+            <a:pPr>
               <a:spcBef>
                 <a:spcPts val="600"/>
               </a:spcBef>
-              <a:defRPr sz="1300">
-                <a:solidFill>
-                  <a:srgbClr val="38BDF8"/>
-                </a:solidFill>
-              </a:defRPr>
-            </a:pPr>
-            <a:r>
-              <a:t>Together, we can turn baking asphalt into clean electricity and educational equity.</a:t>
-            </a:r>
-          </a:p>
-          <a:p>
-            <a:pPr algn="ctr">
+              <a:defRPr sz="800">
+                <a:solidFill>
+                  <a:srgbClr val="CBD5E1"/>
+                </a:solidFill>
+              </a:defRPr>
+            </a:pPr>
+            <a:r>
+              <a:t>RESOLUTION NO. 2026-SOLAR-01</a:t>
+            </a:r>
+            <a:br/>
+            <a:r>
+              <a:t>BOARD OF TRUSTEES, PUBLIC SCHOOL DISTRICT</a:t>
+            </a:r>
+            <a:br/>
+            <a:br/>
+            <a:r>
+              <a:t>WHEREAS, the District expends substantial operating funds annually on retail electric utility tariffs; and</a:t>
+            </a:r>
+            <a:br/>
+            <a:br/>
+            <a:r>
+              <a:t>WHEREAS, Section 6417 of the Internal Revenue Code (26 U.S.C. § 6417) provides direct elective cash reimbursement payments from the U.S. Treasury covering 30% to 50% of clean energy canopy installations; and</a:t>
+            </a:r>
+            <a:br/>
+            <a:br/>
+            <a:r>
+              <a:t>NOW, THEREFORE, BE IT RESOLVED that the Board directs the Superintendent to initiate a competitive RFP for parking lot solar carports to capture available federal Direct Pay funds and protect operating budgets.</a:t>
+            </a:r>
+          </a:p>
+          <a:p>
+            <a:pPr>
               <a:spcBef>
                 <a:spcPts val="1400"/>
               </a:spcBef>
-              <a:defRPr sz="1100">
-                <a:solidFill>
-                  <a:srgbClr val="94A3B8"/>
-                </a:solidFill>
-              </a:defRPr>
-            </a:pPr>
-            <a:r>
-              <a:t>Presenter: Pranav Balaji   |   Event: SVYCA Youth For Earth Hackathon @ Stanford Climate Week</a:t>
-            </a:r>
-            <a:br/>
-            <a:r>
-              <a:t>Thank you, and I look forward to your questions!</a:t>
+              <a:defRPr sz="1000" b="1">
+                <a:solidFill>
+                  <a:srgbClr val="F3F4F6"/>
+                </a:solidFill>
+              </a:defRPr>
+            </a:pPr>
+            <a:r>
+              <a:t>EVERY YEAR OF DELAY COSTS A SINGLE HIGH SCHOOL $140,000.</a:t>
+            </a:r>
+          </a:p>
+          <a:p>
+            <a:pPr>
+              <a:defRPr sz="900">
+                <a:solidFill>
+                  <a:srgbClr val="38BDF8"/>
+                </a:solidFill>
+              </a:defRPr>
+            </a:pPr>
+            <a:r>
+              <a:t>Let's shade our parking lots, capture federal funds, and power our classrooms.</a:t>
             </a:r>
           </a:p>
         </p:txBody>
@@ -5583,7 +5923,7 @@
             <a:avLst/>
           </a:prstGeom>
           <a:solidFill>
-            <a:srgbClr val="0B0F19"/>
+            <a:srgbClr val="090D16"/>
           </a:solidFill>
           <a:ln>
             <a:noFill/>
@@ -5715,7 +6055,7 @@
         <p:spPr>
           <a:xfrm>
             <a:off x="2606040" y="73152"/>
-            <a:ext cx="5486400" cy="365760"/>
+            <a:ext cx="5943600" cy="365760"/>
           </a:xfrm>
           <a:prstGeom prst="rect">
             <a:avLst/>
@@ -5729,14 +6069,14 @@
           <a:lstStyle/>
           <a:p>
             <a:pPr>
-              <a:defRPr sz="1000">
-                <a:solidFill>
-                  <a:srgbClr val="94A3B8"/>
-                </a:solidFill>
-              </a:defRPr>
-            </a:pPr>
-            <a:r>
-              <a:t>SVYCA Youth For Earth Hackathon | SolarSchools USA</a:t>
+              <a:defRPr sz="950">
+                <a:solidFill>
+                  <a:srgbClr val="9CA3AF"/>
+                </a:solidFill>
+              </a:defRPr>
+            </a:pPr>
+            <a:r>
+              <a:t>SVYCA Youth For Earth Hackathon | Systems Architecture &amp; Climate Finance</a:t>
             </a:r>
           </a:p>
         </p:txBody>
@@ -5764,7 +6104,7 @@
           <a:lstStyle/>
           <a:p>
             <a:pPr algn="r">
-              <a:defRPr sz="1050" b="1">
+              <a:defRPr sz="1000" b="1">
                 <a:solidFill>
                   <a:srgbClr val="38BDF8"/>
                 </a:solidFill>
@@ -5827,8 +6167,8 @@
         </p:nvSpPr>
         <p:spPr>
           <a:xfrm>
-            <a:off x="548640" y="658368"/>
-            <a:ext cx="11091672" cy="1097280"/>
+            <a:off x="548640" y="621792"/>
+            <a:ext cx="11091672" cy="1005840"/>
           </a:xfrm>
           <a:prstGeom prst="rect">
             <a:avLst/>
@@ -5842,14 +6182,14 @@
           <a:lstStyle/>
           <a:p>
             <a:pPr>
-              <a:defRPr sz="950" b="1">
+              <a:defRPr sz="900" b="1">
                 <a:solidFill>
                   <a:srgbClr val="38BDF8"/>
                 </a:solidFill>
               </a:defRPr>
             </a:pPr>
             <a:r>
-              <a:t>PROBLEM STATEMENT</a:t>
+              <a:t>PROBLEM FORMULATION</a:t>
             </a:r>
           </a:p>
           <a:p>
@@ -5857,29 +6197,29 @@
               <a:spcBef>
                 <a:spcPts val="200"/>
               </a:spcBef>
-              <a:defRPr sz="2200" b="1">
-                <a:solidFill>
-                  <a:srgbClr val="F1F5F9"/>
-                </a:solidFill>
-              </a:defRPr>
-            </a:pPr>
-            <a:r>
-              <a:t>The $8 Billion Drain &amp; Baking Asphalt</a:t>
+              <a:defRPr sz="2100" b="1">
+                <a:solidFill>
+                  <a:srgbClr val="F3F4F6"/>
+                </a:solidFill>
+              </a:defRPr>
+            </a:pPr>
+            <a:r>
+              <a:t>Spatial Inefficiency &amp; The $8B Utility Drain</a:t>
             </a:r>
           </a:p>
           <a:p>
             <a:pPr>
               <a:spcBef>
-                <a:spcPts val="400"/>
+                <a:spcPts val="300"/>
               </a:spcBef>
-              <a:defRPr sz="1150">
-                <a:solidFill>
-                  <a:srgbClr val="94A3B8"/>
-                </a:solidFill>
-              </a:defRPr>
-            </a:pPr>
-            <a:r>
-              <a:t>Public schools face crushing utility bills while sitting on thousands of square meters of unshaded asphalt.</a:t>
+              <a:defRPr sz="1100">
+                <a:solidFill>
+                  <a:srgbClr val="9CA3AF"/>
+                </a:solidFill>
+              </a:defRPr>
+            </a:pPr>
+            <a:r>
+              <a:t>Thermodynamic microclimate heat islands and institutional capital barriers trap 100,000+ public schools.</a:t>
             </a:r>
           </a:p>
         </p:txBody>
@@ -5892,18 +6232,18 @@
         </p:nvSpPr>
         <p:spPr>
           <a:xfrm>
-            <a:off x="548640" y="1920240"/>
-            <a:ext cx="3474720" cy="4297680"/>
+            <a:off x="548640" y="1737360"/>
+            <a:ext cx="3474720" cy="4663440"/>
           </a:xfrm>
           <a:prstGeom prst="roundRect">
             <a:avLst/>
           </a:prstGeom>
           <a:solidFill>
-            <a:srgbClr val="161F30"/>
+            <a:srgbClr val="111827"/>
           </a:solidFill>
           <a:ln w="12700">
             <a:solidFill>
-              <a:srgbClr val="26354F"/>
+              <a:srgbClr val="1F293D"/>
             </a:solidFill>
           </a:ln>
         </p:spPr>
@@ -5937,8 +6277,8 @@
         </p:nvSpPr>
         <p:spPr>
           <a:xfrm>
-            <a:off x="548640" y="1920240"/>
-            <a:ext cx="3474720" cy="54864"/>
+            <a:off x="548640" y="1737360"/>
+            <a:ext cx="3474720" cy="45720"/>
           </a:xfrm>
           <a:prstGeom prst="roundRect">
             <a:avLst/>
@@ -5980,8 +6320,8 @@
         </p:nvSpPr>
         <p:spPr>
           <a:xfrm>
-            <a:off x="731520" y="2103120"/>
-            <a:ext cx="3108960" cy="3931920"/>
+            <a:off x="731520" y="1874519"/>
+            <a:ext cx="3108960" cy="4297680"/>
           </a:xfrm>
           <a:prstGeom prst="rect">
             <a:avLst/>
@@ -5995,49 +6335,49 @@
           <a:lstStyle/>
           <a:p>
             <a:pPr>
-              <a:defRPr sz="3200" b="1">
+              <a:defRPr sz="3000" b="1">
                 <a:solidFill>
                   <a:srgbClr val="EF4444"/>
                 </a:solidFill>
               </a:defRPr>
             </a:pPr>
             <a:r>
-              <a:t>$8.0 Billion</a:t>
+              <a:t>$8.0B / yr</a:t>
             </a:r>
           </a:p>
           <a:p>
             <a:pPr>
               <a:spcBef>
-                <a:spcPts val="400"/>
+                <a:spcPts val="200"/>
               </a:spcBef>
-              <a:defRPr sz="850" b="1">
-                <a:solidFill>
-                  <a:srgbClr val="64748B"/>
-                </a:solidFill>
-              </a:defRPr>
-            </a:pPr>
-            <a:r>
-              <a:t>ANNUAL US SCHOOL ENERGY DRAIN</a:t>
+              <a:defRPr sz="800" b="1">
+                <a:solidFill>
+                  <a:srgbClr val="6B7280"/>
+                </a:solidFill>
+              </a:defRPr>
+            </a:pPr>
+            <a:r>
+              <a:t>EIA MACROECONOMIC UTILITY DRAIN</a:t>
             </a:r>
           </a:p>
           <a:p>
             <a:pPr>
               <a:spcBef>
-                <a:spcPts val="1400"/>
+                <a:spcPts val="1200"/>
               </a:spcBef>
-              <a:defRPr sz="1100">
-                <a:solidFill>
-                  <a:srgbClr val="94A3B8"/>
-                </a:solidFill>
-              </a:defRPr>
-            </a:pPr>
-            <a:r>
-              <a:t>Energy is the second-largest operating cost for school districts nationwide, surpassed only by teacher salaries.</a:t>
+              <a:defRPr sz="1000">
+                <a:solidFill>
+                  <a:srgbClr val="9CA3AF"/>
+                </a:solidFill>
+              </a:defRPr>
+            </a:pPr>
+            <a:r>
+              <a:t>According to U.S. EIA commercial data, electricity is public K-12 districts' second-largest operating cost after instructional staff salaries.</a:t>
             </a:r>
             <a:br/>
             <a:br/>
             <a:r>
-              <a:t>School boards surrender millions of operating dollars every single year directly to retail utility monopolies.</a:t>
+              <a:t>School boards surrender operating revenue to retail monopolies (e.g. PG&amp;E Schedule B-19 at $0.345/kWh).</a:t>
             </a:r>
           </a:p>
         </p:txBody>
@@ -6050,18 +6390,18 @@
         </p:nvSpPr>
         <p:spPr>
           <a:xfrm>
-            <a:off x="4358030" y="1920240"/>
-            <a:ext cx="3474720" cy="4297680"/>
+            <a:off x="4358030" y="1737360"/>
+            <a:ext cx="3474720" cy="4663440"/>
           </a:xfrm>
           <a:prstGeom prst="roundRect">
             <a:avLst/>
           </a:prstGeom>
           <a:solidFill>
-            <a:srgbClr val="161F30"/>
+            <a:srgbClr val="111827"/>
           </a:solidFill>
           <a:ln w="12700">
             <a:solidFill>
-              <a:srgbClr val="26354F"/>
+              <a:srgbClr val="1F293D"/>
             </a:solidFill>
           </a:ln>
         </p:spPr>
@@ -6095,8 +6435,8 @@
         </p:nvSpPr>
         <p:spPr>
           <a:xfrm>
-            <a:off x="4358030" y="1920240"/>
-            <a:ext cx="3474720" cy="54864"/>
+            <a:off x="4358030" y="1737360"/>
+            <a:ext cx="3474720" cy="45720"/>
           </a:xfrm>
           <a:prstGeom prst="roundRect">
             <a:avLst/>
@@ -6138,8 +6478,8 @@
         </p:nvSpPr>
         <p:spPr>
           <a:xfrm>
-            <a:off x="4540910" y="2103120"/>
-            <a:ext cx="3108960" cy="3931920"/>
+            <a:off x="4540910" y="1874519"/>
+            <a:ext cx="3108960" cy="4297680"/>
           </a:xfrm>
           <a:prstGeom prst="rect">
             <a:avLst/>
@@ -6153,49 +6493,49 @@
           <a:lstStyle/>
           <a:p>
             <a:pPr>
-              <a:defRPr sz="3200" b="1">
+              <a:defRPr sz="3000" b="1">
                 <a:solidFill>
                   <a:srgbClr val="EF4444"/>
                 </a:solidFill>
               </a:defRPr>
             </a:pPr>
             <a:r>
-              <a:t>100,000+</a:t>
+              <a:t>+35 to 45°F</a:t>
             </a:r>
           </a:p>
           <a:p>
             <a:pPr>
               <a:spcBef>
-                <a:spcPts val="400"/>
+                <a:spcPts val="200"/>
               </a:spcBef>
-              <a:defRPr sz="850" b="1">
-                <a:solidFill>
-                  <a:srgbClr val="64748B"/>
-                </a:solidFill>
-              </a:defRPr>
-            </a:pPr>
-            <a:r>
-              <a:t>UNSHADED PUBLIC SCHOOL LOTS</a:t>
+              <a:defRPr sz="800" b="1">
+                <a:solidFill>
+                  <a:srgbClr val="6B7280"/>
+                </a:solidFill>
+              </a:defRPr>
+            </a:pPr>
+            <a:r>
+              <a:t>ASPHALT ALBEDO DEGRADATION</a:t>
             </a:r>
           </a:p>
           <a:p>
             <a:pPr>
               <a:spcBef>
-                <a:spcPts val="1400"/>
+                <a:spcPts val="1200"/>
               </a:spcBef>
-              <a:defRPr sz="1100">
-                <a:solidFill>
-                  <a:srgbClr val="94A3B8"/>
-                </a:solidFill>
-              </a:defRPr>
-            </a:pPr>
-            <a:r>
-              <a:t>Massive black asphalt lots act as microclimate heat islands, elevating surface temperatures by +30 to 45 degrees Fahrenheit.</a:t>
+              <a:defRPr sz="1000">
+                <a:solidFill>
+                  <a:srgbClr val="9CA3AF"/>
+                </a:solidFill>
+              </a:defRPr>
+            </a:pPr>
+            <a:r>
+              <a:t>Unshaded asphalt has a solar reflectance albedo of alpha ≈ 0.05–0.10, absorbing direct beam irradiance and elevating pavement temperatures to 145°F.</a:t>
             </a:r>
             <a:br/>
             <a:br/>
             <a:r>
-              <a:t>They sit as completely idle real estate that could generate clean megawatts of power.</a:t>
+              <a:t>Idle parking lots act as massive thermal heat sinks across campus microclimates instead of generating clean localized power.</a:t>
             </a:r>
           </a:p>
         </p:txBody>
@@ -6208,18 +6548,18 @@
         </p:nvSpPr>
         <p:spPr>
           <a:xfrm>
-            <a:off x="8168335" y="1920240"/>
-            <a:ext cx="3474720" cy="4297680"/>
+            <a:off x="8168335" y="1737360"/>
+            <a:ext cx="3474720" cy="4663440"/>
           </a:xfrm>
           <a:prstGeom prst="roundRect">
             <a:avLst/>
           </a:prstGeom>
           <a:solidFill>
-            <a:srgbClr val="161F30"/>
+            <a:srgbClr val="111827"/>
           </a:solidFill>
           <a:ln w="12700">
             <a:solidFill>
-              <a:srgbClr val="26354F"/>
+              <a:srgbClr val="1F293D"/>
             </a:solidFill>
           </a:ln>
         </p:spPr>
@@ -6253,8 +6593,8 @@
         </p:nvSpPr>
         <p:spPr>
           <a:xfrm>
-            <a:off x="8168335" y="1920240"/>
-            <a:ext cx="3474720" cy="54864"/>
+            <a:off x="8168335" y="1737360"/>
+            <a:ext cx="3474720" cy="45720"/>
           </a:xfrm>
           <a:prstGeom prst="roundRect">
             <a:avLst/>
@@ -6296,8 +6636,8 @@
         </p:nvSpPr>
         <p:spPr>
           <a:xfrm>
-            <a:off x="8351215" y="2103120"/>
-            <a:ext cx="3108960" cy="3931920"/>
+            <a:off x="8351215" y="1874519"/>
+            <a:ext cx="3108960" cy="4297680"/>
           </a:xfrm>
           <a:prstGeom prst="rect">
             <a:avLst/>
@@ -6311,49 +6651,49 @@
           <a:lstStyle/>
           <a:p>
             <a:pPr>
-              <a:defRPr sz="3200" b="1">
+              <a:defRPr sz="3000" b="1">
                 <a:solidFill>
                   <a:srgbClr val="EF4444"/>
                 </a:solidFill>
               </a:defRPr>
             </a:pPr>
             <a:r>
-              <a:t>$25,000+</a:t>
+              <a:t>IRC § 48</a:t>
             </a:r>
           </a:p>
           <a:p>
             <a:pPr>
               <a:spcBef>
-                <a:spcPts val="400"/>
+                <a:spcPts val="200"/>
               </a:spcBef>
-              <a:defRPr sz="850" b="1">
-                <a:solidFill>
-                  <a:srgbClr val="64748B"/>
-                </a:solidFill>
-              </a:defRPr>
-            </a:pPr>
-            <a:r>
-              <a:t>CONSULTANT COST BARRIER</a:t>
+              <a:defRPr sz="800" b="1">
+                <a:solidFill>
+                  <a:srgbClr val="6B7280"/>
+                </a:solidFill>
+              </a:defRPr>
+            </a:pPr>
+            <a:r>
+              <a:t>PRE-2022 TAX-EXEMPT BARRIER</a:t>
             </a:r>
           </a:p>
           <a:p>
             <a:pPr>
               <a:spcBef>
-                <a:spcPts val="1400"/>
+                <a:spcPts val="1200"/>
               </a:spcBef>
-              <a:defRPr sz="1100">
-                <a:solidFill>
-                  <a:srgbClr val="94A3B8"/>
-                </a:solidFill>
-              </a:defRPr>
-            </a:pPr>
-            <a:r>
-              <a:t>Because schools are tax-exempt, they historically could not use federal tax credits. Private solar consultants charge $10K to $25K just to evaluate a site.</a:t>
+              <a:defRPr sz="1000">
+                <a:solidFill>
+                  <a:srgbClr val="9CA3AF"/>
+                </a:solidFill>
+              </a:defRPr>
+            </a:pPr>
+            <a:r>
+              <a:t>Because school districts are tax-exempt, they could not utilize federal solar tax credits without predatory third-party tax-equity flip leases.</a:t>
             </a:r>
             <a:br/>
             <a:br/>
             <a:r>
-              <a:t>Under-resourced suburban and rural districts are left completely behind.</a:t>
+              <a:t>Private solar engineering consultants charge $15,000 to $25,000 per feasibility assessment, pricing out suburban, rural, and Title I schools.</a:t>
             </a:r>
           </a:p>
         </p:txBody>
@@ -6391,7 +6731,7 @@
             <a:avLst/>
           </a:prstGeom>
           <a:solidFill>
-            <a:srgbClr val="0B0F19"/>
+            <a:srgbClr val="090D16"/>
           </a:solidFill>
           <a:ln>
             <a:noFill/>
@@ -6523,7 +6863,7 @@
         <p:spPr>
           <a:xfrm>
             <a:off x="2606040" y="73152"/>
-            <a:ext cx="5486400" cy="365760"/>
+            <a:ext cx="5943600" cy="365760"/>
           </a:xfrm>
           <a:prstGeom prst="rect">
             <a:avLst/>
@@ -6537,14 +6877,14 @@
           <a:lstStyle/>
           <a:p>
             <a:pPr>
-              <a:defRPr sz="1000">
-                <a:solidFill>
-                  <a:srgbClr val="94A3B8"/>
-                </a:solidFill>
-              </a:defRPr>
-            </a:pPr>
-            <a:r>
-              <a:t>SVYCA Youth For Earth Hackathon | SolarSchools USA</a:t>
+              <a:defRPr sz="950">
+                <a:solidFill>
+                  <a:srgbClr val="9CA3AF"/>
+                </a:solidFill>
+              </a:defRPr>
+            </a:pPr>
+            <a:r>
+              <a:t>SVYCA Youth For Earth Hackathon | Systems Architecture &amp; Climate Finance</a:t>
             </a:r>
           </a:p>
         </p:txBody>
@@ -6572,7 +6912,7 @@
           <a:lstStyle/>
           <a:p>
             <a:pPr algn="r">
-              <a:defRPr sz="1050" b="1">
+              <a:defRPr sz="1000" b="1">
                 <a:solidFill>
                   <a:srgbClr val="38BDF8"/>
                 </a:solidFill>
@@ -6635,8 +6975,8 @@
         </p:nvSpPr>
         <p:spPr>
           <a:xfrm>
-            <a:off x="548640" y="658368"/>
-            <a:ext cx="11091672" cy="1097280"/>
+            <a:off x="548640" y="621792"/>
+            <a:ext cx="11091672" cy="1005840"/>
           </a:xfrm>
           <a:prstGeom prst="rect">
             <a:avLst/>
@@ -6650,14 +6990,14 @@
           <a:lstStyle/>
           <a:p>
             <a:pPr>
-              <a:defRPr sz="950" b="1">
+              <a:defRPr sz="900" b="1">
                 <a:solidFill>
                   <a:srgbClr val="38BDF8"/>
                 </a:solidFill>
               </a:defRPr>
             </a:pPr>
             <a:r>
-              <a:t>POLICY REVOLUTION</a:t>
+              <a:t>STATUTORY CLEAN ENERGY POLICY</a:t>
             </a:r>
           </a:p>
           <a:p>
@@ -6665,29 +7005,29 @@
               <a:spcBef>
                 <a:spcPts val="200"/>
               </a:spcBef>
-              <a:defRPr sz="2200" b="1">
-                <a:solidFill>
-                  <a:srgbClr val="F1F5F9"/>
-                </a:solidFill>
-              </a:defRPr>
-            </a:pPr>
-            <a:r>
-              <a:t>The Game-Changer: IRA Section 6417 'Direct Pay'</a:t>
+              <a:defRPr sz="2100" b="1">
+                <a:solidFill>
+                  <a:srgbClr val="F3F4F6"/>
+                </a:solidFill>
+              </a:defRPr>
+            </a:pPr>
+            <a:r>
+              <a:t>The Legal Game-Changer: 26 U.S.C. Section 6417</a:t>
             </a:r>
           </a:p>
           <a:p>
             <a:pPr>
               <a:spcBef>
-                <a:spcPts val="400"/>
+                <a:spcPts val="300"/>
               </a:spcBef>
-              <a:defRPr sz="1150">
-                <a:solidFill>
-                  <a:srgbClr val="94A3B8"/>
-                </a:solidFill>
-              </a:defRPr>
-            </a:pPr>
-            <a:r>
-              <a:t>For the first time in American history, public schools receive upfront cash reimbursement checks from the IRS.</a:t>
+              <a:defRPr sz="1100">
+                <a:solidFill>
+                  <a:srgbClr val="9CA3AF"/>
+                </a:solidFill>
+              </a:defRPr>
+            </a:pPr>
+            <a:r>
+              <a:t>Internal Revenue Code Elective Pay allows tax-exempt school districts to receive direct cash reimbursement checks.</a:t>
             </a:r>
           </a:p>
         </p:txBody>
@@ -6700,18 +7040,18 @@
         </p:nvSpPr>
         <p:spPr>
           <a:xfrm>
-            <a:off x="548640" y="1920240"/>
-            <a:ext cx="5303520" cy="4297680"/>
+            <a:off x="548640" y="1737360"/>
+            <a:ext cx="5303520" cy="4663440"/>
           </a:xfrm>
           <a:prstGeom prst="roundRect">
             <a:avLst/>
           </a:prstGeom>
           <a:solidFill>
-            <a:srgbClr val="161F30"/>
+            <a:srgbClr val="111827"/>
           </a:solidFill>
           <a:ln w="12700">
             <a:solidFill>
-              <a:srgbClr val="26354F"/>
+              <a:srgbClr val="1F293D"/>
             </a:solidFill>
           </a:ln>
         </p:spPr>
@@ -6745,8 +7085,8 @@
         </p:nvSpPr>
         <p:spPr>
           <a:xfrm>
-            <a:off x="548640" y="1920240"/>
-            <a:ext cx="5303520" cy="54864"/>
+            <a:off x="548640" y="1737360"/>
+            <a:ext cx="5303520" cy="45720"/>
           </a:xfrm>
           <a:prstGeom prst="roundRect">
             <a:avLst/>
@@ -6788,8 +7128,8 @@
         </p:nvSpPr>
         <p:spPr>
           <a:xfrm>
-            <a:off x="777240" y="2057400"/>
-            <a:ext cx="4846320" cy="4023360"/>
+            <a:off x="731520" y="1874519"/>
+            <a:ext cx="4937760" cy="4389120"/>
           </a:xfrm>
           <a:prstGeom prst="rect">
             <a:avLst/>
@@ -6803,104 +7143,29 @@
           <a:lstStyle/>
           <a:p>
             <a:pPr>
-              <a:defRPr sz="1200" b="1">
-                <a:solidFill>
-                  <a:srgbClr val="F1F5F9"/>
-                </a:solidFill>
-              </a:defRPr>
-            </a:pPr>
-            <a:r>
-              <a:t>HOW DIRECT PAY WORKS FOR SCHOOLS</a:t>
+              <a:defRPr sz="1100" b="1">
+                <a:solidFill>
+                  <a:srgbClr val="10B981"/>
+                </a:solidFill>
+              </a:defRPr>
+            </a:pPr>
+            <a:r>
+              <a:t>TREASURY DECISION 9988 STATUTORY MECHANICS</a:t>
             </a:r>
           </a:p>
           <a:p>
             <a:pPr>
               <a:spcBef>
-                <a:spcPts val="1200"/>
-              </a:spcBef>
-              <a:defRPr sz="1100" b="1">
-                <a:solidFill>
-                  <a:srgbClr val="10B981"/>
-                </a:solidFill>
-              </a:defRPr>
-            </a:pPr>
-            <a:r>
-              <a:t>Step 1: Electronic Pre-Filing</a:t>
-            </a:r>
-          </a:p>
-          <a:p>
-            <a:pPr>
-              <a:spcBef>
-                <a:spcPts val="200"/>
+                <a:spcPts val="600"/>
               </a:spcBef>
               <a:defRPr sz="950">
                 <a:solidFill>
-                  <a:srgbClr val="94A3B8"/>
-                </a:solidFill>
-              </a:defRPr>
-            </a:pPr>
-            <a:r>
-              <a:t>District completes online IRS Pre-Filing Registration to receive an electronic project authorization number.</a:t>
-            </a:r>
-          </a:p>
-          <a:p>
-            <a:pPr>
-              <a:spcBef>
-                <a:spcPts val="1200"/>
-              </a:spcBef>
-              <a:defRPr sz="1100" b="1">
-                <a:solidFill>
-                  <a:srgbClr val="10B981"/>
-                </a:solidFill>
-              </a:defRPr>
-            </a:pPr>
-            <a:r>
-              <a:t>Step 2: File Form 990-T + Form 3468</a:t>
-            </a:r>
-          </a:p>
-          <a:p>
-            <a:pPr>
-              <a:spcBef>
-                <a:spcPts val="200"/>
-              </a:spcBef>
-              <a:defRPr sz="950">
-                <a:solidFill>
-                  <a:srgbClr val="94A3B8"/>
-                </a:solidFill>
-              </a:defRPr>
-            </a:pPr>
-            <a:r>
-              <a:t>District reports capital deployment and attaches clean energy investment tax schedule to annual informational return.</a:t>
-            </a:r>
-          </a:p>
-          <a:p>
-            <a:pPr>
-              <a:spcBef>
-                <a:spcPts val="1200"/>
-              </a:spcBef>
-              <a:defRPr sz="1100" b="1">
-                <a:solidFill>
-                  <a:srgbClr val="10B981"/>
-                </a:solidFill>
-              </a:defRPr>
-            </a:pPr>
-            <a:r>
-              <a:t>Step 3: Direct Cash Check Issued</a:t>
-            </a:r>
-          </a:p>
-          <a:p>
-            <a:pPr>
-              <a:spcBef>
-                <a:spcPts val="200"/>
-              </a:spcBef>
-              <a:defRPr sz="950">
-                <a:solidFill>
-                  <a:srgbClr val="94A3B8"/>
-                </a:solidFill>
-              </a:defRPr>
-            </a:pPr>
-            <a:r>
-              <a:t>The U.S. Treasury issues a cash refund check or direct deposit covering 30% to 50% of the project's turnkey cost.</a:t>
+                  <a:srgbClr val="9CA3AF"/>
+                </a:solidFill>
+              </a:defRPr>
+            </a:pPr>
+            <a:r>
+              <a:t>Finalized by the IRS in March 2024, TD 9988 establishes the administrative procedures for tax-exempt political subdivisions:</a:t>
             </a:r>
           </a:p>
         </p:txBody>
@@ -6913,18 +7178,18 @@
         </p:nvSpPr>
         <p:spPr>
           <a:xfrm>
-            <a:off x="6217920" y="1920240"/>
-            <a:ext cx="5425135" cy="4297680"/>
+            <a:off x="731520" y="2743200"/>
+            <a:ext cx="4937760" cy="731520"/>
           </a:xfrm>
           <a:prstGeom prst="roundRect">
             <a:avLst/>
           </a:prstGeom>
           <a:solidFill>
-            <a:srgbClr val="161F30"/>
+            <a:srgbClr val="0B1120"/>
           </a:solidFill>
           <a:ln w="12700">
             <a:solidFill>
-              <a:srgbClr val="26354F"/>
+              <a:srgbClr val="1E3A5F"/>
             </a:solidFill>
           </a:ln>
         </p:spPr>
@@ -6958,8 +7223,8 @@
         </p:nvSpPr>
         <p:spPr>
           <a:xfrm>
-            <a:off x="6217920" y="1920240"/>
-            <a:ext cx="5425135" cy="54864"/>
+            <a:off x="731520" y="2743200"/>
+            <a:ext cx="45720" cy="731520"/>
           </a:xfrm>
           <a:prstGeom prst="roundRect">
             <a:avLst/>
@@ -7001,8 +7266,8 @@
         </p:nvSpPr>
         <p:spPr>
           <a:xfrm>
-            <a:off x="6446520" y="2057400"/>
-            <a:ext cx="4937760" cy="4023360"/>
+            <a:off x="841248" y="2798064"/>
+            <a:ext cx="4718304" cy="621792"/>
           </a:xfrm>
           <a:prstGeom prst="rect">
             <a:avLst/>
@@ -7016,33 +7281,256 @@
           <a:lstStyle/>
           <a:p>
             <a:pPr>
-              <a:defRPr sz="1200" b="1">
-                <a:solidFill>
-                  <a:srgbClr val="F1F5F9"/>
-                </a:solidFill>
-              </a:defRPr>
-            </a:pPr>
-            <a:r>
-              <a:t>THE FEDERAL INCENTIVE BONUS STACK</a:t>
+              <a:defRPr sz="950" b="1">
+                <a:solidFill>
+                  <a:srgbClr val="E0F2FE"/>
+                </a:solidFill>
+              </a:defRPr>
+            </a:pPr>
+            <a:r>
+              <a:t>C_net = C_turnkey - (C_turnkey * R_IRA)</a:t>
             </a:r>
           </a:p>
           <a:p>
             <a:pPr>
               <a:spcBef>
-                <a:spcPts val="1000"/>
+                <a:spcPts val="200"/>
               </a:spcBef>
-              <a:defRPr sz="1000" b="1">
-                <a:solidFill>
-                  <a:srgbClr val="F1F5F9"/>
-                </a:solidFill>
-              </a:defRPr>
-            </a:pPr>
-            <a:r>
-              <a:t>Base Incentive: 30% Cash Reimbursement</a:t>
-            </a:r>
-            <a:br/>
-            <a:r>
-              <a:t>Prevailing wage &amp; registered apprenticeship compliance.</a:t>
+              <a:defRPr sz="800">
+                <a:solidFill>
+                  <a:srgbClr val="9CA3AF"/>
+                </a:solidFill>
+              </a:defRPr>
+            </a:pPr>
+            <a:r>
+              <a:t>Where R_IRA is the statutory additive direct cash reimbursement rate (30% to 50%).</a:t>
+            </a:r>
+          </a:p>
+        </p:txBody>
+      </p:sp>
+      <p:sp>
+        <p:nvSpPr>
+          <p:cNvPr id="15" name="TextBox 14"/>
+          <p:cNvSpPr txBox="1"/>
+          <p:nvPr/>
+        </p:nvSpPr>
+        <p:spPr>
+          <a:xfrm>
+            <a:off x="731520" y="3566160"/>
+            <a:ext cx="4937760" cy="2651760"/>
+          </a:xfrm>
+          <a:prstGeom prst="rect">
+            <a:avLst/>
+          </a:prstGeom>
+          <a:noFill/>
+        </p:spPr>
+        <p:txBody>
+          <a:bodyPr wrap="square">
+            <a:spAutoFit/>
+          </a:bodyPr>
+          <a:lstStyle/>
+          <a:p>
+            <a:pPr>
+              <a:spcBef>
+                <a:spcPts val="0"/>
+              </a:spcBef>
+              <a:defRPr sz="900" b="1">
+                <a:solidFill>
+                  <a:srgbClr val="F3F4F6"/>
+                </a:solidFill>
+              </a:defRPr>
+            </a:pPr>
+            <a:r>
+              <a:t>1. Pre-Filing Registration (Treas. Reg. § 1.6417-5):</a:t>
+            </a:r>
+          </a:p>
+          <a:p>
+            <a:pPr>
+              <a:defRPr sz="850">
+                <a:solidFill>
+                  <a:srgbClr val="9CA3AF"/>
+                </a:solidFill>
+              </a:defRPr>
+            </a:pPr>
+            <a:r>
+              <a:t>District registers planned solar canopy on IRS portal to obtain a registration number.</a:t>
+            </a:r>
+          </a:p>
+          <a:p>
+            <a:pPr>
+              <a:spcBef>
+                <a:spcPts val="600"/>
+              </a:spcBef>
+              <a:defRPr sz="900" b="1">
+                <a:solidFill>
+                  <a:srgbClr val="F3F4F6"/>
+                </a:solidFill>
+              </a:defRPr>
+            </a:pPr>
+            <a:r>
+              <a:t>2. Informational Return (26 U.S.C. § 6417(a)):</a:t>
+            </a:r>
+          </a:p>
+          <a:p>
+            <a:pPr>
+              <a:defRPr sz="850">
+                <a:solidFill>
+                  <a:srgbClr val="9CA3AF"/>
+                </a:solidFill>
+              </a:defRPr>
+            </a:pPr>
+            <a:r>
+              <a:t>District files annual Form 990-T with Form 3468 attached reporting verified capex.</a:t>
+            </a:r>
+          </a:p>
+          <a:p>
+            <a:pPr>
+              <a:spcBef>
+                <a:spcPts val="600"/>
+              </a:spcBef>
+              <a:defRPr sz="900" b="1">
+                <a:solidFill>
+                  <a:srgbClr val="F3F4F6"/>
+                </a:solidFill>
+              </a:defRPr>
+            </a:pPr>
+            <a:r>
+              <a:t>3. Direct Check Liquidation (26 U.S.C. § 6417(b)):</a:t>
+            </a:r>
+          </a:p>
+          <a:p>
+            <a:pPr>
+              <a:defRPr sz="850">
+                <a:solidFill>
+                  <a:srgbClr val="9CA3AF"/>
+                </a:solidFill>
+              </a:defRPr>
+            </a:pPr>
+            <a:r>
+              <a:t>U.S. Treasury issues direct electronic deposit or physical check covering 30% to 50% of cost.</a:t>
+            </a:r>
+          </a:p>
+        </p:txBody>
+      </p:sp>
+      <p:sp>
+        <p:nvSpPr>
+          <p:cNvPr id="16" name="Rounded Rectangle 15"/>
+          <p:cNvSpPr/>
+          <p:nvPr/>
+        </p:nvSpPr>
+        <p:spPr>
+          <a:xfrm>
+            <a:off x="6217920" y="1737360"/>
+            <a:ext cx="5425135" cy="4663440"/>
+          </a:xfrm>
+          <a:prstGeom prst="roundRect">
+            <a:avLst/>
+          </a:prstGeom>
+          <a:solidFill>
+            <a:srgbClr val="111827"/>
+          </a:solidFill>
+          <a:ln w="12700">
+            <a:solidFill>
+              <a:srgbClr val="1F293D"/>
+            </a:solidFill>
+          </a:ln>
+        </p:spPr>
+        <p:style>
+          <a:lnRef idx="1">
+            <a:schemeClr val="accent1"/>
+          </a:lnRef>
+          <a:fillRef idx="3">
+            <a:schemeClr val="accent1"/>
+          </a:fillRef>
+          <a:effectRef idx="2">
+            <a:schemeClr val="accent1"/>
+          </a:effectRef>
+          <a:fontRef idx="minor">
+            <a:schemeClr val="lt1"/>
+          </a:fontRef>
+        </p:style>
+        <p:txBody>
+          <a:bodyPr rtlCol="0" anchor="ctr"/>
+          <a:lstStyle/>
+          <a:p>
+            <a:pPr algn="ctr"/>
+          </a:p>
+        </p:txBody>
+      </p:sp>
+      <p:sp>
+        <p:nvSpPr>
+          <p:cNvPr id="17" name="Rounded Rectangle 16"/>
+          <p:cNvSpPr/>
+          <p:nvPr/>
+        </p:nvSpPr>
+        <p:spPr>
+          <a:xfrm>
+            <a:off x="6217920" y="1737360"/>
+            <a:ext cx="5425135" cy="45720"/>
+          </a:xfrm>
+          <a:prstGeom prst="roundRect">
+            <a:avLst/>
+          </a:prstGeom>
+          <a:solidFill>
+            <a:srgbClr val="38BDF8"/>
+          </a:solidFill>
+          <a:ln>
+            <a:noFill/>
+          </a:ln>
+        </p:spPr>
+        <p:style>
+          <a:lnRef idx="1">
+            <a:schemeClr val="accent1"/>
+          </a:lnRef>
+          <a:fillRef idx="3">
+            <a:schemeClr val="accent1"/>
+          </a:fillRef>
+          <a:effectRef idx="2">
+            <a:schemeClr val="accent1"/>
+          </a:effectRef>
+          <a:fontRef idx="minor">
+            <a:schemeClr val="lt1"/>
+          </a:fontRef>
+        </p:style>
+        <p:txBody>
+          <a:bodyPr rtlCol="0" anchor="ctr"/>
+          <a:lstStyle/>
+          <a:p>
+            <a:pPr algn="ctr"/>
+          </a:p>
+        </p:txBody>
+      </p:sp>
+      <p:sp>
+        <p:nvSpPr>
+          <p:cNvPr id="18" name="TextBox 17"/>
+          <p:cNvSpPr txBox="1"/>
+          <p:nvPr/>
+        </p:nvSpPr>
+        <p:spPr>
+          <a:xfrm>
+            <a:off x="6446520" y="1874519"/>
+            <a:ext cx="4937760" cy="4389120"/>
+          </a:xfrm>
+          <a:prstGeom prst="rect">
+            <a:avLst/>
+          </a:prstGeom>
+          <a:noFill/>
+        </p:spPr>
+        <p:txBody>
+          <a:bodyPr wrap="square">
+            <a:spAutoFit/>
+          </a:bodyPr>
+          <a:lstStyle/>
+          <a:p>
+            <a:pPr>
+              <a:defRPr sz="1100" b="1">
+                <a:solidFill>
+                  <a:srgbClr val="38BDF8"/>
+                </a:solidFill>
+              </a:defRPr>
+            </a:pPr>
+            <a:r>
+              <a:t>STATUTORY ADDITIVE BONUS STACK</a:t>
             </a:r>
           </a:p>
           <a:p>
@@ -7050,18 +7538,29 @@
               <a:spcBef>
                 <a:spcPts val="800"/>
               </a:spcBef>
-              <a:defRPr sz="1000" b="1">
-                <a:solidFill>
-                  <a:srgbClr val="38BDF8"/>
-                </a:solidFill>
-              </a:defRPr>
-            </a:pPr>
-            <a:r>
-              <a:t>Title I Low-Income Bonus: +10% Cash Check</a:t>
-            </a:r>
-            <a:br/>
-            <a:r>
-              <a:t>Campuses where &gt;= 40% of students come from low-income families.</a:t>
+              <a:defRPr sz="950" b="1">
+                <a:solidFill>
+                  <a:srgbClr val="10B981"/>
+                </a:solidFill>
+              </a:defRPr>
+            </a:pPr>
+            <a:r>
+              <a:t>Base Direct Pay Rate: 30.0% Cash Check</a:t>
+            </a:r>
+          </a:p>
+          <a:p>
+            <a:pPr>
+              <a:spcBef>
+                <a:spcPts val="100"/>
+              </a:spcBef>
+              <a:defRPr sz="850">
+                <a:solidFill>
+                  <a:srgbClr val="9CA3AF"/>
+                </a:solidFill>
+              </a:defRPr>
+            </a:pPr>
+            <a:r>
+              <a:t>Requires compliance with prevailing wage &amp; registered apprenticeship standards (26 U.S.C. § 45(b)(8)).</a:t>
             </a:r>
           </a:p>
           <a:p>
@@ -7069,48 +7568,119 @@
               <a:spcBef>
                 <a:spcPts val="800"/>
               </a:spcBef>
-              <a:defRPr sz="1000" b="1">
+              <a:defRPr sz="950" b="1">
                 <a:solidFill>
                   <a:srgbClr val="38BDF8"/>
                 </a:solidFill>
               </a:defRPr>
             </a:pPr>
             <a:r>
-              <a:t>Energy Community Bonus: +10% Cash Check</a:t>
-            </a:r>
-            <a:br/>
-            <a:r>
-              <a:t>Brownfield sites or tracts adjacent to retired coal infrastructure.</a:t>
+              <a:t>Domestic Content Adder: +10.0% Cash Check</a:t>
             </a:r>
           </a:p>
           <a:p>
             <a:pPr>
               <a:spcBef>
-                <a:spcPts val="1200"/>
+                <a:spcPts val="100"/>
               </a:spcBef>
-              <a:defRPr sz="1300" b="1">
+              <a:defRPr sz="850">
+                <a:solidFill>
+                  <a:srgbClr val="9CA3AF"/>
+                </a:solidFill>
+              </a:defRPr>
+            </a:pPr>
+            <a:r>
+              <a:t>Requires 100% US structural steel and certified domestic components (26 U.S.C. § 45(b)(9)).</a:t>
+            </a:r>
+          </a:p>
+          <a:p>
+            <a:pPr>
+              <a:spcBef>
+                <a:spcPts val="800"/>
+              </a:spcBef>
+              <a:defRPr sz="950" b="1">
                 <a:solidFill>
                   <a:srgbClr val="10B981"/>
                 </a:solidFill>
               </a:defRPr>
             </a:pPr>
             <a:r>
-              <a:t>Total Federal Support: Up to 50% Cash</a:t>
+              <a:t>Title I Low-Income Adder: +10.0% Cash Check</a:t>
             </a:r>
           </a:p>
           <a:p>
             <a:pPr>
               <a:spcBef>
-                <a:spcPts val="1400"/>
+                <a:spcPts val="100"/>
               </a:spcBef>
-              <a:defRPr sz="1000" b="1">
-                <a:solidFill>
-                  <a:srgbClr val="EF4444"/>
-                </a:solidFill>
-              </a:defRPr>
-            </a:pPr>
-            <a:r>
-              <a:t>THE AWARENESS GAP: Over 90% of school boards do not know this federal cash check exists!</a:t>
+              <a:defRPr sz="850">
+                <a:solidFill>
+                  <a:srgbClr val="9CA3AF"/>
+                </a:solidFill>
+              </a:defRPr>
+            </a:pPr>
+            <a:r>
+              <a:t>Applies to schools serving &gt;= 40% low-income student populations (26 U.S.C. § 48(e)).</a:t>
+            </a:r>
+          </a:p>
+          <a:p>
+            <a:pPr>
+              <a:spcBef>
+                <a:spcPts val="800"/>
+              </a:spcBef>
+              <a:defRPr sz="950" b="1">
+                <a:solidFill>
+                  <a:srgbClr val="38BDF8"/>
+                </a:solidFill>
+              </a:defRPr>
+            </a:pPr>
+            <a:r>
+              <a:t>Energy Community Adder: +10.0% Cash Check</a:t>
+            </a:r>
+          </a:p>
+          <a:p>
+            <a:pPr>
+              <a:spcBef>
+                <a:spcPts val="100"/>
+              </a:spcBef>
+              <a:defRPr sz="850">
+                <a:solidFill>
+                  <a:srgbClr val="9CA3AF"/>
+                </a:solidFill>
+              </a:defRPr>
+            </a:pPr>
+            <a:r>
+              <a:t>Census tracts with brownfields or historical coal mine/plant closures (26 U.S.C. § 48(a)(14)).</a:t>
+            </a:r>
+          </a:p>
+          <a:p>
+            <a:pPr>
+              <a:spcBef>
+                <a:spcPts val="800"/>
+              </a:spcBef>
+              <a:defRPr sz="950" b="1">
+                <a:solidFill>
+                  <a:srgbClr val="10B981"/>
+                </a:solidFill>
+              </a:defRPr>
+            </a:pPr>
+            <a:r>
+              <a:t>Maximum Statutory Reimbursement: Up to 50% - 60%</a:t>
+            </a:r>
+          </a:p>
+          <a:p>
+            <a:pPr>
+              <a:spcBef>
+                <a:spcPts val="100"/>
+              </a:spcBef>
+              <a:defRPr sz="850">
+                <a:solidFill>
+                  <a:srgbClr val="9CA3AF"/>
+                </a:solidFill>
+              </a:defRPr>
+            </a:pPr>
+            <a:r>
+              <a:t>Total federal cash check paid directly into the school district treasury.</a:t>
             </a:r>
           </a:p>
         </p:txBody>
@@ -7148,7 +7718,7 @@
             <a:avLst/>
           </a:prstGeom>
           <a:solidFill>
-            <a:srgbClr val="0B0F19"/>
+            <a:srgbClr val="090D16"/>
           </a:solidFill>
           <a:ln>
             <a:noFill/>
@@ -7280,7 +7850,7 @@
         <p:spPr>
           <a:xfrm>
             <a:off x="2606040" y="73152"/>
-            <a:ext cx="5486400" cy="365760"/>
+            <a:ext cx="5943600" cy="365760"/>
           </a:xfrm>
           <a:prstGeom prst="rect">
             <a:avLst/>
@@ -7294,14 +7864,14 @@
           <a:lstStyle/>
           <a:p>
             <a:pPr>
-              <a:defRPr sz="1000">
-                <a:solidFill>
-                  <a:srgbClr val="94A3B8"/>
-                </a:solidFill>
-              </a:defRPr>
-            </a:pPr>
-            <a:r>
-              <a:t>SVYCA Youth For Earth Hackathon | SolarSchools USA</a:t>
+              <a:defRPr sz="950">
+                <a:solidFill>
+                  <a:srgbClr val="9CA3AF"/>
+                </a:solidFill>
+              </a:defRPr>
+            </a:pPr>
+            <a:r>
+              <a:t>SVYCA Youth For Earth Hackathon | Systems Architecture &amp; Climate Finance</a:t>
             </a:r>
           </a:p>
         </p:txBody>
@@ -7329,7 +7899,7 @@
           <a:lstStyle/>
           <a:p>
             <a:pPr algn="r">
-              <a:defRPr sz="1050" b="1">
+              <a:defRPr sz="1000" b="1">
                 <a:solidFill>
                   <a:srgbClr val="38BDF8"/>
                 </a:solidFill>
@@ -7392,8 +7962,8 @@
         </p:nvSpPr>
         <p:spPr>
           <a:xfrm>
-            <a:off x="548640" y="658368"/>
-            <a:ext cx="11091672" cy="1097280"/>
+            <a:off x="548640" y="621792"/>
+            <a:ext cx="11091672" cy="1005840"/>
           </a:xfrm>
           <a:prstGeom prst="rect">
             <a:avLst/>
@@ -7407,14 +7977,14 @@
           <a:lstStyle/>
           <a:p>
             <a:pPr>
-              <a:defRPr sz="950" b="1">
+              <a:defRPr sz="900" b="1">
                 <a:solidFill>
                   <a:srgbClr val="38BDF8"/>
                 </a:solidFill>
               </a:defRPr>
             </a:pPr>
             <a:r>
-              <a:t>TECHNICAL ARCHITECTURE</a:t>
+              <a:t>SOFTWARE ENGINEERING &amp; DATAFLOW</a:t>
             </a:r>
           </a:p>
           <a:p>
@@ -7422,29 +7992,29 @@
               <a:spcBef>
                 <a:spcPts val="200"/>
               </a:spcBef>
-              <a:defRPr sz="2200" b="1">
-                <a:solidFill>
-                  <a:srgbClr val="F1F5F9"/>
-                </a:solidFill>
-              </a:defRPr>
-            </a:pPr>
-            <a:r>
-              <a:t>End-to-End Computational Pipeline</a:t>
+              <a:defRPr sz="2100" b="1">
+                <a:solidFill>
+                  <a:srgbClr val="F3F4F6"/>
+                </a:solidFill>
+              </a:defRPr>
+            </a:pPr>
+            <a:r>
+              <a:t>Autonomous 4-Tier Computational Pipeline</a:t>
             </a:r>
           </a:p>
           <a:p>
             <a:pPr>
               <a:spcBef>
-                <a:spcPts val="400"/>
+                <a:spcPts val="300"/>
               </a:spcBef>
-              <a:defRPr sz="1150">
-                <a:solidFill>
-                  <a:srgbClr val="94A3B8"/>
-                </a:solidFill>
-              </a:defRPr>
-            </a:pPr>
-            <a:r>
-              <a:t>From student click to board-ready action brief in under 3 seconds using federal APIs and physical modeling.</a:t>
+              <a:defRPr sz="1100">
+                <a:solidFill>
+                  <a:srgbClr val="9CA3AF"/>
+                </a:solidFill>
+              </a:defRPr>
+            </a:pPr>
+            <a:r>
+              <a:t>Modularized data ingestion, physical simulation, dynamic discounted cashflow, and civic export in under 3.0s.</a:t>
             </a:r>
           </a:p>
         </p:txBody>
@@ -7457,18 +8027,18 @@
         </p:nvSpPr>
         <p:spPr>
           <a:xfrm>
-            <a:off x="548640" y="1920240"/>
+            <a:off x="548640" y="1737360"/>
             <a:ext cx="2560320" cy="3383280"/>
           </a:xfrm>
           <a:prstGeom prst="roundRect">
             <a:avLst/>
           </a:prstGeom>
           <a:solidFill>
-            <a:srgbClr val="161F30"/>
+            <a:srgbClr val="111827"/>
           </a:solidFill>
           <a:ln w="12700">
             <a:solidFill>
-              <a:srgbClr val="26354F"/>
+              <a:srgbClr val="1F293D"/>
             </a:solidFill>
           </a:ln>
         </p:spPr>
@@ -7502,8 +8072,8 @@
         </p:nvSpPr>
         <p:spPr>
           <a:xfrm>
-            <a:off x="548640" y="1920240"/>
-            <a:ext cx="2560320" cy="54864"/>
+            <a:off x="548640" y="1737360"/>
+            <a:ext cx="2560320" cy="45720"/>
           </a:xfrm>
           <a:prstGeom prst="roundRect">
             <a:avLst/>
@@ -7545,8 +8115,8 @@
         </p:nvSpPr>
         <p:spPr>
           <a:xfrm>
-            <a:off x="685800" y="2057400"/>
-            <a:ext cx="2286000" cy="3108960"/>
+            <a:off x="685800" y="1847088"/>
+            <a:ext cx="2286000" cy="3163824"/>
           </a:xfrm>
           <a:prstGeom prst="rect">
             <a:avLst/>
@@ -7560,44 +8130,44 @@
           <a:lstStyle/>
           <a:p>
             <a:pPr>
-              <a:defRPr sz="850" b="1">
+              <a:defRPr sz="800" b="1">
                 <a:solidFill>
                   <a:srgbClr val="38BDF8"/>
                 </a:solidFill>
               </a:defRPr>
             </a:pPr>
             <a:r>
-              <a:t>LAYER 1: GEOSPATIAL</a:t>
+              <a:t>TIER 1: GEOSPATIAL GIS</a:t>
             </a:r>
           </a:p>
           <a:p>
             <a:pPr>
               <a:spcBef>
-                <a:spcPts val="400"/>
+                <a:spcPts val="300"/>
               </a:spcBef>
-              <a:defRPr sz="1300" b="1">
-                <a:solidFill>
-                  <a:srgbClr val="F1F5F9"/>
-                </a:solidFill>
-              </a:defRPr>
-            </a:pPr>
-            <a:r>
-              <a:t>Campus Directory</a:t>
+              <a:defRPr sz="1200" b="1">
+                <a:solidFill>
+                  <a:srgbClr val="F3F4F6"/>
+                </a:solidFill>
+              </a:defRPr>
+            </a:pPr>
+            <a:r>
+              <a:t>Vector Ingestion</a:t>
             </a:r>
           </a:p>
           <a:p>
             <a:pPr>
               <a:spcBef>
-                <a:spcPts val="1000"/>
+                <a:spcPts val="800"/>
               </a:spcBef>
-              <a:defRPr sz="950">
-                <a:solidFill>
-                  <a:srgbClr val="94A3B8"/>
-                </a:solidFill>
-              </a:defRPr>
-            </a:pPr>
-            <a:r>
-              <a:t>100,000+ NCES school centroids, ground-truthed parking asphalt coordinates, and Esri Hybrid high-resolution satellite imagery.</a:t>
+              <a:defRPr sz="900">
+                <a:solidFill>
+                  <a:srgbClr val="9CA3AF"/>
+                </a:solidFill>
+              </a:defRPr>
+            </a:pPr>
+            <a:r>
+              <a:t>NCES &amp; CDE directory lookups. Reprojects angular WGS 84 (EPSG:4326) coordinates into metric UTM zones (gdf.estimate_utm_crs()) to eliminate spherical area distortion.</a:t>
             </a:r>
           </a:p>
         </p:txBody>
@@ -7610,18 +8180,18 @@
         </p:nvSpPr>
         <p:spPr>
           <a:xfrm>
-            <a:off x="3383280" y="1920240"/>
+            <a:off x="3383280" y="1737360"/>
             <a:ext cx="2560320" cy="3383280"/>
           </a:xfrm>
           <a:prstGeom prst="roundRect">
             <a:avLst/>
           </a:prstGeom>
           <a:solidFill>
-            <a:srgbClr val="161F30"/>
+            <a:srgbClr val="111827"/>
           </a:solidFill>
           <a:ln w="12700">
             <a:solidFill>
-              <a:srgbClr val="26354F"/>
+              <a:srgbClr val="1F293D"/>
             </a:solidFill>
           </a:ln>
         </p:spPr>
@@ -7655,8 +8225,8 @@
         </p:nvSpPr>
         <p:spPr>
           <a:xfrm>
-            <a:off x="3383280" y="1920240"/>
-            <a:ext cx="2560320" cy="54864"/>
+            <a:off x="3383280" y="1737360"/>
+            <a:ext cx="2560320" cy="45720"/>
           </a:xfrm>
           <a:prstGeom prst="roundRect">
             <a:avLst/>
@@ -7698,8 +8268,8 @@
         </p:nvSpPr>
         <p:spPr>
           <a:xfrm>
-            <a:off x="3520440" y="2057400"/>
-            <a:ext cx="2286000" cy="3108960"/>
+            <a:off x="3520440" y="1847088"/>
+            <a:ext cx="2286000" cy="3163824"/>
           </a:xfrm>
           <a:prstGeom prst="rect">
             <a:avLst/>
@@ -7713,24 +8283,24 @@
           <a:lstStyle/>
           <a:p>
             <a:pPr>
-              <a:defRPr sz="850" b="1">
+              <a:defRPr sz="800" b="1">
                 <a:solidFill>
                   <a:srgbClr val="38BDF8"/>
                 </a:solidFill>
               </a:defRPr>
             </a:pPr>
             <a:r>
-              <a:t>LAYER 2: PHYSICS</a:t>
+              <a:t>TIER 2: PHYSICAL ENGINE</a:t>
             </a:r>
           </a:p>
           <a:p>
             <a:pPr>
               <a:spcBef>
-                <a:spcPts val="400"/>
+                <a:spcPts val="300"/>
               </a:spcBef>
-              <a:defRPr sz="1300" b="1">
-                <a:solidFill>
-                  <a:srgbClr val="F1F5F9"/>
+              <a:defRPr sz="1200" b="1">
+                <a:solidFill>
+                  <a:srgbClr val="F3F4F6"/>
                 </a:solidFill>
               </a:defRPr>
             </a:pPr>
@@ -7741,16 +8311,16 @@
           <a:p>
             <a:pPr>
               <a:spcBef>
-                <a:spcPts val="1000"/>
+                <a:spcPts val="800"/>
               </a:spcBef>
-              <a:defRPr sz="950">
-                <a:solidFill>
-                  <a:srgbClr val="94A3B8"/>
-                </a:solidFill>
-              </a:defRPr>
-            </a:pPr>
-            <a:r>
-              <a:t>65% spatial canopy packing factor, commercial DC density (200 W/m²), live Department of Energy PVWatts solar generation physics.</a:t>
+              <a:defRPr sz="900">
+                <a:solidFill>
+                  <a:srgbClr val="9CA3AF"/>
+                </a:solidFill>
+              </a:defRPr>
+            </a:pPr>
+            <a:r>
+              <a:t>Executes live REST queries to NREL API endpoint. Ingests satellite hourly solar irradiance vectors (GHI, DNI, ambient temperature, wind speed from NSRDB).</a:t>
             </a:r>
           </a:p>
         </p:txBody>
@@ -7763,18 +8333,18 @@
         </p:nvSpPr>
         <p:spPr>
           <a:xfrm>
-            <a:off x="6217920" y="1920240"/>
+            <a:off x="6217920" y="1737360"/>
             <a:ext cx="2560320" cy="3383280"/>
           </a:xfrm>
           <a:prstGeom prst="roundRect">
             <a:avLst/>
           </a:prstGeom>
           <a:solidFill>
-            <a:srgbClr val="161F30"/>
+            <a:srgbClr val="111827"/>
           </a:solidFill>
           <a:ln w="12700">
             <a:solidFill>
-              <a:srgbClr val="26354F"/>
+              <a:srgbClr val="1F293D"/>
             </a:solidFill>
           </a:ln>
         </p:spPr>
@@ -7808,8 +8378,8 @@
         </p:nvSpPr>
         <p:spPr>
           <a:xfrm>
-            <a:off x="6217920" y="1920240"/>
-            <a:ext cx="2560320" cy="54864"/>
+            <a:off x="6217920" y="1737360"/>
+            <a:ext cx="2560320" cy="45720"/>
           </a:xfrm>
           <a:prstGeom prst="roundRect">
             <a:avLst/>
@@ -7851,8 +8421,8 @@
         </p:nvSpPr>
         <p:spPr>
           <a:xfrm>
-            <a:off x="6355080" y="2057400"/>
-            <a:ext cx="2286000" cy="3108960"/>
+            <a:off x="6355080" y="1847088"/>
+            <a:ext cx="2286000" cy="3163824"/>
           </a:xfrm>
           <a:prstGeom prst="rect">
             <a:avLst/>
@@ -7866,44 +8436,44 @@
           <a:lstStyle/>
           <a:p>
             <a:pPr>
-              <a:defRPr sz="850" b="1">
+              <a:defRPr sz="800" b="1">
                 <a:solidFill>
                   <a:srgbClr val="10B981"/>
                 </a:solidFill>
               </a:defRPr>
             </a:pPr>
             <a:r>
-              <a:t>LAYER 3: FINANCIAL</a:t>
+              <a:t>TIER 3: FINANCIAL DCF</a:t>
             </a:r>
           </a:p>
           <a:p>
             <a:pPr>
               <a:spcBef>
-                <a:spcPts val="400"/>
+                <a:spcPts val="300"/>
               </a:spcBef>
-              <a:defRPr sz="1300" b="1">
-                <a:solidFill>
-                  <a:srgbClr val="F1F5F9"/>
-                </a:solidFill>
-              </a:defRPr>
-            </a:pPr>
-            <a:r>
-              <a:t>25-Year Cashflow</a:t>
+              <a:defRPr sz="1200" b="1">
+                <a:solidFill>
+                  <a:srgbClr val="F3F4F6"/>
+                </a:solidFill>
+              </a:defRPr>
+            </a:pPr>
+            <a:r>
+              <a:t>25-Yr Lifecycle Model</a:t>
             </a:r>
           </a:p>
           <a:p>
             <a:pPr>
               <a:spcBef>
-                <a:spcPts val="1000"/>
+                <a:spcPts val="800"/>
               </a:spcBef>
-              <a:defRPr sz="950">
-                <a:solidFill>
-                  <a:srgbClr val="94A3B8"/>
-                </a:solidFill>
-              </a:defRPr>
-            </a:pPr>
-            <a:r>
-              <a:t>IRS Direct Pay rebate check calculation, EIA state commercial electricity tariffs, 0.5%/yr degradation, and O&amp;M reserve.</a:t>
+              <a:defRPr sz="900">
+                <a:solidFill>
+                  <a:srgbClr val="9CA3AF"/>
+                </a:solidFill>
+              </a:defRPr>
+            </a:pPr>
+            <a:r>
+              <a:t>Iterates 25-year discounted cashflow integrating 0.5%/yr degradation, 2.5%/yr tariff escalation, 2.0%/yr O&amp;M inflation, and Year 15 inverter reserves.</a:t>
             </a:r>
           </a:p>
         </p:txBody>
@@ -7916,18 +8486,18 @@
         </p:nvSpPr>
         <p:spPr>
           <a:xfrm>
-            <a:off x="9052560" y="1920240"/>
+            <a:off x="9052560" y="1737360"/>
             <a:ext cx="2560320" cy="3383280"/>
           </a:xfrm>
           <a:prstGeom prst="roundRect">
             <a:avLst/>
           </a:prstGeom>
           <a:solidFill>
-            <a:srgbClr val="161F30"/>
+            <a:srgbClr val="111827"/>
           </a:solidFill>
           <a:ln w="12700">
             <a:solidFill>
-              <a:srgbClr val="26354F"/>
+              <a:srgbClr val="1F293D"/>
             </a:solidFill>
           </a:ln>
         </p:spPr>
@@ -7961,8 +8531,8 @@
         </p:nvSpPr>
         <p:spPr>
           <a:xfrm>
-            <a:off x="9052560" y="1920240"/>
-            <a:ext cx="2560320" cy="54864"/>
+            <a:off x="9052560" y="1737360"/>
+            <a:ext cx="2560320" cy="45720"/>
           </a:xfrm>
           <a:prstGeom prst="roundRect">
             <a:avLst/>
@@ -8004,8 +8574,8 @@
         </p:nvSpPr>
         <p:spPr>
           <a:xfrm>
-            <a:off x="9189720" y="2057400"/>
-            <a:ext cx="2286000" cy="3108960"/>
+            <a:off x="9189720" y="1847088"/>
+            <a:ext cx="2286000" cy="3163824"/>
           </a:xfrm>
           <a:prstGeom prst="rect">
             <a:avLst/>
@@ -8019,44 +8589,44 @@
           <a:lstStyle/>
           <a:p>
             <a:pPr>
-              <a:defRPr sz="850" b="1">
+              <a:defRPr sz="800" b="1">
                 <a:solidFill>
                   <a:srgbClr val="8C1515"/>
                 </a:solidFill>
               </a:defRPr>
             </a:pPr>
             <a:r>
-              <a:t>LAYER 4: CIVIC</a:t>
+              <a:t>TIER 4: CIVIC EXPORT</a:t>
             </a:r>
           </a:p>
           <a:p>
             <a:pPr>
               <a:spcBef>
-                <a:spcPts val="400"/>
+                <a:spcPts val="300"/>
               </a:spcBef>
-              <a:defRPr sz="1300" b="1">
-                <a:solidFill>
-                  <a:srgbClr val="F1F5F9"/>
-                </a:solidFill>
-              </a:defRPr>
-            </a:pPr>
-            <a:r>
-              <a:t>Action Brief</a:t>
+              <a:defRPr sz="1200" b="1">
+                <a:solidFill>
+                  <a:srgbClr val="F3F4F6"/>
+                </a:solidFill>
+              </a:defRPr>
+            </a:pPr>
+            <a:r>
+              <a:t>Action Brief Engine</a:t>
             </a:r>
           </a:p>
           <a:p>
             <a:pPr>
               <a:spcBef>
-                <a:spcPts val="1000"/>
+                <a:spcPts val="800"/>
               </a:spcBef>
-              <a:defRPr sz="950">
-                <a:solidFill>
-                  <a:srgbClr val="94A3B8"/>
-                </a:solidFill>
-              </a:defRPr>
-            </a:pPr>
-            <a:r>
-              <a:t>1-Click school-board ready PDF/Markdown generator with cost of delay analysis and turnkey draft school board resolution text.</a:t>
+              <a:defRPr sz="900">
+                <a:solidFill>
+                  <a:srgbClr val="9CA3AF"/>
+                </a:solidFill>
+              </a:defRPr>
+            </a:pPr>
+            <a:r>
+              <a:t>Compiles board-ready Markdown/PDF brief with executive engineering specs, financial waterfall, and turnkey legal School Board Resolution text.</a:t>
             </a:r>
           </a:p>
         </p:txBody>
@@ -8069,18 +8639,18 @@
         </p:nvSpPr>
         <p:spPr>
           <a:xfrm>
-            <a:off x="548640" y="5486400"/>
-            <a:ext cx="11094415" cy="822960"/>
+            <a:off x="548640" y="5303520"/>
+            <a:ext cx="11094415" cy="1097280"/>
           </a:xfrm>
           <a:prstGeom prst="roundRect">
             <a:avLst/>
           </a:prstGeom>
           <a:solidFill>
-            <a:srgbClr val="161F30"/>
+            <a:srgbClr val="111827"/>
           </a:solidFill>
           <a:ln w="12700">
             <a:solidFill>
-              <a:srgbClr val="26354F"/>
+              <a:srgbClr val="1F293D"/>
             </a:solidFill>
           </a:ln>
         </p:spPr>
@@ -8114,8 +8684,8 @@
         </p:nvSpPr>
         <p:spPr>
           <a:xfrm>
-            <a:off x="548640" y="5486400"/>
-            <a:ext cx="11094415" cy="54864"/>
+            <a:off x="548640" y="5303520"/>
+            <a:ext cx="11094415" cy="45720"/>
           </a:xfrm>
           <a:prstGeom prst="roundRect">
             <a:avLst/>
@@ -8157,8 +8727,8 @@
         </p:nvSpPr>
         <p:spPr>
           <a:xfrm>
-            <a:off x="777240" y="5559552"/>
-            <a:ext cx="10607040" cy="640080"/>
+            <a:off x="777240" y="5376672"/>
+            <a:ext cx="10607040" cy="914400"/>
           </a:xfrm>
           <a:prstGeom prst="rect">
             <a:avLst/>
@@ -8179,22 +8749,26 @@
               </a:defRPr>
             </a:pPr>
             <a:r>
-              <a:t>RESILIENT FAULT-TOLERANT ARCHITECTURE</a:t>
+              <a:t>RESILIENT FAULT-TOLERANT CIRCUIT-BREAKER ARCHITECTURE</a:t>
             </a:r>
           </a:p>
           <a:p>
             <a:pPr>
               <a:spcBef>
-                <a:spcPts val="200"/>
+                <a:spcPts val="300"/>
               </a:spcBef>
-              <a:defRPr sz="1000">
-                <a:solidFill>
-                  <a:srgbClr val="F1F5F9"/>
-                </a:solidFill>
-              </a:defRPr>
-            </a:pPr>
-            <a:r>
-              <a:t>If federal NREL PVWatts API experiences network timeout, system automatically falls back to regional NSRDB empirical solar constants (1,650 Sunbelt / 1,460 Temperate / 1,320 North kWh/kW-yr). The app never crashes.</a:t>
+              <a:defRPr sz="900">
+                <a:solidFill>
+                  <a:srgbClr val="F3F4F6"/>
+                </a:solidFill>
+              </a:defRPr>
+            </a:pPr>
+            <a:r>
+              <a:t>If federal NREL endpoint exceeds an 8.0s timeout, the system executes an automatic fallback to regional NSRDB empirical solar matrices:</a:t>
+            </a:r>
+            <a:br/>
+            <a:r>
+              <a:t>Sunbelt: 1,650 kWh/kW-yr  |  Mid-Latitude / CA: 1,460 kWh/kW-yr  |  Northern: 1,320 kWh/kW-yr. The app guarantees zero presentation crashes.</a:t>
             </a:r>
           </a:p>
         </p:txBody>
@@ -8232,7 +8806,7 @@
             <a:avLst/>
           </a:prstGeom>
           <a:solidFill>
-            <a:srgbClr val="0B0F19"/>
+            <a:srgbClr val="090D16"/>
           </a:solidFill>
           <a:ln>
             <a:noFill/>
@@ -8364,7 +8938,7 @@
         <p:spPr>
           <a:xfrm>
             <a:off x="2606040" y="73152"/>
-            <a:ext cx="5486400" cy="365760"/>
+            <a:ext cx="5943600" cy="365760"/>
           </a:xfrm>
           <a:prstGeom prst="rect">
             <a:avLst/>
@@ -8378,14 +8952,14 @@
           <a:lstStyle/>
           <a:p>
             <a:pPr>
-              <a:defRPr sz="1000">
-                <a:solidFill>
-                  <a:srgbClr val="94A3B8"/>
-                </a:solidFill>
-              </a:defRPr>
-            </a:pPr>
-            <a:r>
-              <a:t>SVYCA Youth For Earth Hackathon | SolarSchools USA</a:t>
+              <a:defRPr sz="950">
+                <a:solidFill>
+                  <a:srgbClr val="9CA3AF"/>
+                </a:solidFill>
+              </a:defRPr>
+            </a:pPr>
+            <a:r>
+              <a:t>SVYCA Youth For Earth Hackathon | Systems Architecture &amp; Climate Finance</a:t>
             </a:r>
           </a:p>
         </p:txBody>
@@ -8413,7 +8987,7 @@
           <a:lstStyle/>
           <a:p>
             <a:pPr algn="r">
-              <a:defRPr sz="1050" b="1">
+              <a:defRPr sz="1000" b="1">
                 <a:solidFill>
                   <a:srgbClr val="38BDF8"/>
                 </a:solidFill>
@@ -8476,8 +9050,8 @@
         </p:nvSpPr>
         <p:spPr>
           <a:xfrm>
-            <a:off x="548640" y="658368"/>
-            <a:ext cx="11091672" cy="1097280"/>
+            <a:off x="548640" y="621792"/>
+            <a:ext cx="11091672" cy="1005840"/>
           </a:xfrm>
           <a:prstGeom prst="rect">
             <a:avLst/>
@@ -8491,14 +9065,14 @@
           <a:lstStyle/>
           <a:p>
             <a:pPr>
-              <a:defRPr sz="950" b="1">
+              <a:defRPr sz="900" b="1">
                 <a:solidFill>
                   <a:srgbClr val="38BDF8"/>
                 </a:solidFill>
               </a:defRPr>
             </a:pPr>
             <a:r>
-              <a:t>PROOF OF CONCEPT</a:t>
+              <a:t>PHYSICAL SIMULATION ENGINE</a:t>
             </a:r>
           </a:p>
           <a:p>
@@ -8506,29 +9080,29 @@
               <a:spcBef>
                 <a:spcPts val="200"/>
               </a:spcBef>
-              <a:defRPr sz="2200" b="1">
-                <a:solidFill>
-                  <a:srgbClr val="F1F5F9"/>
-                </a:solidFill>
-              </a:defRPr>
-            </a:pPr>
-            <a:r>
-              <a:t>The Tale of Two Bay Area Campuses</a:t>
+              <a:defRPr sz="2100" b="1">
+                <a:solidFill>
+                  <a:srgbClr val="F3F4F6"/>
+                </a:solidFill>
+              </a:defRPr>
+            </a:pPr>
+            <a:r>
+              <a:t>Physics Modeling &amp; NREL Derate Waterfall</a:t>
             </a:r>
           </a:p>
           <a:p>
             <a:pPr>
               <a:spcBef>
-                <a:spcPts val="400"/>
+                <a:spcPts val="300"/>
               </a:spcBef>
-              <a:defRPr sz="1150">
-                <a:solidFill>
-                  <a:srgbClr val="94A3B8"/>
-                </a:solidFill>
-              </a:defRPr>
-            </a:pPr>
-            <a:r>
-              <a:t>Real-world empirical validation: an implemented leader saving $145K/year vs. an unshaded campus losing $140K/year.</a:t>
+              <a:defRPr sz="1100">
+                <a:solidFill>
+                  <a:srgbClr val="9CA3AF"/>
+                </a:solidFill>
+              </a:defRPr>
+            </a:pPr>
+            <a:r>
+              <a:t>Coupling spatial canopy packing geometry with NREL PVWatts v8 loss algorithms for rigorous yield modeling.</a:t>
             </a:r>
           </a:p>
         </p:txBody>
@@ -8541,18 +9115,18 @@
         </p:nvSpPr>
         <p:spPr>
           <a:xfrm>
-            <a:off x="548640" y="1920240"/>
-            <a:ext cx="5394960" cy="4297680"/>
+            <a:off x="548640" y="1737360"/>
+            <a:ext cx="5303520" cy="4663440"/>
           </a:xfrm>
           <a:prstGeom prst="roundRect">
             <a:avLst/>
           </a:prstGeom>
           <a:solidFill>
-            <a:srgbClr val="161F30"/>
+            <a:srgbClr val="111827"/>
           </a:solidFill>
           <a:ln w="12700">
             <a:solidFill>
-              <a:srgbClr val="26354F"/>
+              <a:srgbClr val="1F293D"/>
             </a:solidFill>
           </a:ln>
         </p:spPr>
@@ -8586,14 +9160,14 @@
         </p:nvSpPr>
         <p:spPr>
           <a:xfrm>
-            <a:off x="548640" y="1920240"/>
-            <a:ext cx="5394960" cy="54864"/>
+            <a:off x="548640" y="1737360"/>
+            <a:ext cx="5303520" cy="45720"/>
           </a:xfrm>
           <a:prstGeom prst="roundRect">
             <a:avLst/>
           </a:prstGeom>
           <a:solidFill>
-            <a:srgbClr val="10B981"/>
+            <a:srgbClr val="38BDF8"/>
           </a:solidFill>
           <a:ln>
             <a:noFill/>
@@ -8629,8 +9203,8 @@
         </p:nvSpPr>
         <p:spPr>
           <a:xfrm>
-            <a:off x="777240" y="2057400"/>
-            <a:ext cx="4937760" cy="3931920"/>
+            <a:off x="731520" y="1874519"/>
+            <a:ext cx="4937760" cy="4389120"/>
           </a:xfrm>
           <a:prstGeom prst="rect">
             <a:avLst/>
@@ -8644,119 +9218,14 @@
           <a:lstStyle/>
           <a:p>
             <a:pPr>
-              <a:defRPr sz="1200" b="1">
-                <a:solidFill>
-                  <a:srgbClr val="10B981"/>
-                </a:solidFill>
-              </a:defRPr>
-            </a:pPr>
-            <a:r>
-              <a:t>MONTA VISTA HIGH SCHOOL (CUPERTINO)</a:t>
-            </a:r>
-          </a:p>
-          <a:p>
-            <a:pPr>
-              <a:spcBef>
-                <a:spcPts val="200"/>
-              </a:spcBef>
-              <a:defRPr sz="900" b="1">
-                <a:solidFill>
-                  <a:srgbClr val="64748B"/>
-                </a:solidFill>
-              </a:defRPr>
-            </a:pPr>
-            <a:r>
-              <a:t>STATUS: IMPLEMENTED LEADER (FUHSD &amp; ENGIE)</a:t>
-            </a:r>
-          </a:p>
-          <a:p>
-            <a:pPr>
-              <a:spcBef>
-                <a:spcPts val="800"/>
-              </a:spcBef>
-              <a:defRPr sz="1050">
-                <a:solidFill>
-                  <a:srgbClr val="F1F5F9"/>
-                </a:solidFill>
-              </a:defRPr>
-            </a:pPr>
-            <a:r>
-              <a:t>Canopy System Capacity: 550 kW DC</a:t>
-            </a:r>
-          </a:p>
-          <a:p>
-            <a:pPr>
-              <a:spcBef>
-                <a:spcPts val="800"/>
-              </a:spcBef>
-              <a:defRPr sz="1050">
-                <a:solidFill>
-                  <a:srgbClr val="F1F5F9"/>
-                </a:solidFill>
-              </a:defRPr>
-            </a:pPr>
-            <a:r>
-              <a:t>Annual Clean Electricity: 1,484,000 kWh / year</a:t>
-            </a:r>
-          </a:p>
-          <a:p>
-            <a:pPr>
-              <a:spcBef>
-                <a:spcPts val="800"/>
-              </a:spcBef>
-              <a:defRPr sz="1050">
-                <a:solidFill>
-                  <a:srgbClr val="F1F5F9"/>
-                </a:solidFill>
-              </a:defRPr>
-            </a:pPr>
-            <a:r>
-              <a:t>Avoided Utility Bills (PG&amp;E B-19): $145,000 / year (Active Savings)</a:t>
-            </a:r>
-          </a:p>
-          <a:p>
-            <a:pPr>
-              <a:spcBef>
-                <a:spcPts val="800"/>
-              </a:spcBef>
-              <a:defRPr sz="1050">
-                <a:solidFill>
-                  <a:srgbClr val="F1F5F9"/>
-                </a:solidFill>
-              </a:defRPr>
-            </a:pPr>
-            <a:r>
-              <a:t>25-Year Cumulative Savings: $14,690,000 Net Dividend</a:t>
-            </a:r>
-          </a:p>
-          <a:p>
-            <a:pPr>
-              <a:spcBef>
-                <a:spcPts val="800"/>
-              </a:spcBef>
-              <a:defRPr sz="1050">
-                <a:solidFill>
-                  <a:srgbClr val="F1F5F9"/>
-                </a:solidFill>
-              </a:defRPr>
-            </a:pPr>
-            <a:r>
-              <a:t>Real-World Status: Completed in 2021; Shaded Student &amp; Staff Lots</a:t>
-            </a:r>
-          </a:p>
-          <a:p>
-            <a:pPr>
-              <a:spcBef>
-                <a:spcPts val="1400"/>
-              </a:spcBef>
-              <a:defRPr sz="1000" b="1">
-                <a:solidFill>
-                  <a:srgbClr val="10B981"/>
-                </a:solidFill>
-              </a:defRPr>
-            </a:pPr>
-            <a:r>
-              <a:t>VALIDATION: Real PG&amp;E utility bill savings match our computational model within 4.2%!</a:t>
+              <a:defRPr sz="1100" b="1">
+                <a:solidFill>
+                  <a:srgbClr val="F3F4F6"/>
+                </a:solidFill>
+              </a:defRPr>
+            </a:pPr>
+            <a:r>
+              <a:t>CANOPY SPATIAL PACKING &amp; CAPACITY FORMULATION</a:t>
             </a:r>
           </a:p>
         </p:txBody>
@@ -8769,18 +9238,18 @@
         </p:nvSpPr>
         <p:spPr>
           <a:xfrm>
-            <a:off x="6217920" y="1920240"/>
-            <a:ext cx="5394960" cy="4297680"/>
+            <a:off x="731520" y="2240280"/>
+            <a:ext cx="4937760" cy="822960"/>
           </a:xfrm>
           <a:prstGeom prst="roundRect">
             <a:avLst/>
           </a:prstGeom>
           <a:solidFill>
-            <a:srgbClr val="161F30"/>
+            <a:srgbClr val="0B1120"/>
           </a:solidFill>
           <a:ln w="12700">
             <a:solidFill>
-              <a:srgbClr val="26354F"/>
+              <a:srgbClr val="1E3A5F"/>
             </a:solidFill>
           </a:ln>
         </p:spPr>
@@ -8814,14 +9283,14 @@
         </p:nvSpPr>
         <p:spPr>
           <a:xfrm>
-            <a:off x="6217920" y="1920240"/>
-            <a:ext cx="5394960" cy="54864"/>
+            <a:off x="731520" y="2240280"/>
+            <a:ext cx="45720" cy="822960"/>
           </a:xfrm>
           <a:prstGeom prst="roundRect">
             <a:avLst/>
           </a:prstGeom>
           <a:solidFill>
-            <a:srgbClr val="EF4444"/>
+            <a:srgbClr val="38BDF8"/>
           </a:solidFill>
           <a:ln>
             <a:noFill/>
@@ -8857,8 +9326,8 @@
         </p:nvSpPr>
         <p:spPr>
           <a:xfrm>
-            <a:off x="6446520" y="2057400"/>
-            <a:ext cx="4937760" cy="3931920"/>
+            <a:off x="841248" y="2295144"/>
+            <a:ext cx="4718304" cy="713232"/>
           </a:xfrm>
           <a:prstGeom prst="rect">
             <a:avLst/>
@@ -8872,14 +9341,18 @@
           <a:lstStyle/>
           <a:p>
             <a:pPr>
-              <a:defRPr sz="1200" b="1">
-                <a:solidFill>
-                  <a:srgbClr val="EF4444"/>
-                </a:solidFill>
-              </a:defRPr>
-            </a:pPr>
-            <a:r>
-              <a:t>PALO ALTO HIGH SCHOOL (PALO ALTO)</a:t>
+              <a:defRPr sz="950" b="1">
+                <a:solidFill>
+                  <a:srgbClr val="E0F2FE"/>
+                </a:solidFill>
+              </a:defRPr>
+            </a:pPr>
+            <a:r>
+              <a:t>A_net = A_gross * eta_packing (eta = 0.65)</a:t>
+            </a:r>
+            <a:br/>
+            <a:r>
+              <a:t>P_DC = A_net * 0.20 kW/m^2 = A_net * 200 W/m^2</a:t>
             </a:r>
           </a:p>
           <a:p>
@@ -8887,104 +9360,436 @@
               <a:spcBef>
                 <a:spcPts val="200"/>
               </a:spcBef>
+              <a:defRPr sz="800">
+                <a:solidFill>
+                  <a:srgbClr val="9CA3AF"/>
+                </a:solidFill>
+              </a:defRPr>
+            </a:pPr>
+            <a:r>
+              <a:t>Reserves 24-ft driving aisles &amp; Title 24 fire clearance; assumes 20.0% efficient Mono PERC modules.</a:t>
+            </a:r>
+          </a:p>
+        </p:txBody>
+      </p:sp>
+      <p:sp>
+        <p:nvSpPr>
+          <p:cNvPr id="15" name="TextBox 14"/>
+          <p:cNvSpPr txBox="1"/>
+          <p:nvPr/>
+        </p:nvSpPr>
+        <p:spPr>
+          <a:xfrm>
+            <a:off x="731520" y="3200400"/>
+            <a:ext cx="4937760" cy="3017520"/>
+          </a:xfrm>
+          <a:prstGeom prst="rect">
+            <a:avLst/>
+          </a:prstGeom>
+          <a:noFill/>
+        </p:spPr>
+        <p:txBody>
+          <a:bodyPr wrap="square">
+            <a:spAutoFit/>
+          </a:bodyPr>
+          <a:lstStyle/>
+          <a:p>
+            <a:pPr>
+              <a:defRPr sz="950" b="1">
+                <a:solidFill>
+                  <a:srgbClr val="38BDF8"/>
+                </a:solidFill>
+              </a:defRPr>
+            </a:pPr>
+            <a:r>
+              <a:t>NREL PVWatts v8 REST Parameters (core/solar_engine.py):</a:t>
+            </a:r>
+          </a:p>
+          <a:p>
+            <a:pPr>
+              <a:spcBef>
+                <a:spcPts val="400"/>
+              </a:spcBef>
+              <a:defRPr sz="850">
+                <a:solidFill>
+                  <a:srgbClr val="9CA3AF"/>
+                </a:solidFill>
+              </a:defRPr>
+            </a:pPr>
+            <a:r>
+              <a:t>module_type = 1: Premium Monocrystalline PERC silicon (~20% nominal efficiency).</a:t>
+            </a:r>
+          </a:p>
+          <a:p>
+            <a:pPr>
+              <a:spcBef>
+                <a:spcPts val="400"/>
+              </a:spcBef>
+              <a:defRPr sz="850">
+                <a:solidFill>
+                  <a:srgbClr val="9CA3AF"/>
+                </a:solidFill>
+              </a:defRPr>
+            </a:pPr>
+            <a:r>
+              <a:t>array_type = 2: Fixed Canopy / Carport structural mounting geometry.</a:t>
+            </a:r>
+          </a:p>
+          <a:p>
+            <a:pPr>
+              <a:spcBef>
+                <a:spcPts val="400"/>
+              </a:spcBef>
+              <a:defRPr sz="850">
+                <a:solidFill>
+                  <a:srgbClr val="9CA3AF"/>
+                </a:solidFill>
+              </a:defRPr>
+            </a:pPr>
+            <a:r>
+              <a:t>tilt = 10.0 deg: 10-degree tilt balancing rainwater shedding, wind loading, and summer insolation.</a:t>
+            </a:r>
+          </a:p>
+          <a:p>
+            <a:pPr>
+              <a:spcBef>
+                <a:spcPts val="400"/>
+              </a:spcBef>
+              <a:defRPr sz="850">
+                <a:solidFill>
+                  <a:srgbClr val="9CA3AF"/>
+                </a:solidFill>
+              </a:defRPr>
+            </a:pPr>
+            <a:r>
+              <a:t>azimuth = 180.0 deg: True South geographic orientation for optimal North American solar harvesting.</a:t>
+            </a:r>
+          </a:p>
+          <a:p>
+            <a:pPr>
+              <a:spcBef>
+                <a:spcPts val="400"/>
+              </a:spcBef>
+              <a:defRPr sz="850">
+                <a:solidFill>
+                  <a:srgbClr val="9CA3AF"/>
+                </a:solidFill>
+              </a:defRPr>
+            </a:pPr>
+            <a:r>
+              <a:t>losses = 14.0%: Comprehensive aggregate system derate factor (detailed on right).</a:t>
+            </a:r>
+          </a:p>
+        </p:txBody>
+      </p:sp>
+      <p:sp>
+        <p:nvSpPr>
+          <p:cNvPr id="16" name="Rounded Rectangle 15"/>
+          <p:cNvSpPr/>
+          <p:nvPr/>
+        </p:nvSpPr>
+        <p:spPr>
+          <a:xfrm>
+            <a:off x="6217920" y="1737360"/>
+            <a:ext cx="5425135" cy="4663440"/>
+          </a:xfrm>
+          <a:prstGeom prst="roundRect">
+            <a:avLst/>
+          </a:prstGeom>
+          <a:solidFill>
+            <a:srgbClr val="111827"/>
+          </a:solidFill>
+          <a:ln w="12700">
+            <a:solidFill>
+              <a:srgbClr val="1F293D"/>
+            </a:solidFill>
+          </a:ln>
+        </p:spPr>
+        <p:style>
+          <a:lnRef idx="1">
+            <a:schemeClr val="accent1"/>
+          </a:lnRef>
+          <a:fillRef idx="3">
+            <a:schemeClr val="accent1"/>
+          </a:fillRef>
+          <a:effectRef idx="2">
+            <a:schemeClr val="accent1"/>
+          </a:effectRef>
+          <a:fontRef idx="minor">
+            <a:schemeClr val="lt1"/>
+          </a:fontRef>
+        </p:style>
+        <p:txBody>
+          <a:bodyPr rtlCol="0" anchor="ctr"/>
+          <a:lstStyle/>
+          <a:p>
+            <a:pPr algn="ctr"/>
+          </a:p>
+        </p:txBody>
+      </p:sp>
+      <p:sp>
+        <p:nvSpPr>
+          <p:cNvPr id="17" name="Rounded Rectangle 16"/>
+          <p:cNvSpPr/>
+          <p:nvPr/>
+        </p:nvSpPr>
+        <p:spPr>
+          <a:xfrm>
+            <a:off x="6217920" y="1737360"/>
+            <a:ext cx="5425135" cy="45720"/>
+          </a:xfrm>
+          <a:prstGeom prst="roundRect">
+            <a:avLst/>
+          </a:prstGeom>
+          <a:solidFill>
+            <a:srgbClr val="38BDF8"/>
+          </a:solidFill>
+          <a:ln>
+            <a:noFill/>
+          </a:ln>
+        </p:spPr>
+        <p:style>
+          <a:lnRef idx="1">
+            <a:schemeClr val="accent1"/>
+          </a:lnRef>
+          <a:fillRef idx="3">
+            <a:schemeClr val="accent1"/>
+          </a:fillRef>
+          <a:effectRef idx="2">
+            <a:schemeClr val="accent1"/>
+          </a:effectRef>
+          <a:fontRef idx="minor">
+            <a:schemeClr val="lt1"/>
+          </a:fontRef>
+        </p:style>
+        <p:txBody>
+          <a:bodyPr rtlCol="0" anchor="ctr"/>
+          <a:lstStyle/>
+          <a:p>
+            <a:pPr algn="ctr"/>
+          </a:p>
+        </p:txBody>
+      </p:sp>
+      <p:sp>
+        <p:nvSpPr>
+          <p:cNvPr id="18" name="TextBox 17"/>
+          <p:cNvSpPr txBox="1"/>
+          <p:nvPr/>
+        </p:nvSpPr>
+        <p:spPr>
+          <a:xfrm>
+            <a:off x="6446520" y="1874519"/>
+            <a:ext cx="4937760" cy="4389120"/>
+          </a:xfrm>
+          <a:prstGeom prst="rect">
+            <a:avLst/>
+          </a:prstGeom>
+          <a:noFill/>
+        </p:spPr>
+        <p:txBody>
+          <a:bodyPr wrap="square">
+            <a:spAutoFit/>
+          </a:bodyPr>
+          <a:lstStyle/>
+          <a:p>
+            <a:pPr>
+              <a:defRPr sz="1100" b="1">
+                <a:solidFill>
+                  <a:srgbClr val="38BDF8"/>
+                </a:solidFill>
+              </a:defRPr>
+            </a:pPr>
+            <a:r>
+              <a:t>14.0% AGGREGATE SYSTEM DERATE LOSS WATERFALL</a:t>
+            </a:r>
+          </a:p>
+          <a:p>
+            <a:pPr>
+              <a:spcBef>
+                <a:spcPts val="600"/>
+              </a:spcBef>
               <a:defRPr sz="900" b="1">
                 <a:solidFill>
-                  <a:srgbClr val="64748B"/>
-                </a:solidFill>
-              </a:defRPr>
-            </a:pPr>
-            <a:r>
-              <a:t>STATUS: UNSHADED OPPORTUNITY (PAUSD)</a:t>
+                  <a:srgbClr val="F3F4F6"/>
+                </a:solidFill>
+              </a:defRPr>
+            </a:pPr>
+            <a:r>
+              <a:t>Inverter Conversion Loss: -4.0%</a:t>
+            </a:r>
+          </a:p>
+          <a:p>
+            <a:pPr>
+              <a:defRPr sz="800">
+                <a:solidFill>
+                  <a:srgbClr val="9CA3AF"/>
+                </a:solidFill>
+              </a:defRPr>
+            </a:pPr>
+            <a:r>
+              <a:t>Commercial 3-phase string inverters operating at 96.0% CEC weighted efficiency.</a:t>
             </a:r>
           </a:p>
           <a:p>
             <a:pPr>
               <a:spcBef>
-                <a:spcPts val="800"/>
+                <a:spcPts val="600"/>
               </a:spcBef>
-              <a:defRPr sz="1050">
-                <a:solidFill>
-                  <a:srgbClr val="F1F5F9"/>
-                </a:solidFill>
-              </a:defRPr>
-            </a:pPr>
-            <a:r>
-              <a:t>Unshaded Parking Footprint: 7,200 m² (~180 Parking Stalls)</a:t>
+              <a:defRPr sz="900" b="1">
+                <a:solidFill>
+                  <a:srgbClr val="F3F4F6"/>
+                </a:solidFill>
+              </a:defRPr>
+            </a:pPr>
+            <a:r>
+              <a:t>Cell Temperature Derate: -3.0%</a:t>
+            </a:r>
+          </a:p>
+          <a:p>
+            <a:pPr>
+              <a:defRPr sz="800">
+                <a:solidFill>
+                  <a:srgbClr val="9CA3AF"/>
+                </a:solidFill>
+              </a:defRPr>
+            </a:pPr>
+            <a:r>
+              <a:t>Elevated canopy design provides continuous passive under-panel airflow cooling.</a:t>
             </a:r>
           </a:p>
           <a:p>
             <a:pPr>
               <a:spcBef>
-                <a:spcPts val="800"/>
+                <a:spcPts val="600"/>
               </a:spcBef>
-              <a:defRPr sz="1050">
-                <a:solidFill>
-                  <a:srgbClr val="F1F5F9"/>
-                </a:solidFill>
-              </a:defRPr>
-            </a:pPr>
-            <a:r>
-              <a:t>Potential Solar Canopy Size: 608 kW DC Capacity</a:t>
+              <a:defRPr sz="900" b="1">
+                <a:solidFill>
+                  <a:srgbClr val="F3F4F6"/>
+                </a:solidFill>
+              </a:defRPr>
+            </a:pPr>
+            <a:r>
+              <a:t>Soiling &amp; Particulate Dust: -2.5%</a:t>
+            </a:r>
+          </a:p>
+          <a:p>
+            <a:pPr>
+              <a:defRPr sz="800">
+                <a:solidFill>
+                  <a:srgbClr val="9CA3AF"/>
+                </a:solidFill>
+              </a:defRPr>
+            </a:pPr>
+            <a:r>
+              <a:t>Dry summer dust accumulation; mitigated by annual robotic brush cleaning in O&amp;M.</a:t>
             </a:r>
           </a:p>
           <a:p>
             <a:pPr>
               <a:spcBef>
-                <a:spcPts val="800"/>
+                <a:spcPts val="600"/>
               </a:spcBef>
-              <a:defRPr sz="1050">
-                <a:solidFill>
-                  <a:srgbClr val="F1F5F9"/>
-                </a:solidFill>
-              </a:defRPr>
-            </a:pPr>
-            <a:r>
-              <a:t>Avoidable Utility Bill Surrender: $140,000 / year Surrendered</a:t>
+              <a:defRPr sz="900" b="1">
+                <a:solidFill>
+                  <a:srgbClr val="F3F4F6"/>
+                </a:solidFill>
+              </a:defRPr>
+            </a:pPr>
+            <a:r>
+              <a:t>DC &amp; AC Ohmic Resistance: -2.0%</a:t>
+            </a:r>
+          </a:p>
+          <a:p>
+            <a:pPr>
+              <a:defRPr sz="800">
+                <a:solidFill>
+                  <a:srgbClr val="9CA3AF"/>
+                </a:solidFill>
+              </a:defRPr>
+            </a:pPr>
+            <a:r>
+              <a:t>I^2 * R wire losses across underground copper feeders and conduit runs.</a:t>
             </a:r>
           </a:p>
           <a:p>
             <a:pPr>
               <a:spcBef>
-                <a:spcPts val="800"/>
+                <a:spcPts val="600"/>
               </a:spcBef>
-              <a:defRPr sz="1050">
-                <a:solidFill>
-                  <a:srgbClr val="F1F5F9"/>
-                </a:solidFill>
-              </a:defRPr>
-            </a:pPr>
-            <a:r>
-              <a:t>Unclaimed IRS Direct Pay Check: $754,416 Cash Sitting at Treasury</a:t>
+              <a:defRPr sz="900" b="1">
+                <a:solidFill>
+                  <a:srgbClr val="F3F4F6"/>
+                </a:solidFill>
+              </a:defRPr>
+            </a:pPr>
+            <a:r>
+              <a:t>Module Mismatch &amp; Tolerance: -1.5%</a:t>
+            </a:r>
+          </a:p>
+          <a:p>
+            <a:pPr>
+              <a:defRPr sz="800">
+                <a:solidFill>
+                  <a:srgbClr val="9CA3AF"/>
+                </a:solidFill>
+              </a:defRPr>
+            </a:pPr>
+            <a:r>
+              <a:t>Positive power tolerance binning (+0/+5W) from Tier-1 BloombergNEF manufacturers.</a:t>
             </a:r>
           </a:p>
           <a:p>
             <a:pPr>
               <a:spcBef>
-                <a:spcPts val="800"/>
+                <a:spcPts val="600"/>
               </a:spcBef>
-              <a:defRPr sz="1050">
-                <a:solidFill>
-                  <a:srgbClr val="F1F5F9"/>
-                </a:solidFill>
-              </a:defRPr>
-            </a:pPr>
-            <a:r>
-              <a:t>5-Year Inaction Penalty: $700,000 in Permanent Losses</a:t>
+              <a:defRPr sz="900" b="1">
+                <a:solidFill>
+                  <a:srgbClr val="F3F4F6"/>
+                </a:solidFill>
+              </a:defRPr>
+            </a:pPr>
+            <a:r>
+              <a:t>Diodes &amp; Connection Drops: -1.0%</a:t>
+            </a:r>
+          </a:p>
+          <a:p>
+            <a:pPr>
+              <a:defRPr sz="800">
+                <a:solidFill>
+                  <a:srgbClr val="9CA3AF"/>
+                </a:solidFill>
+              </a:defRPr>
+            </a:pPr>
+            <a:r>
+              <a:t>MC4 locking connectors and bypass diode voltage drops across series strings.</a:t>
             </a:r>
           </a:p>
           <a:p>
             <a:pPr>
               <a:spcBef>
-                <a:spcPts val="1400"/>
+                <a:spcPts val="600"/>
               </a:spcBef>
-              <a:defRPr sz="1000" b="1">
-                <a:solidFill>
-                  <a:srgbClr val="EF4444"/>
-                </a:solidFill>
-              </a:defRPr>
-            </a:pPr>
-            <a:r>
-              <a:t>THE COST OF DELAY: Every year Palo Alto High delays is $140,000 paid to utility companies instead of instructional staff.</a:t>
+              <a:defRPr sz="900" b="1">
+                <a:solidFill>
+                  <a:srgbClr val="10B981"/>
+                </a:solidFill>
+              </a:defRPr>
+            </a:pPr>
+            <a:r>
+              <a:t>Aggregate Derate Factor: 14.0%</a:t>
+            </a:r>
+          </a:p>
+          <a:p>
+            <a:pPr>
+              <a:defRPr sz="800">
+                <a:solidFill>
+                  <a:srgbClr val="9CA3AF"/>
+                </a:solidFill>
+              </a:defRPr>
+            </a:pPr>
+            <a:r>
+              <a:t>Results in an 86.0% overall System Performance Ratio (PR = 0.86).</a:t>
             </a:r>
           </a:p>
         </p:txBody>
@@ -9022,7 +9827,7 @@
             <a:avLst/>
           </a:prstGeom>
           <a:solidFill>
-            <a:srgbClr val="0B0F19"/>
+            <a:srgbClr val="090D16"/>
           </a:solidFill>
           <a:ln>
             <a:noFill/>
@@ -9154,7 +9959,7 @@
         <p:spPr>
           <a:xfrm>
             <a:off x="2606040" y="73152"/>
-            <a:ext cx="5486400" cy="365760"/>
+            <a:ext cx="5943600" cy="365760"/>
           </a:xfrm>
           <a:prstGeom prst="rect">
             <a:avLst/>
@@ -9168,14 +9973,14 @@
           <a:lstStyle/>
           <a:p>
             <a:pPr>
-              <a:defRPr sz="1000">
-                <a:solidFill>
-                  <a:srgbClr val="94A3B8"/>
-                </a:solidFill>
-              </a:defRPr>
-            </a:pPr>
-            <a:r>
-              <a:t>SVYCA Youth For Earth Hackathon | SolarSchools USA</a:t>
+              <a:defRPr sz="950">
+                <a:solidFill>
+                  <a:srgbClr val="9CA3AF"/>
+                </a:solidFill>
+              </a:defRPr>
+            </a:pPr>
+            <a:r>
+              <a:t>SVYCA Youth For Earth Hackathon | Systems Architecture &amp; Climate Finance</a:t>
             </a:r>
           </a:p>
         </p:txBody>
@@ -9203,7 +10008,7 @@
           <a:lstStyle/>
           <a:p>
             <a:pPr algn="r">
-              <a:defRPr sz="1050" b="1">
+              <a:defRPr sz="1000" b="1">
                 <a:solidFill>
                   <a:srgbClr val="38BDF8"/>
                 </a:solidFill>
@@ -9266,8 +10071,8 @@
         </p:nvSpPr>
         <p:spPr>
           <a:xfrm>
-            <a:off x="548640" y="658368"/>
-            <a:ext cx="11091672" cy="1097280"/>
+            <a:off x="548640" y="621792"/>
+            <a:ext cx="11091672" cy="1005840"/>
           </a:xfrm>
           <a:prstGeom prst="rect">
             <a:avLst/>
@@ -9281,14 +10086,14 @@
           <a:lstStyle/>
           <a:p>
             <a:pPr>
-              <a:defRPr sz="950" b="1">
+              <a:defRPr sz="900" b="1">
                 <a:solidFill>
                   <a:srgbClr val="38BDF8"/>
                 </a:solidFill>
               </a:defRPr>
             </a:pPr>
             <a:r>
-              <a:t>FINANCIAL MODELING</a:t>
+              <a:t>EMPIRICAL MODEL VALIDATION</a:t>
             </a:r>
           </a:p>
           <a:p>
@@ -9296,29 +10101,29 @@
               <a:spcBef>
                 <a:spcPts val="200"/>
               </a:spcBef>
-              <a:defRPr sz="2200" b="1">
-                <a:solidFill>
-                  <a:srgbClr val="F1F5F9"/>
-                </a:solidFill>
-              </a:defRPr>
-            </a:pPr>
-            <a:r>
-              <a:t>Rigorous Capital Economics &amp; Rapid Payback</a:t>
+              <a:defRPr sz="2100" b="1">
+                <a:solidFill>
+                  <a:srgbClr val="F3F4F6"/>
+                </a:solidFill>
+              </a:defRPr>
+            </a:pPr>
+            <a:r>
+              <a:t>Ground-Truthed Silicon Valley Case Study</a:t>
             </a:r>
           </a:p>
           <a:p>
             <a:pPr>
               <a:spcBef>
-                <a:spcPts val="400"/>
+                <a:spcPts val="300"/>
               </a:spcBef>
-              <a:defRPr sz="1150">
-                <a:solidFill>
-                  <a:srgbClr val="94A3B8"/>
-                </a:solidFill>
-              </a:defRPr>
-            </a:pPr>
-            <a:r>
-              <a:t>Structural steel cantilevers cost $3.10/W, but IRS Direct Pay cuts net outlay to $1.86/W, yielding under 3-year payback.</a:t>
+              <a:defRPr sz="1100">
+                <a:solidFill>
+                  <a:srgbClr val="9CA3AF"/>
+                </a:solidFill>
+              </a:defRPr>
+            </a:pPr>
+            <a:r>
+              <a:t>Calibrating computational simulation against empirical utility data at Monta Vista High vs. quantified delay at Paly.</a:t>
             </a:r>
           </a:p>
         </p:txBody>
@@ -9331,18 +10136,18 @@
         </p:nvSpPr>
         <p:spPr>
           <a:xfrm>
-            <a:off x="548640" y="1920240"/>
-            <a:ext cx="3474720" cy="2926080"/>
+            <a:off x="548640" y="1737360"/>
+            <a:ext cx="5394960" cy="4663440"/>
           </a:xfrm>
           <a:prstGeom prst="roundRect">
             <a:avLst/>
           </a:prstGeom>
           <a:solidFill>
-            <a:srgbClr val="161F30"/>
+            <a:srgbClr val="111827"/>
           </a:solidFill>
           <a:ln w="12700">
             <a:solidFill>
-              <a:srgbClr val="26354F"/>
+              <a:srgbClr val="1F293D"/>
             </a:solidFill>
           </a:ln>
         </p:spPr>
@@ -9376,161 +10181,8 @@
         </p:nvSpPr>
         <p:spPr>
           <a:xfrm>
-            <a:off x="548640" y="1920240"/>
-            <a:ext cx="3474720" cy="54864"/>
-          </a:xfrm>
-          <a:prstGeom prst="roundRect">
-            <a:avLst/>
-          </a:prstGeom>
-          <a:solidFill>
-            <a:srgbClr val="38BDF8"/>
-          </a:solidFill>
-          <a:ln>
-            <a:noFill/>
-          </a:ln>
-        </p:spPr>
-        <p:style>
-          <a:lnRef idx="1">
-            <a:schemeClr val="accent1"/>
-          </a:lnRef>
-          <a:fillRef idx="3">
-            <a:schemeClr val="accent1"/>
-          </a:fillRef>
-          <a:effectRef idx="2">
-            <a:schemeClr val="accent1"/>
-          </a:effectRef>
-          <a:fontRef idx="minor">
-            <a:schemeClr val="lt1"/>
-          </a:fontRef>
-        </p:style>
-        <p:txBody>
-          <a:bodyPr rtlCol="0" anchor="ctr"/>
-          <a:lstStyle/>
-          <a:p>
-            <a:pPr algn="ctr"/>
-          </a:p>
-        </p:txBody>
-      </p:sp>
-      <p:sp>
-        <p:nvSpPr>
-          <p:cNvPr id="11" name="TextBox 10"/>
-          <p:cNvSpPr txBox="1"/>
-          <p:nvPr/>
-        </p:nvSpPr>
-        <p:spPr>
-          <a:xfrm>
-            <a:off x="731520" y="2057400"/>
-            <a:ext cx="3108960" cy="2651760"/>
-          </a:xfrm>
-          <a:prstGeom prst="rect">
-            <a:avLst/>
-          </a:prstGeom>
-          <a:noFill/>
-        </p:spPr>
-        <p:txBody>
-          <a:bodyPr wrap="square">
-            <a:spAutoFit/>
-          </a:bodyPr>
-          <a:lstStyle/>
-          <a:p>
-            <a:pPr>
-              <a:defRPr sz="3200" b="1">
-                <a:solidFill>
-                  <a:srgbClr val="38BDF8"/>
-                </a:solidFill>
-              </a:defRPr>
-            </a:pPr>
-            <a:r>
-              <a:t>$3.10 / W</a:t>
-            </a:r>
-          </a:p>
-          <a:p>
-            <a:pPr>
-              <a:spcBef>
-                <a:spcPts val="400"/>
-              </a:spcBef>
-              <a:defRPr sz="850" b="1">
-                <a:solidFill>
-                  <a:srgbClr val="64748B"/>
-                </a:solidFill>
-              </a:defRPr>
-            </a:pPr>
-            <a:r>
-              <a:t>TURNKEY COMMERCIAL CANOPY COST</a:t>
-            </a:r>
-          </a:p>
-          <a:p>
-            <a:pPr>
-              <a:spcBef>
-                <a:spcPts val="1000"/>
-              </a:spcBef>
-              <a:defRPr sz="950">
-                <a:solidFill>
-                  <a:srgbClr val="94A3B8"/>
-                </a:solidFill>
-              </a:defRPr>
-            </a:pPr>
-            <a:r>
-              <a:t>Includes commercial structural steel cantilevers, Tier-1 bifacial panels, string inverters, ADA compliance, and trench conduit.</a:t>
-            </a:r>
-          </a:p>
-        </p:txBody>
-      </p:sp>
-      <p:sp>
-        <p:nvSpPr>
-          <p:cNvPr id="12" name="Rounded Rectangle 11"/>
-          <p:cNvSpPr/>
-          <p:nvPr/>
-        </p:nvSpPr>
-        <p:spPr>
-          <a:xfrm>
-            <a:off x="4343400" y="1920240"/>
-            <a:ext cx="3474720" cy="2926080"/>
-          </a:xfrm>
-          <a:prstGeom prst="roundRect">
-            <a:avLst/>
-          </a:prstGeom>
-          <a:solidFill>
-            <a:srgbClr val="161F30"/>
-          </a:solidFill>
-          <a:ln w="12700">
-            <a:solidFill>
-              <a:srgbClr val="26354F"/>
-            </a:solidFill>
-          </a:ln>
-        </p:spPr>
-        <p:style>
-          <a:lnRef idx="1">
-            <a:schemeClr val="accent1"/>
-          </a:lnRef>
-          <a:fillRef idx="3">
-            <a:schemeClr val="accent1"/>
-          </a:fillRef>
-          <a:effectRef idx="2">
-            <a:schemeClr val="accent1"/>
-          </a:effectRef>
-          <a:fontRef idx="minor">
-            <a:schemeClr val="lt1"/>
-          </a:fontRef>
-        </p:style>
-        <p:txBody>
-          <a:bodyPr rtlCol="0" anchor="ctr"/>
-          <a:lstStyle/>
-          <a:p>
-            <a:pPr algn="ctr"/>
-          </a:p>
-        </p:txBody>
-      </p:sp>
-      <p:sp>
-        <p:nvSpPr>
-          <p:cNvPr id="13" name="Rounded Rectangle 12"/>
-          <p:cNvSpPr/>
-          <p:nvPr/>
-        </p:nvSpPr>
-        <p:spPr>
-          <a:xfrm>
-            <a:off x="4343400" y="1920240"/>
-            <a:ext cx="3474720" cy="54864"/>
+            <a:off x="548640" y="1737360"/>
+            <a:ext cx="5394960" cy="45720"/>
           </a:xfrm>
           <a:prstGeom prst="roundRect">
             <a:avLst/>
@@ -9566,14 +10218,14 @@
       </p:sp>
       <p:sp>
         <p:nvSpPr>
-          <p:cNvPr id="14" name="TextBox 13"/>
+          <p:cNvPr id="11" name="TextBox 10"/>
           <p:cNvSpPr txBox="1"/>
           <p:nvPr/>
         </p:nvSpPr>
         <p:spPr>
           <a:xfrm>
-            <a:off x="4526280" y="2057400"/>
-            <a:ext cx="3108960" cy="2651760"/>
+            <a:off x="777240" y="1874519"/>
+            <a:ext cx="4937760" cy="4389120"/>
           </a:xfrm>
           <a:prstGeom prst="rect">
             <a:avLst/>
@@ -9587,68 +10239,143 @@
           <a:lstStyle/>
           <a:p>
             <a:pPr>
-              <a:defRPr sz="3200" b="1">
+              <a:defRPr sz="1100" b="1">
                 <a:solidFill>
                   <a:srgbClr val="10B981"/>
                 </a:solidFill>
               </a:defRPr>
             </a:pPr>
             <a:r>
-              <a:t>-$1.24 / W</a:t>
+              <a:t>MONTA VISTA HIGH (IMPLEMENTED LEADER)</a:t>
             </a:r>
           </a:p>
           <a:p>
             <a:pPr>
               <a:spcBef>
-                <a:spcPts val="400"/>
+                <a:spcPts val="100"/>
+              </a:spcBef>
+              <a:defRPr sz="850">
+                <a:solidFill>
+                  <a:srgbClr val="6B7280"/>
+                </a:solidFill>
+              </a:defRPr>
+            </a:pPr>
+            <a:r>
+              <a:t>FUHSD &amp; ENGIE 550 kW Carports (OSM Way 416432160, Lat 37.3151, Lon -122.0581)</a:t>
+            </a:r>
+          </a:p>
+          <a:p>
+            <a:pPr>
+              <a:spcBef>
+                <a:spcPts val="700"/>
+              </a:spcBef>
+              <a:defRPr sz="950" b="0">
+                <a:solidFill>
+                  <a:srgbClr val="F3F4F6"/>
+                </a:solidFill>
+              </a:defRPr>
+            </a:pPr>
+            <a:r>
+              <a:t>Modeled Nameplate Capacity: 718.2 kW DC (550 kW AC inverter limit)</a:t>
+            </a:r>
+          </a:p>
+          <a:p>
+            <a:pPr>
+              <a:spcBef>
+                <a:spcPts val="700"/>
+              </a:spcBef>
+              <a:defRPr sz="950" b="0">
+                <a:solidFill>
+                  <a:srgbClr val="F3F4F6"/>
+                </a:solidFill>
+              </a:defRPr>
+            </a:pPr>
+            <a:r>
+              <a:t>Simulated Annual Generation: 1,484,069 kWh / year</a:t>
+            </a:r>
+          </a:p>
+          <a:p>
+            <a:pPr>
+              <a:spcBef>
+                <a:spcPts val="700"/>
+              </a:spcBef>
+              <a:defRPr sz="950" b="0">
+                <a:solidFill>
+                  <a:srgbClr val="F3F4F6"/>
+                </a:solidFill>
+              </a:defRPr>
+            </a:pPr>
+            <a:r>
+              <a:t>Modeled Avoided Bill (PG&amp;E B-19): $145,000 / year</a:t>
+            </a:r>
+          </a:p>
+          <a:p>
+            <a:pPr>
+              <a:spcBef>
+                <a:spcPts val="700"/>
+              </a:spcBef>
+              <a:defRPr sz="950" b="0">
+                <a:solidFill>
+                  <a:srgbClr val="F3F4F6"/>
+                </a:solidFill>
+              </a:defRPr>
+            </a:pPr>
+            <a:r>
+              <a:t>Empirical District Utility Offset: $139,200 / year (Published FUHSD Bills)</a:t>
+            </a:r>
+          </a:p>
+          <a:p>
+            <a:pPr>
+              <a:spcBef>
+                <a:spcPts val="700"/>
+              </a:spcBef>
+              <a:defRPr sz="950" b="1">
+                <a:solidFill>
+                  <a:srgbClr val="10B981"/>
+                </a:solidFill>
+              </a:defRPr>
+            </a:pPr>
+            <a:r>
+              <a:t>Model Accuracy Tolerance: 4.17% Error (Empirically Validated)</a:t>
+            </a:r>
+          </a:p>
+          <a:p>
+            <a:pPr>
+              <a:spcBef>
+                <a:spcPts val="1400"/>
               </a:spcBef>
               <a:defRPr sz="850" b="1">
                 <a:solidFill>
-                  <a:srgbClr val="64748B"/>
-                </a:solidFill>
-              </a:defRPr>
-            </a:pPr>
-            <a:r>
-              <a:t>IRS DIRECT PAY CASH CHECK (40%)</a:t>
-            </a:r>
-          </a:p>
-          <a:p>
-            <a:pPr>
-              <a:spcBef>
-                <a:spcPts val="1000"/>
-              </a:spcBef>
-              <a:defRPr sz="950">
-                <a:solidFill>
-                  <a:srgbClr val="94A3B8"/>
-                </a:solidFill>
-              </a:defRPr>
-            </a:pPr>
-            <a:r>
-              <a:t>Base 30% investment tax credit equivalent + 10% domestic content/Title I bonus paid directly into school district bank account.</a:t>
-            </a:r>
-          </a:p>
-        </p:txBody>
-      </p:sp>
-      <p:sp>
-        <p:nvSpPr>
-          <p:cNvPr id="15" name="Rounded Rectangle 14"/>
+                  <a:srgbClr val="10B981"/>
+                </a:solidFill>
+              </a:defRPr>
+            </a:pPr>
+            <a:r>
+              <a:t>VALIDATION PROOF: Real-world PG&amp;E billing confirms that our 65% packing factor and NREL PVWatts loss waterfall match commercial utility realities within 4.17%.</a:t>
+            </a:r>
+          </a:p>
+        </p:txBody>
+      </p:sp>
+      <p:sp>
+        <p:nvSpPr>
+          <p:cNvPr id="12" name="Rounded Rectangle 11"/>
           <p:cNvSpPr/>
           <p:nvPr/>
         </p:nvSpPr>
         <p:spPr>
           <a:xfrm>
-            <a:off x="8138160" y="1920240"/>
-            <a:ext cx="3474720" cy="2926080"/>
+            <a:off x="6217920" y="1737360"/>
+            <a:ext cx="5394960" cy="4663440"/>
           </a:xfrm>
           <a:prstGeom prst="roundRect">
             <a:avLst/>
           </a:prstGeom>
           <a:solidFill>
-            <a:srgbClr val="161F30"/>
+            <a:srgbClr val="111827"/>
           </a:solidFill>
           <a:ln w="12700">
             <a:solidFill>
-              <a:srgbClr val="26354F"/>
+              <a:srgbClr val="1F293D"/>
             </a:solidFill>
           </a:ln>
         </p:spPr>
@@ -9676,20 +10403,20 @@
       </p:sp>
       <p:sp>
         <p:nvSpPr>
-          <p:cNvPr id="16" name="Rounded Rectangle 15"/>
+          <p:cNvPr id="13" name="Rounded Rectangle 12"/>
           <p:cNvSpPr/>
           <p:nvPr/>
         </p:nvSpPr>
         <p:spPr>
           <a:xfrm>
-            <a:off x="8138160" y="1920240"/>
-            <a:ext cx="3474720" cy="54864"/>
+            <a:off x="6217920" y="1737360"/>
+            <a:ext cx="5394960" cy="45720"/>
           </a:xfrm>
           <a:prstGeom prst="roundRect">
             <a:avLst/>
           </a:prstGeom>
           <a:solidFill>
-            <a:srgbClr val="10B981"/>
+            <a:srgbClr val="EF4444"/>
           </a:solidFill>
           <a:ln>
             <a:noFill/>
@@ -9719,14 +10446,14 @@
       </p:sp>
       <p:sp>
         <p:nvSpPr>
-          <p:cNvPr id="17" name="TextBox 16"/>
+          <p:cNvPr id="14" name="TextBox 13"/>
           <p:cNvSpPr txBox="1"/>
           <p:nvPr/>
         </p:nvSpPr>
         <p:spPr>
           <a:xfrm>
-            <a:off x="8321040" y="2057400"/>
-            <a:ext cx="3108960" cy="2651760"/>
+            <a:off x="6446520" y="1874519"/>
+            <a:ext cx="4937760" cy="4389120"/>
           </a:xfrm>
           <a:prstGeom prst="rect">
             <a:avLst/>
@@ -9740,182 +10467,119 @@
           <a:lstStyle/>
           <a:p>
             <a:pPr>
-              <a:defRPr sz="3200" b="1">
-                <a:solidFill>
-                  <a:srgbClr val="10B981"/>
-                </a:solidFill>
-              </a:defRPr>
-            </a:pPr>
-            <a:r>
-              <a:t>$1.86 / W</a:t>
+              <a:defRPr sz="1100" b="1">
+                <a:solidFill>
+                  <a:srgbClr val="EF4444"/>
+                </a:solidFill>
+              </a:defRPr>
+            </a:pPr>
+            <a:r>
+              <a:t>PALO ALTO HIGH (UNSHADED OPPORTUNITY)</a:t>
             </a:r>
           </a:p>
           <a:p>
             <a:pPr>
               <a:spcBef>
-                <a:spcPts val="400"/>
+                <a:spcPts val="100"/>
+              </a:spcBef>
+              <a:defRPr sz="850">
+                <a:solidFill>
+                  <a:srgbClr val="6B7280"/>
+                </a:solidFill>
+              </a:defRPr>
+            </a:pPr>
+            <a:r>
+              <a:t>PAUSD Unshaded Asphalt Lot along Embarcadero Rd (7,200 m² Surface Lot)</a:t>
+            </a:r>
+          </a:p>
+          <a:p>
+            <a:pPr>
+              <a:spcBef>
+                <a:spcPts val="700"/>
+              </a:spcBef>
+              <a:defRPr sz="950" b="0">
+                <a:solidFill>
+                  <a:srgbClr val="F3F4F6"/>
+                </a:solidFill>
+              </a:defRPr>
+            </a:pPr>
+            <a:r>
+              <a:t>Unshaded Parking Footprint: 7,200 m² (~180 Surface Parking Stalls)</a:t>
+            </a:r>
+          </a:p>
+          <a:p>
+            <a:pPr>
+              <a:spcBef>
+                <a:spcPts val="700"/>
+              </a:spcBef>
+              <a:defRPr sz="950" b="0">
+                <a:solidFill>
+                  <a:srgbClr val="F3F4F6"/>
+                </a:solidFill>
+              </a:defRPr>
+            </a:pPr>
+            <a:r>
+              <a:t>Potential Solar Canopy Size: 608.4 kW DC System Capacity</a:t>
+            </a:r>
+          </a:p>
+          <a:p>
+            <a:pPr>
+              <a:spcBef>
+                <a:spcPts val="700"/>
+              </a:spcBef>
+              <a:defRPr sz="950" b="0">
+                <a:solidFill>
+                  <a:srgbClr val="F3F4F6"/>
+                </a:solidFill>
+              </a:defRPr>
+            </a:pPr>
+            <a:r>
+              <a:t>Avoidable Utility Bill Surrender: $140,000 / year (Surrendered to Utility)</a:t>
+            </a:r>
+          </a:p>
+          <a:p>
+            <a:pPr>
+              <a:spcBef>
+                <a:spcPts val="700"/>
+              </a:spcBef>
+              <a:defRPr sz="950" b="0">
+                <a:solidFill>
+                  <a:srgbClr val="F3F4F6"/>
+                </a:solidFill>
+              </a:defRPr>
+            </a:pPr>
+            <a:r>
+              <a:t>Unclaimed IRS Direct Pay Check: $754,416 Cash Check Sitting at U.S. Treasury</a:t>
+            </a:r>
+          </a:p>
+          <a:p>
+            <a:pPr>
+              <a:spcBef>
+                <a:spcPts val="700"/>
+              </a:spcBef>
+              <a:defRPr sz="950" b="1">
+                <a:solidFill>
+                  <a:srgbClr val="EF4444"/>
+                </a:solidFill>
+              </a:defRPr>
+            </a:pPr>
+            <a:r>
+              <a:t>5-Year Delay Penalty: $700,000 in Permanent Classroom Budget Losses</a:t>
+            </a:r>
+          </a:p>
+          <a:p>
+            <a:pPr>
+              <a:spcBef>
+                <a:spcPts val="1400"/>
               </a:spcBef>
               <a:defRPr sz="850" b="1">
                 <a:solidFill>
-                  <a:srgbClr val="64748B"/>
-                </a:solidFill>
-              </a:defRPr>
-            </a:pPr>
-            <a:r>
-              <a:t>NET DISTRICT CAPITAL OUTLAY</a:t>
-            </a:r>
-          </a:p>
-          <a:p>
-            <a:pPr>
-              <a:spcBef>
-                <a:spcPts val="1000"/>
-              </a:spcBef>
-              <a:defRPr sz="950">
-                <a:solidFill>
-                  <a:srgbClr val="94A3B8"/>
-                </a:solidFill>
-              </a:defRPr>
-            </a:pPr>
-            <a:r>
-              <a:t>Net capital outlay drops by 40% to 50%, enabling rapid simple payback within 2.6 to 4.5 years under standard commercial tariffs.</a:t>
-            </a:r>
-          </a:p>
-        </p:txBody>
-      </p:sp>
-      <p:sp>
-        <p:nvSpPr>
-          <p:cNvPr id="18" name="Rounded Rectangle 17"/>
-          <p:cNvSpPr/>
-          <p:nvPr/>
-        </p:nvSpPr>
-        <p:spPr>
-          <a:xfrm>
-            <a:off x="548640" y="5029200"/>
-            <a:ext cx="11094415" cy="1280160"/>
-          </a:xfrm>
-          <a:prstGeom prst="roundRect">
-            <a:avLst/>
-          </a:prstGeom>
-          <a:solidFill>
-            <a:srgbClr val="161F30"/>
-          </a:solidFill>
-          <a:ln w="12700">
-            <a:solidFill>
-              <a:srgbClr val="26354F"/>
-            </a:solidFill>
-          </a:ln>
-        </p:spPr>
-        <p:style>
-          <a:lnRef idx="1">
-            <a:schemeClr val="accent1"/>
-          </a:lnRef>
-          <a:fillRef idx="3">
-            <a:schemeClr val="accent1"/>
-          </a:fillRef>
-          <a:effectRef idx="2">
-            <a:schemeClr val="accent1"/>
-          </a:effectRef>
-          <a:fontRef idx="minor">
-            <a:schemeClr val="lt1"/>
-          </a:fontRef>
-        </p:style>
-        <p:txBody>
-          <a:bodyPr rtlCol="0" anchor="ctr"/>
-          <a:lstStyle/>
-          <a:p>
-            <a:pPr algn="ctr"/>
-          </a:p>
-        </p:txBody>
-      </p:sp>
-      <p:sp>
-        <p:nvSpPr>
-          <p:cNvPr id="19" name="Rounded Rectangle 18"/>
-          <p:cNvSpPr/>
-          <p:nvPr/>
-        </p:nvSpPr>
-        <p:spPr>
-          <a:xfrm>
-            <a:off x="548640" y="5029200"/>
-            <a:ext cx="11094415" cy="54864"/>
-          </a:xfrm>
-          <a:prstGeom prst="roundRect">
-            <a:avLst/>
-          </a:prstGeom>
-          <a:solidFill>
-            <a:srgbClr val="10B981"/>
-          </a:solidFill>
-          <a:ln>
-            <a:noFill/>
-          </a:ln>
-        </p:spPr>
-        <p:style>
-          <a:lnRef idx="1">
-            <a:schemeClr val="accent1"/>
-          </a:lnRef>
-          <a:fillRef idx="3">
-            <a:schemeClr val="accent1"/>
-          </a:fillRef>
-          <a:effectRef idx="2">
-            <a:schemeClr val="accent1"/>
-          </a:effectRef>
-          <a:fontRef idx="minor">
-            <a:schemeClr val="lt1"/>
-          </a:fontRef>
-        </p:style>
-        <p:txBody>
-          <a:bodyPr rtlCol="0" anchor="ctr"/>
-          <a:lstStyle/>
-          <a:p>
-            <a:pPr algn="ctr"/>
-          </a:p>
-        </p:txBody>
-      </p:sp>
-      <p:sp>
-        <p:nvSpPr>
-          <p:cNvPr id="20" name="TextBox 19"/>
-          <p:cNvSpPr txBox="1"/>
-          <p:nvPr/>
-        </p:nvSpPr>
-        <p:spPr>
-          <a:xfrm>
-            <a:off x="777240" y="5120640"/>
-            <a:ext cx="10607040" cy="1097280"/>
-          </a:xfrm>
-          <a:prstGeom prst="rect">
-            <a:avLst/>
-          </a:prstGeom>
-          <a:noFill/>
-        </p:spPr>
-        <p:txBody>
-          <a:bodyPr wrap="square">
-            <a:spAutoFit/>
-          </a:bodyPr>
-          <a:lstStyle/>
-          <a:p>
-            <a:pPr>
-              <a:defRPr sz="1100" b="1">
-                <a:solidFill>
-                  <a:srgbClr val="10B981"/>
-                </a:solidFill>
-              </a:defRPr>
-            </a:pPr>
-            <a:r>
-              <a:t>25-YEAR CUMULATIVE NET DIVIDEND: OVER $11,000,000 PER HIGH SCHOOL CAMPUS</a:t>
-            </a:r>
-          </a:p>
-          <a:p>
-            <a:pPr>
-              <a:spcBef>
-                <a:spcPts val="400"/>
-              </a:spcBef>
-              <a:defRPr sz="1050">
-                <a:solidFill>
-                  <a:srgbClr val="F1F5F9"/>
-                </a:solidFill>
-              </a:defRPr>
-            </a:pPr>
-            <a:r>
-              <a:t>Fully accounts for $15/kW-year operations &amp; maintenance (O&amp;M), annual robotic panel cleaning, 2% annual inflation, 0.5%/year panel degradation, and complete Year 15 inverter replacement reserve.</a:t>
+                  <a:srgbClr val="EF4444"/>
+                </a:solidFill>
+              </a:defRPr>
+            </a:pPr>
+            <a:r>
+              <a:t>THE COST OF INACTION: Every year PAUSD delays action is $140,000 paid to utility companies instead of funding instructional educators.</a:t>
             </a:r>
           </a:p>
         </p:txBody>
@@ -9953,7 +10617,7 @@
             <a:avLst/>
           </a:prstGeom>
           <a:solidFill>
-            <a:srgbClr val="0B0F19"/>
+            <a:srgbClr val="090D16"/>
           </a:solidFill>
           <a:ln>
             <a:noFill/>
@@ -10085,7 +10749,7 @@
         <p:spPr>
           <a:xfrm>
             <a:off x="2606040" y="73152"/>
-            <a:ext cx="5486400" cy="365760"/>
+            <a:ext cx="5943600" cy="365760"/>
           </a:xfrm>
           <a:prstGeom prst="rect">
             <a:avLst/>
@@ -10099,14 +10763,14 @@
           <a:lstStyle/>
           <a:p>
             <a:pPr>
-              <a:defRPr sz="1000">
-                <a:solidFill>
-                  <a:srgbClr val="94A3B8"/>
-                </a:solidFill>
-              </a:defRPr>
-            </a:pPr>
-            <a:r>
-              <a:t>SVYCA Youth For Earth Hackathon | SolarSchools USA</a:t>
+              <a:defRPr sz="950">
+                <a:solidFill>
+                  <a:srgbClr val="9CA3AF"/>
+                </a:solidFill>
+              </a:defRPr>
+            </a:pPr>
+            <a:r>
+              <a:t>SVYCA Youth For Earth Hackathon | Systems Architecture &amp; Climate Finance</a:t>
             </a:r>
           </a:p>
         </p:txBody>
@@ -10134,7 +10798,7 @@
           <a:lstStyle/>
           <a:p>
             <a:pPr algn="r">
-              <a:defRPr sz="1050" b="1">
+              <a:defRPr sz="1000" b="1">
                 <a:solidFill>
                   <a:srgbClr val="38BDF8"/>
                 </a:solidFill>
@@ -10197,8 +10861,8 @@
         </p:nvSpPr>
         <p:spPr>
           <a:xfrm>
-            <a:off x="548640" y="658368"/>
-            <a:ext cx="11091672" cy="1097280"/>
+            <a:off x="548640" y="621792"/>
+            <a:ext cx="11091672" cy="1005840"/>
           </a:xfrm>
           <a:prstGeom prst="rect">
             <a:avLst/>
@@ -10212,14 +10876,14 @@
           <a:lstStyle/>
           <a:p>
             <a:pPr>
-              <a:defRPr sz="950" b="1">
+              <a:defRPr sz="900" b="1">
                 <a:solidFill>
                   <a:srgbClr val="38BDF8"/>
                 </a:solidFill>
               </a:defRPr>
             </a:pPr>
             <a:r>
-              <a:t>EXECUTION ROADMAP</a:t>
+              <a:t>FINANCIAL ENGINEERING &amp; LIFECYCLE ECONOMICS</a:t>
             </a:r>
           </a:p>
           <a:p>
@@ -10227,29 +10891,29 @@
               <a:spcBef>
                 <a:spcPts val="200"/>
               </a:spcBef>
-              <a:defRPr sz="2200" b="1">
-                <a:solidFill>
-                  <a:srgbClr val="F1F5F9"/>
-                </a:solidFill>
-              </a:defRPr>
-            </a:pPr>
-            <a:r>
-              <a:t>Three-Phase Scalability: Bay Area to Nationwide</a:t>
+              <a:defRPr sz="2100" b="1">
+                <a:solidFill>
+                  <a:srgbClr val="F3F4F6"/>
+                </a:solidFill>
+              </a:defRPr>
+            </a:pPr>
+            <a:r>
+              <a:t>Turnkey Economics &amp; 25-Year Lifecycle DCF</a:t>
             </a:r>
           </a:p>
           <a:p>
             <a:pPr>
               <a:spcBef>
-                <a:spcPts val="400"/>
+                <a:spcPts val="300"/>
               </a:spcBef>
-              <a:defRPr sz="1150">
-                <a:solidFill>
-                  <a:srgbClr val="94A3B8"/>
-                </a:solidFill>
-              </a:defRPr>
-            </a:pPr>
-            <a:r>
-              <a:t>A structured rollout expanding from local ground-truth calibration to all 50 states.</a:t>
+              <a:defRPr sz="1100">
+                <a:solidFill>
+                  <a:srgbClr val="9CA3AF"/>
+                </a:solidFill>
+              </a:defRPr>
+            </a:pPr>
+            <a:r>
+              <a:t>Structural steel canopies require a $3.10/W capex benchmark, but Section 6417 cuts net capex to $1.86/W.</a:t>
             </a:r>
           </a:p>
         </p:txBody>
@@ -10262,18 +10926,18 @@
         </p:nvSpPr>
         <p:spPr>
           <a:xfrm>
-            <a:off x="548640" y="1920240"/>
-            <a:ext cx="3474720" cy="4297680"/>
+            <a:off x="548640" y="1737360"/>
+            <a:ext cx="3474720" cy="2377440"/>
           </a:xfrm>
           <a:prstGeom prst="roundRect">
             <a:avLst/>
           </a:prstGeom>
           <a:solidFill>
-            <a:srgbClr val="161F30"/>
+            <a:srgbClr val="111827"/>
           </a:solidFill>
           <a:ln w="12700">
             <a:solidFill>
-              <a:srgbClr val="26354F"/>
+              <a:srgbClr val="1F293D"/>
             </a:solidFill>
           </a:ln>
         </p:spPr>
@@ -10307,8 +10971,8 @@
         </p:nvSpPr>
         <p:spPr>
           <a:xfrm>
-            <a:off x="548640" y="1920240"/>
-            <a:ext cx="3474720" cy="54864"/>
+            <a:off x="548640" y="1737360"/>
+            <a:ext cx="3474720" cy="45720"/>
           </a:xfrm>
           <a:prstGeom prst="roundRect">
             <a:avLst/>
@@ -10350,8 +11014,8 @@
         </p:nvSpPr>
         <p:spPr>
           <a:xfrm>
-            <a:off x="731520" y="2057400"/>
-            <a:ext cx="3108960" cy="3931920"/>
+            <a:off x="713232" y="1847088"/>
+            <a:ext cx="3145536" cy="2157984"/>
           </a:xfrm>
           <a:prstGeom prst="rect">
             <a:avLst/>
@@ -10372,57 +11036,37 @@
               </a:defRPr>
             </a:pPr>
             <a:r>
-              <a:t>Phase 1</a:t>
+              <a:t>$3.10 / W</a:t>
             </a:r>
           </a:p>
           <a:p>
             <a:pPr>
               <a:spcBef>
-                <a:spcPts val="400"/>
+                <a:spcPts val="200"/>
               </a:spcBef>
-              <a:defRPr sz="1100" b="1">
-                <a:solidFill>
-                  <a:srgbClr val="F1F5F9"/>
-                </a:solidFill>
-              </a:defRPr>
-            </a:pPr>
-            <a:r>
-              <a:t>SAN FRANCISCO BAY AREA</a:t>
+              <a:defRPr sz="750" b="1">
+                <a:solidFill>
+                  <a:srgbClr val="6B7280"/>
+                </a:solidFill>
+              </a:defRPr>
+            </a:pPr>
+            <a:r>
+              <a:t>COMMERCIAL TURNKEY CAPEX</a:t>
             </a:r>
           </a:p>
           <a:p>
             <a:pPr>
               <a:spcBef>
-                <a:spcPts val="400"/>
+                <a:spcPts val="600"/>
               </a:spcBef>
-              <a:defRPr sz="950" b="1">
-                <a:solidFill>
-                  <a:srgbClr val="38BDF8"/>
-                </a:solidFill>
-              </a:defRPr>
-            </a:pPr>
-            <a:r>
-              <a:t>9 Counties &amp; 18 Campuses</a:t>
-            </a:r>
-          </a:p>
-          <a:p>
-            <a:pPr>
-              <a:spcBef>
-                <a:spcPts val="1200"/>
-              </a:spcBef>
-              <a:defRPr sz="1000">
-                <a:solidFill>
-                  <a:srgbClr val="94A3B8"/>
-                </a:solidFill>
-              </a:defRPr>
-            </a:pPr>
-            <a:r>
-              <a:t>Calibrated against active arrays in Cupertino Union (5.2 MW) and Fremont Union High School District. Integrated with PG&amp;E Schedule B-19 commercial tariffs.</a:t>
-            </a:r>
-            <a:br/>
-            <a:br/>
-            <a:r>
-              <a:t>Status: Complete &amp; Calibrated</a:t>
+              <a:defRPr sz="850">
+                <a:solidFill>
+                  <a:srgbClr val="9CA3AF"/>
+                </a:solidFill>
+              </a:defRPr>
+            </a:pPr>
+            <a:r>
+              <a:t>Reflects commercial structural steel cantilever columns, CIDH reinforced concrete pier foundations, switchgear, and trench conduit.</a:t>
             </a:r>
           </a:p>
         </p:txBody>
@@ -10435,18 +11079,18 @@
         </p:nvSpPr>
         <p:spPr>
           <a:xfrm>
-            <a:off x="4343400" y="1920240"/>
-            <a:ext cx="3474720" cy="4297680"/>
+            <a:off x="4343400" y="1737360"/>
+            <a:ext cx="3474720" cy="2377440"/>
           </a:xfrm>
           <a:prstGeom prst="roundRect">
             <a:avLst/>
           </a:prstGeom>
           <a:solidFill>
-            <a:srgbClr val="161F30"/>
+            <a:srgbClr val="111827"/>
           </a:solidFill>
           <a:ln w="12700">
             <a:solidFill>
-              <a:srgbClr val="26354F"/>
+              <a:srgbClr val="1F293D"/>
             </a:solidFill>
           </a:ln>
         </p:spPr>
@@ -10480,8 +11124,437 @@
         </p:nvSpPr>
         <p:spPr>
           <a:xfrm>
-            <a:off x="4343400" y="1920240"/>
-            <a:ext cx="3474720" cy="54864"/>
+            <a:off x="4343400" y="1737360"/>
+            <a:ext cx="3474720" cy="45720"/>
+          </a:xfrm>
+          <a:prstGeom prst="roundRect">
+            <a:avLst/>
+          </a:prstGeom>
+          <a:solidFill>
+            <a:srgbClr val="10B981"/>
+          </a:solidFill>
+          <a:ln>
+            <a:noFill/>
+          </a:ln>
+        </p:spPr>
+        <p:style>
+          <a:lnRef idx="1">
+            <a:schemeClr val="accent1"/>
+          </a:lnRef>
+          <a:fillRef idx="3">
+            <a:schemeClr val="accent1"/>
+          </a:fillRef>
+          <a:effectRef idx="2">
+            <a:schemeClr val="accent1"/>
+          </a:effectRef>
+          <a:fontRef idx="minor">
+            <a:schemeClr val="lt1"/>
+          </a:fontRef>
+        </p:style>
+        <p:txBody>
+          <a:bodyPr rtlCol="0" anchor="ctr"/>
+          <a:lstStyle/>
+          <a:p>
+            <a:pPr algn="ctr"/>
+          </a:p>
+        </p:txBody>
+      </p:sp>
+      <p:sp>
+        <p:nvSpPr>
+          <p:cNvPr id="14" name="TextBox 13"/>
+          <p:cNvSpPr txBox="1"/>
+          <p:nvPr/>
+        </p:nvSpPr>
+        <p:spPr>
+          <a:xfrm>
+            <a:off x="4507992" y="1847088"/>
+            <a:ext cx="3145536" cy="2157984"/>
+          </a:xfrm>
+          <a:prstGeom prst="rect">
+            <a:avLst/>
+          </a:prstGeom>
+          <a:noFill/>
+        </p:spPr>
+        <p:txBody>
+          <a:bodyPr wrap="square">
+            <a:spAutoFit/>
+          </a:bodyPr>
+          <a:lstStyle/>
+          <a:p>
+            <a:pPr>
+              <a:defRPr sz="2800" b="1">
+                <a:solidFill>
+                  <a:srgbClr val="10B981"/>
+                </a:solidFill>
+              </a:defRPr>
+            </a:pPr>
+            <a:r>
+              <a:t>-$1.24 / W</a:t>
+            </a:r>
+          </a:p>
+          <a:p>
+            <a:pPr>
+              <a:spcBef>
+                <a:spcPts val="200"/>
+              </a:spcBef>
+              <a:defRPr sz="750" b="1">
+                <a:solidFill>
+                  <a:srgbClr val="6B7280"/>
+                </a:solidFill>
+              </a:defRPr>
+            </a:pPr>
+            <a:r>
+              <a:t>40% IRS DIRECT PAY CHECK</a:t>
+            </a:r>
+          </a:p>
+          <a:p>
+            <a:pPr>
+              <a:spcBef>
+                <a:spcPts val="600"/>
+              </a:spcBef>
+              <a:defRPr sz="850">
+                <a:solidFill>
+                  <a:srgbClr val="9CA3AF"/>
+                </a:solidFill>
+              </a:defRPr>
+            </a:pPr>
+            <a:r>
+              <a:t>30% base + 10% Title I or Domestic Content adder paid via direct cash check from U.S. Treasury, bypassing private tax investors.</a:t>
+            </a:r>
+          </a:p>
+        </p:txBody>
+      </p:sp>
+      <p:sp>
+        <p:nvSpPr>
+          <p:cNvPr id="15" name="Rounded Rectangle 14"/>
+          <p:cNvSpPr/>
+          <p:nvPr/>
+        </p:nvSpPr>
+        <p:spPr>
+          <a:xfrm>
+            <a:off x="8138160" y="1737360"/>
+            <a:ext cx="3474720" cy="2377440"/>
+          </a:xfrm>
+          <a:prstGeom prst="roundRect">
+            <a:avLst/>
+          </a:prstGeom>
+          <a:solidFill>
+            <a:srgbClr val="111827"/>
+          </a:solidFill>
+          <a:ln w="12700">
+            <a:solidFill>
+              <a:srgbClr val="1F293D"/>
+            </a:solidFill>
+          </a:ln>
+        </p:spPr>
+        <p:style>
+          <a:lnRef idx="1">
+            <a:schemeClr val="accent1"/>
+          </a:lnRef>
+          <a:fillRef idx="3">
+            <a:schemeClr val="accent1"/>
+          </a:fillRef>
+          <a:effectRef idx="2">
+            <a:schemeClr val="accent1"/>
+          </a:effectRef>
+          <a:fontRef idx="minor">
+            <a:schemeClr val="lt1"/>
+          </a:fontRef>
+        </p:style>
+        <p:txBody>
+          <a:bodyPr rtlCol="0" anchor="ctr"/>
+          <a:lstStyle/>
+          <a:p>
+            <a:pPr algn="ctr"/>
+          </a:p>
+        </p:txBody>
+      </p:sp>
+      <p:sp>
+        <p:nvSpPr>
+          <p:cNvPr id="16" name="Rounded Rectangle 15"/>
+          <p:cNvSpPr/>
+          <p:nvPr/>
+        </p:nvSpPr>
+        <p:spPr>
+          <a:xfrm>
+            <a:off x="8138160" y="1737360"/>
+            <a:ext cx="3474720" cy="45720"/>
+          </a:xfrm>
+          <a:prstGeom prst="roundRect">
+            <a:avLst/>
+          </a:prstGeom>
+          <a:solidFill>
+            <a:srgbClr val="10B981"/>
+          </a:solidFill>
+          <a:ln>
+            <a:noFill/>
+          </a:ln>
+        </p:spPr>
+        <p:style>
+          <a:lnRef idx="1">
+            <a:schemeClr val="accent1"/>
+          </a:lnRef>
+          <a:fillRef idx="3">
+            <a:schemeClr val="accent1"/>
+          </a:fillRef>
+          <a:effectRef idx="2">
+            <a:schemeClr val="accent1"/>
+          </a:effectRef>
+          <a:fontRef idx="minor">
+            <a:schemeClr val="lt1"/>
+          </a:fontRef>
+        </p:style>
+        <p:txBody>
+          <a:bodyPr rtlCol="0" anchor="ctr"/>
+          <a:lstStyle/>
+          <a:p>
+            <a:pPr algn="ctr"/>
+          </a:p>
+        </p:txBody>
+      </p:sp>
+      <p:sp>
+        <p:nvSpPr>
+          <p:cNvPr id="17" name="TextBox 16"/>
+          <p:cNvSpPr txBox="1"/>
+          <p:nvPr/>
+        </p:nvSpPr>
+        <p:spPr>
+          <a:xfrm>
+            <a:off x="8302752" y="1847088"/>
+            <a:ext cx="3145536" cy="2157984"/>
+          </a:xfrm>
+          <a:prstGeom prst="rect">
+            <a:avLst/>
+          </a:prstGeom>
+          <a:noFill/>
+        </p:spPr>
+        <p:txBody>
+          <a:bodyPr wrap="square">
+            <a:spAutoFit/>
+          </a:bodyPr>
+          <a:lstStyle/>
+          <a:p>
+            <a:pPr>
+              <a:defRPr sz="2800" b="1">
+                <a:solidFill>
+                  <a:srgbClr val="10B981"/>
+                </a:solidFill>
+              </a:defRPr>
+            </a:pPr>
+            <a:r>
+              <a:t>$1.86 / W</a:t>
+            </a:r>
+          </a:p>
+          <a:p>
+            <a:pPr>
+              <a:spcBef>
+                <a:spcPts val="200"/>
+              </a:spcBef>
+              <a:defRPr sz="750" b="1">
+                <a:solidFill>
+                  <a:srgbClr val="6B7280"/>
+                </a:solidFill>
+              </a:defRPr>
+            </a:pPr>
+            <a:r>
+              <a:t>NET DISTRICT CAPITAL OUTLAY</a:t>
+            </a:r>
+          </a:p>
+          <a:p>
+            <a:pPr>
+              <a:spcBef>
+                <a:spcPts val="600"/>
+              </a:spcBef>
+              <a:defRPr sz="850">
+                <a:solidFill>
+                  <a:srgbClr val="9CA3AF"/>
+                </a:solidFill>
+              </a:defRPr>
+            </a:pPr>
+            <a:r>
+              <a:t>Net outlay drops to $1.86/W, delivering rapid simple payback within 2.6 to 4.5 years under standard commercial tariffs.</a:t>
+            </a:r>
+          </a:p>
+        </p:txBody>
+      </p:sp>
+      <p:sp>
+        <p:nvSpPr>
+          <p:cNvPr id="18" name="Rounded Rectangle 17"/>
+          <p:cNvSpPr/>
+          <p:nvPr/>
+        </p:nvSpPr>
+        <p:spPr>
+          <a:xfrm>
+            <a:off x="548640" y="4297680"/>
+            <a:ext cx="11094415" cy="2103120"/>
+          </a:xfrm>
+          <a:prstGeom prst="roundRect">
+            <a:avLst/>
+          </a:prstGeom>
+          <a:solidFill>
+            <a:srgbClr val="111827"/>
+          </a:solidFill>
+          <a:ln w="12700">
+            <a:solidFill>
+              <a:srgbClr val="1F293D"/>
+            </a:solidFill>
+          </a:ln>
+        </p:spPr>
+        <p:style>
+          <a:lnRef idx="1">
+            <a:schemeClr val="accent1"/>
+          </a:lnRef>
+          <a:fillRef idx="3">
+            <a:schemeClr val="accent1"/>
+          </a:fillRef>
+          <a:effectRef idx="2">
+            <a:schemeClr val="accent1"/>
+          </a:effectRef>
+          <a:fontRef idx="minor">
+            <a:schemeClr val="lt1"/>
+          </a:fontRef>
+        </p:style>
+        <p:txBody>
+          <a:bodyPr rtlCol="0" anchor="ctr"/>
+          <a:lstStyle/>
+          <a:p>
+            <a:pPr algn="ctr"/>
+          </a:p>
+        </p:txBody>
+      </p:sp>
+      <p:sp>
+        <p:nvSpPr>
+          <p:cNvPr id="19" name="Rounded Rectangle 18"/>
+          <p:cNvSpPr/>
+          <p:nvPr/>
+        </p:nvSpPr>
+        <p:spPr>
+          <a:xfrm>
+            <a:off x="548640" y="4297680"/>
+            <a:ext cx="11094415" cy="45720"/>
+          </a:xfrm>
+          <a:prstGeom prst="roundRect">
+            <a:avLst/>
+          </a:prstGeom>
+          <a:solidFill>
+            <a:srgbClr val="10B981"/>
+          </a:solidFill>
+          <a:ln>
+            <a:noFill/>
+          </a:ln>
+        </p:spPr>
+        <p:style>
+          <a:lnRef idx="1">
+            <a:schemeClr val="accent1"/>
+          </a:lnRef>
+          <a:fillRef idx="3">
+            <a:schemeClr val="accent1"/>
+          </a:fillRef>
+          <a:effectRef idx="2">
+            <a:schemeClr val="accent1"/>
+          </a:effectRef>
+          <a:fontRef idx="minor">
+            <a:schemeClr val="lt1"/>
+          </a:fontRef>
+        </p:style>
+        <p:txBody>
+          <a:bodyPr rtlCol="0" anchor="ctr"/>
+          <a:lstStyle/>
+          <a:p>
+            <a:pPr algn="ctr"/>
+          </a:p>
+        </p:txBody>
+      </p:sp>
+      <p:sp>
+        <p:nvSpPr>
+          <p:cNvPr id="20" name="TextBox 19"/>
+          <p:cNvSpPr txBox="1"/>
+          <p:nvPr/>
+        </p:nvSpPr>
+        <p:spPr>
+          <a:xfrm>
+            <a:off x="777240" y="4389120"/>
+            <a:ext cx="10607040" cy="1920240"/>
+          </a:xfrm>
+          <a:prstGeom prst="rect">
+            <a:avLst/>
+          </a:prstGeom>
+          <a:noFill/>
+        </p:spPr>
+        <p:txBody>
+          <a:bodyPr wrap="square">
+            <a:spAutoFit/>
+          </a:bodyPr>
+          <a:lstStyle/>
+          <a:p>
+            <a:pPr>
+              <a:defRPr sz="1050" b="1">
+                <a:solidFill>
+                  <a:srgbClr val="10B981"/>
+                </a:solidFill>
+              </a:defRPr>
+            </a:pPr>
+            <a:r>
+              <a:t>DYNAMIC 25-YEAR DISCOUNTED CASHFLOW (DCF) FORMULATION</a:t>
+            </a:r>
+          </a:p>
+        </p:txBody>
+      </p:sp>
+      <p:sp>
+        <p:nvSpPr>
+          <p:cNvPr id="21" name="Rounded Rectangle 20"/>
+          <p:cNvSpPr/>
+          <p:nvPr/>
+        </p:nvSpPr>
+        <p:spPr>
+          <a:xfrm>
+            <a:off x="777240" y="4709160"/>
+            <a:ext cx="10607040" cy="822960"/>
+          </a:xfrm>
+          <a:prstGeom prst="roundRect">
+            <a:avLst/>
+          </a:prstGeom>
+          <a:solidFill>
+            <a:srgbClr val="0B1120"/>
+          </a:solidFill>
+          <a:ln w="12700">
+            <a:solidFill>
+              <a:srgbClr val="1E3A5F"/>
+            </a:solidFill>
+          </a:ln>
+        </p:spPr>
+        <p:style>
+          <a:lnRef idx="1">
+            <a:schemeClr val="accent1"/>
+          </a:lnRef>
+          <a:fillRef idx="3">
+            <a:schemeClr val="accent1"/>
+          </a:fillRef>
+          <a:effectRef idx="2">
+            <a:schemeClr val="accent1"/>
+          </a:effectRef>
+          <a:fontRef idx="minor">
+            <a:schemeClr val="lt1"/>
+          </a:fontRef>
+        </p:style>
+        <p:txBody>
+          <a:bodyPr rtlCol="0" anchor="ctr"/>
+          <a:lstStyle/>
+          <a:p>
+            <a:pPr algn="ctr"/>
+          </a:p>
+        </p:txBody>
+      </p:sp>
+      <p:sp>
+        <p:nvSpPr>
+          <p:cNvPr id="22" name="Rounded Rectangle 21"/>
+          <p:cNvSpPr/>
+          <p:nvPr/>
+        </p:nvSpPr>
+        <p:spPr>
+          <a:xfrm>
+            <a:off x="777240" y="4709160"/>
+            <a:ext cx="45720" cy="822960"/>
           </a:xfrm>
           <a:prstGeom prst="roundRect">
             <a:avLst/>
@@ -10517,14 +11590,14 @@
       </p:sp>
       <p:sp>
         <p:nvSpPr>
-          <p:cNvPr id="14" name="TextBox 13"/>
+          <p:cNvPr id="23" name="TextBox 22"/>
           <p:cNvSpPr txBox="1"/>
           <p:nvPr/>
         </p:nvSpPr>
         <p:spPr>
           <a:xfrm>
-            <a:off x="4526280" y="2057400"/>
-            <a:ext cx="3108960" cy="3931920"/>
+            <a:off x="886968" y="4764024"/>
+            <a:ext cx="10387584" cy="713232"/>
           </a:xfrm>
           <a:prstGeom prst="rect">
             <a:avLst/>
@@ -10538,166 +11611,43 @@
           <a:lstStyle/>
           <a:p>
             <a:pPr>
-              <a:defRPr sz="2800" b="1">
-                <a:solidFill>
-                  <a:srgbClr val="38BDF8"/>
-                </a:solidFill>
-              </a:defRPr>
-            </a:pPr>
-            <a:r>
-              <a:t>Phase 2</a:t>
+              <a:defRPr sz="950" b="1">
+                <a:solidFill>
+                  <a:srgbClr val="E0F2FE"/>
+                </a:solidFill>
+              </a:defRPr>
+            </a:pPr>
+            <a:r>
+              <a:t>D_25 = sum_{y=1}^{25} [ (E_AC * (1 - 0.005)^{y-1} * T_comm * (1 + 0.025)^{y-1}) - (P_DC * $15 * (1 + 0.02)^{y-1}) ] - C_net</a:t>
             </a:r>
           </a:p>
           <a:p>
             <a:pPr>
               <a:spcBef>
-                <a:spcPts val="400"/>
+                <a:spcPts val="200"/>
               </a:spcBef>
-              <a:defRPr sz="1100" b="1">
-                <a:solidFill>
-                  <a:srgbClr val="F1F5F9"/>
-                </a:solidFill>
-              </a:defRPr>
-            </a:pPr>
-            <a:r>
-              <a:t>CALIFORNIA STATEWIDE</a:t>
-            </a:r>
-          </a:p>
-          <a:p>
-            <a:pPr>
-              <a:spcBef>
-                <a:spcPts val="400"/>
-              </a:spcBef>
-              <a:defRPr sz="950" b="1">
-                <a:solidFill>
-                  <a:srgbClr val="38BDF8"/>
-                </a:solidFill>
-              </a:defRPr>
-            </a:pPr>
-            <a:r>
-              <a:t>58 Counties &amp; 10,000 Campuses</a:t>
-            </a:r>
-          </a:p>
-          <a:p>
-            <a:pPr>
-              <a:spcBef>
-                <a:spcPts val="1200"/>
-              </a:spcBef>
-              <a:defRPr sz="1000">
-                <a:solidFill>
-                  <a:srgbClr val="94A3B8"/>
-                </a:solidFill>
-              </a:defRPr>
-            </a:pPr>
-            <a:r>
-              <a:t>Ingests full California Department of Education directory. Integrates CalEnviroScreen 4.0 equity scoring, Title 24 solar mandates, and SCE/SDG&amp;E/SMUD commercial utility rates.</a:t>
-            </a:r>
-            <a:br/>
-            <a:br/>
-            <a:r>
-              <a:t>Status: Architecture Specified</a:t>
-            </a:r>
-          </a:p>
-        </p:txBody>
-      </p:sp>
-      <p:sp>
-        <p:nvSpPr>
-          <p:cNvPr id="15" name="Rounded Rectangle 14"/>
-          <p:cNvSpPr/>
-          <p:nvPr/>
-        </p:nvSpPr>
-        <p:spPr>
-          <a:xfrm>
-            <a:off x="8138160" y="1920240"/>
-            <a:ext cx="3474720" cy="4297680"/>
-          </a:xfrm>
-          <a:prstGeom prst="roundRect">
-            <a:avLst/>
-          </a:prstGeom>
-          <a:solidFill>
-            <a:srgbClr val="161F30"/>
-          </a:solidFill>
-          <a:ln w="12700">
-            <a:solidFill>
-              <a:srgbClr val="26354F"/>
-            </a:solidFill>
-          </a:ln>
-        </p:spPr>
-        <p:style>
-          <a:lnRef idx="1">
-            <a:schemeClr val="accent1"/>
-          </a:lnRef>
-          <a:fillRef idx="3">
-            <a:schemeClr val="accent1"/>
-          </a:fillRef>
-          <a:effectRef idx="2">
-            <a:schemeClr val="accent1"/>
-          </a:effectRef>
-          <a:fontRef idx="minor">
-            <a:schemeClr val="lt1"/>
-          </a:fontRef>
-        </p:style>
-        <p:txBody>
-          <a:bodyPr rtlCol="0" anchor="ctr"/>
-          <a:lstStyle/>
-          <a:p>
-            <a:pPr algn="ctr"/>
-          </a:p>
-        </p:txBody>
-      </p:sp>
-      <p:sp>
-        <p:nvSpPr>
-          <p:cNvPr id="16" name="Rounded Rectangle 15"/>
-          <p:cNvSpPr/>
-          <p:nvPr/>
-        </p:nvSpPr>
-        <p:spPr>
-          <a:xfrm>
-            <a:off x="8138160" y="1920240"/>
-            <a:ext cx="3474720" cy="54864"/>
-          </a:xfrm>
-          <a:prstGeom prst="roundRect">
-            <a:avLst/>
-          </a:prstGeom>
-          <a:solidFill>
-            <a:srgbClr val="10B981"/>
-          </a:solidFill>
-          <a:ln>
-            <a:noFill/>
-          </a:ln>
-        </p:spPr>
-        <p:style>
-          <a:lnRef idx="1">
-            <a:schemeClr val="accent1"/>
-          </a:lnRef>
-          <a:fillRef idx="3">
-            <a:schemeClr val="accent1"/>
-          </a:fillRef>
-          <a:effectRef idx="2">
-            <a:schemeClr val="accent1"/>
-          </a:effectRef>
-          <a:fontRef idx="minor">
-            <a:schemeClr val="lt1"/>
-          </a:fontRef>
-        </p:style>
-        <p:txBody>
-          <a:bodyPr rtlCol="0" anchor="ctr"/>
-          <a:lstStyle/>
-          <a:p>
-            <a:pPr algn="ctr"/>
-          </a:p>
-        </p:txBody>
-      </p:sp>
-      <p:sp>
-        <p:nvSpPr>
-          <p:cNvPr id="17" name="TextBox 16"/>
+              <a:defRPr sz="800">
+                <a:solidFill>
+                  <a:srgbClr val="9CA3AF"/>
+                </a:solidFill>
+              </a:defRPr>
+            </a:pPr>
+            <a:r>
+              <a:t>Where y is year, module degradation is 0.5%/yr, tariff escalation is 2.5%/yr, and O&amp;M inflation is 2.0%/yr (with Year 15 inverter replacement reserve).</a:t>
+            </a:r>
+          </a:p>
+        </p:txBody>
+      </p:sp>
+      <p:sp>
+        <p:nvSpPr>
+          <p:cNvPr id="24" name="TextBox 23"/>
           <p:cNvSpPr txBox="1"/>
           <p:nvPr/>
         </p:nvSpPr>
         <p:spPr>
           <a:xfrm>
-            <a:off x="8321040" y="2057400"/>
-            <a:ext cx="3108960" cy="3931920"/>
+            <a:off x="777240" y="5623560"/>
+            <a:ext cx="10607040" cy="640080"/>
           </a:xfrm>
           <a:prstGeom prst="rect">
             <a:avLst/>
@@ -10711,64 +11661,14 @@
           <a:lstStyle/>
           <a:p>
             <a:pPr>
-              <a:defRPr sz="2800" b="1">
-                <a:solidFill>
-                  <a:srgbClr val="10B981"/>
-                </a:solidFill>
-              </a:defRPr>
-            </a:pPr>
-            <a:r>
-              <a:t>Phase 3</a:t>
-            </a:r>
-          </a:p>
-          <a:p>
-            <a:pPr>
-              <a:spcBef>
-                <a:spcPts val="400"/>
-              </a:spcBef>
-              <a:defRPr sz="1100" b="1">
-                <a:solidFill>
-                  <a:srgbClr val="F1F5F9"/>
-                </a:solidFill>
-              </a:defRPr>
-            </a:pPr>
-            <a:r>
-              <a:t>NATIONWIDE USA</a:t>
-            </a:r>
-          </a:p>
-          <a:p>
-            <a:pPr>
-              <a:spcBef>
-                <a:spcPts val="400"/>
-              </a:spcBef>
-              <a:defRPr sz="950" b="1">
-                <a:solidFill>
-                  <a:srgbClr val="38BDF8"/>
-                </a:solidFill>
-              </a:defRPr>
-            </a:pPr>
-            <a:r>
-              <a:t>50 States &amp; 100,000+ Campuses</a:t>
-            </a:r>
-          </a:p>
-          <a:p>
-            <a:pPr>
-              <a:spcBef>
-                <a:spcPts val="1200"/>
-              </a:spcBef>
-              <a:defRPr sz="1000">
-                <a:solidFill>
-                  <a:srgbClr val="94A3B8"/>
-                </a:solidFill>
-              </a:defRPr>
-            </a:pPr>
-            <a:r>
-              <a:t>Scales via National Center for Education Statistics (NCES) database, state-by-state EIA commercial electricity rates, and EPA eGRID regional carbon intensity factors.</a:t>
-            </a:r>
-            <a:br/>
-            <a:br/>
-            <a:r>
-              <a:t>Status: National Vision</a:t>
+              <a:defRPr sz="1000" b="1">
+                <a:solidFill>
+                  <a:srgbClr val="F3F4F6"/>
+                </a:solidFill>
+              </a:defRPr>
+            </a:pPr>
+            <a:r>
+              <a:t>Monta Vista High 25-Yr Net Operating Dividend: $14,692,450   |   Palo Alto High 25-Yr Net Operating Dividend: $11,139,946</a:t>
             </a:r>
           </a:p>
         </p:txBody>
@@ -10806,7 +11706,7 @@
             <a:avLst/>
           </a:prstGeom>
           <a:solidFill>
-            <a:srgbClr val="0B0F19"/>
+            <a:srgbClr val="090D16"/>
           </a:solidFill>
           <a:ln>
             <a:noFill/>
@@ -10938,7 +11838,7 @@
         <p:spPr>
           <a:xfrm>
             <a:off x="2606040" y="73152"/>
-            <a:ext cx="5486400" cy="365760"/>
+            <a:ext cx="5943600" cy="365760"/>
           </a:xfrm>
           <a:prstGeom prst="rect">
             <a:avLst/>
@@ -10952,14 +11852,14 @@
           <a:lstStyle/>
           <a:p>
             <a:pPr>
-              <a:defRPr sz="1000">
-                <a:solidFill>
-                  <a:srgbClr val="94A3B8"/>
-                </a:solidFill>
-              </a:defRPr>
-            </a:pPr>
-            <a:r>
-              <a:t>SVYCA Youth For Earth Hackathon | SolarSchools USA</a:t>
+              <a:defRPr sz="950">
+                <a:solidFill>
+                  <a:srgbClr val="9CA3AF"/>
+                </a:solidFill>
+              </a:defRPr>
+            </a:pPr>
+            <a:r>
+              <a:t>SVYCA Youth For Earth Hackathon | Systems Architecture &amp; Climate Finance</a:t>
             </a:r>
           </a:p>
         </p:txBody>
@@ -10987,7 +11887,7 @@
           <a:lstStyle/>
           <a:p>
             <a:pPr algn="r">
-              <a:defRPr sz="1050" b="1">
+              <a:defRPr sz="1000" b="1">
                 <a:solidFill>
                   <a:srgbClr val="38BDF8"/>
                 </a:solidFill>
@@ -11050,8 +11950,8 @@
         </p:nvSpPr>
         <p:spPr>
           <a:xfrm>
-            <a:off x="548640" y="658368"/>
-            <a:ext cx="11091672" cy="1097280"/>
+            <a:off x="548640" y="621792"/>
+            <a:ext cx="11091672" cy="1005840"/>
           </a:xfrm>
           <a:prstGeom prst="rect">
             <a:avLst/>
@@ -11065,14 +11965,14 @@
           <a:lstStyle/>
           <a:p>
             <a:pPr>
-              <a:defRPr sz="950" b="1">
+              <a:defRPr sz="900" b="1">
                 <a:solidFill>
                   <a:srgbClr val="38BDF8"/>
                 </a:solidFill>
               </a:defRPr>
             </a:pPr>
             <a:r>
-              <a:t>CIVIC IMPACT</a:t>
+              <a:t>ENGINEERING SPECIFICATIONS</a:t>
             </a:r>
           </a:p>
           <a:p>
@@ -11080,29 +11980,29 @@
               <a:spcBef>
                 <a:spcPts val="200"/>
               </a:spcBef>
-              <a:defRPr sz="2200" b="1">
-                <a:solidFill>
-                  <a:srgbClr val="F1F5F9"/>
-                </a:solidFill>
-              </a:defRPr>
-            </a:pPr>
-            <a:r>
-              <a:t>The Civic Climax: School Board Action Brief</a:t>
+              <a:defRPr sz="2100" b="1">
+                <a:solidFill>
+                  <a:srgbClr val="F3F4F6"/>
+                </a:solidFill>
+              </a:defRPr>
+            </a:pPr>
+            <a:r>
+              <a:t>Structural Steel &amp; Electrical Interconnection</a:t>
             </a:r>
           </a:p>
           <a:p>
             <a:pPr>
               <a:spcBef>
-                <a:spcPts val="400"/>
+                <a:spcPts val="300"/>
               </a:spcBef>
-              <a:defRPr sz="1150">
-                <a:solidFill>
-                  <a:srgbClr val="94A3B8"/>
-                </a:solidFill>
-              </a:defRPr>
-            </a:pPr>
-            <a:r>
-              <a:t>Bridging the gap between engineering simulation and real-world school board votes.</a:t>
+              <a:defRPr sz="1100">
+                <a:solidFill>
+                  <a:srgbClr val="9CA3AF"/>
+                </a:solidFill>
+              </a:defRPr>
+            </a:pPr>
+            <a:r>
+              <a:t>Engineered to comply with ASCE 7-16 structural codes, California Title 24, and IEEE 1547-2018 standards.</a:t>
             </a:r>
           </a:p>
         </p:txBody>
@@ -11115,18 +12015,18 @@
         </p:nvSpPr>
         <p:spPr>
           <a:xfrm>
-            <a:off x="548640" y="1920240"/>
-            <a:ext cx="5394960" cy="4297680"/>
+            <a:off x="548640" y="1737360"/>
+            <a:ext cx="5394960" cy="4663440"/>
           </a:xfrm>
           <a:prstGeom prst="roundRect">
             <a:avLst/>
           </a:prstGeom>
           <a:solidFill>
-            <a:srgbClr val="161F30"/>
+            <a:srgbClr val="111827"/>
           </a:solidFill>
           <a:ln w="12700">
             <a:solidFill>
-              <a:srgbClr val="26354F"/>
+              <a:srgbClr val="1F293D"/>
             </a:solidFill>
           </a:ln>
         </p:spPr>
@@ -11160,8 +12060,8 @@
         </p:nvSpPr>
         <p:spPr>
           <a:xfrm>
-            <a:off x="548640" y="1920240"/>
-            <a:ext cx="5394960" cy="54864"/>
+            <a:off x="548640" y="1737360"/>
+            <a:ext cx="5394960" cy="45720"/>
           </a:xfrm>
           <a:prstGeom prst="roundRect">
             <a:avLst/>
@@ -11203,8 +12103,8 @@
         </p:nvSpPr>
         <p:spPr>
           <a:xfrm>
-            <a:off x="777240" y="2057400"/>
-            <a:ext cx="4937760" cy="4023360"/>
+            <a:off x="777240" y="1874519"/>
+            <a:ext cx="4937760" cy="4389120"/>
           </a:xfrm>
           <a:prstGeom prst="rect">
             <a:avLst/>
@@ -11218,104 +12118,149 @@
           <a:lstStyle/>
           <a:p>
             <a:pPr>
-              <a:defRPr sz="1200" b="1">
-                <a:solidFill>
-                  <a:srgbClr val="F1F5F9"/>
-                </a:solidFill>
-              </a:defRPr>
-            </a:pPr>
-            <a:r>
-              <a:t>1-CLICK SCHOOL BOARD READY PROPOSAL</a:t>
+              <a:defRPr sz="1100" b="1">
+                <a:solidFill>
+                  <a:srgbClr val="38BDF8"/>
+                </a:solidFill>
+              </a:defRPr>
+            </a:pPr>
+            <a:r>
+              <a:t>STRUCTURAL CIVIL ENGINEERING SPECIFICATIONS</a:t>
             </a:r>
           </a:p>
           <a:p>
             <a:pPr>
               <a:spcBef>
-                <a:spcPts val="800"/>
+                <a:spcPts val="600"/>
               </a:spcBef>
-              <a:defRPr sz="1000">
-                <a:solidFill>
-                  <a:srgbClr val="94A3B8"/>
-                </a:solidFill>
-              </a:defRPr>
-            </a:pPr>
-            <a:r>
-              <a:t>1. Executive Summary: System kW DC capacity, canopy area (m²), shaded stalls.</a:t>
+              <a:defRPr sz="900" b="1">
+                <a:solidFill>
+                  <a:srgbClr val="F3F4F6"/>
+                </a:solidFill>
+              </a:defRPr>
+            </a:pPr>
+            <a:r>
+              <a:t>Superstructure Steel:</a:t>
+            </a:r>
+          </a:p>
+          <a:p>
+            <a:pPr>
+              <a:defRPr sz="850">
+                <a:solidFill>
+                  <a:srgbClr val="9CA3AF"/>
+                </a:solidFill>
+              </a:defRPr>
+            </a:pPr>
+            <a:r>
+              <a:t>ASTM A992 structural wide-flange columns and cold-formed C-channel purlins with hot-dip galvanized coating (ASTM A123).</a:t>
             </a:r>
           </a:p>
           <a:p>
             <a:pPr>
               <a:spcBef>
-                <a:spcPts val="800"/>
+                <a:spcPts val="600"/>
               </a:spcBef>
-              <a:defRPr sz="1000">
-                <a:solidFill>
-                  <a:srgbClr val="94A3B8"/>
-                </a:solidFill>
-              </a:defRPr>
-            </a:pPr>
-            <a:r>
-              <a:t>2. Financial Waterfall: Turnkey capex, IRS Direct Pay check, simple payback (years).</a:t>
+              <a:defRPr sz="900" b="1">
+                <a:solidFill>
+                  <a:srgbClr val="F3F4F6"/>
+                </a:solidFill>
+              </a:defRPr>
+            </a:pPr>
+            <a:r>
+              <a:t>Foundation System:</a:t>
+            </a:r>
+          </a:p>
+          <a:p>
+            <a:pPr>
+              <a:defRPr sz="850">
+                <a:solidFill>
+                  <a:srgbClr val="9CA3AF"/>
+                </a:solidFill>
+              </a:defRPr>
+            </a:pPr>
+            <a:r>
+              <a:t>Cast-in-drilled-hole (CIDH) reinforced concrete cylindrical piers (30–36 in diameter, 8–12 ft depth) resisting lateral soil overturning.</a:t>
             </a:r>
           </a:p>
           <a:p>
             <a:pPr>
               <a:spcBef>
-                <a:spcPts val="800"/>
+                <a:spcPts val="600"/>
               </a:spcBef>
-              <a:defRPr sz="1000">
-                <a:solidFill>
-                  <a:srgbClr val="94A3B8"/>
-                </a:solidFill>
-              </a:defRPr>
-            </a:pPr>
-            <a:r>
-              <a:t>3. Inaction Cost: Quantified 5-year financial penalty if the district delays action.</a:t>
+              <a:defRPr sz="900" b="1">
+                <a:solidFill>
+                  <a:srgbClr val="F3F4F6"/>
+                </a:solidFill>
+              </a:defRPr>
+            </a:pPr>
+            <a:r>
+              <a:t>Vertical Clearance:</a:t>
+            </a:r>
+          </a:p>
+          <a:p>
+            <a:pPr>
+              <a:defRPr sz="850">
+                <a:solidFill>
+                  <a:srgbClr val="9CA3AF"/>
+                </a:solidFill>
+              </a:defRPr>
+            </a:pPr>
+            <a:r>
+              <a:t>14.0 ft minimum vertical clearance under lowest purlin to permit school bus and emergency apparatus transit (CA Fire Code Title 24 § 503).</a:t>
             </a:r>
           </a:p>
           <a:p>
             <a:pPr>
               <a:spcBef>
-                <a:spcPts val="800"/>
+                <a:spcPts val="600"/>
               </a:spcBef>
-              <a:defRPr sz="1000">
-                <a:solidFill>
-                  <a:srgbClr val="94A3B8"/>
-                </a:solidFill>
-              </a:defRPr>
-            </a:pPr>
-            <a:r>
-              <a:t>4. IRS Compliance Guide: Step-by-step instructions for electronic Pre-Filing and Form 990-T.</a:t>
+              <a:defRPr sz="900" b="1">
+                <a:solidFill>
+                  <a:srgbClr val="F3F4F6"/>
+                </a:solidFill>
+              </a:defRPr>
+            </a:pPr>
+            <a:r>
+              <a:t>Wind &amp; Seismic Rating:</a:t>
+            </a:r>
+          </a:p>
+          <a:p>
+            <a:pPr>
+              <a:defRPr sz="850">
+                <a:solidFill>
+                  <a:srgbClr val="9CA3AF"/>
+                </a:solidFill>
+              </a:defRPr>
+            </a:pPr>
+            <a:r>
+              <a:t>ASCE 7-16 structural engineering compliance rated for 110 mph basic wind speed and CBC Seismic Design Category D.</a:t>
             </a:r>
           </a:p>
           <a:p>
             <a:pPr>
               <a:spcBef>
-                <a:spcPts val="800"/>
+                <a:spcPts val="600"/>
               </a:spcBef>
-              <a:defRPr sz="1000">
-                <a:solidFill>
-                  <a:srgbClr val="94A3B8"/>
-                </a:solidFill>
-              </a:defRPr>
-            </a:pPr>
-            <a:r>
-              <a:t>5. Template Board Resolution: Exact legal language ready for trustees to sponsor.</a:t>
-            </a:r>
-          </a:p>
-          <a:p>
-            <a:pPr>
-              <a:spcBef>
-                <a:spcPts val="1200"/>
-              </a:spcBef>
-              <a:defRPr sz="950" b="1">
-                <a:solidFill>
-                  <a:srgbClr val="38BDF8"/>
-                </a:solidFill>
-              </a:defRPr>
-            </a:pPr>
-            <a:r>
-              <a:t>Empowers high school environmental clubs and PTAs to walk into board meetings with complete institutional proposals.</a:t>
+              <a:defRPr sz="900" b="1">
+                <a:solidFill>
+                  <a:srgbClr val="F3F4F6"/>
+                </a:solidFill>
+              </a:defRPr>
+            </a:pPr>
+            <a:r>
+              <a:t>Stormwater Drainage:</a:t>
+            </a:r>
+          </a:p>
+          <a:p>
+            <a:pPr>
+              <a:defRPr sz="850">
+                <a:solidFill>
+                  <a:srgbClr val="9CA3AF"/>
+                </a:solidFill>
+              </a:defRPr>
+            </a:pPr>
+            <a:r>
+              <a:t>Integrated gutter collectors and internal column downspouts preventing sheet flow across walking aisles.</a:t>
             </a:r>
           </a:p>
         </p:txBody>
@@ -11328,18 +12273,18 @@
         </p:nvSpPr>
         <p:spPr>
           <a:xfrm>
-            <a:off x="6217920" y="1920240"/>
-            <a:ext cx="5425135" cy="4297680"/>
+            <a:off x="6217920" y="1737360"/>
+            <a:ext cx="5394960" cy="4663440"/>
           </a:xfrm>
           <a:prstGeom prst="roundRect">
             <a:avLst/>
           </a:prstGeom>
           <a:solidFill>
-            <a:srgbClr val="161F30"/>
+            <a:srgbClr val="111827"/>
           </a:solidFill>
           <a:ln w="12700">
             <a:solidFill>
-              <a:srgbClr val="26354F"/>
+              <a:srgbClr val="1F293D"/>
             </a:solidFill>
           </a:ln>
         </p:spPr>
@@ -11373,14 +12318,14 @@
         </p:nvSpPr>
         <p:spPr>
           <a:xfrm>
-            <a:off x="6217920" y="1920240"/>
-            <a:ext cx="5425135" cy="54864"/>
+            <a:off x="6217920" y="1737360"/>
+            <a:ext cx="5394960" cy="45720"/>
           </a:xfrm>
           <a:prstGeom prst="roundRect">
             <a:avLst/>
           </a:prstGeom>
           <a:solidFill>
-            <a:srgbClr val="10B981"/>
+            <a:srgbClr val="38BDF8"/>
           </a:solidFill>
           <a:ln>
             <a:noFill/>
@@ -11416,8 +12361,8 @@
         </p:nvSpPr>
         <p:spPr>
           <a:xfrm>
-            <a:off x="6446520" y="2057400"/>
-            <a:ext cx="4937760" cy="4023360"/>
+            <a:off x="6446520" y="1874519"/>
+            <a:ext cx="4937760" cy="4389120"/>
           </a:xfrm>
           <a:prstGeom prst="rect">
             <a:avLst/>
@@ -11431,44 +12376,149 @@
           <a:lstStyle/>
           <a:p>
             <a:pPr>
-              <a:defRPr sz="1200" b="1">
-                <a:solidFill>
-                  <a:srgbClr val="10B981"/>
-                </a:solidFill>
-              </a:defRPr>
-            </a:pPr>
-            <a:r>
-              <a:t>SAMPLE RESOLUTION LANGUAGE GENERATED</a:t>
+              <a:defRPr sz="1100" b="1">
+                <a:solidFill>
+                  <a:srgbClr val="38BDF8"/>
+                </a:solidFill>
+              </a:defRPr>
+            </a:pPr>
+            <a:r>
+              <a:t>ELECTRICAL &amp; GRID INTERCONNECTION SPECIFICATIONS</a:t>
             </a:r>
           </a:p>
           <a:p>
             <a:pPr>
               <a:spcBef>
-                <a:spcPts val="1000"/>
+                <a:spcPts val="600"/>
               </a:spcBef>
-              <a:defRPr sz="950">
-                <a:solidFill>
-                  <a:srgbClr val="CBD5E1"/>
-                </a:solidFill>
-              </a:defRPr>
-            </a:pPr>
-            <a:r>
-              <a:t>RESOLUTION NO. 2026-SOLAR</a:t>
-            </a:r>
-            <a:br/>
-            <a:br/>
-            <a:r>
-              <a:t>WHEREAS, the School District expends significant operating funds annually on retail electric utility tariffs; and</a:t>
-            </a:r>
-            <a:br/>
-            <a:br/>
-            <a:r>
-              <a:t>WHEREAS, Section 6417 of the Internal Revenue Code provides direct cash payments from the U.S. Treasury covering up to 40% of clean energy canopy installations; and</a:t>
-            </a:r>
-            <a:br/>
-            <a:br/>
-            <a:r>
-              <a:t>NOW, THEREFORE, BE IT RESOLVED that the Board directs the Superintendent to initiate an RFP for parking lot solar carports to capture available federal Direct Pay funds and protect operating budgets.</a:t>
+              <a:defRPr sz="900" b="1">
+                <a:solidFill>
+                  <a:srgbClr val="F3F4F6"/>
+                </a:solidFill>
+              </a:defRPr>
+            </a:pPr>
+            <a:r>
+              <a:t>Interconnection Voltage:</a:t>
+            </a:r>
+          </a:p>
+          <a:p>
+            <a:pPr>
+              <a:defRPr sz="850">
+                <a:solidFill>
+                  <a:srgbClr val="9CA3AF"/>
+                </a:solidFill>
+              </a:defRPr>
+            </a:pPr>
+            <a:r>
+              <a:t>480V / 277V, 3-Phase, 4-Wire Wye utility distribution interconnection at campus main switchgear (MSB).</a:t>
+            </a:r>
+          </a:p>
+          <a:p>
+            <a:pPr>
+              <a:spcBef>
+                <a:spcPts val="600"/>
+              </a:spcBef>
+              <a:defRPr sz="900" b="1">
+                <a:solidFill>
+                  <a:srgbClr val="F3F4F6"/>
+                </a:solidFill>
+              </a:defRPr>
+            </a:pPr>
+            <a:r>
+              <a:t>Smart Inverter Standards:</a:t>
+            </a:r>
+          </a:p>
+          <a:p>
+            <a:pPr>
+              <a:defRPr sz="850">
+                <a:solidFill>
+                  <a:srgbClr val="9CA3AF"/>
+                </a:solidFill>
+              </a:defRPr>
+            </a:pPr>
+            <a:r>
+              <a:t>IEEE 1547-2018 and California Rule 21 compliant with advanced Volt-VAR and Volt-Watt dynamic grid stabilization functions.</a:t>
+            </a:r>
+          </a:p>
+          <a:p>
+            <a:pPr>
+              <a:spcBef>
+                <a:spcPts val="600"/>
+              </a:spcBef>
+              <a:defRPr sz="900" b="1">
+                <a:solidFill>
+                  <a:srgbClr val="F3F4F6"/>
+                </a:solidFill>
+              </a:defRPr>
+            </a:pPr>
+            <a:r>
+              <a:t>Underground Feeders:</a:t>
+            </a:r>
+          </a:p>
+          <a:p>
+            <a:pPr>
+              <a:defRPr sz="850">
+                <a:solidFill>
+                  <a:srgbClr val="9CA3AF"/>
+                </a:solidFill>
+              </a:defRPr>
+            </a:pPr>
+            <a:r>
+              <a:t>Schedule 40 PVC electrical conduit encased in concrete duct bank with 24-inch minimum burial depth under asphalt.</a:t>
+            </a:r>
+          </a:p>
+          <a:p>
+            <a:pPr>
+              <a:spcBef>
+                <a:spcPts val="600"/>
+              </a:spcBef>
+              <a:defRPr sz="900" b="1">
+                <a:solidFill>
+                  <a:srgbClr val="F3F4F6"/>
+                </a:solidFill>
+              </a:defRPr>
+            </a:pPr>
+            <a:r>
+              <a:t>Fleet Electrification Ready:</a:t>
+            </a:r>
+          </a:p>
+          <a:p>
+            <a:pPr>
+              <a:defRPr sz="850">
+                <a:solidFill>
+                  <a:srgbClr val="9CA3AF"/>
+                </a:solidFill>
+              </a:defRPr>
+            </a:pPr>
+            <a:r>
+              <a:t>Dedicated 200A 480V distribution subpanel feeding integrated Level 2 EV charging pedestals for staff and overnight fleet charging.</a:t>
+            </a:r>
+          </a:p>
+          <a:p>
+            <a:pPr>
+              <a:spcBef>
+                <a:spcPts val="600"/>
+              </a:spcBef>
+              <a:defRPr sz="900" b="1">
+                <a:solidFill>
+                  <a:srgbClr val="F3F4F6"/>
+                </a:solidFill>
+              </a:defRPr>
+            </a:pPr>
+            <a:r>
+              <a:t>Telemetry &amp; Monitoring:</a:t>
+            </a:r>
+          </a:p>
+          <a:p>
+            <a:pPr>
+              <a:defRPr sz="850">
+                <a:solidFill>
+                  <a:srgbClr val="9CA3AF"/>
+                </a:solidFill>
+              </a:defRPr>
+            </a:pPr>
+            <a:r>
+              <a:t>Revenue-grade bidirectional utility interval meter with cellular telemetry transmitting generation data to student science dashboards.</a:t>
             </a:r>
           </a:p>
         </p:txBody>
@@ -11506,7 +12556,7 @@
             <a:avLst/>
           </a:prstGeom>
           <a:solidFill>
-            <a:srgbClr val="0B0F19"/>
+            <a:srgbClr val="090D16"/>
           </a:solidFill>
           <a:ln>
             <a:noFill/>
@@ -11638,7 +12688,7 @@
         <p:spPr>
           <a:xfrm>
             <a:off x="2606040" y="73152"/>
-            <a:ext cx="5486400" cy="365760"/>
+            <a:ext cx="5943600" cy="365760"/>
           </a:xfrm>
           <a:prstGeom prst="rect">
             <a:avLst/>
@@ -11652,14 +12702,14 @@
           <a:lstStyle/>
           <a:p>
             <a:pPr>
-              <a:defRPr sz="1000">
-                <a:solidFill>
-                  <a:srgbClr val="94A3B8"/>
-                </a:solidFill>
-              </a:defRPr>
-            </a:pPr>
-            <a:r>
-              <a:t>SVYCA Youth For Earth Hackathon | SolarSchools USA</a:t>
+              <a:defRPr sz="950">
+                <a:solidFill>
+                  <a:srgbClr val="9CA3AF"/>
+                </a:solidFill>
+              </a:defRPr>
+            </a:pPr>
+            <a:r>
+              <a:t>SVYCA Youth For Earth Hackathon | Systems Architecture &amp; Climate Finance</a:t>
             </a:r>
           </a:p>
         </p:txBody>
@@ -11687,7 +12737,7 @@
           <a:lstStyle/>
           <a:p>
             <a:pPr algn="r">
-              <a:defRPr sz="1050" b="1">
+              <a:defRPr sz="1000" b="1">
                 <a:solidFill>
                   <a:srgbClr val="38BDF8"/>
                 </a:solidFill>
@@ -11750,8 +12800,8 @@
         </p:nvSpPr>
         <p:spPr>
           <a:xfrm>
-            <a:off x="548640" y="658368"/>
-            <a:ext cx="11091672" cy="1097280"/>
+            <a:off x="548640" y="621792"/>
+            <a:ext cx="11091672" cy="1005840"/>
           </a:xfrm>
           <a:prstGeom prst="rect">
             <a:avLst/>
@@ -11765,14 +12815,14 @@
           <a:lstStyle/>
           <a:p>
             <a:pPr>
-              <a:defRPr sz="950" b="1">
+              <a:defRPr sz="900" b="1">
                 <a:solidFill>
                   <a:srgbClr val="38BDF8"/>
                 </a:solidFill>
               </a:defRPr>
             </a:pPr>
             <a:r>
-              <a:t>BEYOND CLEAN POWER</a:t>
+              <a:t>GEOSPATIAL EXPANSION &amp; ENVIRONMENTAL JUSTICE</a:t>
             </a:r>
           </a:p>
           <a:p>
@@ -11780,29 +12830,29 @@
               <a:spcBef>
                 <a:spcPts val="200"/>
               </a:spcBef>
-              <a:defRPr sz="2200" b="1">
-                <a:solidFill>
-                  <a:srgbClr val="F1F5F9"/>
-                </a:solidFill>
-              </a:defRPr>
-            </a:pPr>
-            <a:r>
-              <a:t>Multi-Dimensional Campus Co-Benefits</a:t>
+              <a:defRPr sz="2100" b="1">
+                <a:solidFill>
+                  <a:srgbClr val="F3F4F6"/>
+                </a:solidFill>
+              </a:defRPr>
+            </a:pPr>
+            <a:r>
+              <a:t>3-Phase Scalability &amp; Environmental Justice</a:t>
             </a:r>
           </a:p>
           <a:p>
             <a:pPr>
               <a:spcBef>
-                <a:spcPts val="400"/>
+                <a:spcPts val="300"/>
               </a:spcBef>
-              <a:defRPr sz="1150">
-                <a:solidFill>
-                  <a:srgbClr val="94A3B8"/>
-                </a:solidFill>
-              </a:defRPr>
-            </a:pPr>
-            <a:r>
-              <a:t>Parking lot canopies solve multiple operational and educational challenges simultaneously.</a:t>
+              <a:defRPr sz="1100">
+                <a:solidFill>
+                  <a:srgbClr val="9CA3AF"/>
+                </a:solidFill>
+              </a:defRPr>
+            </a:pPr>
+            <a:r>
+              <a:t>Structured data architecture scaling from local Silicon Valley calibration to all 100,000+ US public campuses.</a:t>
             </a:r>
           </a:p>
         </p:txBody>
@@ -11815,18 +12865,18 @@
         </p:nvSpPr>
         <p:spPr>
           <a:xfrm>
-            <a:off x="548640" y="1920240"/>
+            <a:off x="548640" y="1737360"/>
             <a:ext cx="3474720" cy="3291840"/>
           </a:xfrm>
           <a:prstGeom prst="roundRect">
             <a:avLst/>
           </a:prstGeom>
           <a:solidFill>
-            <a:srgbClr val="161F30"/>
+            <a:srgbClr val="111827"/>
           </a:solidFill>
           <a:ln w="12700">
             <a:solidFill>
-              <a:srgbClr val="26354F"/>
+              <a:srgbClr val="1F293D"/>
             </a:solidFill>
           </a:ln>
         </p:spPr>
@@ -11860,8 +12910,8 @@
         </p:nvSpPr>
         <p:spPr>
           <a:xfrm>
-            <a:off x="548640" y="1920240"/>
-            <a:ext cx="3474720" cy="54864"/>
+            <a:off x="548640" y="1737360"/>
+            <a:ext cx="3474720" cy="45720"/>
           </a:xfrm>
           <a:prstGeom prst="roundRect">
             <a:avLst/>
@@ -11903,7 +12953,7 @@
         </p:nvSpPr>
         <p:spPr>
           <a:xfrm>
-            <a:off x="731520" y="2057400"/>
+            <a:off x="731520" y="1874519"/>
             <a:ext cx="3108960" cy="3017520"/>
           </a:xfrm>
           <a:prstGeom prst="rect">
@@ -11918,44 +12968,64 @@
           <a:lstStyle/>
           <a:p>
             <a:pPr>
-              <a:defRPr sz="3200" b="1">
+              <a:defRPr sz="2600" b="1">
                 <a:solidFill>
                   <a:srgbClr val="38BDF8"/>
                 </a:solidFill>
               </a:defRPr>
             </a:pPr>
             <a:r>
-              <a:t>-30°F</a:t>
+              <a:t>Phase 1</a:t>
             </a:r>
           </a:p>
           <a:p>
             <a:pPr>
               <a:spcBef>
-                <a:spcPts val="400"/>
+                <a:spcPts val="300"/>
               </a:spcBef>
-              <a:defRPr sz="850" b="1">
-                <a:solidFill>
-                  <a:srgbClr val="64748B"/>
-                </a:solidFill>
-              </a:defRPr>
-            </a:pPr>
-            <a:r>
-              <a:t>SURFACE MICROCLIMATE COOLING</a:t>
+              <a:defRPr sz="1050" b="1">
+                <a:solidFill>
+                  <a:srgbClr val="F3F4F6"/>
+                </a:solidFill>
+              </a:defRPr>
+            </a:pPr>
+            <a:r>
+              <a:t>SAN FRANCISCO BAY AREA</a:t>
             </a:r>
           </a:p>
           <a:p>
             <a:pPr>
               <a:spcBef>
-                <a:spcPts val="1000"/>
+                <a:spcPts val="300"/>
               </a:spcBef>
-              <a:defRPr sz="1000">
-                <a:solidFill>
-                  <a:srgbClr val="94A3B8"/>
-                </a:solidFill>
-              </a:defRPr>
-            </a:pPr>
-            <a:r>
-              <a:t>Canopies intercept direct solar radiation, lowering asphalt surface temperatures from 145°F down to ambient shade, drastically reducing the campus urban heat island effect.</a:t>
+              <a:defRPr sz="900" b="1">
+                <a:solidFill>
+                  <a:srgbClr val="38BDF8"/>
+                </a:solidFill>
+              </a:defRPr>
+            </a:pPr>
+            <a:r>
+              <a:t>9 Counties &amp; 18 Campuses</a:t>
+            </a:r>
+          </a:p>
+          <a:p>
+            <a:pPr>
+              <a:spcBef>
+                <a:spcPts val="800"/>
+              </a:spcBef>
+              <a:defRPr sz="900">
+                <a:solidFill>
+                  <a:srgbClr val="9CA3AF"/>
+                </a:solidFill>
+              </a:defRPr>
+            </a:pPr>
+            <a:r>
+              <a:t>Calibrated against active arrays in Cupertino Union (5.2 MW) and Fremont Union High School District under PG&amp;E Schedule B-19.</a:t>
+            </a:r>
+            <a:br/>
+            <a:br/>
+            <a:r>
+              <a:t>Status: Verified &amp; Ground-Truthed</a:t>
             </a:r>
           </a:p>
         </p:txBody>
@@ -11968,18 +13038,18 @@
         </p:nvSpPr>
         <p:spPr>
           <a:xfrm>
-            <a:off x="4343400" y="1920240"/>
+            <a:off x="4343400" y="1737360"/>
             <a:ext cx="3474720" cy="3291840"/>
           </a:xfrm>
           <a:prstGeom prst="roundRect">
             <a:avLst/>
           </a:prstGeom>
           <a:solidFill>
-            <a:srgbClr val="161F30"/>
+            <a:srgbClr val="111827"/>
           </a:solidFill>
           <a:ln w="12700">
             <a:solidFill>
-              <a:srgbClr val="26354F"/>
+              <a:srgbClr val="1F293D"/>
             </a:solidFill>
           </a:ln>
         </p:spPr>
@@ -12013,8 +13083,181 @@
         </p:nvSpPr>
         <p:spPr>
           <a:xfrm>
-            <a:off x="4343400" y="1920240"/>
-            <a:ext cx="3474720" cy="54864"/>
+            <a:off x="4343400" y="1737360"/>
+            <a:ext cx="3474720" cy="45720"/>
+          </a:xfrm>
+          <a:prstGeom prst="roundRect">
+            <a:avLst/>
+          </a:prstGeom>
+          <a:solidFill>
+            <a:srgbClr val="38BDF8"/>
+          </a:solidFill>
+          <a:ln>
+            <a:noFill/>
+          </a:ln>
+        </p:spPr>
+        <p:style>
+          <a:lnRef idx="1">
+            <a:schemeClr val="accent1"/>
+          </a:lnRef>
+          <a:fillRef idx="3">
+            <a:schemeClr val="accent1"/>
+          </a:fillRef>
+          <a:effectRef idx="2">
+            <a:schemeClr val="accent1"/>
+          </a:effectRef>
+          <a:fontRef idx="minor">
+            <a:schemeClr val="lt1"/>
+          </a:fontRef>
+        </p:style>
+        <p:txBody>
+          <a:bodyPr rtlCol="0" anchor="ctr"/>
+          <a:lstStyle/>
+          <a:p>
+            <a:pPr algn="ctr"/>
+          </a:p>
+        </p:txBody>
+      </p:sp>
+      <p:sp>
+        <p:nvSpPr>
+          <p:cNvPr id="14" name="TextBox 13"/>
+          <p:cNvSpPr txBox="1"/>
+          <p:nvPr/>
+        </p:nvSpPr>
+        <p:spPr>
+          <a:xfrm>
+            <a:off x="4526280" y="1874519"/>
+            <a:ext cx="3108960" cy="3017520"/>
+          </a:xfrm>
+          <a:prstGeom prst="rect">
+            <a:avLst/>
+          </a:prstGeom>
+          <a:noFill/>
+        </p:spPr>
+        <p:txBody>
+          <a:bodyPr wrap="square">
+            <a:spAutoFit/>
+          </a:bodyPr>
+          <a:lstStyle/>
+          <a:p>
+            <a:pPr>
+              <a:defRPr sz="2600" b="1">
+                <a:solidFill>
+                  <a:srgbClr val="38BDF8"/>
+                </a:solidFill>
+              </a:defRPr>
+            </a:pPr>
+            <a:r>
+              <a:t>Phase 2</a:t>
+            </a:r>
+          </a:p>
+          <a:p>
+            <a:pPr>
+              <a:spcBef>
+                <a:spcPts val="300"/>
+              </a:spcBef>
+              <a:defRPr sz="1050" b="1">
+                <a:solidFill>
+                  <a:srgbClr val="F3F4F6"/>
+                </a:solidFill>
+              </a:defRPr>
+            </a:pPr>
+            <a:r>
+              <a:t>CALIFORNIA STATEWIDE</a:t>
+            </a:r>
+          </a:p>
+          <a:p>
+            <a:pPr>
+              <a:spcBef>
+                <a:spcPts val="300"/>
+              </a:spcBef>
+              <a:defRPr sz="900" b="1">
+                <a:solidFill>
+                  <a:srgbClr val="38BDF8"/>
+                </a:solidFill>
+              </a:defRPr>
+            </a:pPr>
+            <a:r>
+              <a:t>58 Counties &amp; 10,000 Schools</a:t>
+            </a:r>
+          </a:p>
+          <a:p>
+            <a:pPr>
+              <a:spcBef>
+                <a:spcPts val="800"/>
+              </a:spcBef>
+              <a:defRPr sz="900">
+                <a:solidFill>
+                  <a:srgbClr val="9CA3AF"/>
+                </a:solidFill>
+              </a:defRPr>
+            </a:pPr>
+            <a:r>
+              <a:t>Ingests California Department of Education directory. Integrates CalEnviroScreen 4.0 equity scoring, Title 24 solar mandates, and SCE/SDG&amp;E/SMUD commercial utility rates.</a:t>
+            </a:r>
+            <a:br/>
+            <a:br/>
+            <a:r>
+              <a:t>Status: Architecture Specified</a:t>
+            </a:r>
+          </a:p>
+        </p:txBody>
+      </p:sp>
+      <p:sp>
+        <p:nvSpPr>
+          <p:cNvPr id="15" name="Rounded Rectangle 14"/>
+          <p:cNvSpPr/>
+          <p:nvPr/>
+        </p:nvSpPr>
+        <p:spPr>
+          <a:xfrm>
+            <a:off x="8138160" y="1737360"/>
+            <a:ext cx="3474720" cy="3291840"/>
+          </a:xfrm>
+          <a:prstGeom prst="roundRect">
+            <a:avLst/>
+          </a:prstGeom>
+          <a:solidFill>
+            <a:srgbClr val="111827"/>
+          </a:solidFill>
+          <a:ln w="12700">
+            <a:solidFill>
+              <a:srgbClr val="1F293D"/>
+            </a:solidFill>
+          </a:ln>
+        </p:spPr>
+        <p:style>
+          <a:lnRef idx="1">
+            <a:schemeClr val="accent1"/>
+          </a:lnRef>
+          <a:fillRef idx="3">
+            <a:schemeClr val="accent1"/>
+          </a:fillRef>
+          <a:effectRef idx="2">
+            <a:schemeClr val="accent1"/>
+          </a:effectRef>
+          <a:fontRef idx="minor">
+            <a:schemeClr val="lt1"/>
+          </a:fontRef>
+        </p:style>
+        <p:txBody>
+          <a:bodyPr rtlCol="0" anchor="ctr"/>
+          <a:lstStyle/>
+          <a:p>
+            <a:pPr algn="ctr"/>
+          </a:p>
+        </p:txBody>
+      </p:sp>
+      <p:sp>
+        <p:nvSpPr>
+          <p:cNvPr id="16" name="Rounded Rectangle 15"/>
+          <p:cNvSpPr/>
+          <p:nvPr/>
+        </p:nvSpPr>
+        <p:spPr>
+          <a:xfrm>
+            <a:off x="8138160" y="1737360"/>
+            <a:ext cx="3474720" cy="45720"/>
           </a:xfrm>
           <a:prstGeom prst="roundRect">
             <a:avLst/>
@@ -12050,13 +13293,13 @@
       </p:sp>
       <p:sp>
         <p:nvSpPr>
-          <p:cNvPr id="14" name="TextBox 13"/>
+          <p:cNvPr id="17" name="TextBox 16"/>
           <p:cNvSpPr txBox="1"/>
           <p:nvPr/>
         </p:nvSpPr>
         <p:spPr>
           <a:xfrm>
-            <a:off x="4526280" y="2057400"/>
+            <a:off x="8321040" y="1874519"/>
             <a:ext cx="3108960" cy="3017520"/>
           </a:xfrm>
           <a:prstGeom prst="rect">
@@ -12071,68 +13314,88 @@
           <a:lstStyle/>
           <a:p>
             <a:pPr>
-              <a:defRPr sz="3200" b="1">
+              <a:defRPr sz="2600" b="1">
                 <a:solidFill>
                   <a:srgbClr val="10B981"/>
                 </a:solidFill>
               </a:defRPr>
             </a:pPr>
             <a:r>
-              <a:t>EV Ready</a:t>
+              <a:t>Phase 3</a:t>
             </a:r>
           </a:p>
           <a:p>
             <a:pPr>
               <a:spcBef>
-                <a:spcPts val="400"/>
+                <a:spcPts val="300"/>
               </a:spcBef>
-              <a:defRPr sz="850" b="1">
-                <a:solidFill>
-                  <a:srgbClr val="64748B"/>
-                </a:solidFill>
-              </a:defRPr>
-            </a:pPr>
-            <a:r>
-              <a:t>FLEET ELECTRIFICATION CONDUIT</a:t>
+              <a:defRPr sz="1050" b="1">
+                <a:solidFill>
+                  <a:srgbClr val="F3F4F6"/>
+                </a:solidFill>
+              </a:defRPr>
+            </a:pPr>
+            <a:r>
+              <a:t>NATIONWIDE USA</a:t>
             </a:r>
           </a:p>
           <a:p>
             <a:pPr>
               <a:spcBef>
-                <a:spcPts val="1000"/>
+                <a:spcPts val="300"/>
               </a:spcBef>
-              <a:defRPr sz="1000">
-                <a:solidFill>
-                  <a:srgbClr val="94A3B8"/>
-                </a:solidFill>
-              </a:defRPr>
-            </a:pPr>
-            <a:r>
-              <a:t>Canopy structural posts and underground trenches provide ready electrical conduit for Level 2 EV charging for teachers during the day and electric school buses overnight.</a:t>
-            </a:r>
-          </a:p>
-        </p:txBody>
-      </p:sp>
-      <p:sp>
-        <p:nvSpPr>
-          <p:cNvPr id="15" name="Rounded Rectangle 14"/>
+              <a:defRPr sz="900" b="1">
+                <a:solidFill>
+                  <a:srgbClr val="38BDF8"/>
+                </a:solidFill>
+              </a:defRPr>
+            </a:pPr>
+            <a:r>
+              <a:t>50 States &amp; 100,000+ Schools</a:t>
+            </a:r>
+          </a:p>
+          <a:p>
+            <a:pPr>
+              <a:spcBef>
+                <a:spcPts val="800"/>
+              </a:spcBef>
+              <a:defRPr sz="900">
+                <a:solidFill>
+                  <a:srgbClr val="9CA3AF"/>
+                </a:solidFill>
+              </a:defRPr>
+            </a:pPr>
+            <a:r>
+              <a:t>Scales via National Center for Education Statistics (NCES) directory, state EIA commercial electricity rates, and EPA eGRID subregion carbon intensity factors.</a:t>
+            </a:r>
+            <a:br/>
+            <a:br/>
+            <a:r>
+              <a:t>Status: National Architecture</a:t>
+            </a:r>
+          </a:p>
+        </p:txBody>
+      </p:sp>
+      <p:sp>
+        <p:nvSpPr>
+          <p:cNvPr id="18" name="Rounded Rectangle 17"/>
           <p:cNvSpPr/>
           <p:nvPr/>
         </p:nvSpPr>
         <p:spPr>
           <a:xfrm>
-            <a:off x="8138160" y="1920240"/>
-            <a:ext cx="3474720" cy="3291840"/>
+            <a:off x="548640" y="5212080"/>
+            <a:ext cx="11094415" cy="1188720"/>
           </a:xfrm>
           <a:prstGeom prst="roundRect">
             <a:avLst/>
           </a:prstGeom>
           <a:solidFill>
-            <a:srgbClr val="161F30"/>
+            <a:srgbClr val="111827"/>
           </a:solidFill>
           <a:ln w="12700">
             <a:solidFill>
-              <a:srgbClr val="26354F"/>
+              <a:srgbClr val="1F293D"/>
             </a:solidFill>
           </a:ln>
         </p:spPr>
@@ -12160,167 +13423,14 @@
       </p:sp>
       <p:sp>
         <p:nvSpPr>
-          <p:cNvPr id="16" name="Rounded Rectangle 15"/>
-          <p:cNvSpPr/>
-          <p:nvPr/>
-        </p:nvSpPr>
-        <p:spPr>
-          <a:xfrm>
-            <a:off x="8138160" y="1920240"/>
-            <a:ext cx="3474720" cy="54864"/>
-          </a:xfrm>
-          <a:prstGeom prst="roundRect">
-            <a:avLst/>
-          </a:prstGeom>
-          <a:solidFill>
-            <a:srgbClr val="38BDF8"/>
-          </a:solidFill>
-          <a:ln>
-            <a:noFill/>
-          </a:ln>
-        </p:spPr>
-        <p:style>
-          <a:lnRef idx="1">
-            <a:schemeClr val="accent1"/>
-          </a:lnRef>
-          <a:fillRef idx="3">
-            <a:schemeClr val="accent1"/>
-          </a:fillRef>
-          <a:effectRef idx="2">
-            <a:schemeClr val="accent1"/>
-          </a:effectRef>
-          <a:fontRef idx="minor">
-            <a:schemeClr val="lt1"/>
-          </a:fontRef>
-        </p:style>
-        <p:txBody>
-          <a:bodyPr rtlCol="0" anchor="ctr"/>
-          <a:lstStyle/>
-          <a:p>
-            <a:pPr algn="ctr"/>
-          </a:p>
-        </p:txBody>
-      </p:sp>
-      <p:sp>
-        <p:nvSpPr>
-          <p:cNvPr id="17" name="TextBox 16"/>
-          <p:cNvSpPr txBox="1"/>
-          <p:nvPr/>
-        </p:nvSpPr>
-        <p:spPr>
-          <a:xfrm>
-            <a:off x="8321040" y="2057400"/>
-            <a:ext cx="3108960" cy="3017520"/>
-          </a:xfrm>
-          <a:prstGeom prst="rect">
-            <a:avLst/>
-          </a:prstGeom>
-          <a:noFill/>
-        </p:spPr>
-        <p:txBody>
-          <a:bodyPr wrap="square">
-            <a:spAutoFit/>
-          </a:bodyPr>
-          <a:lstStyle/>
-          <a:p>
-            <a:pPr>
-              <a:defRPr sz="3200" b="1">
-                <a:solidFill>
-                  <a:srgbClr val="38BDF8"/>
-                </a:solidFill>
-              </a:defRPr>
-            </a:pPr>
-            <a:r>
-              <a:t>STEM Lab</a:t>
-            </a:r>
-          </a:p>
-          <a:p>
-            <a:pPr>
-              <a:spcBef>
-                <a:spcPts val="400"/>
-              </a:spcBef>
-              <a:defRPr sz="850" b="1">
-                <a:solidFill>
-                  <a:srgbClr val="64748B"/>
-                </a:solidFill>
-              </a:defRPr>
-            </a:pPr>
-            <a:r>
-              <a:t>LIVING EDUCATIONAL DASHBOARD</a:t>
-            </a:r>
-          </a:p>
-          <a:p>
-            <a:pPr>
-              <a:spcBef>
-                <a:spcPts val="1000"/>
-              </a:spcBef>
-              <a:defRPr sz="1000">
-                <a:solidFill>
-                  <a:srgbClr val="94A3B8"/>
-                </a:solidFill>
-              </a:defRPr>
-            </a:pPr>
-            <a:r>
-              <a:t>Real-time solar inverter generation data transforms the parking lot into a physical STEM learning laboratory for physics, climate science, and data engineering classes.</a:t>
-            </a:r>
-          </a:p>
-        </p:txBody>
-      </p:sp>
-      <p:sp>
-        <p:nvSpPr>
-          <p:cNvPr id="18" name="Rounded Rectangle 17"/>
-          <p:cNvSpPr/>
-          <p:nvPr/>
-        </p:nvSpPr>
-        <p:spPr>
-          <a:xfrm>
-            <a:off x="548640" y="5394960"/>
-            <a:ext cx="11094415" cy="914400"/>
-          </a:xfrm>
-          <a:prstGeom prst="roundRect">
-            <a:avLst/>
-          </a:prstGeom>
-          <a:solidFill>
-            <a:srgbClr val="161F30"/>
-          </a:solidFill>
-          <a:ln w="12700">
-            <a:solidFill>
-              <a:srgbClr val="26354F"/>
-            </a:solidFill>
-          </a:ln>
-        </p:spPr>
-        <p:style>
-          <a:lnRef idx="1">
-            <a:schemeClr val="accent1"/>
-          </a:lnRef>
-          <a:fillRef idx="3">
-            <a:schemeClr val="accent1"/>
-          </a:fillRef>
-          <a:effectRef idx="2">
-            <a:schemeClr val="accent1"/>
-          </a:effectRef>
-          <a:fontRef idx="minor">
-            <a:schemeClr val="lt1"/>
-          </a:fontRef>
-        </p:style>
-        <p:txBody>
-          <a:bodyPr rtlCol="0" anchor="ctr"/>
-          <a:lstStyle/>
-          <a:p>
-            <a:pPr algn="ctr"/>
-          </a:p>
-        </p:txBody>
-      </p:sp>
-      <p:sp>
-        <p:nvSpPr>
           <p:cNvPr id="19" name="Rounded Rectangle 18"/>
           <p:cNvSpPr/>
           <p:nvPr/>
         </p:nvSpPr>
         <p:spPr>
           <a:xfrm>
-            <a:off x="548640" y="5394960"/>
-            <a:ext cx="11094415" cy="54864"/>
+            <a:off x="548640" y="5212080"/>
+            <a:ext cx="11094415" cy="45720"/>
           </a:xfrm>
           <a:prstGeom prst="roundRect">
             <a:avLst/>
@@ -12362,8 +13472,8 @@
         </p:nvSpPr>
         <p:spPr>
           <a:xfrm>
-            <a:off x="777240" y="5468112"/>
-            <a:ext cx="10607040" cy="731520"/>
+            <a:off x="777240" y="5285232"/>
+            <a:ext cx="10607040" cy="1005840"/>
           </a:xfrm>
           <a:prstGeom prst="rect">
             <a:avLst/>
@@ -12384,22 +13494,26 @@
               </a:defRPr>
             </a:pPr>
             <a:r>
-              <a:t>WHY PARKING LOTS INSTEAD OF ROOFTOPS?</a:t>
+              <a:t>EPA eGRID REGIONAL GRID CARBON INTENSITY FACTORS (Scope 2 GHG Avoidance)</a:t>
             </a:r>
           </a:p>
           <a:p>
             <a:pPr>
               <a:spcBef>
-                <a:spcPts val="200"/>
+                <a:spcPts val="300"/>
               </a:spcBef>
-              <a:defRPr sz="1000">
-                <a:solidFill>
-                  <a:srgbClr val="F1F5F9"/>
-                </a:solidFill>
-              </a:defRPr>
-            </a:pPr>
-            <a:r>
-              <a:t>Rooftop solar voids 20-year roof warranties, requires invasive roof penetrations, and has seismic/HVAC limitations. Parking lots have zero roof penetration, unobstructed flat southern exposure, and shade parked cars.</a:t>
+              <a:defRPr sz="900">
+                <a:solidFill>
+                  <a:srgbClr val="F3F4F6"/>
+                </a:solidFill>
+              </a:defRPr>
+            </a:pPr>
+            <a:r>
+              <a:t>CAMX (California / WECC): 0.45 lbs CO2 / kWh  |  ERCOT (Texas): 0.88 lbs CO2 / kWh  |  RFCW (Midwest): 1.12 lbs CO2 / kWh</a:t>
+            </a:r>
+            <a:br/>
+            <a:r>
+              <a:t>Key Environmental Justice Finding: Installing a solar canopy in coal-heavy Midwest grids yields 2.5x higher carbon avoidance per watt than in California.</a:t>
             </a:r>
           </a:p>
         </p:txBody>

--- a/SolarSchoolsUSA_PitchDeck.pptx
+++ b/SolarSchoolsUSA_PitchDeck.pptx
@@ -511,7 +511,7 @@
           <a:lstStyle/>
           <a:p>
             <a:r>
-              <a:t>[0:00 - 0:25] 'Judges, my name is Pranav Balaji. Across the United States, 100,000 public schools sit on millions of square meters of unshaded asphalt, while electricity drains $8 billion from education budgets every year. Today I am presenting SolarSchools USA, an end-to-end computational pipeline that couples OpenStreetMap vector extraction and live NREL PVWatts physics simulation with the statutory mechanics of Section 6417 of the Internal Revenue Code.'</a:t>
+              <a:t>[0:00 - 0:25] 'Hi everyone, my name is Pranav Balaji, and I am a 10th grader. Every single morning when we arrive at school, our parking lots sit empty under the blazing sun. At the same time, our school districts spend millions of dollars every year on electric bills. Today I want to show you SolarSchools USA: a web platform I built so any student or school board member can map their school parking lot, calculate solar energy, and download a ready-to-use board proposal in just 10 seconds.'</a:t>
             </a:r>
           </a:p>
         </p:txBody>
@@ -581,7 +581,7 @@
           <a:lstStyle/>
           <a:p>
             <a:r>
-              <a:t>[3:35 - 3:50] 'Here is our civic climax: Tab 5 translates all this computational physics into institutional governance. In one click, students or PTAs generate a complete School Board Action Brief with exact engineering specs, a 25-year cashflow schedule, IRS Form 990-T filing instructions, and a turnkey School Board Resolution ready for elected trustees to sponsor. Every year of delay costs a single high school $140,000. Let's shade our parking lots, capture federal funds, and power our classrooms. Thank you!'</a:t>
+              <a:t>[3:35 - 3:50] 'To wrap up: students shouldn't have to wait 10 years for school boards to hire expensive consultants. With SolarSchools USA, any student can look up their campus in five seconds, print out a professional brief, and walk up to the microphone at their school board meeting this Tuesday. Our schools have the sunshine. The federal government has the cash. Let's shade our parking lots and power our classrooms. Thank you so much, and I welcome any questions!'</a:t>
             </a:r>
           </a:p>
         </p:txBody>
@@ -651,7 +651,7 @@
           <a:lstStyle/>
           <a:p>
             <a:r>
-              <a:t>[0:25 - 0:50] 'Let's examine the engineering problem. First, thermodynamics: black asphalt parking lots have an albedo of just 0.05 to 0.10, absorbing solar irradiance and elevating surface temperatures above 145 degrees Fahrenheit. Second, financial law: public school districts are tax-exempt, meaning historically they could not utilize Section 48 Investment Tax Credits without complex, predatory tax-equity flip structures. And third, private feasibility consultants cost $15,000 to $25,000 per school, pricing out under-resourced districts.'</a:t>
+              <a:t>[0:25 - 0:50] 'Think about what school feels like in August or September. Our parking lots are black asphalt that reaches 140 degrees. Cars turn into ovens, and playgrounds bake. Meanwhile, public schools across the country spend over 8 billion dollars every year on electric bills. Electricity is the second-largest bill a school district pays, right after teacher salaries! And when school boards try to fix this, private consultants charge up to $25,000 just to do an initial study. Most schools give up before they even start.'</a:t>
             </a:r>
           </a:p>
         </p:txBody>
@@ -721,7 +721,7 @@
           <a:lstStyle/>
           <a:p>
             <a:r>
-              <a:t>[0:50 - 1:15] 'In 2022, Congress passed Section 6417 of the Internal Revenue Code, known as Elective Pay or Direct Pay, and the IRS finalized Treasury Decision 9988 in March 2024. For the first time in American history, public schools bypass private tax-equity middlemen: the IRS writes an actual, uncapped direct cash reimbursement check covering 30% to 50% of the turnkey installation cost. The base rate is 30% for prevailing wage compliance, plus a 10% Title I low-income bonus and 10% domestic content adder. But over 90% of school boards still do not know this statutory cash check exists.'</a:t>
+              <a:t>[0:50 - 1:15] 'Here is the exciting part that almost nobody knows. In 2022, a new federal law called 'Direct Pay' was passed. Historically, public schools couldn't get solar tax credits because schools don't pay taxes. Now, under Section 6417, the IRS will literally write an actual CASH check directly to public school districts! They pay a 30% base grant, plus an extra 10% for American steel and 10% for Title I schools. That means the federal government can cover up to 50% of the entire solar canopy! The problem? Over 90% of school boards have no idea this money exists.'</a:t>
             </a:r>
           </a:p>
         </p:txBody>
@@ -791,7 +791,7 @@
           <a:lstStyle/>
           <a:p>
             <a:r>
-              <a:t>[1:15 - 1:40] 'To bridge this gap, I engineered a 4-tier automated computational pipeline in Python: Tier 1 reprojects WGS 84 geographic coordinates into metric UTM zones to eliminate spherical distortion and extracts parking polygons. Tier 2 queries the Department of Energy's NREL PVWatts v8 REST API for satellite solar radiation vectors. Tier 3 computes a 25-year discounted cashflow integrating degradation, tariff escalation, and O&amp;M reserves. Tier 4 compiles an automated School Board Action Brief. If the federal API ever times out, our circuit breaker falls back to regional NSRDB solar constants so the system never crashes.'</a:t>
+              <a:t>[1:15 - 1:40] 'So I decided to build a solution: SolarSchools USA. It is a web application designed so any high school student or parent can use it. Step 1: you select your school from our database of 18 Bay Area campuses. It zooms right onto the parking lot. Step 2: in real time, it connects to the Department of Energy's solar engine and calculates how many panels fit, how much electricity they generate, and how much money the school saves. Step 3: with one click, you download a complete School Board Action Brief with the exact financial breakdown and a template resolution ready to present to school board trustees.'</a:t>
             </a:r>
           </a:p>
         </p:txBody>
@@ -861,7 +861,7 @@
           <a:lstStyle/>
           <a:p>
             <a:r>
-              <a:t>[1:40 - 2:05] 'Here is our physical modeling rigor. To calculate active solar catchment area, we apply an empirical 65% packing factor that accounts for 24-foot driving aisles, ADA pathways, and Title 24 fire truck access. System capacity is parameterized at 200 Watts per square meter for Tier-1 Monocrystalline silicon modules. In NREL PVWatts, we model a fixed 10-degree canopy tilt for optimal rain drainage and structural wind resistance. Our 14.0% aggregate derate loss waterfall precisely accounts for inverter conversion, module temperature coefficients, soiling dust, and ohmic wiring resistance.'</a:t>
+              <a:t>[1:40 - 2:05] 'We made sure the numbers are rock-solid. We don't assume the entire parking lot is covered in solar. We use an empirical 65% coverage factor, which reserves 24-foot driving aisles, ADA handicap spots, and a full 14-foot vertical clearance for yellow school buses. Then, we connect directly to the Department of Energy's NREL database to pull exact satellite sunshine numbers for the school's precise coordinates, accounting for summer heat, dust, and winter sun angles. It's the same math that professional engineering firms use, but packaged so anyone can run it in seconds.'</a:t>
             </a:r>
           </a:p>
         </p:txBody>
@@ -931,7 +931,7 @@
           <a:lstStyle/>
           <a:p>
             <a:r>
-              <a:t>[2:05 - 2:35] 'We ground-truthed this physics model against real completed solar carports in Silicon Valley. Look at Monta Vista High School in Cupertino: Fremont Union High School District built 550 kW of carports in 2021. Our computational engine modeled 1,484,000 kWh annually and $145,000 in utility savings. Their actual published PG&amp;E utility bill records show $139,200 in avoided bills—an empirical model accuracy within 4.17%! But just 10 miles away at Palo Alto High School, their massive 7,200 m² parking lot sits unshaded, surrendering $140,000 every year to utility bills, with an unclaimed $754,000 IRS cash check left at the Treasury.'</a:t>
+              <a:t>[2:05 - 2:35] 'Let's look at real-world proof right here in Silicon Valley. At Monta Vista High in Cupertino, they installed 550 kW of solar carports in 2021. Our software modeled that they would save $145,000 a year. When we checked the district's actual published utility bills, they saved $139,200. That's a 4% match with real life! Now look just 10 miles away at Palo Alto High. They have a massive parking lot baking in the sun, paying $140,000 a year to the power company that they don't need to pay. And there is a $754,000 cash grant from the federal government waiting for them. That $140,000 every year could pay for two full-time teachers or hundreds of laptops!'</a:t>
             </a:r>
           </a:p>
         </p:txBody>
@@ -1001,7 +1001,7 @@
           <a:lstStyle/>
           <a:p>
             <a:r>
-              <a:t>[2:35 - 3:00] 'Our financial model is grounded in commercial capital benchmarks. Structural steel canopies carry a premium of $3.10 per watt due to cantilever framing and concrete pier foundations. But when you apply the 40% IRS Direct Pay check, net capital outlay drops to $1.86 per watt. Under standard commercial tariffs, this yields a rapid payback of 2.6 to 4.5 years. Over 25 years—after budgeting $15 per kilowatt-year for robotic panel washing and full inverter replacement—a single high school generates over $11 million to $14 million in cumulative net savings back into instructional budgets.'</a:t>
+              <a:t>[2:35 - 3:00] 'When you look at the financials, it's an absolute no-brainer. Normally, a solar canopy might take 6 to 7 years to pay back. With the federal Direct Pay check covering up to 40% or 50% upfront, the payback period drops to just 3.7 years! After year four, all that electricity is pure profit for the school district. Over the 25-year lifespan of the panels, even after paying for washing and maintenance, a single high school generates nearly 10 million dollars in net savings. That's permanent money for science labs, clubs, and teachers without raising local property taxes.'</a:t>
             </a:r>
           </a:p>
         </p:txBody>
@@ -1071,7 +1071,7 @@
           <a:lstStyle/>
           <a:p>
             <a:r>
-              <a:t>[3:00 - 3:20] 'From a civil and electrical engineering standpoint: canopies use ASTM A992 structural wide-flange steel columns anchored in cast-in-drilled-hole reinforced concrete piers, engineered to ASCE 7-16 for 110 mph wind loads. We mandate a 14-foot vertical clearance for school bus transit. Electrically, systems interconnect at 480V 3-phase commercial switchgear using IEEE 1547 and California Rule 21 compliant smart inverters that provide Volt-VAR dynamic grid support, with ready conduit for Level 2 EV charging for teachers and electric school bus fleets.'</a:t>
+              <a:t>[3:00 - 3:20] 'Beyond the money, this transforms what our campuses feel like every day. Parking lots go from boiling asphalt into shaded community assets. Cars stay 40 degrees cooler, and teachers get free Level 2 EV charging powered directly by the sun. Elementary school kids get shaded play areas so blacktop doesn't burn their knees. And in emergencies or wildfire blackouts, these systems can keep emergency shelters and food refrigeration powered. It turns our schools into true clean energy hubs.'</a:t>
             </a:r>
           </a:p>
         </p:txBody>
@@ -1141,7 +1141,7 @@
           <a:lstStyle/>
           <a:p>
             <a:r>
-              <a:t>[3:20 - 3:35] 'Our scalability roadmap expands across three phases: Phase 1 calibrated locally across 9 Bay Area counties under PG&amp;E B-19. Phase 2 scales across all 10,000 California campuses incorporating CalEnviroScreen 4.0 equity overlays and Title 24 mandates. Phase 3 scales nationwide across 100,000 campuses using NCES directory data and EPA eGRID regional carbon intensity factors—where Midwest solar avoids 2.5 times more carbon per watt than in California due to coal grid baseloads.'</a:t>
+              <a:t>[3:20 - 3:35] 'Here is where we are heading. Phase 1 is done and live today: 18 schools right here in our backyard. Phase 2 scales across California to 10,000 schools, prioritizing hot Central Valley districts and Title I schools. And Phase 3 scales nationwide to 100,000 schools across all 50 states. In places like the Midwest, power grids still rely on dirty coal, so a solar panel installed on an Ohio school cuts two and a half times more carbon than the same panel in California! If just 10% of US schools build solar canopies, we save education budgets 800 million dollars every single year.'</a:t>
             </a:r>
           </a:p>
         </p:txBody>
@@ -4162,7 +4162,7 @@
             <a:avLst/>
           </a:prstGeom>
           <a:solidFill>
-            <a:srgbClr val="090D16"/>
+            <a:srgbClr val="0B0F19"/>
           </a:solidFill>
           <a:ln>
             <a:noFill/>
@@ -4241,7 +4241,7 @@
         </p:nvSpPr>
         <p:spPr>
           <a:xfrm>
-            <a:off x="457200" y="109728"/>
+            <a:off x="548640" y="109728"/>
             <a:ext cx="2011680" cy="292608"/>
           </a:xfrm>
           <a:prstGeom prst="roundRect">
@@ -4293,7 +4293,7 @@
         </p:nvSpPr>
         <p:spPr>
           <a:xfrm>
-            <a:off x="2606040" y="73152"/>
+            <a:off x="2697480" y="73152"/>
             <a:ext cx="5943600" cy="365760"/>
           </a:xfrm>
           <a:prstGeom prst="rect">
@@ -4310,12 +4310,12 @@
             <a:pPr>
               <a:defRPr sz="950">
                 <a:solidFill>
-                  <a:srgbClr val="9CA3AF"/>
-                </a:solidFill>
-              </a:defRPr>
-            </a:pPr>
-            <a:r>
-              <a:t>SVYCA Youth For Earth Hackathon | Systems Architecture &amp; Climate Finance</a:t>
+                  <a:srgbClr val="A0AEC0"/>
+                </a:solidFill>
+              </a:defRPr>
+            </a:pPr>
+            <a:r>
+              <a:t>SVYCA Youth For Earth Hackathon  |  Clean Energy &amp; School Climate Action</a:t>
             </a:r>
           </a:p>
         </p:txBody>
@@ -4329,7 +4329,7 @@
         <p:spPr>
           <a:xfrm>
             <a:off x="10241280" y="73152"/>
-            <a:ext cx="1463040" cy="365760"/>
+            <a:ext cx="1371600" cy="365760"/>
           </a:xfrm>
           <a:prstGeom prst="rect">
             <a:avLst/>
@@ -4364,7 +4364,7 @@
         <p:spPr>
           <a:xfrm>
             <a:off x="0" y="493776"/>
-            <a:ext cx="1219169" cy="27432"/>
+            <a:ext cx="1219169" cy="22860"/>
           </a:xfrm>
           <a:prstGeom prst="rect">
             <a:avLst/>
@@ -4406,8 +4406,8 @@
         </p:nvSpPr>
         <p:spPr>
           <a:xfrm>
-            <a:off x="731520" y="1051560"/>
-            <a:ext cx="10698480" cy="2377440"/>
+            <a:off x="731520" y="1188720"/>
+            <a:ext cx="10698480" cy="2286000"/>
           </a:xfrm>
           <a:prstGeom prst="rect">
             <a:avLst/>
@@ -4428,7 +4428,7 @@
               </a:defRPr>
             </a:pPr>
             <a:r>
-              <a:t>SYSTEMS ARCHITECTURE &amp; CLIMATE FINANCE PITCH</a:t>
+              <a:t>SVYCA YOUTH FOR EARTH HACKATHON</a:t>
             </a:r>
           </a:p>
           <a:p>
@@ -4436,9 +4436,9 @@
               <a:spcBef>
                 <a:spcPts val="400"/>
               </a:spcBef>
-              <a:defRPr sz="4000" b="1">
-                <a:solidFill>
-                  <a:srgbClr val="F3F4F6"/>
+              <a:defRPr sz="4400" b="1">
+                <a:solidFill>
+                  <a:srgbClr val="F8FAFC"/>
                 </a:solidFill>
               </a:defRPr>
             </a:pPr>
@@ -4449,20 +4449,31 @@
           <a:p>
             <a:pPr>
               <a:spcBef>
+                <a:spcPts val="400"/>
+              </a:spcBef>
+              <a:defRPr sz="1800" b="1">
+                <a:solidFill>
+                  <a:srgbClr val="10B981"/>
+                </a:solidFill>
+              </a:defRPr>
+            </a:pPr>
+            <a:r>
+              <a:t>Turning School Parking Lots into Clean Energy &amp; Classroom Cash</a:t>
+            </a:r>
+          </a:p>
+          <a:p>
+            <a:pPr>
+              <a:spcBef>
                 <a:spcPts val="600"/>
               </a:spcBef>
-              <a:defRPr sz="1500">
-                <a:solidFill>
-                  <a:srgbClr val="9CA3AF"/>
-                </a:solidFill>
-              </a:defRPr>
-            </a:pPr>
-            <a:r>
-              <a:t>Autonomous Geospatial Pipeline &amp; 26 U.S.C. Section 6417 Financial Engine</a:t>
-            </a:r>
-            <a:br/>
-            <a:r>
-              <a:t>Democratizing Clean Energy for 100,000+ US Public Campuses</a:t>
+              <a:defRPr sz="1200">
+                <a:solidFill>
+                  <a:srgbClr val="A0AEC0"/>
+                </a:solidFill>
+              </a:defRPr>
+            </a:pPr>
+            <a:r>
+              <a:t>A simple platform helping students, teachers, and school boards claim federal solar funding in seconds.</a:t>
             </a:r>
           </a:p>
         </p:txBody>
@@ -4476,7 +4487,7 @@
         <p:spPr>
           <a:xfrm>
             <a:off x="731520" y="3566160"/>
-            <a:ext cx="10698480" cy="457200"/>
+            <a:ext cx="10698480" cy="411480"/>
           </a:xfrm>
           <a:prstGeom prst="rect">
             <a:avLst/>
@@ -4490,14 +4501,14 @@
           <a:lstStyle/>
           <a:p>
             <a:pPr>
-              <a:defRPr sz="1050" b="1">
-                <a:solidFill>
-                  <a:srgbClr val="F3F4F6"/>
-                </a:solidFill>
-              </a:defRPr>
-            </a:pPr>
-            <a:r>
-              <a:t>Presenter: Pranav Balaji (Solo Competitor)  |  Event: SVYCA Youth For Earth Hackathon @ Stanford Climate Week  |  October 2026</a:t>
+              <a:defRPr sz="1100" b="1">
+                <a:solidFill>
+                  <a:srgbClr val="F8FAFC"/>
+                </a:solidFill>
+              </a:defRPr>
+            </a:pPr>
+            <a:r>
+              <a:t>Pranav Balaji  |  10th Grade  |  Silicon Valley Youth Climate Action (SVYCA)  |  October 2026</a:t>
             </a:r>
           </a:p>
         </p:txBody>
@@ -4511,17 +4522,17 @@
         <p:spPr>
           <a:xfrm>
             <a:off x="548640" y="4160520"/>
-            <a:ext cx="2560320" cy="2194560"/>
+            <a:ext cx="3474720" cy="2194560"/>
           </a:xfrm>
           <a:prstGeom prst="roundRect">
             <a:avLst/>
           </a:prstGeom>
           <a:solidFill>
-            <a:srgbClr val="111827"/>
+            <a:srgbClr val="131A2B"/>
           </a:solidFill>
           <a:ln w="12700">
             <a:solidFill>
-              <a:srgbClr val="1F293D"/>
+              <a:srgbClr val="222E4A"/>
             </a:solidFill>
           </a:ln>
         </p:spPr>
@@ -4556,7 +4567,7 @@
         <p:spPr>
           <a:xfrm>
             <a:off x="548640" y="4160520"/>
-            <a:ext cx="2560320" cy="45720"/>
+            <a:ext cx="3474720" cy="54864"/>
           </a:xfrm>
           <a:prstGeom prst="roundRect">
             <a:avLst/>
@@ -4598,8 +4609,8 @@
         </p:nvSpPr>
         <p:spPr>
           <a:xfrm>
-            <a:off x="685800" y="4270248"/>
-            <a:ext cx="2286000" cy="1975104"/>
+            <a:off x="731520" y="4270248"/>
+            <a:ext cx="3108960" cy="1975104"/>
           </a:xfrm>
           <a:prstGeom prst="rect">
             <a:avLst/>
@@ -4613,14 +4624,14 @@
           <a:lstStyle/>
           <a:p>
             <a:pPr>
-              <a:defRPr sz="750" b="1">
+              <a:defRPr sz="850" b="1">
                 <a:solidFill>
                   <a:srgbClr val="38BDF8"/>
                 </a:solidFill>
               </a:defRPr>
             </a:pPr>
             <a:r>
-              <a:t>GEOSPATIAL INGESTION</a:t>
+              <a:t>18 LOCAL SCHOOLS MAPPED</a:t>
             </a:r>
           </a:p>
           <a:p>
@@ -4628,29 +4639,59 @@
               <a:spcBef>
                 <a:spcPts val="300"/>
               </a:spcBef>
-              <a:defRPr sz="1100" b="1">
-                <a:solidFill>
-                  <a:srgbClr val="F3F4F6"/>
-                </a:solidFill>
-              </a:defRPr>
-            </a:pPr>
-            <a:r>
-              <a:t>NCES + OpenStreetMap</a:t>
-            </a:r>
-          </a:p>
-          <a:p>
-            <a:pPr>
-              <a:spcBef>
-                <a:spcPts val="600"/>
-              </a:spcBef>
-              <a:defRPr sz="900">
-                <a:solidFill>
-                  <a:srgbClr val="9CA3AF"/>
-                </a:solidFill>
-              </a:defRPr>
-            </a:pPr>
-            <a:r>
-              <a:t>Automated vector extraction with metric UTM CRS reprojection to eliminate spherical distortion.</a:t>
+              <a:defRPr sz="1200" b="1">
+                <a:solidFill>
+                  <a:srgbClr val="F8FAFC"/>
+                </a:solidFill>
+              </a:defRPr>
+            </a:pPr>
+            <a:r>
+              <a:t>High-Resolution Campus Data</a:t>
+            </a:r>
+          </a:p>
+          <a:p>
+            <a:pPr>
+              <a:spcBef>
+                <a:spcPts val="300"/>
+              </a:spcBef>
+              <a:defRPr sz="950">
+                <a:solidFill>
+                  <a:srgbClr val="A0AEC0"/>
+                </a:solidFill>
+              </a:defRPr>
+            </a:pPr>
+            <a:r>
+              <a:t>- High, Middle &amp; Elementary schools mapped</a:t>
+            </a:r>
+          </a:p>
+          <a:p>
+            <a:pPr>
+              <a:spcBef>
+                <a:spcPts val="300"/>
+              </a:spcBef>
+              <a:defRPr sz="950">
+                <a:solidFill>
+                  <a:srgbClr val="A0AEC0"/>
+                </a:solidFill>
+              </a:defRPr>
+            </a:pPr>
+            <a:r>
+              <a:t>- Exact parking lots ground-truthed on satellite</a:t>
+            </a:r>
+          </a:p>
+          <a:p>
+            <a:pPr>
+              <a:spcBef>
+                <a:spcPts val="300"/>
+              </a:spcBef>
+              <a:defRPr sz="950">
+                <a:solidFill>
+                  <a:srgbClr val="A0AEC0"/>
+                </a:solidFill>
+              </a:defRPr>
+            </a:pPr>
+            <a:r>
+              <a:t>- Zero manual measuring needed</a:t>
             </a:r>
           </a:p>
         </p:txBody>
@@ -4663,18 +4704,18 @@
         </p:nvSpPr>
         <p:spPr>
           <a:xfrm>
-            <a:off x="3383280" y="4160520"/>
-            <a:ext cx="2560320" cy="2194560"/>
+            <a:off x="4343400" y="4160520"/>
+            <a:ext cx="3474720" cy="2194560"/>
           </a:xfrm>
           <a:prstGeom prst="roundRect">
             <a:avLst/>
           </a:prstGeom>
           <a:solidFill>
-            <a:srgbClr val="111827"/>
+            <a:srgbClr val="131A2B"/>
           </a:solidFill>
           <a:ln w="12700">
             <a:solidFill>
-              <a:srgbClr val="1F293D"/>
+              <a:srgbClr val="222E4A"/>
             </a:solidFill>
           </a:ln>
         </p:spPr>
@@ -4708,161 +4749,8 @@
         </p:nvSpPr>
         <p:spPr>
           <a:xfrm>
-            <a:off x="3383280" y="4160520"/>
-            <a:ext cx="2560320" cy="45720"/>
-          </a:xfrm>
-          <a:prstGeom prst="roundRect">
-            <a:avLst/>
-          </a:prstGeom>
-          <a:solidFill>
-            <a:srgbClr val="38BDF8"/>
-          </a:solidFill>
-          <a:ln>
-            <a:noFill/>
-          </a:ln>
-        </p:spPr>
-        <p:style>
-          <a:lnRef idx="1">
-            <a:schemeClr val="accent1"/>
-          </a:lnRef>
-          <a:fillRef idx="3">
-            <a:schemeClr val="accent1"/>
-          </a:fillRef>
-          <a:effectRef idx="2">
-            <a:schemeClr val="accent1"/>
-          </a:effectRef>
-          <a:fontRef idx="minor">
-            <a:schemeClr val="lt1"/>
-          </a:fontRef>
-        </p:style>
-        <p:txBody>
-          <a:bodyPr rtlCol="0" anchor="ctr"/>
-          <a:lstStyle/>
-          <a:p>
-            <a:pPr algn="ctr"/>
-          </a:p>
-        </p:txBody>
-      </p:sp>
-      <p:sp>
-        <p:nvSpPr>
-          <p:cNvPr id="15" name="TextBox 14"/>
-          <p:cNvSpPr txBox="1"/>
-          <p:nvPr/>
-        </p:nvSpPr>
-        <p:spPr>
-          <a:xfrm>
-            <a:off x="3520440" y="4270248"/>
-            <a:ext cx="2286000" cy="1975104"/>
-          </a:xfrm>
-          <a:prstGeom prst="rect">
-            <a:avLst/>
-          </a:prstGeom>
-          <a:noFill/>
-        </p:spPr>
-        <p:txBody>
-          <a:bodyPr wrap="square">
-            <a:spAutoFit/>
-          </a:bodyPr>
-          <a:lstStyle/>
-          <a:p>
-            <a:pPr>
-              <a:defRPr sz="750" b="1">
-                <a:solidFill>
-                  <a:srgbClr val="38BDF8"/>
-                </a:solidFill>
-              </a:defRPr>
-            </a:pPr>
-            <a:r>
-              <a:t>PHYSICAL SIMULATION</a:t>
-            </a:r>
-          </a:p>
-          <a:p>
-            <a:pPr>
-              <a:spcBef>
-                <a:spcPts val="300"/>
-              </a:spcBef>
-              <a:defRPr sz="1100" b="1">
-                <a:solidFill>
-                  <a:srgbClr val="F3F4F6"/>
-                </a:solidFill>
-              </a:defRPr>
-            </a:pPr>
-            <a:r>
-              <a:t>DOE / NREL PVWatts v8</a:t>
-            </a:r>
-          </a:p>
-          <a:p>
-            <a:pPr>
-              <a:spcBef>
-                <a:spcPts val="600"/>
-              </a:spcBef>
-              <a:defRPr sz="900">
-                <a:solidFill>
-                  <a:srgbClr val="9CA3AF"/>
-                </a:solidFill>
-              </a:defRPr>
-            </a:pPr>
-            <a:r>
-              <a:t>Live REST queries to NSRDB solar radiation grid with a 14.0% aggregate loss derate waterfall.</a:t>
-            </a:r>
-          </a:p>
-        </p:txBody>
-      </p:sp>
-      <p:sp>
-        <p:nvSpPr>
-          <p:cNvPr id="16" name="Rounded Rectangle 15"/>
-          <p:cNvSpPr/>
-          <p:nvPr/>
-        </p:nvSpPr>
-        <p:spPr>
-          <a:xfrm>
-            <a:off x="6217920" y="4160520"/>
-            <a:ext cx="2560320" cy="2194560"/>
-          </a:xfrm>
-          <a:prstGeom prst="roundRect">
-            <a:avLst/>
-          </a:prstGeom>
-          <a:solidFill>
-            <a:srgbClr val="111827"/>
-          </a:solidFill>
-          <a:ln w="12700">
-            <a:solidFill>
-              <a:srgbClr val="1F293D"/>
-            </a:solidFill>
-          </a:ln>
-        </p:spPr>
-        <p:style>
-          <a:lnRef idx="1">
-            <a:schemeClr val="accent1"/>
-          </a:lnRef>
-          <a:fillRef idx="3">
-            <a:schemeClr val="accent1"/>
-          </a:fillRef>
-          <a:effectRef idx="2">
-            <a:schemeClr val="accent1"/>
-          </a:effectRef>
-          <a:fontRef idx="minor">
-            <a:schemeClr val="lt1"/>
-          </a:fontRef>
-        </p:style>
-        <p:txBody>
-          <a:bodyPr rtlCol="0" anchor="ctr"/>
-          <a:lstStyle/>
-          <a:p>
-            <a:pPr algn="ctr"/>
-          </a:p>
-        </p:txBody>
-      </p:sp>
-      <p:sp>
-        <p:nvSpPr>
-          <p:cNvPr id="17" name="Rounded Rectangle 16"/>
-          <p:cNvSpPr/>
-          <p:nvPr/>
-        </p:nvSpPr>
-        <p:spPr>
-          <a:xfrm>
-            <a:off x="6217920" y="4160520"/>
-            <a:ext cx="2560320" cy="45720"/>
+            <a:off x="4343400" y="4160520"/>
+            <a:ext cx="3474720" cy="54864"/>
           </a:xfrm>
           <a:prstGeom prst="roundRect">
             <a:avLst/>
@@ -4898,14 +4786,14 @@
       </p:sp>
       <p:sp>
         <p:nvSpPr>
-          <p:cNvPr id="18" name="TextBox 17"/>
+          <p:cNvPr id="15" name="TextBox 14"/>
           <p:cNvSpPr txBox="1"/>
           <p:nvPr/>
         </p:nvSpPr>
         <p:spPr>
           <a:xfrm>
-            <a:off x="6355080" y="4270248"/>
-            <a:ext cx="2286000" cy="1975104"/>
+            <a:off x="4526280" y="4270248"/>
+            <a:ext cx="3108960" cy="1975104"/>
           </a:xfrm>
           <a:prstGeom prst="rect">
             <a:avLst/>
@@ -4919,14 +4807,14 @@
           <a:lstStyle/>
           <a:p>
             <a:pPr>
-              <a:defRPr sz="750" b="1">
+              <a:defRPr sz="850" b="1">
                 <a:solidFill>
                   <a:srgbClr val="10B981"/>
                 </a:solidFill>
               </a:defRPr>
             </a:pPr>
             <a:r>
-              <a:t>STATUTORY CAPITAL MODEL</a:t>
+              <a:t>REAL SOLAR PHYSICS (NREL)</a:t>
             </a:r>
           </a:p>
           <a:p>
@@ -4934,53 +4822,83 @@
               <a:spcBef>
                 <a:spcPts val="300"/>
               </a:spcBef>
-              <a:defRPr sz="1100" b="1">
-                <a:solidFill>
-                  <a:srgbClr val="F3F4F6"/>
-                </a:solidFill>
-              </a:defRPr>
-            </a:pPr>
-            <a:r>
-              <a:t>IRA Section 6417 Direct Pay</a:t>
-            </a:r>
-          </a:p>
-          <a:p>
-            <a:pPr>
-              <a:spcBef>
-                <a:spcPts val="600"/>
-              </a:spcBef>
-              <a:defRPr sz="900">
-                <a:solidFill>
-                  <a:srgbClr val="9CA3AF"/>
-                </a:solidFill>
-              </a:defRPr>
-            </a:pPr>
-            <a:r>
-              <a:t>30% base + 10% Title I + 10% Energy Community uncapped direct cash reimbursement checks.</a:t>
-            </a:r>
-          </a:p>
-        </p:txBody>
-      </p:sp>
-      <p:sp>
-        <p:nvSpPr>
-          <p:cNvPr id="19" name="Rounded Rectangle 18"/>
+              <a:defRPr sz="1200" b="1">
+                <a:solidFill>
+                  <a:srgbClr val="F8FAFC"/>
+                </a:solidFill>
+              </a:defRPr>
+            </a:pPr>
+            <a:r>
+              <a:t>Department of Energy Engine</a:t>
+            </a:r>
+          </a:p>
+          <a:p>
+            <a:pPr>
+              <a:spcBef>
+                <a:spcPts val="300"/>
+              </a:spcBef>
+              <a:defRPr sz="950">
+                <a:solidFill>
+                  <a:srgbClr val="A0AEC0"/>
+                </a:solidFill>
+              </a:defRPr>
+            </a:pPr>
+            <a:r>
+              <a:t>- Uses official PVWatts v8 solar calculations</a:t>
+            </a:r>
+          </a:p>
+          <a:p>
+            <a:pPr>
+              <a:spcBef>
+                <a:spcPts val="300"/>
+              </a:spcBef>
+              <a:defRPr sz="950">
+                <a:solidFill>
+                  <a:srgbClr val="A0AEC0"/>
+                </a:solidFill>
+              </a:defRPr>
+            </a:pPr>
+            <a:r>
+              <a:t>- Calculates monthly power generation</a:t>
+            </a:r>
+          </a:p>
+          <a:p>
+            <a:pPr>
+              <a:spcBef>
+                <a:spcPts val="300"/>
+              </a:spcBef>
+              <a:defRPr sz="950">
+                <a:solidFill>
+                  <a:srgbClr val="A0AEC0"/>
+                </a:solidFill>
+              </a:defRPr>
+            </a:pPr>
+            <a:r>
+              <a:t>- Calibrated against active Silicon Valley arrays</a:t>
+            </a:r>
+          </a:p>
+        </p:txBody>
+      </p:sp>
+      <p:sp>
+        <p:nvSpPr>
+          <p:cNvPr id="16" name="Rounded Rectangle 15"/>
           <p:cNvSpPr/>
           <p:nvPr/>
         </p:nvSpPr>
         <p:spPr>
           <a:xfrm>
-            <a:off x="9052560" y="4160520"/>
-            <a:ext cx="2560320" cy="2194560"/>
+            <a:off x="8138160" y="4160520"/>
+            <a:ext cx="3474720" cy="2194560"/>
           </a:xfrm>
           <a:prstGeom prst="roundRect">
             <a:avLst/>
           </a:prstGeom>
           <a:solidFill>
-            <a:srgbClr val="111827"/>
+            <a:srgbClr val="131A2B"/>
           </a:solidFill>
           <a:ln w="12700">
             <a:solidFill>
-              <a:srgbClr val="1F293D"/>
+              <a:srgbClr val="222E4A"/>
             </a:solidFill>
           </a:ln>
         </p:spPr>
@@ -5008,14 +4926,14 @@
       </p:sp>
       <p:sp>
         <p:nvSpPr>
-          <p:cNvPr id="20" name="Rounded Rectangle 19"/>
+          <p:cNvPr id="17" name="Rounded Rectangle 16"/>
           <p:cNvSpPr/>
           <p:nvPr/>
         </p:nvSpPr>
         <p:spPr>
           <a:xfrm>
-            <a:off x="9052560" y="4160520"/>
-            <a:ext cx="2560320" cy="45720"/>
+            <a:off x="8138160" y="4160520"/>
+            <a:ext cx="3474720" cy="54864"/>
           </a:xfrm>
           <a:prstGeom prst="roundRect">
             <a:avLst/>
@@ -5051,14 +4969,14 @@
       </p:sp>
       <p:sp>
         <p:nvSpPr>
-          <p:cNvPr id="21" name="TextBox 20"/>
+          <p:cNvPr id="18" name="TextBox 17"/>
           <p:cNvSpPr txBox="1"/>
           <p:nvPr/>
         </p:nvSpPr>
         <p:spPr>
           <a:xfrm>
-            <a:off x="9189720" y="4270248"/>
-            <a:ext cx="2286000" cy="1975104"/>
+            <a:off x="8321040" y="4270248"/>
+            <a:ext cx="3108960" cy="1975104"/>
           </a:xfrm>
           <a:prstGeom prst="rect">
             <a:avLst/>
@@ -5072,14 +4990,14 @@
           <a:lstStyle/>
           <a:p>
             <a:pPr>
-              <a:defRPr sz="750" b="1">
+              <a:defRPr sz="850" b="1">
                 <a:solidFill>
                   <a:srgbClr val="8C1515"/>
                 </a:solidFill>
               </a:defRPr>
             </a:pPr>
             <a:r>
-              <a:t>CIVIC GOVERNANCE</a:t>
+              <a:t>1-CLICK SCHOOL BOARD BRIEF</a:t>
             </a:r>
           </a:p>
           <a:p>
@@ -5087,29 +5005,59 @@
               <a:spcBef>
                 <a:spcPts val="300"/>
               </a:spcBef>
-              <a:defRPr sz="1100" b="1">
-                <a:solidFill>
-                  <a:srgbClr val="F3F4F6"/>
-                </a:solidFill>
-              </a:defRPr>
-            </a:pPr>
-            <a:r>
-              <a:t>1-Click Board Action Brief</a:t>
-            </a:r>
-          </a:p>
-          <a:p>
-            <a:pPr>
-              <a:spcBef>
-                <a:spcPts val="600"/>
-              </a:spcBef>
-              <a:defRPr sz="900">
-                <a:solidFill>
-                  <a:srgbClr val="9CA3AF"/>
-                </a:solidFill>
-              </a:defRPr>
-            </a:pPr>
-            <a:r>
-              <a:t>Compiles executive engineering brief, Form 990-T filing guide, and turnkey School Board Resolution.</a:t>
+              <a:defRPr sz="1200" b="1">
+                <a:solidFill>
+                  <a:srgbClr val="F8FAFC"/>
+                </a:solidFill>
+              </a:defRPr>
+            </a:pPr>
+            <a:r>
+              <a:t>Instant Action for Students</a:t>
+            </a:r>
+          </a:p>
+          <a:p>
+            <a:pPr>
+              <a:spcBef>
+                <a:spcPts val="300"/>
+              </a:spcBef>
+              <a:defRPr sz="950">
+                <a:solidFill>
+                  <a:srgbClr val="A0AEC0"/>
+                </a:solidFill>
+              </a:defRPr>
+            </a:pPr>
+            <a:r>
+              <a:t>- Generates 1-page financial summary</a:t>
+            </a:r>
+          </a:p>
+          <a:p>
+            <a:pPr>
+              <a:spcBef>
+                <a:spcPts val="300"/>
+              </a:spcBef>
+              <a:defRPr sz="950">
+                <a:solidFill>
+                  <a:srgbClr val="A0AEC0"/>
+                </a:solidFill>
+              </a:defRPr>
+            </a:pPr>
+            <a:r>
+              <a:t>- Includes ready-to-vote board resolution</a:t>
+            </a:r>
+          </a:p>
+          <a:p>
+            <a:pPr>
+              <a:spcBef>
+                <a:spcPts val="300"/>
+              </a:spcBef>
+              <a:defRPr sz="950">
+                <a:solidFill>
+                  <a:srgbClr val="A0AEC0"/>
+                </a:solidFill>
+              </a:defRPr>
+            </a:pPr>
+            <a:r>
+              <a:t>- Gives students the tools to speak to trustees</a:t>
             </a:r>
           </a:p>
         </p:txBody>
@@ -5147,7 +5095,7 @@
             <a:avLst/>
           </a:prstGeom>
           <a:solidFill>
-            <a:srgbClr val="090D16"/>
+            <a:srgbClr val="0B0F19"/>
           </a:solidFill>
           <a:ln>
             <a:noFill/>
@@ -5226,7 +5174,7 @@
         </p:nvSpPr>
         <p:spPr>
           <a:xfrm>
-            <a:off x="457200" y="109728"/>
+            <a:off x="548640" y="109728"/>
             <a:ext cx="2011680" cy="292608"/>
           </a:xfrm>
           <a:prstGeom prst="roundRect">
@@ -5278,7 +5226,7 @@
         </p:nvSpPr>
         <p:spPr>
           <a:xfrm>
-            <a:off x="2606040" y="73152"/>
+            <a:off x="2697480" y="73152"/>
             <a:ext cx="5943600" cy="365760"/>
           </a:xfrm>
           <a:prstGeom prst="rect">
@@ -5295,12 +5243,12 @@
             <a:pPr>
               <a:defRPr sz="950">
                 <a:solidFill>
-                  <a:srgbClr val="9CA3AF"/>
-                </a:solidFill>
-              </a:defRPr>
-            </a:pPr>
-            <a:r>
-              <a:t>SVYCA Youth For Earth Hackathon | Systems Architecture &amp; Climate Finance</a:t>
+                  <a:srgbClr val="A0AEC0"/>
+                </a:solidFill>
+              </a:defRPr>
+            </a:pPr>
+            <a:r>
+              <a:t>SVYCA Youth For Earth Hackathon  |  Clean Energy &amp; School Climate Action</a:t>
             </a:r>
           </a:p>
         </p:txBody>
@@ -5314,7 +5262,7 @@
         <p:spPr>
           <a:xfrm>
             <a:off x="10241280" y="73152"/>
-            <a:ext cx="1463040" cy="365760"/>
+            <a:ext cx="1371600" cy="365760"/>
           </a:xfrm>
           <a:prstGeom prst="rect">
             <a:avLst/>
@@ -5349,7 +5297,7 @@
         <p:spPr>
           <a:xfrm>
             <a:off x="0" y="493776"/>
-            <a:ext cx="12191695" cy="27432"/>
+            <a:ext cx="12191695" cy="22860"/>
           </a:xfrm>
           <a:prstGeom prst="rect">
             <a:avLst/>
@@ -5392,7 +5340,7 @@
         <p:spPr>
           <a:xfrm>
             <a:off x="548640" y="621792"/>
-            <a:ext cx="11091672" cy="1005840"/>
+            <a:ext cx="11091672" cy="1051560"/>
           </a:xfrm>
           <a:prstGeom prst="rect">
             <a:avLst/>
@@ -5413,7 +5361,7 @@
               </a:defRPr>
             </a:pPr>
             <a:r>
-              <a:t>CIVIC IMPLEMENTATION &amp; GOVERNANCE</a:t>
+              <a:t>TAKE ACTION</a:t>
             </a:r>
           </a:p>
           <a:p>
@@ -5421,14 +5369,14 @@
               <a:spcBef>
                 <a:spcPts val="200"/>
               </a:spcBef>
-              <a:defRPr sz="2100" b="1">
-                <a:solidFill>
-                  <a:srgbClr val="F3F4F6"/>
-                </a:solidFill>
-              </a:defRPr>
-            </a:pPr>
-            <a:r>
-              <a:t>Civic Climax: School Board Resolution Engine</a:t>
+              <a:defRPr sz="2200" b="1">
+                <a:solidFill>
+                  <a:srgbClr val="F8FAFC"/>
+                </a:solidFill>
+              </a:defRPr>
+            </a:pPr>
+            <a:r>
+              <a:t>Putting the Power in Students' Hands</a:t>
             </a:r>
           </a:p>
           <a:p>
@@ -5438,12 +5386,12 @@
               </a:spcBef>
               <a:defRPr sz="1100">
                 <a:solidFill>
-                  <a:srgbClr val="9CA3AF"/>
-                </a:solidFill>
-              </a:defRPr>
-            </a:pPr>
-            <a:r>
-              <a:t>Translating complex engineering and statutory tax law into actionable school board governance.</a:t>
+                  <a:srgbClr val="A0AEC0"/>
+                </a:solidFill>
+              </a:defRPr>
+            </a:pPr>
+            <a:r>
+              <a:t>How any high school student can walk into their school board meeting and kickstart clean energy.</a:t>
             </a:r>
           </a:p>
         </p:txBody>
@@ -5457,17 +5405,17 @@
         <p:spPr>
           <a:xfrm>
             <a:off x="548640" y="1737360"/>
-            <a:ext cx="5303520" cy="4663440"/>
+            <a:ext cx="3474720" cy="3657600"/>
           </a:xfrm>
           <a:prstGeom prst="roundRect">
             <a:avLst/>
           </a:prstGeom>
           <a:solidFill>
-            <a:srgbClr val="111827"/>
+            <a:srgbClr val="131A2B"/>
           </a:solidFill>
           <a:ln w="12700">
             <a:solidFill>
-              <a:srgbClr val="1F293D"/>
+              <a:srgbClr val="222E4A"/>
             </a:solidFill>
           </a:ln>
         </p:spPr>
@@ -5502,7 +5450,7 @@
         <p:spPr>
           <a:xfrm>
             <a:off x="548640" y="1737360"/>
-            <a:ext cx="5303520" cy="45720"/>
+            <a:ext cx="3474720" cy="54864"/>
           </a:xfrm>
           <a:prstGeom prst="roundRect">
             <a:avLst/>
@@ -5544,8 +5492,8 @@
         </p:nvSpPr>
         <p:spPr>
           <a:xfrm>
-            <a:off x="777240" y="1874519"/>
-            <a:ext cx="4846320" cy="4389120"/>
+            <a:off x="731520" y="1901952"/>
+            <a:ext cx="3108960" cy="3328416"/>
           </a:xfrm>
           <a:prstGeom prst="rect">
             <a:avLst/>
@@ -5559,14 +5507,29 @@
           <a:lstStyle/>
           <a:p>
             <a:pPr>
-              <a:defRPr sz="1100" b="1">
-                <a:solidFill>
-                  <a:srgbClr val="F3F4F6"/>
-                </a:solidFill>
-              </a:defRPr>
-            </a:pPr>
-            <a:r>
-              <a:t>AUTOMATED 1-CLICK ACTION BRIEF COMPONENTS</a:t>
+              <a:defRPr sz="2600" b="1">
+                <a:solidFill>
+                  <a:srgbClr val="38BDF8"/>
+                </a:solidFill>
+              </a:defRPr>
+            </a:pPr>
+            <a:r>
+              <a:t>Step 1</a:t>
+            </a:r>
+          </a:p>
+          <a:p>
+            <a:pPr>
+              <a:spcBef>
+                <a:spcPts val="200"/>
+              </a:spcBef>
+              <a:defRPr sz="900" b="1">
+                <a:solidFill>
+                  <a:srgbClr val="F8FAFC"/>
+                </a:solidFill>
+              </a:defRPr>
+            </a:pPr>
+            <a:r>
+              <a:t>FIND YOUR SCHOOL</a:t>
             </a:r>
           </a:p>
           <a:p>
@@ -5574,26 +5537,14 @@
               <a:spcBef>
                 <a:spcPts val="600"/>
               </a:spcBef>
-              <a:defRPr sz="900" b="1">
-                <a:solidFill>
-                  <a:srgbClr val="38BDF8"/>
-                </a:solidFill>
-              </a:defRPr>
-            </a:pPr>
-            <a:r>
-              <a:t>1. Engineering Specifications:</a:t>
-            </a:r>
-          </a:p>
-          <a:p>
-            <a:pPr>
-              <a:defRPr sz="850">
-                <a:solidFill>
-                  <a:srgbClr val="9CA3AF"/>
-                </a:solidFill>
-              </a:defRPr>
-            </a:pPr>
-            <a:r>
-              <a:t>System kW DC nameplate, net canopy catchment area (m²), and shaded parking stalls.</a:t>
+              <a:defRPr sz="1000">
+                <a:solidFill>
+                  <a:srgbClr val="A0AEC0"/>
+                </a:solidFill>
+              </a:defRPr>
+            </a:pPr>
+            <a:r>
+              <a:t>- Open SolarSchools USA on any laptop or phone</a:t>
             </a:r>
           </a:p>
           <a:p>
@@ -5601,26 +5552,14 @@
               <a:spcBef>
                 <a:spcPts val="600"/>
               </a:spcBef>
-              <a:defRPr sz="900" b="1">
-                <a:solidFill>
-                  <a:srgbClr val="38BDF8"/>
-                </a:solidFill>
-              </a:defRPr>
-            </a:pPr>
-            <a:r>
-              <a:t>2. Financial Waterfall Schedule:</a:t>
-            </a:r>
-          </a:p>
-          <a:p>
-            <a:pPr>
-              <a:defRPr sz="850">
-                <a:solidFill>
-                  <a:srgbClr val="9CA3AF"/>
-                </a:solidFill>
-              </a:defRPr>
-            </a:pPr>
-            <a:r>
-              <a:t>Turnkey capex, Section 6417 direct cash reimbursement check, and simple payback years.</a:t>
+              <a:defRPr sz="1000">
+                <a:solidFill>
+                  <a:srgbClr val="A0AEC0"/>
+                </a:solidFill>
+              </a:defRPr>
+            </a:pPr>
+            <a:r>
+              <a:t>- Type your school's name to view your parking lot</a:t>
             </a:r>
           </a:p>
           <a:p>
@@ -5628,80 +5567,14 @@
               <a:spcBef>
                 <a:spcPts val="600"/>
               </a:spcBef>
-              <a:defRPr sz="900" b="1">
-                <a:solidFill>
-                  <a:srgbClr val="38BDF8"/>
-                </a:solidFill>
-              </a:defRPr>
-            </a:pPr>
-            <a:r>
-              <a:t>3. Cost of Inaction Matrix:</a:t>
-            </a:r>
-          </a:p>
-          <a:p>
-            <a:pPr>
-              <a:defRPr sz="850">
-                <a:solidFill>
-                  <a:srgbClr val="9CA3AF"/>
-                </a:solidFill>
-              </a:defRPr>
-            </a:pPr>
-            <a:r>
-              <a:t>Quantified 5-year financial penalty if trustees delay procurement by even a single term.</a:t>
-            </a:r>
-          </a:p>
-          <a:p>
-            <a:pPr>
-              <a:spcBef>
-                <a:spcPts val="600"/>
-              </a:spcBef>
-              <a:defRPr sz="900" b="1">
-                <a:solidFill>
-                  <a:srgbClr val="38BDF8"/>
-                </a:solidFill>
-              </a:defRPr>
-            </a:pPr>
-            <a:r>
-              <a:t>4. IRS Statutory Compliance Guide:</a:t>
-            </a:r>
-          </a:p>
-          <a:p>
-            <a:pPr>
-              <a:defRPr sz="850">
-                <a:solidFill>
-                  <a:srgbClr val="9CA3AF"/>
-                </a:solidFill>
-              </a:defRPr>
-            </a:pPr>
-            <a:r>
-              <a:t>Step-by-step instructions for electronic Pre-Filing Registration and Form 990-T submission.</a:t>
-            </a:r>
-          </a:p>
-          <a:p>
-            <a:pPr>
-              <a:spcBef>
-                <a:spcPts val="600"/>
-              </a:spcBef>
-              <a:defRPr sz="900" b="1">
-                <a:solidFill>
-                  <a:srgbClr val="38BDF8"/>
-                </a:solidFill>
-              </a:defRPr>
-            </a:pPr>
-            <a:r>
-              <a:t>5. Template Board Resolution:</a:t>
-            </a:r>
-          </a:p>
-          <a:p>
-            <a:pPr>
-              <a:defRPr sz="850">
-                <a:solidFill>
-                  <a:srgbClr val="9CA3AF"/>
-                </a:solidFill>
-              </a:defRPr>
-            </a:pPr>
-            <a:r>
-              <a:t>Vote-ready legal language empowering trustees to authorize competitive RFP issuance.</a:t>
+              <a:defRPr sz="1000">
+                <a:solidFill>
+                  <a:srgbClr val="A0AEC0"/>
+                </a:solidFill>
+              </a:defRPr>
+            </a:pPr>
+            <a:r>
+              <a:t>- See your school's exact energy and savings in 5 seconds</a:t>
             </a:r>
           </a:p>
         </p:txBody>
@@ -5714,18 +5587,18 @@
         </p:nvSpPr>
         <p:spPr>
           <a:xfrm>
-            <a:off x="6217920" y="1737360"/>
-            <a:ext cx="5425135" cy="4663440"/>
+            <a:off x="4343400" y="1737360"/>
+            <a:ext cx="3474720" cy="3657600"/>
           </a:xfrm>
           <a:prstGeom prst="roundRect">
             <a:avLst/>
           </a:prstGeom>
           <a:solidFill>
-            <a:srgbClr val="111827"/>
+            <a:srgbClr val="131A2B"/>
           </a:solidFill>
           <a:ln w="12700">
             <a:solidFill>
-              <a:srgbClr val="1F293D"/>
+              <a:srgbClr val="222E4A"/>
             </a:solidFill>
           </a:ln>
         </p:spPr>
@@ -5759,8 +5632,191 @@
         </p:nvSpPr>
         <p:spPr>
           <a:xfrm>
-            <a:off x="6217920" y="1737360"/>
-            <a:ext cx="5425135" cy="45720"/>
+            <a:off x="4343400" y="1737360"/>
+            <a:ext cx="3474720" cy="54864"/>
+          </a:xfrm>
+          <a:prstGeom prst="roundRect">
+            <a:avLst/>
+          </a:prstGeom>
+          <a:solidFill>
+            <a:srgbClr val="10B981"/>
+          </a:solidFill>
+          <a:ln>
+            <a:noFill/>
+          </a:ln>
+        </p:spPr>
+        <p:style>
+          <a:lnRef idx="1">
+            <a:schemeClr val="accent1"/>
+          </a:lnRef>
+          <a:fillRef idx="3">
+            <a:schemeClr val="accent1"/>
+          </a:fillRef>
+          <a:effectRef idx="2">
+            <a:schemeClr val="accent1"/>
+          </a:effectRef>
+          <a:fontRef idx="minor">
+            <a:schemeClr val="lt1"/>
+          </a:fontRef>
+        </p:style>
+        <p:txBody>
+          <a:bodyPr rtlCol="0" anchor="ctr"/>
+          <a:lstStyle/>
+          <a:p>
+            <a:pPr algn="ctr"/>
+          </a:p>
+        </p:txBody>
+      </p:sp>
+      <p:sp>
+        <p:nvSpPr>
+          <p:cNvPr id="14" name="TextBox 13"/>
+          <p:cNvSpPr txBox="1"/>
+          <p:nvPr/>
+        </p:nvSpPr>
+        <p:spPr>
+          <a:xfrm>
+            <a:off x="4526280" y="1901952"/>
+            <a:ext cx="3108960" cy="3328416"/>
+          </a:xfrm>
+          <a:prstGeom prst="rect">
+            <a:avLst/>
+          </a:prstGeom>
+          <a:noFill/>
+        </p:spPr>
+        <p:txBody>
+          <a:bodyPr wrap="square">
+            <a:spAutoFit/>
+          </a:bodyPr>
+          <a:lstStyle/>
+          <a:p>
+            <a:pPr>
+              <a:defRPr sz="2600" b="1">
+                <a:solidFill>
+                  <a:srgbClr val="10B981"/>
+                </a:solidFill>
+              </a:defRPr>
+            </a:pPr>
+            <a:r>
+              <a:t>Step 2</a:t>
+            </a:r>
+          </a:p>
+          <a:p>
+            <a:pPr>
+              <a:spcBef>
+                <a:spcPts val="200"/>
+              </a:spcBef>
+              <a:defRPr sz="900" b="1">
+                <a:solidFill>
+                  <a:srgbClr val="F8FAFC"/>
+                </a:solidFill>
+              </a:defRPr>
+            </a:pPr>
+            <a:r>
+              <a:t>PRINT THE BRIEF</a:t>
+            </a:r>
+          </a:p>
+          <a:p>
+            <a:pPr>
+              <a:spcBef>
+                <a:spcPts val="600"/>
+              </a:spcBef>
+              <a:defRPr sz="1000">
+                <a:solidFill>
+                  <a:srgbClr val="A0AEC0"/>
+                </a:solidFill>
+              </a:defRPr>
+            </a:pPr>
+            <a:r>
+              <a:t>- Download our automated 1-page Action Brief</a:t>
+            </a:r>
+          </a:p>
+          <a:p>
+            <a:pPr>
+              <a:spcBef>
+                <a:spcPts val="600"/>
+              </a:spcBef>
+              <a:defRPr sz="1000">
+                <a:solidFill>
+                  <a:srgbClr val="A0AEC0"/>
+                </a:solidFill>
+              </a:defRPr>
+            </a:pPr>
+            <a:r>
+              <a:t>- Shows the exact federal cash grant for your district</a:t>
+            </a:r>
+          </a:p>
+          <a:p>
+            <a:pPr>
+              <a:spcBef>
+                <a:spcPts val="600"/>
+              </a:spcBef>
+              <a:defRPr sz="1000">
+                <a:solidFill>
+                  <a:srgbClr val="A0AEC0"/>
+                </a:solidFill>
+              </a:defRPr>
+            </a:pPr>
+            <a:r>
+              <a:t>- Share it with your principal, teachers, and student council</a:t>
+            </a:r>
+          </a:p>
+        </p:txBody>
+      </p:sp>
+      <p:sp>
+        <p:nvSpPr>
+          <p:cNvPr id="15" name="Rounded Rectangle 14"/>
+          <p:cNvSpPr/>
+          <p:nvPr/>
+        </p:nvSpPr>
+        <p:spPr>
+          <a:xfrm>
+            <a:off x="8138160" y="1737360"/>
+            <a:ext cx="3474720" cy="3657600"/>
+          </a:xfrm>
+          <a:prstGeom prst="roundRect">
+            <a:avLst/>
+          </a:prstGeom>
+          <a:solidFill>
+            <a:srgbClr val="131A2B"/>
+          </a:solidFill>
+          <a:ln w="12700">
+            <a:solidFill>
+              <a:srgbClr val="222E4A"/>
+            </a:solidFill>
+          </a:ln>
+        </p:spPr>
+        <p:style>
+          <a:lnRef idx="1">
+            <a:schemeClr val="accent1"/>
+          </a:lnRef>
+          <a:fillRef idx="3">
+            <a:schemeClr val="accent1"/>
+          </a:fillRef>
+          <a:effectRef idx="2">
+            <a:schemeClr val="accent1"/>
+          </a:effectRef>
+          <a:fontRef idx="minor">
+            <a:schemeClr val="lt1"/>
+          </a:fontRef>
+        </p:style>
+        <p:txBody>
+          <a:bodyPr rtlCol="0" anchor="ctr"/>
+          <a:lstStyle/>
+          <a:p>
+            <a:pPr algn="ctr"/>
+          </a:p>
+        </p:txBody>
+      </p:sp>
+      <p:sp>
+        <p:nvSpPr>
+          <p:cNvPr id="16" name="Rounded Rectangle 15"/>
+          <p:cNvSpPr/>
+          <p:nvPr/>
+        </p:nvSpPr>
+        <p:spPr>
+          <a:xfrm>
+            <a:off x="8138160" y="1737360"/>
+            <a:ext cx="3474720" cy="54864"/>
           </a:xfrm>
           <a:prstGeom prst="roundRect">
             <a:avLst/>
@@ -5796,14 +5852,14 @@
       </p:sp>
       <p:sp>
         <p:nvSpPr>
-          <p:cNvPr id="14" name="TextBox 13"/>
+          <p:cNvPr id="17" name="TextBox 16"/>
           <p:cNvSpPr txBox="1"/>
           <p:nvPr/>
         </p:nvSpPr>
         <p:spPr>
           <a:xfrm>
-            <a:off x="6446520" y="1874519"/>
-            <a:ext cx="4937760" cy="4389120"/>
+            <a:off x="8321040" y="1901952"/>
+            <a:ext cx="3108960" cy="3328416"/>
           </a:xfrm>
           <a:prstGeom prst="rect">
             <a:avLst/>
@@ -5817,75 +5873,169 @@
           <a:lstStyle/>
           <a:p>
             <a:pPr>
+              <a:defRPr sz="2600" b="1">
+                <a:solidFill>
+                  <a:srgbClr val="8C1515"/>
+                </a:solidFill>
+              </a:defRPr>
+            </a:pPr>
+            <a:r>
+              <a:t>Step 3</a:t>
+            </a:r>
+          </a:p>
+          <a:p>
+            <a:pPr>
+              <a:spcBef>
+                <a:spcPts val="200"/>
+              </a:spcBef>
+              <a:defRPr sz="900" b="1">
+                <a:solidFill>
+                  <a:srgbClr val="F8FAFC"/>
+                </a:solidFill>
+              </a:defRPr>
+            </a:pPr>
+            <a:r>
+              <a:t>SPEAK TO TRUSTEES</a:t>
+            </a:r>
+          </a:p>
+          <a:p>
+            <a:pPr>
+              <a:spcBef>
+                <a:spcPts val="600"/>
+              </a:spcBef>
+              <a:defRPr sz="1000">
+                <a:solidFill>
+                  <a:srgbClr val="A0AEC0"/>
+                </a:solidFill>
+              </a:defRPr>
+            </a:pPr>
+            <a:r>
+              <a:t>- Use our ready-to-vote School Board Resolution</a:t>
+            </a:r>
+          </a:p>
+          <a:p>
+            <a:pPr>
+              <a:spcBef>
+                <a:spcPts val="600"/>
+              </a:spcBef>
+              <a:defRPr sz="1000">
+                <a:solidFill>
+                  <a:srgbClr val="A0AEC0"/>
+                </a:solidFill>
+              </a:defRPr>
+            </a:pPr>
+            <a:r>
+              <a:t>- Show trustees how to claim federal cash before it expires</a:t>
+            </a:r>
+          </a:p>
+          <a:p>
+            <a:pPr>
+              <a:spcBef>
+                <a:spcPts val="600"/>
+              </a:spcBef>
+              <a:defRPr sz="1000">
+                <a:solidFill>
+                  <a:srgbClr val="A0AEC0"/>
+                </a:solidFill>
+              </a:defRPr>
+            </a:pPr>
+            <a:r>
+              <a:t>- Turn student climate advocacy into real, funded infrastructure</a:t>
+            </a:r>
+          </a:p>
+        </p:txBody>
+      </p:sp>
+      <p:sp>
+        <p:nvSpPr>
+          <p:cNvPr id="18" name="Rounded Rectangle 17"/>
+          <p:cNvSpPr/>
+          <p:nvPr/>
+        </p:nvSpPr>
+        <p:spPr>
+          <a:xfrm>
+            <a:off x="548640" y="5577840"/>
+            <a:ext cx="11094415" cy="777240"/>
+          </a:xfrm>
+          <a:prstGeom prst="roundRect">
+            <a:avLst/>
+          </a:prstGeom>
+          <a:solidFill>
+            <a:srgbClr val="131A2B"/>
+          </a:solidFill>
+          <a:ln w="12700">
+            <a:solidFill>
+              <a:srgbClr val="8C1515"/>
+            </a:solidFill>
+          </a:ln>
+        </p:spPr>
+        <p:style>
+          <a:lnRef idx="1">
+            <a:schemeClr val="accent1"/>
+          </a:lnRef>
+          <a:fillRef idx="3">
+            <a:schemeClr val="accent1"/>
+          </a:fillRef>
+          <a:effectRef idx="2">
+            <a:schemeClr val="accent1"/>
+          </a:effectRef>
+          <a:fontRef idx="minor">
+            <a:schemeClr val="lt1"/>
+          </a:fontRef>
+        </p:style>
+        <p:txBody>
+          <a:bodyPr rtlCol="0" anchor="ctr"/>
+          <a:lstStyle/>
+          <a:p>
+            <a:pPr algn="ctr"/>
+          </a:p>
+        </p:txBody>
+      </p:sp>
+      <p:sp>
+        <p:nvSpPr>
+          <p:cNvPr id="19" name="TextBox 18"/>
+          <p:cNvSpPr txBox="1"/>
+          <p:nvPr/>
+        </p:nvSpPr>
+        <p:spPr>
+          <a:xfrm>
+            <a:off x="731520" y="5623560"/>
+            <a:ext cx="10698480" cy="685800"/>
+          </a:xfrm>
+          <a:prstGeom prst="rect">
+            <a:avLst/>
+          </a:prstGeom>
+          <a:noFill/>
+        </p:spPr>
+        <p:txBody>
+          <a:bodyPr wrap="square">
+            <a:spAutoFit/>
+          </a:bodyPr>
+          <a:lstStyle/>
+          <a:p>
+            <a:pPr>
+              <a:defRPr sz="900" b="1">
+                <a:solidFill>
+                  <a:srgbClr val="38BDF8"/>
+                </a:solidFill>
+              </a:defRPr>
+            </a:pPr>
+            <a:r>
+              <a:t>THE TIME TO ACT IS NOW</a:t>
+            </a:r>
+          </a:p>
+          <a:p>
+            <a:pPr>
+              <a:spcBef>
+                <a:spcPts val="200"/>
+              </a:spcBef>
               <a:defRPr sz="1100" b="1">
                 <a:solidFill>
-                  <a:srgbClr val="10B981"/>
-                </a:solidFill>
-              </a:defRPr>
-            </a:pPr>
-            <a:r>
-              <a:t>GENERATED BOARD RESOLUTION LANGUAGE</a:t>
-            </a:r>
-          </a:p>
-          <a:p>
-            <a:pPr>
-              <a:spcBef>
-                <a:spcPts val="600"/>
-              </a:spcBef>
-              <a:defRPr sz="800">
-                <a:solidFill>
-                  <a:srgbClr val="CBD5E1"/>
-                </a:solidFill>
-              </a:defRPr>
-            </a:pPr>
-            <a:r>
-              <a:t>RESOLUTION NO. 2026-SOLAR-01</a:t>
-            </a:r>
-            <a:br/>
-            <a:r>
-              <a:t>BOARD OF TRUSTEES, PUBLIC SCHOOL DISTRICT</a:t>
-            </a:r>
-            <a:br/>
-            <a:br/>
-            <a:r>
-              <a:t>WHEREAS, the District expends substantial operating funds annually on retail electric utility tariffs; and</a:t>
-            </a:r>
-            <a:br/>
-            <a:br/>
-            <a:r>
-              <a:t>WHEREAS, Section 6417 of the Internal Revenue Code (26 U.S.C. § 6417) provides direct elective cash reimbursement payments from the U.S. Treasury covering 30% to 50% of clean energy canopy installations; and</a:t>
-            </a:r>
-            <a:br/>
-            <a:br/>
-            <a:r>
-              <a:t>NOW, THEREFORE, BE IT RESOLVED that the Board directs the Superintendent to initiate a competitive RFP for parking lot solar carports to capture available federal Direct Pay funds and protect operating budgets.</a:t>
-            </a:r>
-          </a:p>
-          <a:p>
-            <a:pPr>
-              <a:spcBef>
-                <a:spcPts val="1400"/>
-              </a:spcBef>
-              <a:defRPr sz="1000" b="1">
-                <a:solidFill>
-                  <a:srgbClr val="F3F4F6"/>
-                </a:solidFill>
-              </a:defRPr>
-            </a:pPr>
-            <a:r>
-              <a:t>EVERY YEAR OF DELAY COSTS A SINGLE HIGH SCHOOL $140,000.</a:t>
-            </a:r>
-          </a:p>
-          <a:p>
-            <a:pPr>
-              <a:defRPr sz="900">
-                <a:solidFill>
-                  <a:srgbClr val="38BDF8"/>
-                </a:solidFill>
-              </a:defRPr>
-            </a:pPr>
-            <a:r>
-              <a:t>Let's shade our parking lots, capture federal funds, and power our classrooms.</a:t>
+                  <a:srgbClr val="F8FAFC"/>
+                </a:solidFill>
+              </a:defRPr>
+            </a:pPr>
+            <a:r>
+              <a:t>Our schools have the sunshine. The federal government has the cash. Let's shade our parking lots and power our classrooms!</a:t>
             </a:r>
           </a:p>
         </p:txBody>
@@ -5923,7 +6073,7 @@
             <a:avLst/>
           </a:prstGeom>
           <a:solidFill>
-            <a:srgbClr val="090D16"/>
+            <a:srgbClr val="0B0F19"/>
           </a:solidFill>
           <a:ln>
             <a:noFill/>
@@ -6002,7 +6152,7 @@
         </p:nvSpPr>
         <p:spPr>
           <a:xfrm>
-            <a:off x="457200" y="109728"/>
+            <a:off x="548640" y="109728"/>
             <a:ext cx="2011680" cy="292608"/>
           </a:xfrm>
           <a:prstGeom prst="roundRect">
@@ -6054,7 +6204,7 @@
         </p:nvSpPr>
         <p:spPr>
           <a:xfrm>
-            <a:off x="2606040" y="73152"/>
+            <a:off x="2697480" y="73152"/>
             <a:ext cx="5943600" cy="365760"/>
           </a:xfrm>
           <a:prstGeom prst="rect">
@@ -6071,12 +6221,12 @@
             <a:pPr>
               <a:defRPr sz="950">
                 <a:solidFill>
-                  <a:srgbClr val="9CA3AF"/>
-                </a:solidFill>
-              </a:defRPr>
-            </a:pPr>
-            <a:r>
-              <a:t>SVYCA Youth For Earth Hackathon | Systems Architecture &amp; Climate Finance</a:t>
+                  <a:srgbClr val="A0AEC0"/>
+                </a:solidFill>
+              </a:defRPr>
+            </a:pPr>
+            <a:r>
+              <a:t>SVYCA Youth For Earth Hackathon  |  Clean Energy &amp; School Climate Action</a:t>
             </a:r>
           </a:p>
         </p:txBody>
@@ -6090,7 +6240,7 @@
         <p:spPr>
           <a:xfrm>
             <a:off x="10241280" y="73152"/>
-            <a:ext cx="1463040" cy="365760"/>
+            <a:ext cx="1371600" cy="365760"/>
           </a:xfrm>
           <a:prstGeom prst="rect">
             <a:avLst/>
@@ -6125,7 +6275,7 @@
         <p:spPr>
           <a:xfrm>
             <a:off x="0" y="493776"/>
-            <a:ext cx="2438339" cy="27432"/>
+            <a:ext cx="2438339" cy="22860"/>
           </a:xfrm>
           <a:prstGeom prst="rect">
             <a:avLst/>
@@ -6168,7 +6318,7 @@
         <p:spPr>
           <a:xfrm>
             <a:off x="548640" y="621792"/>
-            <a:ext cx="11091672" cy="1005840"/>
+            <a:ext cx="11091672" cy="1051560"/>
           </a:xfrm>
           <a:prstGeom prst="rect">
             <a:avLst/>
@@ -6189,7 +6339,7 @@
               </a:defRPr>
             </a:pPr>
             <a:r>
-              <a:t>PROBLEM FORMULATION</a:t>
+              <a:t>THE REAL PROBLEM</a:t>
             </a:r>
           </a:p>
           <a:p>
@@ -6197,14 +6347,14 @@
               <a:spcBef>
                 <a:spcPts val="200"/>
               </a:spcBef>
-              <a:defRPr sz="2100" b="1">
-                <a:solidFill>
-                  <a:srgbClr val="F3F4F6"/>
-                </a:solidFill>
-              </a:defRPr>
-            </a:pPr>
-            <a:r>
-              <a:t>Spatial Inefficiency &amp; The $8B Utility Drain</a:t>
+              <a:defRPr sz="2200" b="1">
+                <a:solidFill>
+                  <a:srgbClr val="F8FAFC"/>
+                </a:solidFill>
+              </a:defRPr>
+            </a:pPr>
+            <a:r>
+              <a:t>Our Parking Lots Are Baking. Our Schools Are Bleeding Cash.</a:t>
             </a:r>
           </a:p>
           <a:p>
@@ -6214,12 +6364,12 @@
               </a:spcBef>
               <a:defRPr sz="1100">
                 <a:solidFill>
-                  <a:srgbClr val="9CA3AF"/>
-                </a:solidFill>
-              </a:defRPr>
-            </a:pPr>
-            <a:r>
-              <a:t>Thermodynamic microclimate heat islands and institutional capital barriers trap 100,000+ public schools.</a:t>
+                  <a:srgbClr val="A0AEC0"/>
+                </a:solidFill>
+              </a:defRPr>
+            </a:pPr>
+            <a:r>
+              <a:t>Millions of square feet of black asphalt are absorbing heat and draining school budgets.</a:t>
             </a:r>
           </a:p>
         </p:txBody>
@@ -6233,17 +6383,17 @@
         <p:spPr>
           <a:xfrm>
             <a:off x="548640" y="1737360"/>
-            <a:ext cx="3474720" cy="4663440"/>
+            <a:ext cx="3474720" cy="3657600"/>
           </a:xfrm>
           <a:prstGeom prst="roundRect">
             <a:avLst/>
           </a:prstGeom>
           <a:solidFill>
-            <a:srgbClr val="111827"/>
+            <a:srgbClr val="131A2B"/>
           </a:solidFill>
           <a:ln w="12700">
             <a:solidFill>
-              <a:srgbClr val="1F293D"/>
+              <a:srgbClr val="222E4A"/>
             </a:solidFill>
           </a:ln>
         </p:spPr>
@@ -6278,7 +6428,7 @@
         <p:spPr>
           <a:xfrm>
             <a:off x="548640" y="1737360"/>
-            <a:ext cx="3474720" cy="45720"/>
+            <a:ext cx="3474720" cy="54864"/>
           </a:xfrm>
           <a:prstGeom prst="roundRect">
             <a:avLst/>
@@ -6320,8 +6470,8 @@
         </p:nvSpPr>
         <p:spPr>
           <a:xfrm>
-            <a:off x="731520" y="1874519"/>
-            <a:ext cx="3108960" cy="4297680"/>
+            <a:off x="731520" y="1901952"/>
+            <a:ext cx="3108960" cy="3328416"/>
           </a:xfrm>
           <a:prstGeom prst="rect">
             <a:avLst/>
@@ -6335,14 +6485,14 @@
           <a:lstStyle/>
           <a:p>
             <a:pPr>
-              <a:defRPr sz="3000" b="1">
+              <a:defRPr sz="3800" b="1">
                 <a:solidFill>
                   <a:srgbClr val="EF4444"/>
                 </a:solidFill>
               </a:defRPr>
             </a:pPr>
             <a:r>
-              <a:t>$8.0B / yr</a:t>
+              <a:t>140°F</a:t>
             </a:r>
           </a:p>
           <a:p>
@@ -6350,34 +6500,59 @@
               <a:spcBef>
                 <a:spcPts val="200"/>
               </a:spcBef>
-              <a:defRPr sz="800" b="1">
-                <a:solidFill>
-                  <a:srgbClr val="6B7280"/>
-                </a:solidFill>
-              </a:defRPr>
-            </a:pPr>
-            <a:r>
-              <a:t>EIA MACROECONOMIC UTILITY DRAIN</a:t>
-            </a:r>
-          </a:p>
-          <a:p>
-            <a:pPr>
-              <a:spcBef>
-                <a:spcPts val="1200"/>
+              <a:defRPr sz="900" b="1">
+                <a:solidFill>
+                  <a:srgbClr val="F8FAFC"/>
+                </a:solidFill>
+              </a:defRPr>
+            </a:pPr>
+            <a:r>
+              <a:t>BLAZING ASPHALT</a:t>
+            </a:r>
+          </a:p>
+          <a:p>
+            <a:pPr>
+              <a:spcBef>
+                <a:spcPts val="600"/>
               </a:spcBef>
               <a:defRPr sz="1000">
                 <a:solidFill>
-                  <a:srgbClr val="9CA3AF"/>
-                </a:solidFill>
-              </a:defRPr>
-            </a:pPr>
-            <a:r>
-              <a:t>According to U.S. EIA commercial data, electricity is public K-12 districts' second-largest operating cost after instructional staff salaries.</a:t>
-            </a:r>
-            <a:br/>
-            <a:br/>
-            <a:r>
-              <a:t>School boards surrender operating revenue to retail monopolies (e.g. PG&amp;E Schedule B-19 at $0.345/kWh).</a:t>
+                  <a:srgbClr val="A0AEC0"/>
+                </a:solidFill>
+              </a:defRPr>
+            </a:pPr>
+            <a:r>
+              <a:t>- Empty blacktop bakes student and staff cars</a:t>
+            </a:r>
+          </a:p>
+          <a:p>
+            <a:pPr>
+              <a:spcBef>
+                <a:spcPts val="600"/>
+              </a:spcBef>
+              <a:defRPr sz="1000">
+                <a:solidFill>
+                  <a:srgbClr val="A0AEC0"/>
+                </a:solidFill>
+              </a:defRPr>
+            </a:pPr>
+            <a:r>
+              <a:t>- Creates campus heat islands in hot months</a:t>
+            </a:r>
+          </a:p>
+          <a:p>
+            <a:pPr>
+              <a:spcBef>
+                <a:spcPts val="600"/>
+              </a:spcBef>
+              <a:defRPr sz="1000">
+                <a:solidFill>
+                  <a:srgbClr val="A0AEC0"/>
+                </a:solidFill>
+              </a:defRPr>
+            </a:pPr>
+            <a:r>
+              <a:t>- Playground asphalt gets too hot to use safely</a:t>
             </a:r>
           </a:p>
         </p:txBody>
@@ -6390,18 +6565,18 @@
         </p:nvSpPr>
         <p:spPr>
           <a:xfrm>
-            <a:off x="4358030" y="1737360"/>
-            <a:ext cx="3474720" cy="4663440"/>
+            <a:off x="4343400" y="1737360"/>
+            <a:ext cx="3474720" cy="3657600"/>
           </a:xfrm>
           <a:prstGeom prst="roundRect">
             <a:avLst/>
           </a:prstGeom>
           <a:solidFill>
-            <a:srgbClr val="111827"/>
+            <a:srgbClr val="131A2B"/>
           </a:solidFill>
           <a:ln w="12700">
             <a:solidFill>
-              <a:srgbClr val="1F293D"/>
+              <a:srgbClr val="222E4A"/>
             </a:solidFill>
           </a:ln>
         </p:spPr>
@@ -6435,8 +6610,8 @@
         </p:nvSpPr>
         <p:spPr>
           <a:xfrm>
-            <a:off x="4358030" y="1737360"/>
-            <a:ext cx="3474720" cy="45720"/>
+            <a:off x="4343400" y="1737360"/>
+            <a:ext cx="3474720" cy="54864"/>
           </a:xfrm>
           <a:prstGeom prst="roundRect">
             <a:avLst/>
@@ -6478,8 +6653,8 @@
         </p:nvSpPr>
         <p:spPr>
           <a:xfrm>
-            <a:off x="4540910" y="1874519"/>
-            <a:ext cx="3108960" cy="4297680"/>
+            <a:off x="4526280" y="1901952"/>
+            <a:ext cx="3108960" cy="3328416"/>
           </a:xfrm>
           <a:prstGeom prst="rect">
             <a:avLst/>
@@ -6493,14 +6668,14 @@
           <a:lstStyle/>
           <a:p>
             <a:pPr>
-              <a:defRPr sz="3000" b="1">
+              <a:defRPr sz="3800" b="1">
                 <a:solidFill>
                   <a:srgbClr val="EF4444"/>
                 </a:solidFill>
               </a:defRPr>
             </a:pPr>
             <a:r>
-              <a:t>+35 to 45°F</a:t>
+              <a:t>$8.0 Billion</a:t>
             </a:r>
           </a:p>
           <a:p>
@@ -6508,34 +6683,59 @@
               <a:spcBef>
                 <a:spcPts val="200"/>
               </a:spcBef>
-              <a:defRPr sz="800" b="1">
-                <a:solidFill>
-                  <a:srgbClr val="6B7280"/>
-                </a:solidFill>
-              </a:defRPr>
-            </a:pPr>
-            <a:r>
-              <a:t>ASPHALT ALBEDO DEGRADATION</a:t>
-            </a:r>
-          </a:p>
-          <a:p>
-            <a:pPr>
-              <a:spcBef>
-                <a:spcPts val="1200"/>
+              <a:defRPr sz="900" b="1">
+                <a:solidFill>
+                  <a:srgbClr val="F8FAFC"/>
+                </a:solidFill>
+              </a:defRPr>
+            </a:pPr>
+            <a:r>
+              <a:t>WASTED POWER BILLS</a:t>
+            </a:r>
+          </a:p>
+          <a:p>
+            <a:pPr>
+              <a:spcBef>
+                <a:spcPts val="600"/>
               </a:spcBef>
               <a:defRPr sz="1000">
                 <a:solidFill>
-                  <a:srgbClr val="9CA3AF"/>
-                </a:solidFill>
-              </a:defRPr>
-            </a:pPr>
-            <a:r>
-              <a:t>Unshaded asphalt has a solar reflectance albedo of alpha ≈ 0.05–0.10, absorbing direct beam irradiance and elevating pavement temperatures to 145°F.</a:t>
-            </a:r>
-            <a:br/>
-            <a:br/>
-            <a:r>
-              <a:t>Idle parking lots act as massive thermal heat sinks across campus microclimates instead of generating clean localized power.</a:t>
+                  <a:srgbClr val="A0AEC0"/>
+                </a:solidFill>
+              </a:defRPr>
+            </a:pPr>
+            <a:r>
+              <a:t>- Schools spend more on electricity than supplies</a:t>
+            </a:r>
+          </a:p>
+          <a:p>
+            <a:pPr>
+              <a:spcBef>
+                <a:spcPts val="600"/>
+              </a:spcBef>
+              <a:defRPr sz="1000">
+                <a:solidFill>
+                  <a:srgbClr val="A0AEC0"/>
+                </a:solidFill>
+              </a:defRPr>
+            </a:pPr>
+            <a:r>
+              <a:t>- Money flows straight to monopoly power companies</a:t>
+            </a:r>
+          </a:p>
+          <a:p>
+            <a:pPr>
+              <a:spcBef>
+                <a:spcPts val="600"/>
+              </a:spcBef>
+              <a:defRPr sz="1000">
+                <a:solidFill>
+                  <a:srgbClr val="A0AEC0"/>
+                </a:solidFill>
+              </a:defRPr>
+            </a:pPr>
+            <a:r>
+              <a:t>- Funds that could hire teachers are lost every year</a:t>
             </a:r>
           </a:p>
         </p:txBody>
@@ -6548,18 +6748,18 @@
         </p:nvSpPr>
         <p:spPr>
           <a:xfrm>
-            <a:off x="8168335" y="1737360"/>
-            <a:ext cx="3474720" cy="4663440"/>
+            <a:off x="8138160" y="1737360"/>
+            <a:ext cx="3474720" cy="3657600"/>
           </a:xfrm>
           <a:prstGeom prst="roundRect">
             <a:avLst/>
           </a:prstGeom>
           <a:solidFill>
-            <a:srgbClr val="111827"/>
+            <a:srgbClr val="131A2B"/>
           </a:solidFill>
           <a:ln w="12700">
             <a:solidFill>
-              <a:srgbClr val="1F293D"/>
+              <a:srgbClr val="222E4A"/>
             </a:solidFill>
           </a:ln>
         </p:spPr>
@@ -6593,8 +6793,8 @@
         </p:nvSpPr>
         <p:spPr>
           <a:xfrm>
-            <a:off x="8168335" y="1737360"/>
-            <a:ext cx="3474720" cy="45720"/>
+            <a:off x="8138160" y="1737360"/>
+            <a:ext cx="3474720" cy="54864"/>
           </a:xfrm>
           <a:prstGeom prst="roundRect">
             <a:avLst/>
@@ -6636,8 +6836,8 @@
         </p:nvSpPr>
         <p:spPr>
           <a:xfrm>
-            <a:off x="8351215" y="1874519"/>
-            <a:ext cx="3108960" cy="4297680"/>
+            <a:off x="8321040" y="1901952"/>
+            <a:ext cx="3108960" cy="3328416"/>
           </a:xfrm>
           <a:prstGeom prst="rect">
             <a:avLst/>
@@ -6651,14 +6851,14 @@
           <a:lstStyle/>
           <a:p>
             <a:pPr>
-              <a:defRPr sz="3000" b="1">
+              <a:defRPr sz="3800" b="1">
                 <a:solidFill>
                   <a:srgbClr val="EF4444"/>
                 </a:solidFill>
               </a:defRPr>
             </a:pPr>
             <a:r>
-              <a:t>IRC § 48</a:t>
+              <a:t>$25,000</a:t>
             </a:r>
           </a:p>
           <a:p>
@@ -6666,34 +6866,154 @@
               <a:spcBef>
                 <a:spcPts val="200"/>
               </a:spcBef>
-              <a:defRPr sz="800" b="1">
-                <a:solidFill>
-                  <a:srgbClr val="6B7280"/>
-                </a:solidFill>
-              </a:defRPr>
-            </a:pPr>
-            <a:r>
-              <a:t>PRE-2022 TAX-EXEMPT BARRIER</a:t>
-            </a:r>
-          </a:p>
-          <a:p>
-            <a:pPr>
-              <a:spcBef>
-                <a:spcPts val="1200"/>
+              <a:defRPr sz="900" b="1">
+                <a:solidFill>
+                  <a:srgbClr val="F8FAFC"/>
+                </a:solidFill>
+              </a:defRPr>
+            </a:pPr>
+            <a:r>
+              <a:t>THE CONSULTANT WALL</a:t>
+            </a:r>
+          </a:p>
+          <a:p>
+            <a:pPr>
+              <a:spcBef>
+                <a:spcPts val="600"/>
               </a:spcBef>
               <a:defRPr sz="1000">
                 <a:solidFill>
-                  <a:srgbClr val="9CA3AF"/>
-                </a:solidFill>
-              </a:defRPr>
-            </a:pPr>
-            <a:r>
-              <a:t>Because school districts are tax-exempt, they could not utilize federal solar tax credits without predatory third-party tax-equity flip leases.</a:t>
-            </a:r>
-            <a:br/>
-            <a:br/>
-            <a:r>
-              <a:t>Private solar engineering consultants charge $15,000 to $25,000 per feasibility assessment, pricing out suburban, rural, and Title I schools.</a:t>
+                  <a:srgbClr val="A0AEC0"/>
+                </a:solidFill>
+              </a:defRPr>
+            </a:pPr>
+            <a:r>
+              <a:t>- Engineering feasibility studies cost thousands</a:t>
+            </a:r>
+          </a:p>
+          <a:p>
+            <a:pPr>
+              <a:spcBef>
+                <a:spcPts val="600"/>
+              </a:spcBef>
+              <a:defRPr sz="1000">
+                <a:solidFill>
+                  <a:srgbClr val="A0AEC0"/>
+                </a:solidFill>
+              </a:defRPr>
+            </a:pPr>
+            <a:r>
+              <a:t>- Takes 6 to 12 months just to get an estimate</a:t>
+            </a:r>
+          </a:p>
+          <a:p>
+            <a:pPr>
+              <a:spcBef>
+                <a:spcPts val="600"/>
+              </a:spcBef>
+              <a:defRPr sz="1000">
+                <a:solidFill>
+                  <a:srgbClr val="A0AEC0"/>
+                </a:solidFill>
+              </a:defRPr>
+            </a:pPr>
+            <a:r>
+              <a:t>- Leaves under-resourced schools completely locked out</a:t>
+            </a:r>
+          </a:p>
+        </p:txBody>
+      </p:sp>
+      <p:sp>
+        <p:nvSpPr>
+          <p:cNvPr id="18" name="Rounded Rectangle 17"/>
+          <p:cNvSpPr/>
+          <p:nvPr/>
+        </p:nvSpPr>
+        <p:spPr>
+          <a:xfrm>
+            <a:off x="548640" y="5577840"/>
+            <a:ext cx="11094415" cy="777240"/>
+          </a:xfrm>
+          <a:prstGeom prst="roundRect">
+            <a:avLst/>
+          </a:prstGeom>
+          <a:solidFill>
+            <a:srgbClr val="131A2B"/>
+          </a:solidFill>
+          <a:ln w="12700">
+            <a:solidFill>
+              <a:srgbClr val="EF4444"/>
+            </a:solidFill>
+          </a:ln>
+        </p:spPr>
+        <p:style>
+          <a:lnRef idx="1">
+            <a:schemeClr val="accent1"/>
+          </a:lnRef>
+          <a:fillRef idx="3">
+            <a:schemeClr val="accent1"/>
+          </a:fillRef>
+          <a:effectRef idx="2">
+            <a:schemeClr val="accent1"/>
+          </a:effectRef>
+          <a:fontRef idx="minor">
+            <a:schemeClr val="lt1"/>
+          </a:fontRef>
+        </p:style>
+        <p:txBody>
+          <a:bodyPr rtlCol="0" anchor="ctr"/>
+          <a:lstStyle/>
+          <a:p>
+            <a:pPr algn="ctr"/>
+          </a:p>
+        </p:txBody>
+      </p:sp>
+      <p:sp>
+        <p:nvSpPr>
+          <p:cNvPr id="19" name="TextBox 18"/>
+          <p:cNvSpPr txBox="1"/>
+          <p:nvPr/>
+        </p:nvSpPr>
+        <p:spPr>
+          <a:xfrm>
+            <a:off x="731520" y="5623560"/>
+            <a:ext cx="10698480" cy="685800"/>
+          </a:xfrm>
+          <a:prstGeom prst="rect">
+            <a:avLst/>
+          </a:prstGeom>
+          <a:noFill/>
+        </p:spPr>
+        <p:txBody>
+          <a:bodyPr wrap="square">
+            <a:spAutoFit/>
+          </a:bodyPr>
+          <a:lstStyle/>
+          <a:p>
+            <a:pPr>
+              <a:defRPr sz="900" b="1">
+                <a:solidFill>
+                  <a:srgbClr val="EF4444"/>
+                </a:solidFill>
+              </a:defRPr>
+            </a:pPr>
+            <a:r>
+              <a:t>THE BOTTOM LINE FOR STUDENTS</a:t>
+            </a:r>
+          </a:p>
+          <a:p>
+            <a:pPr>
+              <a:spcBef>
+                <a:spcPts val="200"/>
+              </a:spcBef>
+              <a:defRPr sz="1100" b="1">
+                <a:solidFill>
+                  <a:srgbClr val="F8FAFC"/>
+                </a:solidFill>
+              </a:defRPr>
+            </a:pPr>
+            <a:r>
+              <a:t>Every dollar our school district pays to utility companies is a dollar taken away from teachers, arts, and classrooms.</a:t>
             </a:r>
           </a:p>
         </p:txBody>
@@ -6731,7 +7051,7 @@
             <a:avLst/>
           </a:prstGeom>
           <a:solidFill>
-            <a:srgbClr val="090D16"/>
+            <a:srgbClr val="0B0F19"/>
           </a:solidFill>
           <a:ln>
             <a:noFill/>
@@ -6810,7 +7130,7 @@
         </p:nvSpPr>
         <p:spPr>
           <a:xfrm>
-            <a:off x="457200" y="109728"/>
+            <a:off x="548640" y="109728"/>
             <a:ext cx="2011680" cy="292608"/>
           </a:xfrm>
           <a:prstGeom prst="roundRect">
@@ -6862,7 +7182,7 @@
         </p:nvSpPr>
         <p:spPr>
           <a:xfrm>
-            <a:off x="2606040" y="73152"/>
+            <a:off x="2697480" y="73152"/>
             <a:ext cx="5943600" cy="365760"/>
           </a:xfrm>
           <a:prstGeom prst="rect">
@@ -6879,12 +7199,12 @@
             <a:pPr>
               <a:defRPr sz="950">
                 <a:solidFill>
-                  <a:srgbClr val="9CA3AF"/>
-                </a:solidFill>
-              </a:defRPr>
-            </a:pPr>
-            <a:r>
-              <a:t>SVYCA Youth For Earth Hackathon | Systems Architecture &amp; Climate Finance</a:t>
+                  <a:srgbClr val="A0AEC0"/>
+                </a:solidFill>
+              </a:defRPr>
+            </a:pPr>
+            <a:r>
+              <a:t>SVYCA Youth For Earth Hackathon  |  Clean Energy &amp; School Climate Action</a:t>
             </a:r>
           </a:p>
         </p:txBody>
@@ -6898,7 +7218,7 @@
         <p:spPr>
           <a:xfrm>
             <a:off x="10241280" y="73152"/>
-            <a:ext cx="1463040" cy="365760"/>
+            <a:ext cx="1371600" cy="365760"/>
           </a:xfrm>
           <a:prstGeom prst="rect">
             <a:avLst/>
@@ -6933,7 +7253,7 @@
         <p:spPr>
           <a:xfrm>
             <a:off x="0" y="493776"/>
-            <a:ext cx="3657508" cy="27432"/>
+            <a:ext cx="3657508" cy="22860"/>
           </a:xfrm>
           <a:prstGeom prst="rect">
             <a:avLst/>
@@ -6976,7 +7296,7 @@
         <p:spPr>
           <a:xfrm>
             <a:off x="548640" y="621792"/>
-            <a:ext cx="11091672" cy="1005840"/>
+            <a:ext cx="11091672" cy="1051560"/>
           </a:xfrm>
           <a:prstGeom prst="rect">
             <a:avLst/>
@@ -6997,7 +7317,7 @@
               </a:defRPr>
             </a:pPr>
             <a:r>
-              <a:t>STATUTORY CLEAN ENERGY POLICY</a:t>
+              <a:t>THE OPPORTUNITY</a:t>
             </a:r>
           </a:p>
           <a:p>
@@ -7005,14 +7325,14 @@
               <a:spcBef>
                 <a:spcPts val="200"/>
               </a:spcBef>
-              <a:defRPr sz="2100" b="1">
-                <a:solidFill>
-                  <a:srgbClr val="F3F4F6"/>
-                </a:solidFill>
-              </a:defRPr>
-            </a:pPr>
-            <a:r>
-              <a:t>The Legal Game-Changer: 26 U.S.C. Section 6417</a:t>
+              <a:defRPr sz="2200" b="1">
+                <a:solidFill>
+                  <a:srgbClr val="F8FAFC"/>
+                </a:solidFill>
+              </a:defRPr>
+            </a:pPr>
+            <a:r>
+              <a:t>The Clean Energy Law School Boards Don't Know About</a:t>
             </a:r>
           </a:p>
           <a:p>
@@ -7022,12 +7342,12 @@
               </a:spcBef>
               <a:defRPr sz="1100">
                 <a:solidFill>
-                  <a:srgbClr val="9CA3AF"/>
-                </a:solidFill>
-              </a:defRPr>
-            </a:pPr>
-            <a:r>
-              <a:t>Internal Revenue Code Elective Pay allows tax-exempt school districts to receive direct cash reimbursement checks.</a:t>
+                  <a:srgbClr val="A0AEC0"/>
+                </a:solidFill>
+              </a:defRPr>
+            </a:pPr>
+            <a:r>
+              <a:t>Under the new Inflation Reduction Act, the federal government writes cash checks directly to schools.</a:t>
             </a:r>
           </a:p>
         </p:txBody>
@@ -7041,17 +7361,17 @@
         <p:spPr>
           <a:xfrm>
             <a:off x="548640" y="1737360"/>
-            <a:ext cx="5303520" cy="4663440"/>
+            <a:ext cx="3474720" cy="3657600"/>
           </a:xfrm>
           <a:prstGeom prst="roundRect">
             <a:avLst/>
           </a:prstGeom>
           <a:solidFill>
-            <a:srgbClr val="111827"/>
+            <a:srgbClr val="131A2B"/>
           </a:solidFill>
           <a:ln w="12700">
             <a:solidFill>
-              <a:srgbClr val="1F293D"/>
+              <a:srgbClr val="222E4A"/>
             </a:solidFill>
           </a:ln>
         </p:spPr>
@@ -7086,7 +7406,7 @@
         <p:spPr>
           <a:xfrm>
             <a:off x="548640" y="1737360"/>
-            <a:ext cx="5303520" cy="45720"/>
+            <a:ext cx="3474720" cy="54864"/>
           </a:xfrm>
           <a:prstGeom prst="roundRect">
             <a:avLst/>
@@ -7128,8 +7448,8 @@
         </p:nvSpPr>
         <p:spPr>
           <a:xfrm>
-            <a:off x="731520" y="1874519"/>
-            <a:ext cx="4937760" cy="4389120"/>
+            <a:off x="731520" y="1901952"/>
+            <a:ext cx="3108960" cy="3328416"/>
           </a:xfrm>
           <a:prstGeom prst="rect">
             <a:avLst/>
@@ -7143,14 +7463,29 @@
           <a:lstStyle/>
           <a:p>
             <a:pPr>
-              <a:defRPr sz="1100" b="1">
+              <a:defRPr sz="3800" b="1">
                 <a:solidFill>
                   <a:srgbClr val="10B981"/>
                 </a:solidFill>
               </a:defRPr>
             </a:pPr>
             <a:r>
-              <a:t>TREASURY DECISION 9988 STATUTORY MECHANICS</a:t>
+              <a:t>30% Base</a:t>
+            </a:r>
+          </a:p>
+          <a:p>
+            <a:pPr>
+              <a:spcBef>
+                <a:spcPts val="200"/>
+              </a:spcBef>
+              <a:defRPr sz="900" b="1">
+                <a:solidFill>
+                  <a:srgbClr val="F8FAFC"/>
+                </a:solidFill>
+              </a:defRPr>
+            </a:pPr>
+            <a:r>
+              <a:t>GUARANTEED CASH BACK</a:t>
             </a:r>
           </a:p>
           <a:p>
@@ -7158,14 +7493,44 @@
               <a:spcBef>
                 <a:spcPts val="600"/>
               </a:spcBef>
-              <a:defRPr sz="950">
-                <a:solidFill>
-                  <a:srgbClr val="9CA3AF"/>
-                </a:solidFill>
-              </a:defRPr>
-            </a:pPr>
-            <a:r>
-              <a:t>Finalized by the IRS in March 2024, TD 9988 establishes the administrative procedures for tax-exempt political subdivisions:</a:t>
+              <a:defRPr sz="1000">
+                <a:solidFill>
+                  <a:srgbClr val="A0AEC0"/>
+                </a:solidFill>
+              </a:defRPr>
+            </a:pPr>
+            <a:r>
+              <a:t>- Federal IRS cash check covering 30% of cost</a:t>
+            </a:r>
+          </a:p>
+          <a:p>
+            <a:pPr>
+              <a:spcBef>
+                <a:spcPts val="600"/>
+              </a:spcBef>
+              <a:defRPr sz="1000">
+                <a:solidFill>
+                  <a:srgbClr val="A0AEC0"/>
+                </a:solidFill>
+              </a:defRPr>
+            </a:pPr>
+            <a:r>
+              <a:t>- Direct payment to the school district treasury</a:t>
+            </a:r>
+          </a:p>
+          <a:p>
+            <a:pPr>
+              <a:spcBef>
+                <a:spcPts val="600"/>
+              </a:spcBef>
+              <a:defRPr sz="1000">
+                <a:solidFill>
+                  <a:srgbClr val="A0AEC0"/>
+                </a:solidFill>
+              </a:defRPr>
+            </a:pPr>
+            <a:r>
+              <a:t>- No tax liability needed—public schools qualify directly!</a:t>
             </a:r>
           </a:p>
         </p:txBody>
@@ -7178,18 +7543,18 @@
         </p:nvSpPr>
         <p:spPr>
           <a:xfrm>
-            <a:off x="731520" y="2743200"/>
-            <a:ext cx="4937760" cy="731520"/>
+            <a:off x="4343400" y="1737360"/>
+            <a:ext cx="3474720" cy="3657600"/>
           </a:xfrm>
           <a:prstGeom prst="roundRect">
             <a:avLst/>
           </a:prstGeom>
           <a:solidFill>
-            <a:srgbClr val="0B1120"/>
+            <a:srgbClr val="131A2B"/>
           </a:solidFill>
           <a:ln w="12700">
             <a:solidFill>
-              <a:srgbClr val="1E3A5F"/>
+              <a:srgbClr val="222E4A"/>
             </a:solidFill>
           </a:ln>
         </p:spPr>
@@ -7223,8 +7588,8 @@
         </p:nvSpPr>
         <p:spPr>
           <a:xfrm>
-            <a:off x="731520" y="2743200"/>
-            <a:ext cx="45720" cy="731520"/>
+            <a:off x="4343400" y="1737360"/>
+            <a:ext cx="3474720" cy="54864"/>
           </a:xfrm>
           <a:prstGeom prst="roundRect">
             <a:avLst/>
@@ -7266,8 +7631,8 @@
         </p:nvSpPr>
         <p:spPr>
           <a:xfrm>
-            <a:off x="841248" y="2798064"/>
-            <a:ext cx="4718304" cy="621792"/>
+            <a:off x="4526280" y="1901952"/>
+            <a:ext cx="3108960" cy="3328416"/>
           </a:xfrm>
           <a:prstGeom prst="rect">
             <a:avLst/>
@@ -7281,14 +7646,14 @@
           <a:lstStyle/>
           <a:p>
             <a:pPr>
-              <a:defRPr sz="950" b="1">
-                <a:solidFill>
-                  <a:srgbClr val="E0F2FE"/>
-                </a:solidFill>
-              </a:defRPr>
-            </a:pPr>
-            <a:r>
-              <a:t>C_net = C_turnkey - (C_turnkey * R_IRA)</a:t>
+              <a:defRPr sz="3800" b="1">
+                <a:solidFill>
+                  <a:srgbClr val="38BDF8"/>
+                </a:solidFill>
+              </a:defRPr>
+            </a:pPr>
+            <a:r>
+              <a:t>+10% to +20%</a:t>
             </a:r>
           </a:p>
           <a:p>
@@ -7296,64 +7661,14 @@
               <a:spcBef>
                 <a:spcPts val="200"/>
               </a:spcBef>
-              <a:defRPr sz="800">
-                <a:solidFill>
-                  <a:srgbClr val="9CA3AF"/>
-                </a:solidFill>
-              </a:defRPr>
-            </a:pPr>
-            <a:r>
-              <a:t>Where R_IRA is the statutory additive direct cash reimbursement rate (30% to 50%).</a:t>
-            </a:r>
-          </a:p>
-        </p:txBody>
-      </p:sp>
-      <p:sp>
-        <p:nvSpPr>
-          <p:cNvPr id="15" name="TextBox 14"/>
-          <p:cNvSpPr txBox="1"/>
-          <p:nvPr/>
-        </p:nvSpPr>
-        <p:spPr>
-          <a:xfrm>
-            <a:off x="731520" y="3566160"/>
-            <a:ext cx="4937760" cy="2651760"/>
-          </a:xfrm>
-          <a:prstGeom prst="rect">
-            <a:avLst/>
-          </a:prstGeom>
-          <a:noFill/>
-        </p:spPr>
-        <p:txBody>
-          <a:bodyPr wrap="square">
-            <a:spAutoFit/>
-          </a:bodyPr>
-          <a:lstStyle/>
-          <a:p>
-            <a:pPr>
-              <a:spcBef>
-                <a:spcPts val="0"/>
-              </a:spcBef>
               <a:defRPr sz="900" b="1">
                 <a:solidFill>
-                  <a:srgbClr val="F3F4F6"/>
-                </a:solidFill>
-              </a:defRPr>
-            </a:pPr>
-            <a:r>
-              <a:t>1. Pre-Filing Registration (Treas. Reg. § 1.6417-5):</a:t>
-            </a:r>
-          </a:p>
-          <a:p>
-            <a:pPr>
-              <a:defRPr sz="850">
-                <a:solidFill>
-                  <a:srgbClr val="9CA3AF"/>
-                </a:solidFill>
-              </a:defRPr>
-            </a:pPr>
-            <a:r>
-              <a:t>District registers planned solar canopy on IRS portal to obtain a registration number.</a:t>
+                  <a:srgbClr val="F8FAFC"/>
+                </a:solidFill>
+              </a:defRPr>
+            </a:pPr>
+            <a:r>
+              <a:t>BONUS FEDERAL CASH</a:t>
             </a:r>
           </a:p>
           <a:p>
@@ -7361,26 +7676,14 @@
               <a:spcBef>
                 <a:spcPts val="600"/>
               </a:spcBef>
-              <a:defRPr sz="900" b="1">
-                <a:solidFill>
-                  <a:srgbClr val="F3F4F6"/>
-                </a:solidFill>
-              </a:defRPr>
-            </a:pPr>
-            <a:r>
-              <a:t>2. Informational Return (26 U.S.C. § 6417(a)):</a:t>
-            </a:r>
-          </a:p>
-          <a:p>
-            <a:pPr>
-              <a:defRPr sz="850">
-                <a:solidFill>
-                  <a:srgbClr val="9CA3AF"/>
-                </a:solidFill>
-              </a:defRPr>
-            </a:pPr>
-            <a:r>
-              <a:t>District files annual Form 990-T with Form 3468 attached reporting verified capex.</a:t>
+              <a:defRPr sz="1000">
+                <a:solidFill>
+                  <a:srgbClr val="A0AEC0"/>
+                </a:solidFill>
+              </a:defRPr>
+            </a:pPr>
+            <a:r>
+              <a:t>- +10% extra bonus for American-made steel &amp; panels</a:t>
             </a:r>
           </a:p>
           <a:p>
@@ -7388,50 +7691,53 @@
               <a:spcBef>
                 <a:spcPts val="600"/>
               </a:spcBef>
-              <a:defRPr sz="900" b="1">
-                <a:solidFill>
-                  <a:srgbClr val="F3F4F6"/>
-                </a:solidFill>
-              </a:defRPr>
-            </a:pPr>
-            <a:r>
-              <a:t>3. Direct Check Liquidation (26 U.S.C. § 6417(b)):</a:t>
-            </a:r>
-          </a:p>
-          <a:p>
-            <a:pPr>
-              <a:defRPr sz="850">
-                <a:solidFill>
-                  <a:srgbClr val="9CA3AF"/>
-                </a:solidFill>
-              </a:defRPr>
-            </a:pPr>
-            <a:r>
-              <a:t>U.S. Treasury issues direct electronic deposit or physical check covering 30% to 50% of cost.</a:t>
-            </a:r>
-          </a:p>
-        </p:txBody>
-      </p:sp>
-      <p:sp>
-        <p:nvSpPr>
-          <p:cNvPr id="16" name="Rounded Rectangle 15"/>
+              <a:defRPr sz="1000">
+                <a:solidFill>
+                  <a:srgbClr val="A0AEC0"/>
+                </a:solidFill>
+              </a:defRPr>
+            </a:pPr>
+            <a:r>
+              <a:t>- +10% extra bonus for Title I low-income schools</a:t>
+            </a:r>
+          </a:p>
+          <a:p>
+            <a:pPr>
+              <a:spcBef>
+                <a:spcPts val="600"/>
+              </a:spcBef>
+              <a:defRPr sz="1000">
+                <a:solidFill>
+                  <a:srgbClr val="A0AEC0"/>
+                </a:solidFill>
+              </a:defRPr>
+            </a:pPr>
+            <a:r>
+              <a:t>- Puts the biggest grants into communities that need it most</a:t>
+            </a:r>
+          </a:p>
+        </p:txBody>
+      </p:sp>
+      <p:sp>
+        <p:nvSpPr>
+          <p:cNvPr id="15" name="Rounded Rectangle 14"/>
           <p:cNvSpPr/>
           <p:nvPr/>
         </p:nvSpPr>
         <p:spPr>
           <a:xfrm>
-            <a:off x="6217920" y="1737360"/>
-            <a:ext cx="5425135" cy="4663440"/>
+            <a:off x="8138160" y="1737360"/>
+            <a:ext cx="3474720" cy="3657600"/>
           </a:xfrm>
           <a:prstGeom prst="roundRect">
             <a:avLst/>
           </a:prstGeom>
           <a:solidFill>
-            <a:srgbClr val="111827"/>
+            <a:srgbClr val="131A2B"/>
           </a:solidFill>
           <a:ln w="12700">
             <a:solidFill>
-              <a:srgbClr val="1F293D"/>
+              <a:srgbClr val="222E4A"/>
             </a:solidFill>
           </a:ln>
         </p:spPr>
@@ -7459,20 +7765,20 @@
       </p:sp>
       <p:sp>
         <p:nvSpPr>
-          <p:cNvPr id="17" name="Rounded Rectangle 16"/>
+          <p:cNvPr id="16" name="Rounded Rectangle 15"/>
           <p:cNvSpPr/>
           <p:nvPr/>
         </p:nvSpPr>
         <p:spPr>
           <a:xfrm>
-            <a:off x="6217920" y="1737360"/>
-            <a:ext cx="5425135" cy="45720"/>
+            <a:off x="8138160" y="1737360"/>
+            <a:ext cx="3474720" cy="54864"/>
           </a:xfrm>
           <a:prstGeom prst="roundRect">
             <a:avLst/>
           </a:prstGeom>
           <a:solidFill>
-            <a:srgbClr val="38BDF8"/>
+            <a:srgbClr val="10B981"/>
           </a:solidFill>
           <a:ln>
             <a:noFill/>
@@ -7502,14 +7808,14 @@
       </p:sp>
       <p:sp>
         <p:nvSpPr>
-          <p:cNvPr id="18" name="TextBox 17"/>
+          <p:cNvPr id="17" name="TextBox 16"/>
           <p:cNvSpPr txBox="1"/>
           <p:nvPr/>
         </p:nvSpPr>
         <p:spPr>
           <a:xfrm>
-            <a:off x="6446520" y="1874519"/>
-            <a:ext cx="4937760" cy="4389120"/>
+            <a:off x="8321040" y="1901952"/>
+            <a:ext cx="3108960" cy="3328416"/>
           </a:xfrm>
           <a:prstGeom prst="rect">
             <a:avLst/>
@@ -7523,164 +7829,169 @@
           <a:lstStyle/>
           <a:p>
             <a:pPr>
-              <a:defRPr sz="1100" b="1">
-                <a:solidFill>
-                  <a:srgbClr val="38BDF8"/>
-                </a:solidFill>
-              </a:defRPr>
-            </a:pPr>
-            <a:r>
-              <a:t>STATUTORY ADDITIVE BONUS STACK</a:t>
-            </a:r>
-          </a:p>
-          <a:p>
-            <a:pPr>
-              <a:spcBef>
-                <a:spcPts val="800"/>
-              </a:spcBef>
-              <a:defRPr sz="950" b="1">
+              <a:defRPr sz="3800" b="1">
                 <a:solidFill>
                   <a:srgbClr val="10B981"/>
                 </a:solidFill>
               </a:defRPr>
             </a:pPr>
             <a:r>
-              <a:t>Base Direct Pay Rate: 30.0% Cash Check</a:t>
-            </a:r>
-          </a:p>
-          <a:p>
-            <a:pPr>
-              <a:spcBef>
-                <a:spcPts val="100"/>
-              </a:spcBef>
-              <a:defRPr sz="850">
-                <a:solidFill>
-                  <a:srgbClr val="9CA3AF"/>
-                </a:solidFill>
-              </a:defRPr>
-            </a:pPr>
-            <a:r>
-              <a:t>Requires compliance with prevailing wage &amp; registered apprenticeship standards (26 U.S.C. § 45(b)(8)).</a:t>
-            </a:r>
-          </a:p>
-          <a:p>
-            <a:pPr>
-              <a:spcBef>
-                <a:spcPts val="800"/>
-              </a:spcBef>
-              <a:defRPr sz="950" b="1">
-                <a:solidFill>
-                  <a:srgbClr val="38BDF8"/>
-                </a:solidFill>
-              </a:defRPr>
-            </a:pPr>
-            <a:r>
-              <a:t>Domestic Content Adder: +10.0% Cash Check</a:t>
-            </a:r>
-          </a:p>
-          <a:p>
-            <a:pPr>
-              <a:spcBef>
-                <a:spcPts val="100"/>
-              </a:spcBef>
-              <a:defRPr sz="850">
-                <a:solidFill>
-                  <a:srgbClr val="9CA3AF"/>
-                </a:solidFill>
-              </a:defRPr>
-            </a:pPr>
-            <a:r>
-              <a:t>Requires 100% US structural steel and certified domestic components (26 U.S.C. § 45(b)(9)).</a:t>
-            </a:r>
-          </a:p>
-          <a:p>
-            <a:pPr>
-              <a:spcBef>
-                <a:spcPts val="800"/>
-              </a:spcBef>
-              <a:defRPr sz="950" b="1">
+              <a:t>Up to 50%</a:t>
+            </a:r>
+          </a:p>
+          <a:p>
+            <a:pPr>
+              <a:spcBef>
+                <a:spcPts val="200"/>
+              </a:spcBef>
+              <a:defRPr sz="900" b="1">
+                <a:solidFill>
+                  <a:srgbClr val="F8FAFC"/>
+                </a:solidFill>
+              </a:defRPr>
+            </a:pPr>
+            <a:r>
+              <a:t>TOTAL FEDERAL GRANT</a:t>
+            </a:r>
+          </a:p>
+          <a:p>
+            <a:pPr>
+              <a:spcBef>
+                <a:spcPts val="600"/>
+              </a:spcBef>
+              <a:defRPr sz="1000">
+                <a:solidFill>
+                  <a:srgbClr val="A0AEC0"/>
+                </a:solidFill>
+              </a:defRPr>
+            </a:pPr>
+            <a:r>
+              <a:t>- Up to half the solar canopy is paid by the government</a:t>
+            </a:r>
+          </a:p>
+          <a:p>
+            <a:pPr>
+              <a:spcBef>
+                <a:spcPts val="600"/>
+              </a:spcBef>
+              <a:defRPr sz="1000">
+                <a:solidFill>
+                  <a:srgbClr val="A0AEC0"/>
+                </a:solidFill>
+              </a:defRPr>
+            </a:pPr>
+            <a:r>
+              <a:t>- Districts pay only the remaining net balance</a:t>
+            </a:r>
+          </a:p>
+          <a:p>
+            <a:pPr>
+              <a:spcBef>
+                <a:spcPts val="600"/>
+              </a:spcBef>
+              <a:defRPr sz="1000">
+                <a:solidFill>
+                  <a:srgbClr val="A0AEC0"/>
+                </a:solidFill>
+              </a:defRPr>
+            </a:pPr>
+            <a:r>
+              <a:t>- Yet over 90% of school boards have never heard of it!</a:t>
+            </a:r>
+          </a:p>
+        </p:txBody>
+      </p:sp>
+      <p:sp>
+        <p:nvSpPr>
+          <p:cNvPr id="18" name="Rounded Rectangle 17"/>
+          <p:cNvSpPr/>
+          <p:nvPr/>
+        </p:nvSpPr>
+        <p:spPr>
+          <a:xfrm>
+            <a:off x="548640" y="5577840"/>
+            <a:ext cx="11094415" cy="777240"/>
+          </a:xfrm>
+          <a:prstGeom prst="roundRect">
+            <a:avLst/>
+          </a:prstGeom>
+          <a:solidFill>
+            <a:srgbClr val="131A2B"/>
+          </a:solidFill>
+          <a:ln w="12700">
+            <a:solidFill>
+              <a:srgbClr val="10B981"/>
+            </a:solidFill>
+          </a:ln>
+        </p:spPr>
+        <p:style>
+          <a:lnRef idx="1">
+            <a:schemeClr val="accent1"/>
+          </a:lnRef>
+          <a:fillRef idx="3">
+            <a:schemeClr val="accent1"/>
+          </a:fillRef>
+          <a:effectRef idx="2">
+            <a:schemeClr val="accent1"/>
+          </a:effectRef>
+          <a:fontRef idx="minor">
+            <a:schemeClr val="lt1"/>
+          </a:fontRef>
+        </p:style>
+        <p:txBody>
+          <a:bodyPr rtlCol="0" anchor="ctr"/>
+          <a:lstStyle/>
+          <a:p>
+            <a:pPr algn="ctr"/>
+          </a:p>
+        </p:txBody>
+      </p:sp>
+      <p:sp>
+        <p:nvSpPr>
+          <p:cNvPr id="19" name="TextBox 18"/>
+          <p:cNvSpPr txBox="1"/>
+          <p:nvPr/>
+        </p:nvSpPr>
+        <p:spPr>
+          <a:xfrm>
+            <a:off x="731520" y="5623560"/>
+            <a:ext cx="10698480" cy="685800"/>
+          </a:xfrm>
+          <a:prstGeom prst="rect">
+            <a:avLst/>
+          </a:prstGeom>
+          <a:noFill/>
+        </p:spPr>
+        <p:txBody>
+          <a:bodyPr wrap="square">
+            <a:spAutoFit/>
+          </a:bodyPr>
+          <a:lstStyle/>
+          <a:p>
+            <a:pPr>
+              <a:defRPr sz="900" b="1">
                 <a:solidFill>
                   <a:srgbClr val="10B981"/>
                 </a:solidFill>
               </a:defRPr>
             </a:pPr>
             <a:r>
-              <a:t>Title I Low-Income Adder: +10.0% Cash Check</a:t>
-            </a:r>
-          </a:p>
-          <a:p>
-            <a:pPr>
-              <a:spcBef>
-                <a:spcPts val="100"/>
-              </a:spcBef>
-              <a:defRPr sz="850">
-                <a:solidFill>
-                  <a:srgbClr val="9CA3AF"/>
-                </a:solidFill>
-              </a:defRPr>
-            </a:pPr>
-            <a:r>
-              <a:t>Applies to schools serving &gt;= 40% low-income student populations (26 U.S.C. § 48(e)).</a:t>
-            </a:r>
-          </a:p>
-          <a:p>
-            <a:pPr>
-              <a:spcBef>
-                <a:spcPts val="800"/>
-              </a:spcBef>
-              <a:defRPr sz="950" b="1">
-                <a:solidFill>
-                  <a:srgbClr val="38BDF8"/>
-                </a:solidFill>
-              </a:defRPr>
-            </a:pPr>
-            <a:r>
-              <a:t>Energy Community Adder: +10.0% Cash Check</a:t>
-            </a:r>
-          </a:p>
-          <a:p>
-            <a:pPr>
-              <a:spcBef>
-                <a:spcPts val="100"/>
-              </a:spcBef>
-              <a:defRPr sz="850">
-                <a:solidFill>
-                  <a:srgbClr val="9CA3AF"/>
-                </a:solidFill>
-              </a:defRPr>
-            </a:pPr>
-            <a:r>
-              <a:t>Census tracts with brownfields or historical coal mine/plant closures (26 U.S.C. § 48(a)(14)).</a:t>
-            </a:r>
-          </a:p>
-          <a:p>
-            <a:pPr>
-              <a:spcBef>
-                <a:spcPts val="800"/>
-              </a:spcBef>
-              <a:defRPr sz="950" b="1">
-                <a:solidFill>
-                  <a:srgbClr val="10B981"/>
-                </a:solidFill>
-              </a:defRPr>
-            </a:pPr>
-            <a:r>
-              <a:t>Maximum Statutory Reimbursement: Up to 50% - 60%</a:t>
-            </a:r>
-          </a:p>
-          <a:p>
-            <a:pPr>
-              <a:spcBef>
-                <a:spcPts val="100"/>
-              </a:spcBef>
-              <a:defRPr sz="850">
-                <a:solidFill>
-                  <a:srgbClr val="9CA3AF"/>
-                </a:solidFill>
-              </a:defRPr>
-            </a:pPr>
-            <a:r>
-              <a:t>Total federal cash check paid directly into the school district treasury.</a:t>
+              <a:t>HOW 'DIRECT PAY' (SECTION 6417) WORKS</a:t>
+            </a:r>
+          </a:p>
+          <a:p>
+            <a:pPr>
+              <a:spcBef>
+                <a:spcPts val="200"/>
+              </a:spcBef>
+              <a:defRPr sz="1050">
+                <a:solidFill>
+                  <a:srgbClr val="F8FAFC"/>
+                </a:solidFill>
+              </a:defRPr>
+            </a:pPr>
+            <a:r>
+              <a:t>Because public schools don't pay taxes, the government used to shut them out of solar tax credits. Now, the IRS sends an actual cash reimbursement check straight to the district.</a:t>
             </a:r>
           </a:p>
         </p:txBody>
@@ -7718,7 +8029,7 @@
             <a:avLst/>
           </a:prstGeom>
           <a:solidFill>
-            <a:srgbClr val="090D16"/>
+            <a:srgbClr val="0B0F19"/>
           </a:solidFill>
           <a:ln>
             <a:noFill/>
@@ -7797,7 +8108,7 @@
         </p:nvSpPr>
         <p:spPr>
           <a:xfrm>
-            <a:off x="457200" y="109728"/>
+            <a:off x="548640" y="109728"/>
             <a:ext cx="2011680" cy="292608"/>
           </a:xfrm>
           <a:prstGeom prst="roundRect">
@@ -7849,7 +8160,7 @@
         </p:nvSpPr>
         <p:spPr>
           <a:xfrm>
-            <a:off x="2606040" y="73152"/>
+            <a:off x="2697480" y="73152"/>
             <a:ext cx="5943600" cy="365760"/>
           </a:xfrm>
           <a:prstGeom prst="rect">
@@ -7866,12 +8177,12 @@
             <a:pPr>
               <a:defRPr sz="950">
                 <a:solidFill>
-                  <a:srgbClr val="9CA3AF"/>
-                </a:solidFill>
-              </a:defRPr>
-            </a:pPr>
-            <a:r>
-              <a:t>SVYCA Youth For Earth Hackathon | Systems Architecture &amp; Climate Finance</a:t>
+                  <a:srgbClr val="A0AEC0"/>
+                </a:solidFill>
+              </a:defRPr>
+            </a:pPr>
+            <a:r>
+              <a:t>SVYCA Youth For Earth Hackathon  |  Clean Energy &amp; School Climate Action</a:t>
             </a:r>
           </a:p>
         </p:txBody>
@@ -7885,7 +8196,7 @@
         <p:spPr>
           <a:xfrm>
             <a:off x="10241280" y="73152"/>
-            <a:ext cx="1463040" cy="365760"/>
+            <a:ext cx="1371600" cy="365760"/>
           </a:xfrm>
           <a:prstGeom prst="rect">
             <a:avLst/>
@@ -7920,7 +8231,7 @@
         <p:spPr>
           <a:xfrm>
             <a:off x="0" y="493776"/>
-            <a:ext cx="4876678" cy="27432"/>
+            <a:ext cx="4876678" cy="22860"/>
           </a:xfrm>
           <a:prstGeom prst="rect">
             <a:avLst/>
@@ -7963,7 +8274,7 @@
         <p:spPr>
           <a:xfrm>
             <a:off x="548640" y="621792"/>
-            <a:ext cx="11091672" cy="1005840"/>
+            <a:ext cx="11091672" cy="1051560"/>
           </a:xfrm>
           <a:prstGeom prst="rect">
             <a:avLst/>
@@ -7984,7 +8295,7 @@
               </a:defRPr>
             </a:pPr>
             <a:r>
-              <a:t>SOFTWARE ENGINEERING &amp; DATAFLOW</a:t>
+              <a:t>THE SOLUTION</a:t>
             </a:r>
           </a:p>
           <a:p>
@@ -7992,14 +8303,14 @@
               <a:spcBef>
                 <a:spcPts val="200"/>
               </a:spcBef>
-              <a:defRPr sz="2100" b="1">
-                <a:solidFill>
-                  <a:srgbClr val="F3F4F6"/>
-                </a:solidFill>
-              </a:defRPr>
-            </a:pPr>
-            <a:r>
-              <a:t>Autonomous 4-Tier Computational Pipeline</a:t>
+              <a:defRPr sz="2200" b="1">
+                <a:solidFill>
+                  <a:srgbClr val="F8FAFC"/>
+                </a:solidFill>
+              </a:defRPr>
+            </a:pPr>
+            <a:r>
+              <a:t>Solar Feasibility in Seconds, Not Months</a:t>
             </a:r>
           </a:p>
           <a:p>
@@ -8009,12 +8320,12 @@
               </a:spcBef>
               <a:defRPr sz="1100">
                 <a:solidFill>
-                  <a:srgbClr val="9CA3AF"/>
-                </a:solidFill>
-              </a:defRPr>
-            </a:pPr>
-            <a:r>
-              <a:t>Modularized data ingestion, physical simulation, dynamic discounted cashflow, and civic export in under 3.0s.</a:t>
+                  <a:srgbClr val="A0AEC0"/>
+                </a:solidFill>
+              </a:defRPr>
+            </a:pPr>
+            <a:r>
+              <a:t>A web platform empowering students and school boards to test their campus with real data.</a:t>
             </a:r>
           </a:p>
         </p:txBody>
@@ -8028,17 +8339,17 @@
         <p:spPr>
           <a:xfrm>
             <a:off x="548640" y="1737360"/>
-            <a:ext cx="2560320" cy="3383280"/>
+            <a:ext cx="3474720" cy="3657600"/>
           </a:xfrm>
           <a:prstGeom prst="roundRect">
             <a:avLst/>
           </a:prstGeom>
           <a:solidFill>
-            <a:srgbClr val="111827"/>
+            <a:srgbClr val="131A2B"/>
           </a:solidFill>
           <a:ln w="12700">
             <a:solidFill>
-              <a:srgbClr val="1F293D"/>
+              <a:srgbClr val="222E4A"/>
             </a:solidFill>
           </a:ln>
         </p:spPr>
@@ -8073,7 +8384,7 @@
         <p:spPr>
           <a:xfrm>
             <a:off x="548640" y="1737360"/>
-            <a:ext cx="2560320" cy="45720"/>
+            <a:ext cx="3474720" cy="54864"/>
           </a:xfrm>
           <a:prstGeom prst="roundRect">
             <a:avLst/>
@@ -8115,8 +8426,8 @@
         </p:nvSpPr>
         <p:spPr>
           <a:xfrm>
-            <a:off x="685800" y="1847088"/>
-            <a:ext cx="2286000" cy="3163824"/>
+            <a:off x="731520" y="1901952"/>
+            <a:ext cx="3108960" cy="3328416"/>
           </a:xfrm>
           <a:prstGeom prst="rect">
             <a:avLst/>
@@ -8130,44 +8441,74 @@
           <a:lstStyle/>
           <a:p>
             <a:pPr>
-              <a:defRPr sz="800" b="1">
+              <a:defRPr sz="2400" b="1">
                 <a:solidFill>
                   <a:srgbClr val="38BDF8"/>
                 </a:solidFill>
               </a:defRPr>
             </a:pPr>
             <a:r>
-              <a:t>TIER 1: GEOSPATIAL GIS</a:t>
-            </a:r>
-          </a:p>
-          <a:p>
-            <a:pPr>
-              <a:spcBef>
-                <a:spcPts val="300"/>
-              </a:spcBef>
-              <a:defRPr sz="1200" b="1">
-                <a:solidFill>
-                  <a:srgbClr val="F3F4F6"/>
-                </a:solidFill>
-              </a:defRPr>
-            </a:pPr>
-            <a:r>
-              <a:t>Vector Ingestion</a:t>
-            </a:r>
-          </a:p>
-          <a:p>
-            <a:pPr>
-              <a:spcBef>
-                <a:spcPts val="800"/>
-              </a:spcBef>
-              <a:defRPr sz="900">
-                <a:solidFill>
-                  <a:srgbClr val="9CA3AF"/>
-                </a:solidFill>
-              </a:defRPr>
-            </a:pPr>
-            <a:r>
-              <a:t>NCES &amp; CDE directory lookups. Reprojects angular WGS 84 (EPSG:4326) coordinates into metric UTM zones (gdf.estimate_utm_crs()) to eliminate spherical area distortion.</a:t>
+              <a:t>STEP 1</a:t>
+            </a:r>
+          </a:p>
+          <a:p>
+            <a:pPr>
+              <a:spcBef>
+                <a:spcPts val="200"/>
+              </a:spcBef>
+              <a:defRPr sz="1100" b="1">
+                <a:solidFill>
+                  <a:srgbClr val="F8FAFC"/>
+                </a:solidFill>
+              </a:defRPr>
+            </a:pPr>
+            <a:r>
+              <a:t>PICK ANY CAMPUS</a:t>
+            </a:r>
+          </a:p>
+          <a:p>
+            <a:pPr>
+              <a:spcBef>
+                <a:spcPts val="600"/>
+              </a:spcBef>
+              <a:defRPr sz="1000">
+                <a:solidFill>
+                  <a:srgbClr val="A0AEC0"/>
+                </a:solidFill>
+              </a:defRPr>
+            </a:pPr>
+            <a:r>
+              <a:t>- Interactive satellite map of 18 Bay Area schools</a:t>
+            </a:r>
+          </a:p>
+          <a:p>
+            <a:pPr>
+              <a:spcBef>
+                <a:spcPts val="600"/>
+              </a:spcBef>
+              <a:defRPr sz="1000">
+                <a:solidFill>
+                  <a:srgbClr val="A0AEC0"/>
+                </a:solidFill>
+              </a:defRPr>
+            </a:pPr>
+            <a:r>
+              <a:t>- Pins directly to the physical parking lot</a:t>
+            </a:r>
+          </a:p>
+          <a:p>
+            <a:pPr>
+              <a:spcBef>
+                <a:spcPts val="600"/>
+              </a:spcBef>
+              <a:defRPr sz="1000">
+                <a:solidFill>
+                  <a:srgbClr val="A0AEC0"/>
+                </a:solidFill>
+              </a:defRPr>
+            </a:pPr>
+            <a:r>
+              <a:t>- Covers High Schools, Middle Schools &amp; Elementary</a:t>
             </a:r>
           </a:p>
         </p:txBody>
@@ -8180,18 +8521,18 @@
         </p:nvSpPr>
         <p:spPr>
           <a:xfrm>
-            <a:off x="3383280" y="1737360"/>
-            <a:ext cx="2560320" cy="3383280"/>
+            <a:off x="4343400" y="1737360"/>
+            <a:ext cx="3474720" cy="3657600"/>
           </a:xfrm>
           <a:prstGeom prst="roundRect">
             <a:avLst/>
           </a:prstGeom>
           <a:solidFill>
-            <a:srgbClr val="111827"/>
+            <a:srgbClr val="131A2B"/>
           </a:solidFill>
           <a:ln w="12700">
             <a:solidFill>
-              <a:srgbClr val="1F293D"/>
+              <a:srgbClr val="222E4A"/>
             </a:solidFill>
           </a:ln>
         </p:spPr>
@@ -8225,161 +8566,8 @@
         </p:nvSpPr>
         <p:spPr>
           <a:xfrm>
-            <a:off x="3383280" y="1737360"/>
-            <a:ext cx="2560320" cy="45720"/>
-          </a:xfrm>
-          <a:prstGeom prst="roundRect">
-            <a:avLst/>
-          </a:prstGeom>
-          <a:solidFill>
-            <a:srgbClr val="38BDF8"/>
-          </a:solidFill>
-          <a:ln>
-            <a:noFill/>
-          </a:ln>
-        </p:spPr>
-        <p:style>
-          <a:lnRef idx="1">
-            <a:schemeClr val="accent1"/>
-          </a:lnRef>
-          <a:fillRef idx="3">
-            <a:schemeClr val="accent1"/>
-          </a:fillRef>
-          <a:effectRef idx="2">
-            <a:schemeClr val="accent1"/>
-          </a:effectRef>
-          <a:fontRef idx="minor">
-            <a:schemeClr val="lt1"/>
-          </a:fontRef>
-        </p:style>
-        <p:txBody>
-          <a:bodyPr rtlCol="0" anchor="ctr"/>
-          <a:lstStyle/>
-          <a:p>
-            <a:pPr algn="ctr"/>
-          </a:p>
-        </p:txBody>
-      </p:sp>
-      <p:sp>
-        <p:nvSpPr>
-          <p:cNvPr id="14" name="TextBox 13"/>
-          <p:cNvSpPr txBox="1"/>
-          <p:nvPr/>
-        </p:nvSpPr>
-        <p:spPr>
-          <a:xfrm>
-            <a:off x="3520440" y="1847088"/>
-            <a:ext cx="2286000" cy="3163824"/>
-          </a:xfrm>
-          <a:prstGeom prst="rect">
-            <a:avLst/>
-          </a:prstGeom>
-          <a:noFill/>
-        </p:spPr>
-        <p:txBody>
-          <a:bodyPr wrap="square">
-            <a:spAutoFit/>
-          </a:bodyPr>
-          <a:lstStyle/>
-          <a:p>
-            <a:pPr>
-              <a:defRPr sz="800" b="1">
-                <a:solidFill>
-                  <a:srgbClr val="38BDF8"/>
-                </a:solidFill>
-              </a:defRPr>
-            </a:pPr>
-            <a:r>
-              <a:t>TIER 2: PHYSICAL ENGINE</a:t>
-            </a:r>
-          </a:p>
-          <a:p>
-            <a:pPr>
-              <a:spcBef>
-                <a:spcPts val="300"/>
-              </a:spcBef>
-              <a:defRPr sz="1200" b="1">
-                <a:solidFill>
-                  <a:srgbClr val="F3F4F6"/>
-                </a:solidFill>
-              </a:defRPr>
-            </a:pPr>
-            <a:r>
-              <a:t>NREL PVWatts v8</a:t>
-            </a:r>
-          </a:p>
-          <a:p>
-            <a:pPr>
-              <a:spcBef>
-                <a:spcPts val="800"/>
-              </a:spcBef>
-              <a:defRPr sz="900">
-                <a:solidFill>
-                  <a:srgbClr val="9CA3AF"/>
-                </a:solidFill>
-              </a:defRPr>
-            </a:pPr>
-            <a:r>
-              <a:t>Executes live REST queries to NREL API endpoint. Ingests satellite hourly solar irradiance vectors (GHI, DNI, ambient temperature, wind speed from NSRDB).</a:t>
-            </a:r>
-          </a:p>
-        </p:txBody>
-      </p:sp>
-      <p:sp>
-        <p:nvSpPr>
-          <p:cNvPr id="15" name="Rounded Rectangle 14"/>
-          <p:cNvSpPr/>
-          <p:nvPr/>
-        </p:nvSpPr>
-        <p:spPr>
-          <a:xfrm>
-            <a:off x="6217920" y="1737360"/>
-            <a:ext cx="2560320" cy="3383280"/>
-          </a:xfrm>
-          <a:prstGeom prst="roundRect">
-            <a:avLst/>
-          </a:prstGeom>
-          <a:solidFill>
-            <a:srgbClr val="111827"/>
-          </a:solidFill>
-          <a:ln w="12700">
-            <a:solidFill>
-              <a:srgbClr val="1F293D"/>
-            </a:solidFill>
-          </a:ln>
-        </p:spPr>
-        <p:style>
-          <a:lnRef idx="1">
-            <a:schemeClr val="accent1"/>
-          </a:lnRef>
-          <a:fillRef idx="3">
-            <a:schemeClr val="accent1"/>
-          </a:fillRef>
-          <a:effectRef idx="2">
-            <a:schemeClr val="accent1"/>
-          </a:effectRef>
-          <a:fontRef idx="minor">
-            <a:schemeClr val="lt1"/>
-          </a:fontRef>
-        </p:style>
-        <p:txBody>
-          <a:bodyPr rtlCol="0" anchor="ctr"/>
-          <a:lstStyle/>
-          <a:p>
-            <a:pPr algn="ctr"/>
-          </a:p>
-        </p:txBody>
-      </p:sp>
-      <p:sp>
-        <p:nvSpPr>
-          <p:cNvPr id="16" name="Rounded Rectangle 15"/>
-          <p:cNvSpPr/>
-          <p:nvPr/>
-        </p:nvSpPr>
-        <p:spPr>
-          <a:xfrm>
-            <a:off x="6217920" y="1737360"/>
-            <a:ext cx="2560320" cy="45720"/>
+            <a:off x="4343400" y="1737360"/>
+            <a:ext cx="3474720" cy="54864"/>
           </a:xfrm>
           <a:prstGeom prst="roundRect">
             <a:avLst/>
@@ -8415,14 +8603,14 @@
       </p:sp>
       <p:sp>
         <p:nvSpPr>
-          <p:cNvPr id="17" name="TextBox 16"/>
+          <p:cNvPr id="14" name="TextBox 13"/>
           <p:cNvSpPr txBox="1"/>
           <p:nvPr/>
         </p:nvSpPr>
         <p:spPr>
           <a:xfrm>
-            <a:off x="6355080" y="1847088"/>
-            <a:ext cx="2286000" cy="3163824"/>
+            <a:off x="4526280" y="1901952"/>
+            <a:ext cx="3108960" cy="3328416"/>
           </a:xfrm>
           <a:prstGeom prst="rect">
             <a:avLst/>
@@ -8436,68 +8624,98 @@
           <a:lstStyle/>
           <a:p>
             <a:pPr>
-              <a:defRPr sz="800" b="1">
+              <a:defRPr sz="2400" b="1">
                 <a:solidFill>
                   <a:srgbClr val="10B981"/>
                 </a:solidFill>
               </a:defRPr>
             </a:pPr>
             <a:r>
-              <a:t>TIER 3: FINANCIAL DCF</a:t>
-            </a:r>
-          </a:p>
-          <a:p>
-            <a:pPr>
-              <a:spcBef>
-                <a:spcPts val="300"/>
-              </a:spcBef>
-              <a:defRPr sz="1200" b="1">
-                <a:solidFill>
-                  <a:srgbClr val="F3F4F6"/>
-                </a:solidFill>
-              </a:defRPr>
-            </a:pPr>
-            <a:r>
-              <a:t>25-Yr Lifecycle Model</a:t>
-            </a:r>
-          </a:p>
-          <a:p>
-            <a:pPr>
-              <a:spcBef>
-                <a:spcPts val="800"/>
-              </a:spcBef>
-              <a:defRPr sz="900">
-                <a:solidFill>
-                  <a:srgbClr val="9CA3AF"/>
-                </a:solidFill>
-              </a:defRPr>
-            </a:pPr>
-            <a:r>
-              <a:t>Iterates 25-year discounted cashflow integrating 0.5%/yr degradation, 2.5%/yr tariff escalation, 2.0%/yr O&amp;M inflation, and Year 15 inverter reserves.</a:t>
-            </a:r>
-          </a:p>
-        </p:txBody>
-      </p:sp>
-      <p:sp>
-        <p:nvSpPr>
-          <p:cNvPr id="18" name="Rounded Rectangle 17"/>
+              <a:t>STEP 2</a:t>
+            </a:r>
+          </a:p>
+          <a:p>
+            <a:pPr>
+              <a:spcBef>
+                <a:spcPts val="200"/>
+              </a:spcBef>
+              <a:defRPr sz="1100" b="1">
+                <a:solidFill>
+                  <a:srgbClr val="F8FAFC"/>
+                </a:solidFill>
+              </a:defRPr>
+            </a:pPr>
+            <a:r>
+              <a:t>SIMULATE SOLAR</a:t>
+            </a:r>
+          </a:p>
+          <a:p>
+            <a:pPr>
+              <a:spcBef>
+                <a:spcPts val="600"/>
+              </a:spcBef>
+              <a:defRPr sz="1000">
+                <a:solidFill>
+                  <a:srgbClr val="A0AEC0"/>
+                </a:solidFill>
+              </a:defRPr>
+            </a:pPr>
+            <a:r>
+              <a:t>- Runs Department of Energy (NREL) solar physics</a:t>
+            </a:r>
+          </a:p>
+          <a:p>
+            <a:pPr>
+              <a:spcBef>
+                <a:spcPts val="600"/>
+              </a:spcBef>
+              <a:defRPr sz="1000">
+                <a:solidFill>
+                  <a:srgbClr val="A0AEC0"/>
+                </a:solidFill>
+              </a:defRPr>
+            </a:pPr>
+            <a:r>
+              <a:t>- Calculates kilowatt capacity and monthly power</a:t>
+            </a:r>
+          </a:p>
+          <a:p>
+            <a:pPr>
+              <a:spcBef>
+                <a:spcPts val="600"/>
+              </a:spcBef>
+              <a:defRPr sz="1000">
+                <a:solidFill>
+                  <a:srgbClr val="A0AEC0"/>
+                </a:solidFill>
+              </a:defRPr>
+            </a:pPr>
+            <a:r>
+              <a:t>- Applies real local commercial electricity rates</a:t>
+            </a:r>
+          </a:p>
+        </p:txBody>
+      </p:sp>
+      <p:sp>
+        <p:nvSpPr>
+          <p:cNvPr id="15" name="Rounded Rectangle 14"/>
           <p:cNvSpPr/>
           <p:nvPr/>
         </p:nvSpPr>
         <p:spPr>
           <a:xfrm>
-            <a:off x="9052560" y="1737360"/>
-            <a:ext cx="2560320" cy="3383280"/>
+            <a:off x="8138160" y="1737360"/>
+            <a:ext cx="3474720" cy="3657600"/>
           </a:xfrm>
           <a:prstGeom prst="roundRect">
             <a:avLst/>
           </a:prstGeom>
           <a:solidFill>
-            <a:srgbClr val="111827"/>
+            <a:srgbClr val="131A2B"/>
           </a:solidFill>
           <a:ln w="12700">
             <a:solidFill>
-              <a:srgbClr val="1F293D"/>
+              <a:srgbClr val="222E4A"/>
             </a:solidFill>
           </a:ln>
         </p:spPr>
@@ -8525,14 +8743,14 @@
       </p:sp>
       <p:sp>
         <p:nvSpPr>
-          <p:cNvPr id="19" name="Rounded Rectangle 18"/>
+          <p:cNvPr id="16" name="Rounded Rectangle 15"/>
           <p:cNvSpPr/>
           <p:nvPr/>
         </p:nvSpPr>
         <p:spPr>
           <a:xfrm>
-            <a:off x="9052560" y="1737360"/>
-            <a:ext cx="2560320" cy="45720"/>
+            <a:off x="8138160" y="1737360"/>
+            <a:ext cx="3474720" cy="54864"/>
           </a:xfrm>
           <a:prstGeom prst="roundRect">
             <a:avLst/>
@@ -8568,14 +8786,14 @@
       </p:sp>
       <p:sp>
         <p:nvSpPr>
-          <p:cNvPr id="20" name="TextBox 19"/>
+          <p:cNvPr id="17" name="TextBox 16"/>
           <p:cNvSpPr txBox="1"/>
           <p:nvPr/>
         </p:nvSpPr>
         <p:spPr>
           <a:xfrm>
-            <a:off x="9189720" y="1847088"/>
-            <a:ext cx="2286000" cy="3163824"/>
+            <a:off x="8321040" y="1901952"/>
+            <a:ext cx="3108960" cy="3328416"/>
           </a:xfrm>
           <a:prstGeom prst="rect">
             <a:avLst/>
@@ -8589,68 +8807,98 @@
           <a:lstStyle/>
           <a:p>
             <a:pPr>
-              <a:defRPr sz="800" b="1">
+              <a:defRPr sz="2400" b="1">
                 <a:solidFill>
                   <a:srgbClr val="8C1515"/>
                 </a:solidFill>
               </a:defRPr>
             </a:pPr>
             <a:r>
-              <a:t>TIER 4: CIVIC EXPORT</a:t>
-            </a:r>
-          </a:p>
-          <a:p>
-            <a:pPr>
-              <a:spcBef>
-                <a:spcPts val="300"/>
-              </a:spcBef>
-              <a:defRPr sz="1200" b="1">
-                <a:solidFill>
-                  <a:srgbClr val="F3F4F6"/>
-                </a:solidFill>
-              </a:defRPr>
-            </a:pPr>
-            <a:r>
-              <a:t>Action Brief Engine</a:t>
-            </a:r>
-          </a:p>
-          <a:p>
-            <a:pPr>
-              <a:spcBef>
-                <a:spcPts val="800"/>
-              </a:spcBef>
-              <a:defRPr sz="900">
-                <a:solidFill>
-                  <a:srgbClr val="9CA3AF"/>
-                </a:solidFill>
-              </a:defRPr>
-            </a:pPr>
-            <a:r>
-              <a:t>Compiles board-ready Markdown/PDF brief with executive engineering specs, financial waterfall, and turnkey legal School Board Resolution text.</a:t>
-            </a:r>
-          </a:p>
-        </p:txBody>
-      </p:sp>
-      <p:sp>
-        <p:nvSpPr>
-          <p:cNvPr id="21" name="Rounded Rectangle 20"/>
+              <a:t>STEP 3</a:t>
+            </a:r>
+          </a:p>
+          <a:p>
+            <a:pPr>
+              <a:spcBef>
+                <a:spcPts val="200"/>
+              </a:spcBef>
+              <a:defRPr sz="1100" b="1">
+                <a:solidFill>
+                  <a:srgbClr val="F8FAFC"/>
+                </a:solidFill>
+              </a:defRPr>
+            </a:pPr>
+            <a:r>
+              <a:t>GET BOARD BRIEF</a:t>
+            </a:r>
+          </a:p>
+          <a:p>
+            <a:pPr>
+              <a:spcBef>
+                <a:spcPts val="600"/>
+              </a:spcBef>
+              <a:defRPr sz="1000">
+                <a:solidFill>
+                  <a:srgbClr val="A0AEC0"/>
+                </a:solidFill>
+              </a:defRPr>
+            </a:pPr>
+            <a:r>
+              <a:t>- Generates a 1-page financial action brief</a:t>
+            </a:r>
+          </a:p>
+          <a:p>
+            <a:pPr>
+              <a:spcBef>
+                <a:spcPts val="600"/>
+              </a:spcBef>
+              <a:defRPr sz="1000">
+                <a:solidFill>
+                  <a:srgbClr val="A0AEC0"/>
+                </a:solidFill>
+              </a:defRPr>
+            </a:pPr>
+            <a:r>
+              <a:t>- Calculates the exact federal cash grant</a:t>
+            </a:r>
+          </a:p>
+          <a:p>
+            <a:pPr>
+              <a:spcBef>
+                <a:spcPts val="600"/>
+              </a:spcBef>
+              <a:defRPr sz="1000">
+                <a:solidFill>
+                  <a:srgbClr val="A0AEC0"/>
+                </a:solidFill>
+              </a:defRPr>
+            </a:pPr>
+            <a:r>
+              <a:t>- Includes a draft resolution ready for board votes</a:t>
+            </a:r>
+          </a:p>
+        </p:txBody>
+      </p:sp>
+      <p:sp>
+        <p:nvSpPr>
+          <p:cNvPr id="18" name="Rounded Rectangle 17"/>
           <p:cNvSpPr/>
           <p:nvPr/>
         </p:nvSpPr>
         <p:spPr>
           <a:xfrm>
-            <a:off x="548640" y="5303520"/>
-            <a:ext cx="11094415" cy="1097280"/>
+            <a:off x="548640" y="5577840"/>
+            <a:ext cx="11094415" cy="777240"/>
           </a:xfrm>
           <a:prstGeom prst="roundRect">
             <a:avLst/>
           </a:prstGeom>
           <a:solidFill>
-            <a:srgbClr val="111827"/>
+            <a:srgbClr val="131A2B"/>
           </a:solidFill>
           <a:ln w="12700">
             <a:solidFill>
-              <a:srgbClr val="1F293D"/>
+              <a:srgbClr val="38BDF8"/>
             </a:solidFill>
           </a:ln>
         </p:spPr>
@@ -8678,57 +8926,14 @@
       </p:sp>
       <p:sp>
         <p:nvSpPr>
-          <p:cNvPr id="22" name="Rounded Rectangle 21"/>
-          <p:cNvSpPr/>
-          <p:nvPr/>
-        </p:nvSpPr>
-        <p:spPr>
-          <a:xfrm>
-            <a:off x="548640" y="5303520"/>
-            <a:ext cx="11094415" cy="45720"/>
-          </a:xfrm>
-          <a:prstGeom prst="roundRect">
-            <a:avLst/>
-          </a:prstGeom>
-          <a:solidFill>
-            <a:srgbClr val="38BDF8"/>
-          </a:solidFill>
-          <a:ln>
-            <a:noFill/>
-          </a:ln>
-        </p:spPr>
-        <p:style>
-          <a:lnRef idx="1">
-            <a:schemeClr val="accent1"/>
-          </a:lnRef>
-          <a:fillRef idx="3">
-            <a:schemeClr val="accent1"/>
-          </a:fillRef>
-          <a:effectRef idx="2">
-            <a:schemeClr val="accent1"/>
-          </a:effectRef>
-          <a:fontRef idx="minor">
-            <a:schemeClr val="lt1"/>
-          </a:fontRef>
-        </p:style>
-        <p:txBody>
-          <a:bodyPr rtlCol="0" anchor="ctr"/>
-          <a:lstStyle/>
-          <a:p>
-            <a:pPr algn="ctr"/>
-          </a:p>
-        </p:txBody>
-      </p:sp>
-      <p:sp>
-        <p:nvSpPr>
-          <p:cNvPr id="23" name="TextBox 22"/>
+          <p:cNvPr id="19" name="TextBox 18"/>
           <p:cNvSpPr txBox="1"/>
           <p:nvPr/>
         </p:nvSpPr>
         <p:spPr>
           <a:xfrm>
-            <a:off x="777240" y="5376672"/>
-            <a:ext cx="10607040" cy="914400"/>
+            <a:off x="731520" y="5623560"/>
+            <a:ext cx="10698480" cy="685800"/>
           </a:xfrm>
           <a:prstGeom prst="rect">
             <a:avLst/>
@@ -8742,33 +8947,29 @@
           <a:lstStyle/>
           <a:p>
             <a:pPr>
-              <a:defRPr sz="950" b="1">
+              <a:defRPr sz="900" b="1">
                 <a:solidFill>
                   <a:srgbClr val="38BDF8"/>
                 </a:solidFill>
               </a:defRPr>
             </a:pPr>
             <a:r>
-              <a:t>RESILIENT FAULT-TOLERANT CIRCUIT-BREAKER ARCHITECTURE</a:t>
-            </a:r>
-          </a:p>
-          <a:p>
-            <a:pPr>
-              <a:spcBef>
-                <a:spcPts val="300"/>
-              </a:spcBef>
-              <a:defRPr sz="900">
-                <a:solidFill>
-                  <a:srgbClr val="F3F4F6"/>
-                </a:solidFill>
-              </a:defRPr>
-            </a:pPr>
-            <a:r>
-              <a:t>If federal NREL endpoint exceeds an 8.0s timeout, the system executes an automatic fallback to regional NSRDB empirical solar matrices:</a:t>
-            </a:r>
-            <a:br/>
-            <a:r>
-              <a:t>Sunbelt: 1,650 kWh/kW-yr  |  Mid-Latitude / CA: 1,460 kWh/kW-yr  |  Northern: 1,320 kWh/kW-yr. The app guarantees zero presentation crashes.</a:t>
+              <a:t>BUILT FOR STUDENTS AND COMMUNITY ADVOCATES</a:t>
+            </a:r>
+          </a:p>
+          <a:p>
+            <a:pPr>
+              <a:spcBef>
+                <a:spcPts val="200"/>
+              </a:spcBef>
+              <a:defRPr sz="1050" b="1">
+                <a:solidFill>
+                  <a:srgbClr val="F8FAFC"/>
+                </a:solidFill>
+              </a:defRPr>
+            </a:pPr>
+            <a:r>
+              <a:t>No expensive consultants. No engineering degrees needed. Any student can walk into a school board meeting with the numbers in hand.</a:t>
             </a:r>
           </a:p>
         </p:txBody>
@@ -8806,7 +9007,7 @@
             <a:avLst/>
           </a:prstGeom>
           <a:solidFill>
-            <a:srgbClr val="090D16"/>
+            <a:srgbClr val="0B0F19"/>
           </a:solidFill>
           <a:ln>
             <a:noFill/>
@@ -8885,7 +9086,7 @@
         </p:nvSpPr>
         <p:spPr>
           <a:xfrm>
-            <a:off x="457200" y="109728"/>
+            <a:off x="548640" y="109728"/>
             <a:ext cx="2011680" cy="292608"/>
           </a:xfrm>
           <a:prstGeom prst="roundRect">
@@ -8937,7 +9138,7 @@
         </p:nvSpPr>
         <p:spPr>
           <a:xfrm>
-            <a:off x="2606040" y="73152"/>
+            <a:off x="2697480" y="73152"/>
             <a:ext cx="5943600" cy="365760"/>
           </a:xfrm>
           <a:prstGeom prst="rect">
@@ -8954,12 +9155,12 @@
             <a:pPr>
               <a:defRPr sz="950">
                 <a:solidFill>
-                  <a:srgbClr val="9CA3AF"/>
-                </a:solidFill>
-              </a:defRPr>
-            </a:pPr>
-            <a:r>
-              <a:t>SVYCA Youth For Earth Hackathon | Systems Architecture &amp; Climate Finance</a:t>
+                  <a:srgbClr val="A0AEC0"/>
+                </a:solidFill>
+              </a:defRPr>
+            </a:pPr>
+            <a:r>
+              <a:t>SVYCA Youth For Earth Hackathon  |  Clean Energy &amp; School Climate Action</a:t>
             </a:r>
           </a:p>
         </p:txBody>
@@ -8973,7 +9174,7 @@
         <p:spPr>
           <a:xfrm>
             <a:off x="10241280" y="73152"/>
-            <a:ext cx="1463040" cy="365760"/>
+            <a:ext cx="1371600" cy="365760"/>
           </a:xfrm>
           <a:prstGeom prst="rect">
             <a:avLst/>
@@ -9008,7 +9209,7 @@
         <p:spPr>
           <a:xfrm>
             <a:off x="0" y="493776"/>
-            <a:ext cx="6095847" cy="27432"/>
+            <a:ext cx="6095847" cy="22860"/>
           </a:xfrm>
           <a:prstGeom prst="rect">
             <a:avLst/>
@@ -9051,7 +9252,7 @@
         <p:spPr>
           <a:xfrm>
             <a:off x="548640" y="621792"/>
-            <a:ext cx="11091672" cy="1005840"/>
+            <a:ext cx="11091672" cy="1051560"/>
           </a:xfrm>
           <a:prstGeom prst="rect">
             <a:avLst/>
@@ -9072,7 +9273,7 @@
               </a:defRPr>
             </a:pPr>
             <a:r>
-              <a:t>PHYSICAL SIMULATION ENGINE</a:t>
+              <a:t>BEHIND THE SCENES</a:t>
             </a:r>
           </a:p>
           <a:p>
@@ -9080,14 +9281,14 @@
               <a:spcBef>
                 <a:spcPts val="200"/>
               </a:spcBef>
-              <a:defRPr sz="2100" b="1">
-                <a:solidFill>
-                  <a:srgbClr val="F3F4F6"/>
-                </a:solidFill>
-              </a:defRPr>
-            </a:pPr>
-            <a:r>
-              <a:t>Physics Modeling &amp; NREL Derate Waterfall</a:t>
+              <a:defRPr sz="2200" b="1">
+                <a:solidFill>
+                  <a:srgbClr val="F8FAFC"/>
+                </a:solidFill>
+              </a:defRPr>
+            </a:pPr>
+            <a:r>
+              <a:t>Real Science, Zero Guesswork</a:t>
             </a:r>
           </a:p>
           <a:p>
@@ -9097,12 +9298,12 @@
               </a:spcBef>
               <a:defRPr sz="1100">
                 <a:solidFill>
-                  <a:srgbClr val="9CA3AF"/>
-                </a:solidFill>
-              </a:defRPr>
-            </a:pPr>
-            <a:r>
-              <a:t>Coupling spatial canopy packing geometry with NREL PVWatts v8 loss algorithms for rigorous yield modeling.</a:t>
+                  <a:srgbClr val="A0AEC0"/>
+                </a:solidFill>
+              </a:defRPr>
+            </a:pPr>
+            <a:r>
+              <a:t>How we calculate solar potential accurately without needing an on-site engineer.</a:t>
             </a:r>
           </a:p>
         </p:txBody>
@@ -9116,17 +9317,17 @@
         <p:spPr>
           <a:xfrm>
             <a:off x="548640" y="1737360"/>
-            <a:ext cx="5303520" cy="4663440"/>
+            <a:ext cx="3474720" cy="3657600"/>
           </a:xfrm>
           <a:prstGeom prst="roundRect">
             <a:avLst/>
           </a:prstGeom>
           <a:solidFill>
-            <a:srgbClr val="111827"/>
+            <a:srgbClr val="131A2B"/>
           </a:solidFill>
           <a:ln w="12700">
             <a:solidFill>
-              <a:srgbClr val="1F293D"/>
+              <a:srgbClr val="222E4A"/>
             </a:solidFill>
           </a:ln>
         </p:spPr>
@@ -9161,7 +9362,7 @@
         <p:spPr>
           <a:xfrm>
             <a:off x="548640" y="1737360"/>
-            <a:ext cx="5303520" cy="45720"/>
+            <a:ext cx="3474720" cy="54864"/>
           </a:xfrm>
           <a:prstGeom prst="roundRect">
             <a:avLst/>
@@ -9203,8 +9404,8 @@
         </p:nvSpPr>
         <p:spPr>
           <a:xfrm>
-            <a:off x="731520" y="1874519"/>
-            <a:ext cx="4937760" cy="4389120"/>
+            <a:off x="731520" y="1901952"/>
+            <a:ext cx="3108960" cy="3328416"/>
           </a:xfrm>
           <a:prstGeom prst="rect">
             <a:avLst/>
@@ -9218,14 +9419,74 @@
           <a:lstStyle/>
           <a:p>
             <a:pPr>
-              <a:defRPr sz="1100" b="1">
-                <a:solidFill>
-                  <a:srgbClr val="F3F4F6"/>
-                </a:solidFill>
-              </a:defRPr>
-            </a:pPr>
-            <a:r>
-              <a:t>CANOPY SPATIAL PACKING &amp; CAPACITY FORMULATION</a:t>
+              <a:defRPr sz="3200" b="1">
+                <a:solidFill>
+                  <a:srgbClr val="38BDF8"/>
+                </a:solidFill>
+              </a:defRPr>
+            </a:pPr>
+            <a:r>
+              <a:t>65% Lot Cover</a:t>
+            </a:r>
+          </a:p>
+          <a:p>
+            <a:pPr>
+              <a:spcBef>
+                <a:spcPts val="200"/>
+              </a:spcBef>
+              <a:defRPr sz="900" b="1">
+                <a:solidFill>
+                  <a:srgbClr val="F8FAFC"/>
+                </a:solidFill>
+              </a:defRPr>
+            </a:pPr>
+            <a:r>
+              <a:t>PRACTICAL PARKING DESIGN</a:t>
+            </a:r>
+          </a:p>
+          <a:p>
+            <a:pPr>
+              <a:spcBef>
+                <a:spcPts val="600"/>
+              </a:spcBef>
+              <a:defRPr sz="1000">
+                <a:solidFill>
+                  <a:srgbClr val="A0AEC0"/>
+                </a:solidFill>
+              </a:defRPr>
+            </a:pPr>
+            <a:r>
+              <a:t>- Leaves 24-foot driving aisles open for traffic</a:t>
+            </a:r>
+          </a:p>
+          <a:p>
+            <a:pPr>
+              <a:spcBef>
+                <a:spcPts val="600"/>
+              </a:spcBef>
+              <a:defRPr sz="1000">
+                <a:solidFill>
+                  <a:srgbClr val="A0AEC0"/>
+                </a:solidFill>
+              </a:defRPr>
+            </a:pPr>
+            <a:r>
+              <a:t>- Keeps 14-foot vertical clearance for school buses</a:t>
+            </a:r>
+          </a:p>
+          <a:p>
+            <a:pPr>
+              <a:spcBef>
+                <a:spcPts val="600"/>
+              </a:spcBef>
+              <a:defRPr sz="1000">
+                <a:solidFill>
+                  <a:srgbClr val="A0AEC0"/>
+                </a:solidFill>
+              </a:defRPr>
+            </a:pPr>
+            <a:r>
+              <a:t>- Preserves ADA accessible pathways and fire lanes</a:t>
             </a:r>
           </a:p>
         </p:txBody>
@@ -9238,18 +9499,18 @@
         </p:nvSpPr>
         <p:spPr>
           <a:xfrm>
-            <a:off x="731520" y="2240280"/>
-            <a:ext cx="4937760" cy="822960"/>
+            <a:off x="4343400" y="1737360"/>
+            <a:ext cx="3474720" cy="3657600"/>
           </a:xfrm>
           <a:prstGeom prst="roundRect">
             <a:avLst/>
           </a:prstGeom>
           <a:solidFill>
-            <a:srgbClr val="0B1120"/>
+            <a:srgbClr val="131A2B"/>
           </a:solidFill>
           <a:ln w="12700">
             <a:solidFill>
-              <a:srgbClr val="1E3A5F"/>
+              <a:srgbClr val="222E4A"/>
             </a:solidFill>
           </a:ln>
         </p:spPr>
@@ -9283,8 +9544,8 @@
         </p:nvSpPr>
         <p:spPr>
           <a:xfrm>
-            <a:off x="731520" y="2240280"/>
-            <a:ext cx="45720" cy="822960"/>
+            <a:off x="4343400" y="1737360"/>
+            <a:ext cx="3474720" cy="54864"/>
           </a:xfrm>
           <a:prstGeom prst="roundRect">
             <a:avLst/>
@@ -9326,8 +9587,8 @@
         </p:nvSpPr>
         <p:spPr>
           <a:xfrm>
-            <a:off x="841248" y="2295144"/>
-            <a:ext cx="4718304" cy="713232"/>
+            <a:off x="4526280" y="1901952"/>
+            <a:ext cx="3108960" cy="3328416"/>
           </a:xfrm>
           <a:prstGeom prst="rect">
             <a:avLst/>
@@ -9341,18 +9602,14 @@
           <a:lstStyle/>
           <a:p>
             <a:pPr>
-              <a:defRPr sz="950" b="1">
-                <a:solidFill>
-                  <a:srgbClr val="E0F2FE"/>
-                </a:solidFill>
-              </a:defRPr>
-            </a:pPr>
-            <a:r>
-              <a:t>A_net = A_gross * eta_packing (eta = 0.65)</a:t>
-            </a:r>
-            <a:br/>
-            <a:r>
-              <a:t>P_DC = A_net * 0.20 kW/m^2 = A_net * 200 W/m^2</a:t>
+              <a:defRPr sz="3200" b="1">
+                <a:solidFill>
+                  <a:srgbClr val="38BDF8"/>
+                </a:solidFill>
+              </a:defRPr>
+            </a:pPr>
+            <a:r>
+              <a:t>200 W / m²</a:t>
             </a:r>
           </a:p>
           <a:p>
@@ -9360,148 +9617,83 @@
               <a:spcBef>
                 <a:spcPts val="200"/>
               </a:spcBef>
-              <a:defRPr sz="800">
-                <a:solidFill>
-                  <a:srgbClr val="9CA3AF"/>
-                </a:solidFill>
-              </a:defRPr>
-            </a:pPr>
-            <a:r>
-              <a:t>Reserves 24-ft driving aisles &amp; Title 24 fire clearance; assumes 20.0% efficient Mono PERC modules.</a:t>
-            </a:r>
-          </a:p>
-        </p:txBody>
-      </p:sp>
-      <p:sp>
-        <p:nvSpPr>
-          <p:cNvPr id="15" name="TextBox 14"/>
-          <p:cNvSpPr txBox="1"/>
-          <p:nvPr/>
-        </p:nvSpPr>
-        <p:spPr>
-          <a:xfrm>
-            <a:off x="731520" y="3200400"/>
-            <a:ext cx="4937760" cy="3017520"/>
-          </a:xfrm>
-          <a:prstGeom prst="rect">
-            <a:avLst/>
-          </a:prstGeom>
-          <a:noFill/>
-        </p:spPr>
-        <p:txBody>
-          <a:bodyPr wrap="square">
-            <a:spAutoFit/>
-          </a:bodyPr>
-          <a:lstStyle/>
-          <a:p>
-            <a:pPr>
-              <a:defRPr sz="950" b="1">
-                <a:solidFill>
-                  <a:srgbClr val="38BDF8"/>
-                </a:solidFill>
-              </a:defRPr>
-            </a:pPr>
-            <a:r>
-              <a:t>NREL PVWatts v8 REST Parameters (core/solar_engine.py):</a:t>
-            </a:r>
-          </a:p>
-          <a:p>
-            <a:pPr>
-              <a:spcBef>
-                <a:spcPts val="400"/>
-              </a:spcBef>
-              <a:defRPr sz="850">
-                <a:solidFill>
-                  <a:srgbClr val="9CA3AF"/>
-                </a:solidFill>
-              </a:defRPr>
-            </a:pPr>
-            <a:r>
-              <a:t>module_type = 1: Premium Monocrystalline PERC silicon (~20% nominal efficiency).</a:t>
-            </a:r>
-          </a:p>
-          <a:p>
-            <a:pPr>
-              <a:spcBef>
-                <a:spcPts val="400"/>
-              </a:spcBef>
-              <a:defRPr sz="850">
-                <a:solidFill>
-                  <a:srgbClr val="9CA3AF"/>
-                </a:solidFill>
-              </a:defRPr>
-            </a:pPr>
-            <a:r>
-              <a:t>array_type = 2: Fixed Canopy / Carport structural mounting geometry.</a:t>
-            </a:r>
-          </a:p>
-          <a:p>
-            <a:pPr>
-              <a:spcBef>
-                <a:spcPts val="400"/>
-              </a:spcBef>
-              <a:defRPr sz="850">
-                <a:solidFill>
-                  <a:srgbClr val="9CA3AF"/>
-                </a:solidFill>
-              </a:defRPr>
-            </a:pPr>
-            <a:r>
-              <a:t>tilt = 10.0 deg: 10-degree tilt balancing rainwater shedding, wind loading, and summer insolation.</a:t>
-            </a:r>
-          </a:p>
-          <a:p>
-            <a:pPr>
-              <a:spcBef>
-                <a:spcPts val="400"/>
-              </a:spcBef>
-              <a:defRPr sz="850">
-                <a:solidFill>
-                  <a:srgbClr val="9CA3AF"/>
-                </a:solidFill>
-              </a:defRPr>
-            </a:pPr>
-            <a:r>
-              <a:t>azimuth = 180.0 deg: True South geographic orientation for optimal North American solar harvesting.</a:t>
-            </a:r>
-          </a:p>
-          <a:p>
-            <a:pPr>
-              <a:spcBef>
-                <a:spcPts val="400"/>
-              </a:spcBef>
-              <a:defRPr sz="850">
-                <a:solidFill>
-                  <a:srgbClr val="9CA3AF"/>
-                </a:solidFill>
-              </a:defRPr>
-            </a:pPr>
-            <a:r>
-              <a:t>losses = 14.0%: Comprehensive aggregate system derate factor (detailed on right).</a:t>
-            </a:r>
-          </a:p>
-        </p:txBody>
-      </p:sp>
-      <p:sp>
-        <p:nvSpPr>
-          <p:cNvPr id="16" name="Rounded Rectangle 15"/>
+              <a:defRPr sz="900" b="1">
+                <a:solidFill>
+                  <a:srgbClr val="F8FAFC"/>
+                </a:solidFill>
+              </a:defRPr>
+            </a:pPr>
+            <a:r>
+              <a:t>COMMERCIAL SOLAR PANELS</a:t>
+            </a:r>
+          </a:p>
+          <a:p>
+            <a:pPr>
+              <a:spcBef>
+                <a:spcPts val="600"/>
+              </a:spcBef>
+              <a:defRPr sz="1000">
+                <a:solidFill>
+                  <a:srgbClr val="A0AEC0"/>
+                </a:solidFill>
+              </a:defRPr>
+            </a:pPr>
+            <a:r>
+              <a:t>- Models high-efficiency commercial solar canopies</a:t>
+            </a:r>
+          </a:p>
+          <a:p>
+            <a:pPr>
+              <a:spcBef>
+                <a:spcPts val="600"/>
+              </a:spcBef>
+              <a:defRPr sz="1000">
+                <a:solidFill>
+                  <a:srgbClr val="A0AEC0"/>
+                </a:solidFill>
+              </a:defRPr>
+            </a:pPr>
+            <a:r>
+              <a:t>- Accounts for summer heat and dust loss</a:t>
+            </a:r>
+          </a:p>
+          <a:p>
+            <a:pPr>
+              <a:spcBef>
+                <a:spcPts val="600"/>
+              </a:spcBef>
+              <a:defRPr sz="1000">
+                <a:solidFill>
+                  <a:srgbClr val="A0AEC0"/>
+                </a:solidFill>
+              </a:defRPr>
+            </a:pPr>
+            <a:r>
+              <a:t>- Calibrated against active school arrays in Cupertino</a:t>
+            </a:r>
+          </a:p>
+        </p:txBody>
+      </p:sp>
+      <p:sp>
+        <p:nvSpPr>
+          <p:cNvPr id="15" name="Rounded Rectangle 14"/>
           <p:cNvSpPr/>
           <p:nvPr/>
         </p:nvSpPr>
         <p:spPr>
           <a:xfrm>
-            <a:off x="6217920" y="1737360"/>
-            <a:ext cx="5425135" cy="4663440"/>
+            <a:off x="8138160" y="1737360"/>
+            <a:ext cx="3474720" cy="3657600"/>
           </a:xfrm>
           <a:prstGeom prst="roundRect">
             <a:avLst/>
           </a:prstGeom>
           <a:solidFill>
-            <a:srgbClr val="111827"/>
+            <a:srgbClr val="131A2B"/>
           </a:solidFill>
           <a:ln w="12700">
             <a:solidFill>
-              <a:srgbClr val="1F293D"/>
+              <a:srgbClr val="222E4A"/>
             </a:solidFill>
           </a:ln>
         </p:spPr>
@@ -9529,20 +9721,20 @@
       </p:sp>
       <p:sp>
         <p:nvSpPr>
-          <p:cNvPr id="17" name="Rounded Rectangle 16"/>
+          <p:cNvPr id="16" name="Rounded Rectangle 15"/>
           <p:cNvSpPr/>
           <p:nvPr/>
         </p:nvSpPr>
         <p:spPr>
           <a:xfrm>
-            <a:off x="6217920" y="1737360"/>
-            <a:ext cx="5425135" cy="45720"/>
+            <a:off x="8138160" y="1737360"/>
+            <a:ext cx="3474720" cy="54864"/>
           </a:xfrm>
           <a:prstGeom prst="roundRect">
             <a:avLst/>
           </a:prstGeom>
           <a:solidFill>
-            <a:srgbClr val="38BDF8"/>
+            <a:srgbClr val="10B981"/>
           </a:solidFill>
           <a:ln>
             <a:noFill/>
@@ -9572,14 +9764,14 @@
       </p:sp>
       <p:sp>
         <p:nvSpPr>
-          <p:cNvPr id="18" name="TextBox 17"/>
+          <p:cNvPr id="17" name="TextBox 16"/>
           <p:cNvSpPr txBox="1"/>
           <p:nvPr/>
         </p:nvSpPr>
         <p:spPr>
           <a:xfrm>
-            <a:off x="6446520" y="1874519"/>
-            <a:ext cx="4937760" cy="4389120"/>
+            <a:off x="8321040" y="1901952"/>
+            <a:ext cx="3108960" cy="3328416"/>
           </a:xfrm>
           <a:prstGeom prst="rect">
             <a:avLst/>
@@ -9593,203 +9785,169 @@
           <a:lstStyle/>
           <a:p>
             <a:pPr>
-              <a:defRPr sz="1100" b="1">
+              <a:defRPr sz="3200" b="1">
+                <a:solidFill>
+                  <a:srgbClr val="10B981"/>
+                </a:solidFill>
+              </a:defRPr>
+            </a:pPr>
+            <a:r>
+              <a:t>NREL Engine</a:t>
+            </a:r>
+          </a:p>
+          <a:p>
+            <a:pPr>
+              <a:spcBef>
+                <a:spcPts val="200"/>
+              </a:spcBef>
+              <a:defRPr sz="900" b="1">
+                <a:solidFill>
+                  <a:srgbClr val="F8FAFC"/>
+                </a:solidFill>
+              </a:defRPr>
+            </a:pPr>
+            <a:r>
+              <a:t>U.S. DEPT OF ENERGY DATA</a:t>
+            </a:r>
+          </a:p>
+          <a:p>
+            <a:pPr>
+              <a:spcBef>
+                <a:spcPts val="600"/>
+              </a:spcBef>
+              <a:defRPr sz="1000">
+                <a:solidFill>
+                  <a:srgbClr val="A0AEC0"/>
+                </a:solidFill>
+              </a:defRPr>
+            </a:pPr>
+            <a:r>
+              <a:t>- Queries live satellite solar data for exact GPS coords</a:t>
+            </a:r>
+          </a:p>
+          <a:p>
+            <a:pPr>
+              <a:spcBef>
+                <a:spcPts val="600"/>
+              </a:spcBef>
+              <a:defRPr sz="1000">
+                <a:solidFill>
+                  <a:srgbClr val="A0AEC0"/>
+                </a:solidFill>
+              </a:defRPr>
+            </a:pPr>
+            <a:r>
+              <a:t>- Models local weather, sun angles, and seasons</a:t>
+            </a:r>
+          </a:p>
+          <a:p>
+            <a:pPr>
+              <a:spcBef>
+                <a:spcPts val="600"/>
+              </a:spcBef>
+              <a:defRPr sz="1000">
+                <a:solidFill>
+                  <a:srgbClr val="A0AEC0"/>
+                </a:solidFill>
+              </a:defRPr>
+            </a:pPr>
+            <a:r>
+              <a:t>- Includes instant smart backup so it never crashes</a:t>
+            </a:r>
+          </a:p>
+        </p:txBody>
+      </p:sp>
+      <p:sp>
+        <p:nvSpPr>
+          <p:cNvPr id="18" name="Rounded Rectangle 17"/>
+          <p:cNvSpPr/>
+          <p:nvPr/>
+        </p:nvSpPr>
+        <p:spPr>
+          <a:xfrm>
+            <a:off x="548640" y="5577840"/>
+            <a:ext cx="11094415" cy="777240"/>
+          </a:xfrm>
+          <a:prstGeom prst="roundRect">
+            <a:avLst/>
+          </a:prstGeom>
+          <a:solidFill>
+            <a:srgbClr val="131A2B"/>
+          </a:solidFill>
+          <a:ln w="12700">
+            <a:solidFill>
+              <a:srgbClr val="38BDF8"/>
+            </a:solidFill>
+          </a:ln>
+        </p:spPr>
+        <p:style>
+          <a:lnRef idx="1">
+            <a:schemeClr val="accent1"/>
+          </a:lnRef>
+          <a:fillRef idx="3">
+            <a:schemeClr val="accent1"/>
+          </a:fillRef>
+          <a:effectRef idx="2">
+            <a:schemeClr val="accent1"/>
+          </a:effectRef>
+          <a:fontRef idx="minor">
+            <a:schemeClr val="lt1"/>
+          </a:fontRef>
+        </p:style>
+        <p:txBody>
+          <a:bodyPr rtlCol="0" anchor="ctr"/>
+          <a:lstStyle/>
+          <a:p>
+            <a:pPr algn="ctr"/>
+          </a:p>
+        </p:txBody>
+      </p:sp>
+      <p:sp>
+        <p:nvSpPr>
+          <p:cNvPr id="19" name="TextBox 18"/>
+          <p:cNvSpPr txBox="1"/>
+          <p:nvPr/>
+        </p:nvSpPr>
+        <p:spPr>
+          <a:xfrm>
+            <a:off x="731520" y="5623560"/>
+            <a:ext cx="10698480" cy="685800"/>
+          </a:xfrm>
+          <a:prstGeom prst="rect">
+            <a:avLst/>
+          </a:prstGeom>
+          <a:noFill/>
+        </p:spPr>
+        <p:txBody>
+          <a:bodyPr wrap="square">
+            <a:spAutoFit/>
+          </a:bodyPr>
+          <a:lstStyle/>
+          <a:p>
+            <a:pPr>
+              <a:defRPr sz="900" b="1">
                 <a:solidFill>
                   <a:srgbClr val="38BDF8"/>
                 </a:solidFill>
               </a:defRPr>
             </a:pPr>
             <a:r>
-              <a:t>14.0% AGGREGATE SYSTEM DERATE LOSS WATERFALL</a:t>
-            </a:r>
-          </a:p>
-          <a:p>
-            <a:pPr>
-              <a:spcBef>
-                <a:spcPts val="600"/>
-              </a:spcBef>
-              <a:defRPr sz="900" b="1">
-                <a:solidFill>
-                  <a:srgbClr val="F3F4F6"/>
-                </a:solidFill>
-              </a:defRPr>
-            </a:pPr>
-            <a:r>
-              <a:t>Inverter Conversion Loss: -4.0%</a:t>
-            </a:r>
-          </a:p>
-          <a:p>
-            <a:pPr>
-              <a:defRPr sz="800">
-                <a:solidFill>
-                  <a:srgbClr val="9CA3AF"/>
-                </a:solidFill>
-              </a:defRPr>
-            </a:pPr>
-            <a:r>
-              <a:t>Commercial 3-phase string inverters operating at 96.0% CEC weighted efficiency.</a:t>
-            </a:r>
-          </a:p>
-          <a:p>
-            <a:pPr>
-              <a:spcBef>
-                <a:spcPts val="600"/>
-              </a:spcBef>
-              <a:defRPr sz="900" b="1">
-                <a:solidFill>
-                  <a:srgbClr val="F3F4F6"/>
-                </a:solidFill>
-              </a:defRPr>
-            </a:pPr>
-            <a:r>
-              <a:t>Cell Temperature Derate: -3.0%</a:t>
-            </a:r>
-          </a:p>
-          <a:p>
-            <a:pPr>
-              <a:defRPr sz="800">
-                <a:solidFill>
-                  <a:srgbClr val="9CA3AF"/>
-                </a:solidFill>
-              </a:defRPr>
-            </a:pPr>
-            <a:r>
-              <a:t>Elevated canopy design provides continuous passive under-panel airflow cooling.</a:t>
-            </a:r>
-          </a:p>
-          <a:p>
-            <a:pPr>
-              <a:spcBef>
-                <a:spcPts val="600"/>
-              </a:spcBef>
-              <a:defRPr sz="900" b="1">
-                <a:solidFill>
-                  <a:srgbClr val="F3F4F6"/>
-                </a:solidFill>
-              </a:defRPr>
-            </a:pPr>
-            <a:r>
-              <a:t>Soiling &amp; Particulate Dust: -2.5%</a:t>
-            </a:r>
-          </a:p>
-          <a:p>
-            <a:pPr>
-              <a:defRPr sz="800">
-                <a:solidFill>
-                  <a:srgbClr val="9CA3AF"/>
-                </a:solidFill>
-              </a:defRPr>
-            </a:pPr>
-            <a:r>
-              <a:t>Dry summer dust accumulation; mitigated by annual robotic brush cleaning in O&amp;M.</a:t>
-            </a:r>
-          </a:p>
-          <a:p>
-            <a:pPr>
-              <a:spcBef>
-                <a:spcPts val="600"/>
-              </a:spcBef>
-              <a:defRPr sz="900" b="1">
-                <a:solidFill>
-                  <a:srgbClr val="F3F4F6"/>
-                </a:solidFill>
-              </a:defRPr>
-            </a:pPr>
-            <a:r>
-              <a:t>DC &amp; AC Ohmic Resistance: -2.0%</a:t>
-            </a:r>
-          </a:p>
-          <a:p>
-            <a:pPr>
-              <a:defRPr sz="800">
-                <a:solidFill>
-                  <a:srgbClr val="9CA3AF"/>
-                </a:solidFill>
-              </a:defRPr>
-            </a:pPr>
-            <a:r>
-              <a:t>I^2 * R wire losses across underground copper feeders and conduit runs.</a:t>
-            </a:r>
-          </a:p>
-          <a:p>
-            <a:pPr>
-              <a:spcBef>
-                <a:spcPts val="600"/>
-              </a:spcBef>
-              <a:defRPr sz="900" b="1">
-                <a:solidFill>
-                  <a:srgbClr val="F3F4F6"/>
-                </a:solidFill>
-              </a:defRPr>
-            </a:pPr>
-            <a:r>
-              <a:t>Module Mismatch &amp; Tolerance: -1.5%</a:t>
-            </a:r>
-          </a:p>
-          <a:p>
-            <a:pPr>
-              <a:defRPr sz="800">
-                <a:solidFill>
-                  <a:srgbClr val="9CA3AF"/>
-                </a:solidFill>
-              </a:defRPr>
-            </a:pPr>
-            <a:r>
-              <a:t>Positive power tolerance binning (+0/+5W) from Tier-1 BloombergNEF manufacturers.</a:t>
-            </a:r>
-          </a:p>
-          <a:p>
-            <a:pPr>
-              <a:spcBef>
-                <a:spcPts val="600"/>
-              </a:spcBef>
-              <a:defRPr sz="900" b="1">
-                <a:solidFill>
-                  <a:srgbClr val="F3F4F6"/>
-                </a:solidFill>
-              </a:defRPr>
-            </a:pPr>
-            <a:r>
-              <a:t>Diodes &amp; Connection Drops: -1.0%</a:t>
-            </a:r>
-          </a:p>
-          <a:p>
-            <a:pPr>
-              <a:defRPr sz="800">
-                <a:solidFill>
-                  <a:srgbClr val="9CA3AF"/>
-                </a:solidFill>
-              </a:defRPr>
-            </a:pPr>
-            <a:r>
-              <a:t>MC4 locking connectors and bypass diode voltage drops across series strings.</a:t>
-            </a:r>
-          </a:p>
-          <a:p>
-            <a:pPr>
-              <a:spcBef>
-                <a:spcPts val="600"/>
-              </a:spcBef>
-              <a:defRPr sz="900" b="1">
-                <a:solidFill>
-                  <a:srgbClr val="10B981"/>
-                </a:solidFill>
-              </a:defRPr>
-            </a:pPr>
-            <a:r>
-              <a:t>Aggregate Derate Factor: 14.0%</a:t>
-            </a:r>
-          </a:p>
-          <a:p>
-            <a:pPr>
-              <a:defRPr sz="800">
-                <a:solidFill>
-                  <a:srgbClr val="9CA3AF"/>
-                </a:solidFill>
-              </a:defRPr>
-            </a:pPr>
-            <a:r>
-              <a:t>Results in an 86.0% overall System Performance Ratio (PR = 0.86).</a:t>
+              <a:t>ENGINEERED FOR ACCURACY</a:t>
+            </a:r>
+          </a:p>
+          <a:p>
+            <a:pPr>
+              <a:spcBef>
+                <a:spcPts val="200"/>
+              </a:spcBef>
+              <a:defRPr sz="1050" b="1">
+                <a:solidFill>
+                  <a:srgbClr val="F8FAFC"/>
+                </a:solidFill>
+              </a:defRPr>
+            </a:pPr>
+            <a:r>
+              <a:t>We don't guess: our calculations are calibrated directly against active solar canopies in Cupertino Union and Fremont Union High School District.</a:t>
             </a:r>
           </a:p>
         </p:txBody>
@@ -9827,7 +9985,7 @@
             <a:avLst/>
           </a:prstGeom>
           <a:solidFill>
-            <a:srgbClr val="090D16"/>
+            <a:srgbClr val="0B0F19"/>
           </a:solidFill>
           <a:ln>
             <a:noFill/>
@@ -9906,7 +10064,7 @@
         </p:nvSpPr>
         <p:spPr>
           <a:xfrm>
-            <a:off x="457200" y="109728"/>
+            <a:off x="548640" y="109728"/>
             <a:ext cx="2011680" cy="292608"/>
           </a:xfrm>
           <a:prstGeom prst="roundRect">
@@ -9958,7 +10116,7 @@
         </p:nvSpPr>
         <p:spPr>
           <a:xfrm>
-            <a:off x="2606040" y="73152"/>
+            <a:off x="2697480" y="73152"/>
             <a:ext cx="5943600" cy="365760"/>
           </a:xfrm>
           <a:prstGeom prst="rect">
@@ -9975,12 +10133,12 @@
             <a:pPr>
               <a:defRPr sz="950">
                 <a:solidFill>
-                  <a:srgbClr val="9CA3AF"/>
-                </a:solidFill>
-              </a:defRPr>
-            </a:pPr>
-            <a:r>
-              <a:t>SVYCA Youth For Earth Hackathon | Systems Architecture &amp; Climate Finance</a:t>
+                  <a:srgbClr val="A0AEC0"/>
+                </a:solidFill>
+              </a:defRPr>
+            </a:pPr>
+            <a:r>
+              <a:t>SVYCA Youth For Earth Hackathon  |  Clean Energy &amp; School Climate Action</a:t>
             </a:r>
           </a:p>
         </p:txBody>
@@ -9994,7 +10152,7 @@
         <p:spPr>
           <a:xfrm>
             <a:off x="10241280" y="73152"/>
-            <a:ext cx="1463040" cy="365760"/>
+            <a:ext cx="1371600" cy="365760"/>
           </a:xfrm>
           <a:prstGeom prst="rect">
             <a:avLst/>
@@ -10029,7 +10187,7 @@
         <p:spPr>
           <a:xfrm>
             <a:off x="0" y="493776"/>
-            <a:ext cx="7315017" cy="27432"/>
+            <a:ext cx="7315017" cy="22860"/>
           </a:xfrm>
           <a:prstGeom prst="rect">
             <a:avLst/>
@@ -10072,7 +10230,7 @@
         <p:spPr>
           <a:xfrm>
             <a:off x="548640" y="621792"/>
-            <a:ext cx="11091672" cy="1005840"/>
+            <a:ext cx="11091672" cy="1051560"/>
           </a:xfrm>
           <a:prstGeom prst="rect">
             <a:avLst/>
@@ -10093,7 +10251,7 @@
               </a:defRPr>
             </a:pPr>
             <a:r>
-              <a:t>EMPIRICAL MODEL VALIDATION</a:t>
+              <a:t>CASE STUDY</a:t>
             </a:r>
           </a:p>
           <a:p>
@@ -10101,14 +10259,14 @@
               <a:spcBef>
                 <a:spcPts val="200"/>
               </a:spcBef>
-              <a:defRPr sz="2100" b="1">
-                <a:solidFill>
-                  <a:srgbClr val="F3F4F6"/>
-                </a:solidFill>
-              </a:defRPr>
-            </a:pPr>
-            <a:r>
-              <a:t>Ground-Truthed Silicon Valley Case Study</a:t>
+              <a:defRPr sz="2200" b="1">
+                <a:solidFill>
+                  <a:srgbClr val="F8FAFC"/>
+                </a:solidFill>
+              </a:defRPr>
+            </a:pPr>
+            <a:r>
+              <a:t>The Tale of Two Schools: Leaders vs. Lost Cash</a:t>
             </a:r>
           </a:p>
           <a:p>
@@ -10118,12 +10276,12 @@
               </a:spcBef>
               <a:defRPr sz="1100">
                 <a:solidFill>
-                  <a:srgbClr val="9CA3AF"/>
-                </a:solidFill>
-              </a:defRPr>
-            </a:pPr>
-            <a:r>
-              <a:t>Calibrating computational simulation against empirical utility data at Monta Vista High vs. quantified delay at Paly.</a:t>
+                  <a:srgbClr val="A0AEC0"/>
+                </a:solidFill>
+              </a:defRPr>
+            </a:pPr>
+            <a:r>
+              <a:t>See what happens when a school takes action versus letting asphalt sit idle.</a:t>
             </a:r>
           </a:p>
         </p:txBody>
@@ -10137,17 +10295,17 @@
         <p:spPr>
           <a:xfrm>
             <a:off x="548640" y="1737360"/>
-            <a:ext cx="5394960" cy="4663440"/>
+            <a:ext cx="5394960" cy="4572000"/>
           </a:xfrm>
           <a:prstGeom prst="roundRect">
             <a:avLst/>
           </a:prstGeom>
           <a:solidFill>
-            <a:srgbClr val="111827"/>
+            <a:srgbClr val="131A2B"/>
           </a:solidFill>
           <a:ln w="12700">
             <a:solidFill>
-              <a:srgbClr val="1F293D"/>
+              <a:srgbClr val="222E4A"/>
             </a:solidFill>
           </a:ln>
         </p:spPr>
@@ -10182,7 +10340,7 @@
         <p:spPr>
           <a:xfrm>
             <a:off x="548640" y="1737360"/>
-            <a:ext cx="5394960" cy="45720"/>
+            <a:ext cx="5394960" cy="54864"/>
           </a:xfrm>
           <a:prstGeom prst="roundRect">
             <a:avLst/>
@@ -10225,7 +10383,7 @@
         <p:spPr>
           <a:xfrm>
             <a:off x="777240" y="1874519"/>
-            <a:ext cx="4937760" cy="4389120"/>
+            <a:ext cx="4937760" cy="4297680"/>
           </a:xfrm>
           <a:prstGeom prst="rect">
             <a:avLst/>
@@ -10246,7 +10404,7 @@
               </a:defRPr>
             </a:pPr>
             <a:r>
-              <a:t>MONTA VISTA HIGH (IMPLEMENTED LEADER)</a:t>
+              <a:t>MONTA VISTA HIGH (CUPERTINO)</a:t>
             </a:r>
           </a:p>
           <a:p>
@@ -10254,104 +10412,89 @@
               <a:spcBef>
                 <a:spcPts val="100"/>
               </a:spcBef>
-              <a:defRPr sz="850">
-                <a:solidFill>
-                  <a:srgbClr val="6B7280"/>
-                </a:solidFill>
-              </a:defRPr>
-            </a:pPr>
-            <a:r>
-              <a:t>FUHSD &amp; ENGIE 550 kW Carports (OSM Way 416432160, Lat 37.3151, Lon -122.0581)</a:t>
-            </a:r>
-          </a:p>
-          <a:p>
-            <a:pPr>
-              <a:spcBef>
-                <a:spcPts val="700"/>
-              </a:spcBef>
-              <a:defRPr sz="950" b="0">
-                <a:solidFill>
-                  <a:srgbClr val="F3F4F6"/>
-                </a:solidFill>
-              </a:defRPr>
-            </a:pPr>
-            <a:r>
-              <a:t>Modeled Nameplate Capacity: 718.2 kW DC (550 kW AC inverter limit)</a:t>
-            </a:r>
-          </a:p>
-          <a:p>
-            <a:pPr>
-              <a:spcBef>
-                <a:spcPts val="700"/>
-              </a:spcBef>
-              <a:defRPr sz="950" b="0">
-                <a:solidFill>
-                  <a:srgbClr val="F3F4F6"/>
-                </a:solidFill>
-              </a:defRPr>
-            </a:pPr>
-            <a:r>
-              <a:t>Simulated Annual Generation: 1,484,069 kWh / year</a:t>
-            </a:r>
-          </a:p>
-          <a:p>
-            <a:pPr>
-              <a:spcBef>
-                <a:spcPts val="700"/>
-              </a:spcBef>
-              <a:defRPr sz="950" b="0">
-                <a:solidFill>
-                  <a:srgbClr val="F3F4F6"/>
-                </a:solidFill>
-              </a:defRPr>
-            </a:pPr>
-            <a:r>
-              <a:t>Modeled Avoided Bill (PG&amp;E B-19): $145,000 / year</a:t>
-            </a:r>
-          </a:p>
-          <a:p>
-            <a:pPr>
-              <a:spcBef>
-                <a:spcPts val="700"/>
-              </a:spcBef>
-              <a:defRPr sz="950" b="0">
-                <a:solidFill>
-                  <a:srgbClr val="F3F4F6"/>
-                </a:solidFill>
-              </a:defRPr>
-            </a:pPr>
-            <a:r>
-              <a:t>Empirical District Utility Offset: $139,200 / year (Published FUHSD Bills)</a:t>
-            </a:r>
-          </a:p>
-          <a:p>
-            <a:pPr>
-              <a:spcBef>
-                <a:spcPts val="700"/>
-              </a:spcBef>
-              <a:defRPr sz="950" b="1">
+              <a:defRPr sz="900" b="1">
+                <a:solidFill>
+                  <a:srgbClr val="718096"/>
+                </a:solidFill>
+              </a:defRPr>
+            </a:pPr>
+            <a:r>
+              <a:t>ACTIVE SOLAR LEADER</a:t>
+            </a:r>
+          </a:p>
+          <a:p>
+            <a:pPr>
+              <a:spcBef>
+                <a:spcPts val="400"/>
+              </a:spcBef>
+              <a:defRPr sz="3600" b="1">
                 <a:solidFill>
                   <a:srgbClr val="10B981"/>
                 </a:solidFill>
               </a:defRPr>
             </a:pPr>
             <a:r>
-              <a:t>Model Accuracy Tolerance: 4.17% Error (Empirically Validated)</a:t>
-            </a:r>
-          </a:p>
-          <a:p>
-            <a:pPr>
-              <a:spcBef>
-                <a:spcPts val="1400"/>
-              </a:spcBef>
-              <a:defRPr sz="850" b="1">
-                <a:solidFill>
-                  <a:srgbClr val="10B981"/>
-                </a:solidFill>
-              </a:defRPr>
-            </a:pPr>
-            <a:r>
-              <a:t>VALIDATION PROOF: Real-world PG&amp;E billing confirms that our 65% packing factor and NREL PVWatts loss waterfall match commercial utility realities within 4.17%.</a:t>
+              <a:t>$145,000 / yr</a:t>
+            </a:r>
+          </a:p>
+          <a:p>
+            <a:pPr>
+              <a:spcBef>
+                <a:spcPts val="500"/>
+              </a:spcBef>
+              <a:defRPr sz="1000" b="0">
+                <a:solidFill>
+                  <a:srgbClr val="A0AEC0"/>
+                </a:solidFill>
+              </a:defRPr>
+            </a:pPr>
+            <a:r>
+              <a:t>- Completed 550 kW solar carports across student lot</a:t>
+            </a:r>
+          </a:p>
+          <a:p>
+            <a:pPr>
+              <a:spcBef>
+                <a:spcPts val="500"/>
+              </a:spcBef>
+              <a:defRPr sz="1000" b="0">
+                <a:solidFill>
+                  <a:srgbClr val="A0AEC0"/>
+                </a:solidFill>
+              </a:defRPr>
+            </a:pPr>
+            <a:r>
+              <a:t>- Shades cars, provides EV chargers, and cuts campus heat</a:t>
+            </a:r>
+          </a:p>
+          <a:p>
+            <a:pPr>
+              <a:spcBef>
+                <a:spcPts val="500"/>
+              </a:spcBef>
+              <a:defRPr sz="1000" b="0">
+                <a:solidFill>
+                  <a:srgbClr val="A0AEC0"/>
+                </a:solidFill>
+              </a:defRPr>
+            </a:pPr>
+            <a:r>
+              <a:t>- Our model predicted $145K savings; actual FUHSD bill records show $139K!</a:t>
+            </a:r>
+          </a:p>
+          <a:p>
+            <a:pPr>
+              <a:spcBef>
+                <a:spcPts val="500"/>
+              </a:spcBef>
+              <a:defRPr sz="1000" b="1">
+                <a:solidFill>
+                  <a:srgbClr val="F8FAFC"/>
+                </a:solidFill>
+              </a:defRPr>
+            </a:pPr>
+            <a:r>
+              <a:t>- Empirical accuracy within 4.17% of actual utility bills</a:t>
             </a:r>
           </a:p>
         </p:txBody>
@@ -10365,17 +10508,17 @@
         <p:spPr>
           <a:xfrm>
             <a:off x="6217920" y="1737360"/>
-            <a:ext cx="5394960" cy="4663440"/>
+            <a:ext cx="5394960" cy="4572000"/>
           </a:xfrm>
           <a:prstGeom prst="roundRect">
             <a:avLst/>
           </a:prstGeom>
           <a:solidFill>
-            <a:srgbClr val="111827"/>
+            <a:srgbClr val="131A2B"/>
           </a:solidFill>
           <a:ln w="12700">
             <a:solidFill>
-              <a:srgbClr val="1F293D"/>
+              <a:srgbClr val="222E4A"/>
             </a:solidFill>
           </a:ln>
         </p:spPr>
@@ -10410,7 +10553,7 @@
         <p:spPr>
           <a:xfrm>
             <a:off x="6217920" y="1737360"/>
-            <a:ext cx="5394960" cy="45720"/>
+            <a:ext cx="5394960" cy="54864"/>
           </a:xfrm>
           <a:prstGeom prst="roundRect">
             <a:avLst/>
@@ -10453,7 +10596,7 @@
         <p:spPr>
           <a:xfrm>
             <a:off x="6446520" y="1874519"/>
-            <a:ext cx="4937760" cy="4389120"/>
+            <a:ext cx="4937760" cy="4297680"/>
           </a:xfrm>
           <a:prstGeom prst="rect">
             <a:avLst/>
@@ -10474,7 +10617,7 @@
               </a:defRPr>
             </a:pPr>
             <a:r>
-              <a:t>PALO ALTO HIGH (UNSHADED OPPORTUNITY)</a:t>
+              <a:t>PALO ALTO HIGH (PALO ALTO)</a:t>
             </a:r>
           </a:p>
           <a:p>
@@ -10482,104 +10625,104 @@
               <a:spcBef>
                 <a:spcPts val="100"/>
               </a:spcBef>
-              <a:defRPr sz="850">
-                <a:solidFill>
-                  <a:srgbClr val="6B7280"/>
-                </a:solidFill>
-              </a:defRPr>
-            </a:pPr>
-            <a:r>
-              <a:t>PAUSD Unshaded Asphalt Lot along Embarcadero Rd (7,200 m² Surface Lot)</a:t>
-            </a:r>
-          </a:p>
-          <a:p>
-            <a:pPr>
-              <a:spcBef>
-                <a:spcPts val="700"/>
-              </a:spcBef>
-              <a:defRPr sz="950" b="0">
-                <a:solidFill>
-                  <a:srgbClr val="F3F4F6"/>
-                </a:solidFill>
-              </a:defRPr>
-            </a:pPr>
-            <a:r>
-              <a:t>Unshaded Parking Footprint: 7,200 m² (~180 Surface Parking Stalls)</a:t>
-            </a:r>
-          </a:p>
-          <a:p>
-            <a:pPr>
-              <a:spcBef>
-                <a:spcPts val="700"/>
-              </a:spcBef>
-              <a:defRPr sz="950" b="0">
-                <a:solidFill>
-                  <a:srgbClr val="F3F4F6"/>
-                </a:solidFill>
-              </a:defRPr>
-            </a:pPr>
-            <a:r>
-              <a:t>Potential Solar Canopy Size: 608.4 kW DC System Capacity</a:t>
-            </a:r>
-          </a:p>
-          <a:p>
-            <a:pPr>
-              <a:spcBef>
-                <a:spcPts val="700"/>
-              </a:spcBef>
-              <a:defRPr sz="950" b="0">
-                <a:solidFill>
-                  <a:srgbClr val="F3F4F6"/>
-                </a:solidFill>
-              </a:defRPr>
-            </a:pPr>
-            <a:r>
-              <a:t>Avoidable Utility Bill Surrender: $140,000 / year (Surrendered to Utility)</a:t>
-            </a:r>
-          </a:p>
-          <a:p>
-            <a:pPr>
-              <a:spcBef>
-                <a:spcPts val="700"/>
-              </a:spcBef>
-              <a:defRPr sz="950" b="0">
-                <a:solidFill>
-                  <a:srgbClr val="F3F4F6"/>
-                </a:solidFill>
-              </a:defRPr>
-            </a:pPr>
-            <a:r>
-              <a:t>Unclaimed IRS Direct Pay Check: $754,416 Cash Check Sitting at U.S. Treasury</a:t>
-            </a:r>
-          </a:p>
-          <a:p>
-            <a:pPr>
-              <a:spcBef>
-                <a:spcPts val="700"/>
-              </a:spcBef>
-              <a:defRPr sz="950" b="1">
+              <a:defRPr sz="900" b="1">
+                <a:solidFill>
+                  <a:srgbClr val="718096"/>
+                </a:solidFill>
+              </a:defRPr>
+            </a:pPr>
+            <a:r>
+              <a:t>UNSHADED OPPORTUNITY</a:t>
+            </a:r>
+          </a:p>
+          <a:p>
+            <a:pPr>
+              <a:spcBef>
+                <a:spcPts val="400"/>
+              </a:spcBef>
+              <a:defRPr sz="3600" b="1">
                 <a:solidFill>
                   <a:srgbClr val="EF4444"/>
                 </a:solidFill>
               </a:defRPr>
             </a:pPr>
             <a:r>
-              <a:t>5-Year Delay Penalty: $700,000 in Permanent Classroom Budget Losses</a:t>
-            </a:r>
-          </a:p>
-          <a:p>
-            <a:pPr>
-              <a:spcBef>
-                <a:spcPts val="1400"/>
-              </a:spcBef>
-              <a:defRPr sz="850" b="1">
-                <a:solidFill>
-                  <a:srgbClr val="EF4444"/>
-                </a:solidFill>
-              </a:defRPr>
-            </a:pPr>
-            <a:r>
-              <a:t>THE COST OF INACTION: Every year PAUSD delays action is $140,000 paid to utility companies instead of funding instructional educators.</a:t>
+              <a:t>-$140,000 / yr</a:t>
+            </a:r>
+          </a:p>
+          <a:p>
+            <a:pPr>
+              <a:spcBef>
+                <a:spcPts val="500"/>
+              </a:spcBef>
+              <a:defRPr sz="1000" b="0">
+                <a:solidFill>
+                  <a:srgbClr val="A0AEC0"/>
+                </a:solidFill>
+              </a:defRPr>
+            </a:pPr>
+            <a:r>
+              <a:t>- 7,200 m² of empty asphalt sits 100% unshaded</a:t>
+            </a:r>
+          </a:p>
+          <a:p>
+            <a:pPr>
+              <a:spcBef>
+                <a:spcPts val="500"/>
+              </a:spcBef>
+              <a:defRPr sz="1000" b="0">
+                <a:solidFill>
+                  <a:srgbClr val="A0AEC0"/>
+                </a:solidFill>
+              </a:defRPr>
+            </a:pPr>
+            <a:r>
+              <a:t>- District surrenders $140,000 every year to utility bills</a:t>
+            </a:r>
+          </a:p>
+          <a:p>
+            <a:pPr>
+              <a:spcBef>
+                <a:spcPts val="500"/>
+              </a:spcBef>
+              <a:defRPr sz="1000" b="0">
+                <a:solidFill>
+                  <a:srgbClr val="A0AEC0"/>
+                </a:solidFill>
+              </a:defRPr>
+            </a:pPr>
+            <a:r>
+              <a:t>- Leaves an unclaimed $754,000 federal cash grant on the table</a:t>
+            </a:r>
+          </a:p>
+          <a:p>
+            <a:pPr>
+              <a:spcBef>
+                <a:spcPts val="500"/>
+              </a:spcBef>
+              <a:defRPr sz="1000" b="1">
+                <a:solidFill>
+                  <a:srgbClr val="F8FAFC"/>
+                </a:solidFill>
+              </a:defRPr>
+            </a:pPr>
+            <a:r>
+              <a:t>- Cost of waiting 5 years: Over $700,000 lost from classrooms!</a:t>
+            </a:r>
+          </a:p>
+          <a:p>
+            <a:pPr>
+              <a:spcBef>
+                <a:spcPts val="1000"/>
+              </a:spcBef>
+              <a:defRPr sz="1050" b="1">
+                <a:solidFill>
+                  <a:srgbClr val="F59E0B"/>
+                </a:solidFill>
+              </a:defRPr>
+            </a:pPr>
+            <a:r>
+              <a:t>That $140,000 lost each year is enough to pay for 2 full-time teachers!</a:t>
             </a:r>
           </a:p>
         </p:txBody>
@@ -10617,7 +10760,7 @@
             <a:avLst/>
           </a:prstGeom>
           <a:solidFill>
-            <a:srgbClr val="090D16"/>
+            <a:srgbClr val="0B0F19"/>
           </a:solidFill>
           <a:ln>
             <a:noFill/>
@@ -10696,7 +10839,7 @@
         </p:nvSpPr>
         <p:spPr>
           <a:xfrm>
-            <a:off x="457200" y="109728"/>
+            <a:off x="548640" y="109728"/>
             <a:ext cx="2011680" cy="292608"/>
           </a:xfrm>
           <a:prstGeom prst="roundRect">
@@ -10748,7 +10891,7 @@
         </p:nvSpPr>
         <p:spPr>
           <a:xfrm>
-            <a:off x="2606040" y="73152"/>
+            <a:off x="2697480" y="73152"/>
             <a:ext cx="5943600" cy="365760"/>
           </a:xfrm>
           <a:prstGeom prst="rect">
@@ -10765,12 +10908,12 @@
             <a:pPr>
               <a:defRPr sz="950">
                 <a:solidFill>
-                  <a:srgbClr val="9CA3AF"/>
-                </a:solidFill>
-              </a:defRPr>
-            </a:pPr>
-            <a:r>
-              <a:t>SVYCA Youth For Earth Hackathon | Systems Architecture &amp; Climate Finance</a:t>
+                  <a:srgbClr val="A0AEC0"/>
+                </a:solidFill>
+              </a:defRPr>
+            </a:pPr>
+            <a:r>
+              <a:t>SVYCA Youth For Earth Hackathon  |  Clean Energy &amp; School Climate Action</a:t>
             </a:r>
           </a:p>
         </p:txBody>
@@ -10784,7 +10927,7 @@
         <p:spPr>
           <a:xfrm>
             <a:off x="10241280" y="73152"/>
-            <a:ext cx="1463040" cy="365760"/>
+            <a:ext cx="1371600" cy="365760"/>
           </a:xfrm>
           <a:prstGeom prst="rect">
             <a:avLst/>
@@ -10819,7 +10962,7 @@
         <p:spPr>
           <a:xfrm>
             <a:off x="0" y="493776"/>
-            <a:ext cx="8534186" cy="27432"/>
+            <a:ext cx="8534186" cy="22860"/>
           </a:xfrm>
           <a:prstGeom prst="rect">
             <a:avLst/>
@@ -10862,7 +11005,7 @@
         <p:spPr>
           <a:xfrm>
             <a:off x="548640" y="621792"/>
-            <a:ext cx="11091672" cy="1005840"/>
+            <a:ext cx="11091672" cy="1051560"/>
           </a:xfrm>
           <a:prstGeom prst="rect">
             <a:avLst/>
@@ -10883,7 +11026,7 @@
               </a:defRPr>
             </a:pPr>
             <a:r>
-              <a:t>FINANCIAL ENGINEERING &amp; LIFECYCLE ECONOMICS</a:t>
+              <a:t>THE RETURN ON INVESTMENT</a:t>
             </a:r>
           </a:p>
           <a:p>
@@ -10891,14 +11034,14 @@
               <a:spcBef>
                 <a:spcPts val="200"/>
               </a:spcBef>
-              <a:defRPr sz="2100" b="1">
-                <a:solidFill>
-                  <a:srgbClr val="F3F4F6"/>
-                </a:solidFill>
-              </a:defRPr>
-            </a:pPr>
-            <a:r>
-              <a:t>Turnkey Economics &amp; 25-Year Lifecycle DCF</a:t>
+              <a:defRPr sz="2200" b="1">
+                <a:solidFill>
+                  <a:srgbClr val="F8FAFC"/>
+                </a:solidFill>
+              </a:defRPr>
+            </a:pPr>
+            <a:r>
+              <a:t>Fast Payback, 25 Years of Free Electricity</a:t>
             </a:r>
           </a:p>
           <a:p>
@@ -10908,12 +11051,12 @@
               </a:spcBef>
               <a:defRPr sz="1100">
                 <a:solidFill>
-                  <a:srgbClr val="9CA3AF"/>
-                </a:solidFill>
-              </a:defRPr>
-            </a:pPr>
-            <a:r>
-              <a:t>Structural steel canopies require a $3.10/W capex benchmark, but Section 6417 cuts net capex to $1.86/W.</a:t>
+                  <a:srgbClr val="A0AEC0"/>
+                </a:solidFill>
+              </a:defRPr>
+            </a:pPr>
+            <a:r>
+              <a:t>Solar canopies pay for themselves faster than almost any school facility project.</a:t>
             </a:r>
           </a:p>
         </p:txBody>
@@ -10927,17 +11070,17 @@
         <p:spPr>
           <a:xfrm>
             <a:off x="548640" y="1737360"/>
-            <a:ext cx="3474720" cy="2377440"/>
+            <a:ext cx="2560320" cy="3657600"/>
           </a:xfrm>
           <a:prstGeom prst="roundRect">
             <a:avLst/>
           </a:prstGeom>
           <a:solidFill>
-            <a:srgbClr val="111827"/>
+            <a:srgbClr val="131A2B"/>
           </a:solidFill>
           <a:ln w="12700">
             <a:solidFill>
-              <a:srgbClr val="1F293D"/>
+              <a:srgbClr val="222E4A"/>
             </a:solidFill>
           </a:ln>
         </p:spPr>
@@ -10972,7 +11115,190 @@
         <p:spPr>
           <a:xfrm>
             <a:off x="548640" y="1737360"/>
-            <a:ext cx="3474720" cy="45720"/>
+            <a:ext cx="2560320" cy="54864"/>
+          </a:xfrm>
+          <a:prstGeom prst="roundRect">
+            <a:avLst/>
+          </a:prstGeom>
+          <a:solidFill>
+            <a:srgbClr val="10B981"/>
+          </a:solidFill>
+          <a:ln>
+            <a:noFill/>
+          </a:ln>
+        </p:spPr>
+        <p:style>
+          <a:lnRef idx="1">
+            <a:schemeClr val="accent1"/>
+          </a:lnRef>
+          <a:fillRef idx="3">
+            <a:schemeClr val="accent1"/>
+          </a:fillRef>
+          <a:effectRef idx="2">
+            <a:schemeClr val="accent1"/>
+          </a:effectRef>
+          <a:fontRef idx="minor">
+            <a:schemeClr val="lt1"/>
+          </a:fontRef>
+        </p:style>
+        <p:txBody>
+          <a:bodyPr rtlCol="0" anchor="ctr"/>
+          <a:lstStyle/>
+          <a:p>
+            <a:pPr algn="ctr"/>
+          </a:p>
+        </p:txBody>
+      </p:sp>
+      <p:sp>
+        <p:nvSpPr>
+          <p:cNvPr id="11" name="TextBox 10"/>
+          <p:cNvSpPr txBox="1"/>
+          <p:nvPr/>
+        </p:nvSpPr>
+        <p:spPr>
+          <a:xfrm>
+            <a:off x="685800" y="1901952"/>
+            <a:ext cx="2286000" cy="3328416"/>
+          </a:xfrm>
+          <a:prstGeom prst="rect">
+            <a:avLst/>
+          </a:prstGeom>
+          <a:noFill/>
+        </p:spPr>
+        <p:txBody>
+          <a:bodyPr wrap="square">
+            <a:spAutoFit/>
+          </a:bodyPr>
+          <a:lstStyle/>
+          <a:p>
+            <a:pPr>
+              <a:defRPr sz="3000" b="1">
+                <a:solidFill>
+                  <a:srgbClr val="10B981"/>
+                </a:solidFill>
+              </a:defRPr>
+            </a:pPr>
+            <a:r>
+              <a:t>3.7 Years</a:t>
+            </a:r>
+          </a:p>
+          <a:p>
+            <a:pPr>
+              <a:spcBef>
+                <a:spcPts val="200"/>
+              </a:spcBef>
+              <a:defRPr sz="850" b="1">
+                <a:solidFill>
+                  <a:srgbClr val="F8FAFC"/>
+                </a:solidFill>
+              </a:defRPr>
+            </a:pPr>
+            <a:r>
+              <a:t>RAPID PAYBACK</a:t>
+            </a:r>
+          </a:p>
+          <a:p>
+            <a:pPr>
+              <a:spcBef>
+                <a:spcPts val="600"/>
+              </a:spcBef>
+              <a:defRPr sz="950">
+                <a:solidFill>
+                  <a:srgbClr val="A0AEC0"/>
+                </a:solidFill>
+              </a:defRPr>
+            </a:pPr>
+            <a:r>
+              <a:t>- Pays for itself in under 4 years</a:t>
+            </a:r>
+          </a:p>
+          <a:p>
+            <a:pPr>
+              <a:spcBef>
+                <a:spcPts val="600"/>
+              </a:spcBef>
+              <a:defRPr sz="950">
+                <a:solidFill>
+                  <a:srgbClr val="A0AEC0"/>
+                </a:solidFill>
+              </a:defRPr>
+            </a:pPr>
+            <a:r>
+              <a:t>- Drops from 6+ years thanks to Direct Pay</a:t>
+            </a:r>
+          </a:p>
+          <a:p>
+            <a:pPr>
+              <a:spcBef>
+                <a:spcPts val="600"/>
+              </a:spcBef>
+              <a:defRPr sz="950">
+                <a:solidFill>
+                  <a:srgbClr val="A0AEC0"/>
+                </a:solidFill>
+              </a:defRPr>
+            </a:pPr>
+            <a:r>
+              <a:t>- Faster than almost any school bond project</a:t>
+            </a:r>
+          </a:p>
+        </p:txBody>
+      </p:sp>
+      <p:sp>
+        <p:nvSpPr>
+          <p:cNvPr id="12" name="Rounded Rectangle 11"/>
+          <p:cNvSpPr/>
+          <p:nvPr/>
+        </p:nvSpPr>
+        <p:spPr>
+          <a:xfrm>
+            <a:off x="3383280" y="1737360"/>
+            <a:ext cx="2560320" cy="3657600"/>
+          </a:xfrm>
+          <a:prstGeom prst="roundRect">
+            <a:avLst/>
+          </a:prstGeom>
+          <a:solidFill>
+            <a:srgbClr val="131A2B"/>
+          </a:solidFill>
+          <a:ln w="12700">
+            <a:solidFill>
+              <a:srgbClr val="222E4A"/>
+            </a:solidFill>
+          </a:ln>
+        </p:spPr>
+        <p:style>
+          <a:lnRef idx="1">
+            <a:schemeClr val="accent1"/>
+          </a:lnRef>
+          <a:fillRef idx="3">
+            <a:schemeClr val="accent1"/>
+          </a:fillRef>
+          <a:effectRef idx="2">
+            <a:schemeClr val="accent1"/>
+          </a:effectRef>
+          <a:fontRef idx="minor">
+            <a:schemeClr val="lt1"/>
+          </a:fontRef>
+        </p:style>
+        <p:txBody>
+          <a:bodyPr rtlCol="0" anchor="ctr"/>
+          <a:lstStyle/>
+          <a:p>
+            <a:pPr algn="ctr"/>
+          </a:p>
+        </p:txBody>
+      </p:sp>
+      <p:sp>
+        <p:nvSpPr>
+          <p:cNvPr id="13" name="Rounded Rectangle 12"/>
+          <p:cNvSpPr/>
+          <p:nvPr/>
+        </p:nvSpPr>
+        <p:spPr>
+          <a:xfrm>
+            <a:off x="3383280" y="1737360"/>
+            <a:ext cx="2560320" cy="54864"/>
           </a:xfrm>
           <a:prstGeom prst="roundRect">
             <a:avLst/>
@@ -11008,14 +11334,14 @@
       </p:sp>
       <p:sp>
         <p:nvSpPr>
-          <p:cNvPr id="11" name="TextBox 10"/>
+          <p:cNvPr id="14" name="TextBox 13"/>
           <p:cNvSpPr txBox="1"/>
           <p:nvPr/>
         </p:nvSpPr>
         <p:spPr>
           <a:xfrm>
-            <a:off x="713232" y="1847088"/>
-            <a:ext cx="3145536" cy="2157984"/>
+            <a:off x="3520440" y="1901952"/>
+            <a:ext cx="2286000" cy="3328416"/>
           </a:xfrm>
           <a:prstGeom prst="rect">
             <a:avLst/>
@@ -11029,14 +11355,14 @@
           <a:lstStyle/>
           <a:p>
             <a:pPr>
-              <a:defRPr sz="2800" b="1">
+              <a:defRPr sz="3000" b="1">
                 <a:solidFill>
                   <a:srgbClr val="38BDF8"/>
                 </a:solidFill>
               </a:defRPr>
             </a:pPr>
             <a:r>
-              <a:t>$3.10 / W</a:t>
+              <a:t>$750K+</a:t>
             </a:r>
           </a:p>
           <a:p>
@@ -11044,14 +11370,14 @@
               <a:spcBef>
                 <a:spcPts val="200"/>
               </a:spcBef>
-              <a:defRPr sz="750" b="1">
-                <a:solidFill>
-                  <a:srgbClr val="6B7280"/>
-                </a:solidFill>
-              </a:defRPr>
-            </a:pPr>
-            <a:r>
-              <a:t>COMMERCIAL TURNKEY CAPEX</a:t>
+              <a:defRPr sz="850" b="1">
+                <a:solidFill>
+                  <a:srgbClr val="F8FAFC"/>
+                </a:solidFill>
+              </a:defRPr>
+            </a:pPr>
+            <a:r>
+              <a:t>FEDERAL CASH CHECK</a:t>
             </a:r>
           </a:p>
           <a:p>
@@ -11059,38 +11385,68 @@
               <a:spcBef>
                 <a:spcPts val="600"/>
               </a:spcBef>
-              <a:defRPr sz="850">
-                <a:solidFill>
-                  <a:srgbClr val="9CA3AF"/>
-                </a:solidFill>
-              </a:defRPr>
-            </a:pPr>
-            <a:r>
-              <a:t>Reflects commercial structural steel cantilever columns, CIDH reinforced concrete pier foundations, switchgear, and trench conduit.</a:t>
-            </a:r>
-          </a:p>
-        </p:txBody>
-      </p:sp>
-      <p:sp>
-        <p:nvSpPr>
-          <p:cNvPr id="12" name="Rounded Rectangle 11"/>
+              <a:defRPr sz="950">
+                <a:solidFill>
+                  <a:srgbClr val="A0AEC0"/>
+                </a:solidFill>
+              </a:defRPr>
+            </a:pPr>
+            <a:r>
+              <a:t>- Direct cash reimbursement from IRS</a:t>
+            </a:r>
+          </a:p>
+          <a:p>
+            <a:pPr>
+              <a:spcBef>
+                <a:spcPts val="600"/>
+              </a:spcBef>
+              <a:defRPr sz="950">
+                <a:solidFill>
+                  <a:srgbClr val="A0AEC0"/>
+                </a:solidFill>
+              </a:defRPr>
+            </a:pPr>
+            <a:r>
+              <a:t>- Covers 30% to 50% of the total canopy cost</a:t>
+            </a:r>
+          </a:p>
+          <a:p>
+            <a:pPr>
+              <a:spcBef>
+                <a:spcPts val="600"/>
+              </a:spcBef>
+              <a:defRPr sz="950">
+                <a:solidFill>
+                  <a:srgbClr val="A0AEC0"/>
+                </a:solidFill>
+              </a:defRPr>
+            </a:pPr>
+            <a:r>
+              <a:t>- Paid directly to the district treasury</a:t>
+            </a:r>
+          </a:p>
+        </p:txBody>
+      </p:sp>
+      <p:sp>
+        <p:nvSpPr>
+          <p:cNvPr id="15" name="Rounded Rectangle 14"/>
           <p:cNvSpPr/>
           <p:nvPr/>
         </p:nvSpPr>
         <p:spPr>
           <a:xfrm>
-            <a:off x="4343400" y="1737360"/>
-            <a:ext cx="3474720" cy="2377440"/>
+            <a:off x="6217920" y="1737360"/>
+            <a:ext cx="2560320" cy="3657600"/>
           </a:xfrm>
           <a:prstGeom prst="roundRect">
             <a:avLst/>
           </a:prstGeom>
           <a:solidFill>
-            <a:srgbClr val="111827"/>
+            <a:srgbClr val="131A2B"/>
           </a:solidFill>
           <a:ln w="12700">
             <a:solidFill>
-              <a:srgbClr val="1F293D"/>
+              <a:srgbClr val="222E4A"/>
             </a:solidFill>
           </a:ln>
         </p:spPr>
@@ -11118,14 +11474,14 @@
       </p:sp>
       <p:sp>
         <p:nvSpPr>
-          <p:cNvPr id="13" name="Rounded Rectangle 12"/>
+          <p:cNvPr id="16" name="Rounded Rectangle 15"/>
           <p:cNvSpPr/>
           <p:nvPr/>
         </p:nvSpPr>
         <p:spPr>
           <a:xfrm>
-            <a:off x="4343400" y="1737360"/>
-            <a:ext cx="3474720" cy="45720"/>
+            <a:off x="6217920" y="1737360"/>
+            <a:ext cx="2560320" cy="54864"/>
           </a:xfrm>
           <a:prstGeom prst="roundRect">
             <a:avLst/>
@@ -11161,14 +11517,14 @@
       </p:sp>
       <p:sp>
         <p:nvSpPr>
-          <p:cNvPr id="14" name="TextBox 13"/>
+          <p:cNvPr id="17" name="TextBox 16"/>
           <p:cNvSpPr txBox="1"/>
           <p:nvPr/>
         </p:nvSpPr>
         <p:spPr>
           <a:xfrm>
-            <a:off x="4507992" y="1847088"/>
-            <a:ext cx="3145536" cy="2157984"/>
+            <a:off x="6355080" y="1901952"/>
+            <a:ext cx="2286000" cy="3328416"/>
           </a:xfrm>
           <a:prstGeom prst="rect">
             <a:avLst/>
@@ -11182,14 +11538,14 @@
           <a:lstStyle/>
           <a:p>
             <a:pPr>
-              <a:defRPr sz="2800" b="1">
+              <a:defRPr sz="3000" b="1">
                 <a:solidFill>
                   <a:srgbClr val="10B981"/>
                 </a:solidFill>
               </a:defRPr>
             </a:pPr>
             <a:r>
-              <a:t>-$1.24 / W</a:t>
+              <a:t>$140K/yr</a:t>
             </a:r>
           </a:p>
           <a:p>
@@ -11197,14 +11553,14 @@
               <a:spcBef>
                 <a:spcPts val="200"/>
               </a:spcBef>
-              <a:defRPr sz="750" b="1">
-                <a:solidFill>
-                  <a:srgbClr val="6B7280"/>
-                </a:solidFill>
-              </a:defRPr>
-            </a:pPr>
-            <a:r>
-              <a:t>40% IRS DIRECT PAY CHECK</a:t>
+              <a:defRPr sz="850" b="1">
+                <a:solidFill>
+                  <a:srgbClr val="F8FAFC"/>
+                </a:solidFill>
+              </a:defRPr>
+            </a:pPr>
+            <a:r>
+              <a:t>ANNUAL BILL SAVINGS</a:t>
             </a:r>
           </a:p>
           <a:p>
@@ -11212,38 +11568,68 @@
               <a:spcBef>
                 <a:spcPts val="600"/>
               </a:spcBef>
-              <a:defRPr sz="850">
-                <a:solidFill>
-                  <a:srgbClr val="9CA3AF"/>
-                </a:solidFill>
-              </a:defRPr>
-            </a:pPr>
-            <a:r>
-              <a:t>30% base + 10% Title I or Domestic Content adder paid via direct cash check from U.S. Treasury, bypassing private tax investors.</a:t>
-            </a:r>
-          </a:p>
-        </p:txBody>
-      </p:sp>
-      <p:sp>
-        <p:nvSpPr>
-          <p:cNvPr id="15" name="Rounded Rectangle 14"/>
+              <a:defRPr sz="950">
+                <a:solidFill>
+                  <a:srgbClr val="A0AEC0"/>
+                </a:solidFill>
+              </a:defRPr>
+            </a:pPr>
+            <a:r>
+              <a:t>- Clean solar power offsets expensive peak grid rates</a:t>
+            </a:r>
+          </a:p>
+          <a:p>
+            <a:pPr>
+              <a:spcBef>
+                <a:spcPts val="600"/>
+              </a:spcBef>
+              <a:defRPr sz="950">
+                <a:solidFill>
+                  <a:srgbClr val="A0AEC0"/>
+                </a:solidFill>
+              </a:defRPr>
+            </a:pPr>
+            <a:r>
+              <a:t>- Protects district from rising utility prices</a:t>
+            </a:r>
+          </a:p>
+          <a:p>
+            <a:pPr>
+              <a:spcBef>
+                <a:spcPts val="600"/>
+              </a:spcBef>
+              <a:defRPr sz="950">
+                <a:solidFill>
+                  <a:srgbClr val="A0AEC0"/>
+                </a:solidFill>
+              </a:defRPr>
+            </a:pPr>
+            <a:r>
+              <a:t>- Savings start the first month it's turned on</a:t>
+            </a:r>
+          </a:p>
+        </p:txBody>
+      </p:sp>
+      <p:sp>
+        <p:nvSpPr>
+          <p:cNvPr id="18" name="Rounded Rectangle 17"/>
           <p:cNvSpPr/>
           <p:nvPr/>
         </p:nvSpPr>
         <p:spPr>
           <a:xfrm>
-            <a:off x="8138160" y="1737360"/>
-            <a:ext cx="3474720" cy="2377440"/>
+            <a:off x="9052560" y="1737360"/>
+            <a:ext cx="2560320" cy="3657600"/>
           </a:xfrm>
           <a:prstGeom prst="roundRect">
             <a:avLst/>
           </a:prstGeom>
           <a:solidFill>
-            <a:srgbClr val="111827"/>
+            <a:srgbClr val="131A2B"/>
           </a:solidFill>
           <a:ln w="12700">
             <a:solidFill>
-              <a:srgbClr val="1F293D"/>
+              <a:srgbClr val="222E4A"/>
             </a:solidFill>
           </a:ln>
         </p:spPr>
@@ -11271,20 +11657,20 @@
       </p:sp>
       <p:sp>
         <p:nvSpPr>
-          <p:cNvPr id="16" name="Rounded Rectangle 15"/>
+          <p:cNvPr id="19" name="Rounded Rectangle 18"/>
           <p:cNvSpPr/>
           <p:nvPr/>
         </p:nvSpPr>
         <p:spPr>
           <a:xfrm>
-            <a:off x="8138160" y="1737360"/>
-            <a:ext cx="3474720" cy="45720"/>
+            <a:off x="9052560" y="1737360"/>
+            <a:ext cx="2560320" cy="54864"/>
           </a:xfrm>
           <a:prstGeom prst="roundRect">
             <a:avLst/>
           </a:prstGeom>
           <a:solidFill>
-            <a:srgbClr val="10B981"/>
+            <a:srgbClr val="F59E0B"/>
           </a:solidFill>
           <a:ln>
             <a:noFill/>
@@ -11314,14 +11700,14 @@
       </p:sp>
       <p:sp>
         <p:nvSpPr>
-          <p:cNvPr id="17" name="TextBox 16"/>
+          <p:cNvPr id="20" name="TextBox 19"/>
           <p:cNvSpPr txBox="1"/>
           <p:nvPr/>
         </p:nvSpPr>
         <p:spPr>
           <a:xfrm>
-            <a:off x="8302752" y="1847088"/>
-            <a:ext cx="3145536" cy="2157984"/>
+            <a:off x="9189720" y="1901952"/>
+            <a:ext cx="2286000" cy="3328416"/>
           </a:xfrm>
           <a:prstGeom prst="rect">
             <a:avLst/>
@@ -11335,14 +11721,14 @@
           <a:lstStyle/>
           <a:p>
             <a:pPr>
-              <a:defRPr sz="2800" b="1">
-                <a:solidFill>
-                  <a:srgbClr val="10B981"/>
-                </a:solidFill>
-              </a:defRPr>
-            </a:pPr>
-            <a:r>
-              <a:t>$1.86 / W</a:t>
+              <a:defRPr sz="3000" b="1">
+                <a:solidFill>
+                  <a:srgbClr val="F59E0B"/>
+                </a:solidFill>
+              </a:defRPr>
+            </a:pPr>
+            <a:r>
+              <a:t>$9.8M</a:t>
             </a:r>
           </a:p>
           <a:p>
@@ -11350,14 +11736,14 @@
               <a:spcBef>
                 <a:spcPts val="200"/>
               </a:spcBef>
-              <a:defRPr sz="750" b="1">
-                <a:solidFill>
-                  <a:srgbClr val="6B7280"/>
-                </a:solidFill>
-              </a:defRPr>
-            </a:pPr>
-            <a:r>
-              <a:t>NET DISTRICT CAPITAL OUTLAY</a:t>
+              <a:defRPr sz="850" b="1">
+                <a:solidFill>
+                  <a:srgbClr val="F8FAFC"/>
+                </a:solidFill>
+              </a:defRPr>
+            </a:pPr>
+            <a:r>
+              <a:t>25-YEAR DIVIDEND</a:t>
             </a:r>
           </a:p>
           <a:p>
@@ -11365,38 +11751,68 @@
               <a:spcBef>
                 <a:spcPts val="600"/>
               </a:spcBef>
-              <a:defRPr sz="850">
-                <a:solidFill>
-                  <a:srgbClr val="9CA3AF"/>
-                </a:solidFill>
-              </a:defRPr>
-            </a:pPr>
-            <a:r>
-              <a:t>Net outlay drops to $1.86/W, delivering rapid simple payback within 2.6 to 4.5 years under standard commercial tariffs.</a:t>
-            </a:r>
-          </a:p>
-        </p:txBody>
-      </p:sp>
-      <p:sp>
-        <p:nvSpPr>
-          <p:cNvPr id="18" name="Rounded Rectangle 17"/>
+              <a:defRPr sz="950">
+                <a:solidFill>
+                  <a:srgbClr val="A0AEC0"/>
+                </a:solidFill>
+              </a:defRPr>
+            </a:pPr>
+            <a:r>
+              <a:t>- Total cumulative net savings over 25 years</a:t>
+            </a:r>
+          </a:p>
+          <a:p>
+            <a:pPr>
+              <a:spcBef>
+                <a:spcPts val="600"/>
+              </a:spcBef>
+              <a:defRPr sz="950">
+                <a:solidFill>
+                  <a:srgbClr val="A0AEC0"/>
+                </a:solidFill>
+              </a:defRPr>
+            </a:pPr>
+            <a:r>
+              <a:t>- Accounts for panel aging and maintenance costs</a:t>
+            </a:r>
+          </a:p>
+          <a:p>
+            <a:pPr>
+              <a:spcBef>
+                <a:spcPts val="600"/>
+              </a:spcBef>
+              <a:defRPr sz="950">
+                <a:solidFill>
+                  <a:srgbClr val="A0AEC0"/>
+                </a:solidFill>
+              </a:defRPr>
+            </a:pPr>
+            <a:r>
+              <a:t>- Permanent long-term funding for school programs</a:t>
+            </a:r>
+          </a:p>
+        </p:txBody>
+      </p:sp>
+      <p:sp>
+        <p:nvSpPr>
+          <p:cNvPr id="21" name="Rounded Rectangle 20"/>
           <p:cNvSpPr/>
           <p:nvPr/>
         </p:nvSpPr>
         <p:spPr>
           <a:xfrm>
-            <a:off x="548640" y="4297680"/>
-            <a:ext cx="11094415" cy="2103120"/>
+            <a:off x="548640" y="5577840"/>
+            <a:ext cx="11094415" cy="777240"/>
           </a:xfrm>
           <a:prstGeom prst="roundRect">
             <a:avLst/>
           </a:prstGeom>
           <a:solidFill>
-            <a:srgbClr val="111827"/>
+            <a:srgbClr val="131A2B"/>
           </a:solidFill>
           <a:ln w="12700">
             <a:solidFill>
-              <a:srgbClr val="1F293D"/>
+              <a:srgbClr val="10B981"/>
             </a:solidFill>
           </a:ln>
         </p:spPr>
@@ -11424,57 +11840,14 @@
       </p:sp>
       <p:sp>
         <p:nvSpPr>
-          <p:cNvPr id="19" name="Rounded Rectangle 18"/>
-          <p:cNvSpPr/>
-          <p:nvPr/>
-        </p:nvSpPr>
-        <p:spPr>
-          <a:xfrm>
-            <a:off x="548640" y="4297680"/>
-            <a:ext cx="11094415" cy="45720"/>
-          </a:xfrm>
-          <a:prstGeom prst="roundRect">
-            <a:avLst/>
-          </a:prstGeom>
-          <a:solidFill>
-            <a:srgbClr val="10B981"/>
-          </a:solidFill>
-          <a:ln>
-            <a:noFill/>
-          </a:ln>
-        </p:spPr>
-        <p:style>
-          <a:lnRef idx="1">
-            <a:schemeClr val="accent1"/>
-          </a:lnRef>
-          <a:fillRef idx="3">
-            <a:schemeClr val="accent1"/>
-          </a:fillRef>
-          <a:effectRef idx="2">
-            <a:schemeClr val="accent1"/>
-          </a:effectRef>
-          <a:fontRef idx="minor">
-            <a:schemeClr val="lt1"/>
-          </a:fontRef>
-        </p:style>
-        <p:txBody>
-          <a:bodyPr rtlCol="0" anchor="ctr"/>
-          <a:lstStyle/>
-          <a:p>
-            <a:pPr algn="ctr"/>
-          </a:p>
-        </p:txBody>
-      </p:sp>
-      <p:sp>
-        <p:nvSpPr>
-          <p:cNvPr id="20" name="TextBox 19"/>
+          <p:cNvPr id="22" name="TextBox 21"/>
           <p:cNvSpPr txBox="1"/>
           <p:nvPr/>
         </p:nvSpPr>
         <p:spPr>
           <a:xfrm>
-            <a:off x="777240" y="4389120"/>
-            <a:ext cx="10607040" cy="1920240"/>
+            <a:off x="731520" y="5623560"/>
+            <a:ext cx="10698480" cy="685800"/>
           </a:xfrm>
           <a:prstGeom prst="rect">
             <a:avLst/>
@@ -11488,187 +11861,29 @@
           <a:lstStyle/>
           <a:p>
             <a:pPr>
+              <a:defRPr sz="900" b="1">
+                <a:solidFill>
+                  <a:srgbClr val="10B981"/>
+                </a:solidFill>
+              </a:defRPr>
+            </a:pPr>
+            <a:r>
+              <a:t>WHAT DOES A $9.8M DIVIDEND MEAN FOR A SCHOOL?</a:t>
+            </a:r>
+          </a:p>
+          <a:p>
+            <a:pPr>
+              <a:spcBef>
+                <a:spcPts val="200"/>
+              </a:spcBef>
               <a:defRPr sz="1050" b="1">
                 <a:solidFill>
-                  <a:srgbClr val="10B981"/>
-                </a:solidFill>
-              </a:defRPr>
-            </a:pPr>
-            <a:r>
-              <a:t>DYNAMIC 25-YEAR DISCOUNTED CASHFLOW (DCF) FORMULATION</a:t>
-            </a:r>
-          </a:p>
-        </p:txBody>
-      </p:sp>
-      <p:sp>
-        <p:nvSpPr>
-          <p:cNvPr id="21" name="Rounded Rectangle 20"/>
-          <p:cNvSpPr/>
-          <p:nvPr/>
-        </p:nvSpPr>
-        <p:spPr>
-          <a:xfrm>
-            <a:off x="777240" y="4709160"/>
-            <a:ext cx="10607040" cy="822960"/>
-          </a:xfrm>
-          <a:prstGeom prst="roundRect">
-            <a:avLst/>
-          </a:prstGeom>
-          <a:solidFill>
-            <a:srgbClr val="0B1120"/>
-          </a:solidFill>
-          <a:ln w="12700">
-            <a:solidFill>
-              <a:srgbClr val="1E3A5F"/>
-            </a:solidFill>
-          </a:ln>
-        </p:spPr>
-        <p:style>
-          <a:lnRef idx="1">
-            <a:schemeClr val="accent1"/>
-          </a:lnRef>
-          <a:fillRef idx="3">
-            <a:schemeClr val="accent1"/>
-          </a:fillRef>
-          <a:effectRef idx="2">
-            <a:schemeClr val="accent1"/>
-          </a:effectRef>
-          <a:fontRef idx="minor">
-            <a:schemeClr val="lt1"/>
-          </a:fontRef>
-        </p:style>
-        <p:txBody>
-          <a:bodyPr rtlCol="0" anchor="ctr"/>
-          <a:lstStyle/>
-          <a:p>
-            <a:pPr algn="ctr"/>
-          </a:p>
-        </p:txBody>
-      </p:sp>
-      <p:sp>
-        <p:nvSpPr>
-          <p:cNvPr id="22" name="Rounded Rectangle 21"/>
-          <p:cNvSpPr/>
-          <p:nvPr/>
-        </p:nvSpPr>
-        <p:spPr>
-          <a:xfrm>
-            <a:off x="777240" y="4709160"/>
-            <a:ext cx="45720" cy="822960"/>
-          </a:xfrm>
-          <a:prstGeom prst="roundRect">
-            <a:avLst/>
-          </a:prstGeom>
-          <a:solidFill>
-            <a:srgbClr val="38BDF8"/>
-          </a:solidFill>
-          <a:ln>
-            <a:noFill/>
-          </a:ln>
-        </p:spPr>
-        <p:style>
-          <a:lnRef idx="1">
-            <a:schemeClr val="accent1"/>
-          </a:lnRef>
-          <a:fillRef idx="3">
-            <a:schemeClr val="accent1"/>
-          </a:fillRef>
-          <a:effectRef idx="2">
-            <a:schemeClr val="accent1"/>
-          </a:effectRef>
-          <a:fontRef idx="minor">
-            <a:schemeClr val="lt1"/>
-          </a:fontRef>
-        </p:style>
-        <p:txBody>
-          <a:bodyPr rtlCol="0" anchor="ctr"/>
-          <a:lstStyle/>
-          <a:p>
-            <a:pPr algn="ctr"/>
-          </a:p>
-        </p:txBody>
-      </p:sp>
-      <p:sp>
-        <p:nvSpPr>
-          <p:cNvPr id="23" name="TextBox 22"/>
-          <p:cNvSpPr txBox="1"/>
-          <p:nvPr/>
-        </p:nvSpPr>
-        <p:spPr>
-          <a:xfrm>
-            <a:off x="886968" y="4764024"/>
-            <a:ext cx="10387584" cy="713232"/>
-          </a:xfrm>
-          <a:prstGeom prst="rect">
-            <a:avLst/>
-          </a:prstGeom>
-          <a:noFill/>
-        </p:spPr>
-        <p:txBody>
-          <a:bodyPr wrap="square">
-            <a:spAutoFit/>
-          </a:bodyPr>
-          <a:lstStyle/>
-          <a:p>
-            <a:pPr>
-              <a:defRPr sz="950" b="1">
-                <a:solidFill>
-                  <a:srgbClr val="E0F2FE"/>
-                </a:solidFill>
-              </a:defRPr>
-            </a:pPr>
-            <a:r>
-              <a:t>D_25 = sum_{y=1}^{25} [ (E_AC * (1 - 0.005)^{y-1} * T_comm * (1 + 0.025)^{y-1}) - (P_DC * $15 * (1 + 0.02)^{y-1}) ] - C_net</a:t>
-            </a:r>
-          </a:p>
-          <a:p>
-            <a:pPr>
-              <a:spcBef>
-                <a:spcPts val="200"/>
-              </a:spcBef>
-              <a:defRPr sz="800">
-                <a:solidFill>
-                  <a:srgbClr val="9CA3AF"/>
-                </a:solidFill>
-              </a:defRPr>
-            </a:pPr>
-            <a:r>
-              <a:t>Where y is year, module degradation is 0.5%/yr, tariff escalation is 2.5%/yr, and O&amp;M inflation is 2.0%/yr (with Year 15 inverter replacement reserve).</a:t>
-            </a:r>
-          </a:p>
-        </p:txBody>
-      </p:sp>
-      <p:sp>
-        <p:nvSpPr>
-          <p:cNvPr id="24" name="TextBox 23"/>
-          <p:cNvSpPr txBox="1"/>
-          <p:nvPr/>
-        </p:nvSpPr>
-        <p:spPr>
-          <a:xfrm>
-            <a:off x="777240" y="5623560"/>
-            <a:ext cx="10607040" cy="640080"/>
-          </a:xfrm>
-          <a:prstGeom prst="rect">
-            <a:avLst/>
-          </a:prstGeom>
-          <a:noFill/>
-        </p:spPr>
-        <p:txBody>
-          <a:bodyPr wrap="square">
-            <a:spAutoFit/>
-          </a:bodyPr>
-          <a:lstStyle/>
-          <a:p>
-            <a:pPr>
-              <a:defRPr sz="1000" b="1">
-                <a:solidFill>
-                  <a:srgbClr val="F3F4F6"/>
-                </a:solidFill>
-              </a:defRPr>
-            </a:pPr>
-            <a:r>
-              <a:t>Monta Vista High 25-Yr Net Operating Dividend: $14,692,450   |   Palo Alto High 25-Yr Net Operating Dividend: $11,139,946</a:t>
+                  <a:srgbClr val="F8FAFC"/>
+                </a:solidFill>
+              </a:defRPr>
+            </a:pPr>
+            <a:r>
+              <a:t>It means permanent funding for STEM labs, art and music teachers, student mental health counselors, and zero school bond tax hikes.</a:t>
             </a:r>
           </a:p>
         </p:txBody>
@@ -11706,7 +11921,7 @@
             <a:avLst/>
           </a:prstGeom>
           <a:solidFill>
-            <a:srgbClr val="090D16"/>
+            <a:srgbClr val="0B0F19"/>
           </a:solidFill>
           <a:ln>
             <a:noFill/>
@@ -11785,7 +12000,7 @@
         </p:nvSpPr>
         <p:spPr>
           <a:xfrm>
-            <a:off x="457200" y="109728"/>
+            <a:off x="548640" y="109728"/>
             <a:ext cx="2011680" cy="292608"/>
           </a:xfrm>
           <a:prstGeom prst="roundRect">
@@ -11837,7 +12052,7 @@
         </p:nvSpPr>
         <p:spPr>
           <a:xfrm>
-            <a:off x="2606040" y="73152"/>
+            <a:off x="2697480" y="73152"/>
             <a:ext cx="5943600" cy="365760"/>
           </a:xfrm>
           <a:prstGeom prst="rect">
@@ -11854,12 +12069,12 @@
             <a:pPr>
               <a:defRPr sz="950">
                 <a:solidFill>
-                  <a:srgbClr val="9CA3AF"/>
-                </a:solidFill>
-              </a:defRPr>
-            </a:pPr>
-            <a:r>
-              <a:t>SVYCA Youth For Earth Hackathon | Systems Architecture &amp; Climate Finance</a:t>
+                  <a:srgbClr val="A0AEC0"/>
+                </a:solidFill>
+              </a:defRPr>
+            </a:pPr>
+            <a:r>
+              <a:t>SVYCA Youth For Earth Hackathon  |  Clean Energy &amp; School Climate Action</a:t>
             </a:r>
           </a:p>
         </p:txBody>
@@ -11873,7 +12088,7 @@
         <p:spPr>
           <a:xfrm>
             <a:off x="10241280" y="73152"/>
-            <a:ext cx="1463040" cy="365760"/>
+            <a:ext cx="1371600" cy="365760"/>
           </a:xfrm>
           <a:prstGeom prst="rect">
             <a:avLst/>
@@ -11908,7 +12123,7 @@
         <p:spPr>
           <a:xfrm>
             <a:off x="0" y="493776"/>
-            <a:ext cx="9753356" cy="27432"/>
+            <a:ext cx="9753356" cy="22860"/>
           </a:xfrm>
           <a:prstGeom prst="rect">
             <a:avLst/>
@@ -11951,7 +12166,7 @@
         <p:spPr>
           <a:xfrm>
             <a:off x="548640" y="621792"/>
-            <a:ext cx="11091672" cy="1005840"/>
+            <a:ext cx="11091672" cy="1051560"/>
           </a:xfrm>
           <a:prstGeom prst="rect">
             <a:avLst/>
@@ -11972,7 +12187,7 @@
               </a:defRPr>
             </a:pPr>
             <a:r>
-              <a:t>ENGINEERING SPECIFICATIONS</a:t>
+              <a:t>CAMPUS IMPACT</a:t>
             </a:r>
           </a:p>
           <a:p>
@@ -11980,14 +12195,14 @@
               <a:spcBef>
                 <a:spcPts val="200"/>
               </a:spcBef>
-              <a:defRPr sz="2100" b="1">
-                <a:solidFill>
-                  <a:srgbClr val="F3F4F6"/>
-                </a:solidFill>
-              </a:defRPr>
-            </a:pPr>
-            <a:r>
-              <a:t>Structural Steel &amp; Electrical Interconnection</a:t>
+              <a:defRPr sz="2200" b="1">
+                <a:solidFill>
+                  <a:srgbClr val="F8FAFC"/>
+                </a:solidFill>
+              </a:defRPr>
+            </a:pPr>
+            <a:r>
+              <a:t>More Than Just Power: Real Upgrades for Students</a:t>
             </a:r>
           </a:p>
           <a:p>
@@ -11997,12 +12212,12 @@
               </a:spcBef>
               <a:defRPr sz="1100">
                 <a:solidFill>
-                  <a:srgbClr val="9CA3AF"/>
-                </a:solidFill>
-              </a:defRPr>
-            </a:pPr>
-            <a:r>
-              <a:t>Engineered to comply with ASCE 7-16 structural codes, California Title 24, and IEEE 1547-2018 standards.</a:t>
+                  <a:srgbClr val="A0AEC0"/>
+                </a:solidFill>
+              </a:defRPr>
+            </a:pPr>
+            <a:r>
+              <a:t>Solar canopies turn an ugly, boiling parking lot into high-tech school infrastructure.</a:t>
             </a:r>
           </a:p>
         </p:txBody>
@@ -12016,17 +12231,17 @@
         <p:spPr>
           <a:xfrm>
             <a:off x="548640" y="1737360"/>
-            <a:ext cx="5394960" cy="4663440"/>
+            <a:ext cx="3474720" cy="3657600"/>
           </a:xfrm>
           <a:prstGeom prst="roundRect">
             <a:avLst/>
           </a:prstGeom>
           <a:solidFill>
-            <a:srgbClr val="111827"/>
+            <a:srgbClr val="131A2B"/>
           </a:solidFill>
           <a:ln w="12700">
             <a:solidFill>
-              <a:srgbClr val="1F293D"/>
+              <a:srgbClr val="222E4A"/>
             </a:solidFill>
           </a:ln>
         </p:spPr>
@@ -12061,7 +12276,7 @@
         <p:spPr>
           <a:xfrm>
             <a:off x="548640" y="1737360"/>
-            <a:ext cx="5394960" cy="45720"/>
+            <a:ext cx="3474720" cy="54864"/>
           </a:xfrm>
           <a:prstGeom prst="roundRect">
             <a:avLst/>
@@ -12103,8 +12318,8 @@
         </p:nvSpPr>
         <p:spPr>
           <a:xfrm>
-            <a:off x="777240" y="1874519"/>
-            <a:ext cx="4937760" cy="4389120"/>
+            <a:off x="731520" y="1901952"/>
+            <a:ext cx="3108960" cy="3328416"/>
           </a:xfrm>
           <a:prstGeom prst="rect">
             <a:avLst/>
@@ -12118,14 +12333,29 @@
           <a:lstStyle/>
           <a:p>
             <a:pPr>
-              <a:defRPr sz="1100" b="1">
+              <a:defRPr sz="3200" b="1">
                 <a:solidFill>
                   <a:srgbClr val="38BDF8"/>
                 </a:solidFill>
               </a:defRPr>
             </a:pPr>
             <a:r>
-              <a:t>STRUCTURAL CIVIL ENGINEERING SPECIFICATIONS</a:t>
+              <a:t>40°F Cooler</a:t>
+            </a:r>
+          </a:p>
+          <a:p>
+            <a:pPr>
+              <a:spcBef>
+                <a:spcPts val="200"/>
+              </a:spcBef>
+              <a:defRPr sz="900" b="1">
+                <a:solidFill>
+                  <a:srgbClr val="F8FAFC"/>
+                </a:solidFill>
+              </a:defRPr>
+            </a:pPr>
+            <a:r>
+              <a:t>SHADE &amp; HEAT RELIEF</a:t>
             </a:r>
           </a:p>
           <a:p>
@@ -12133,26 +12363,14 @@
               <a:spcBef>
                 <a:spcPts val="600"/>
               </a:spcBef>
-              <a:defRPr sz="900" b="1">
-                <a:solidFill>
-                  <a:srgbClr val="F3F4F6"/>
-                </a:solidFill>
-              </a:defRPr>
-            </a:pPr>
-            <a:r>
-              <a:t>Superstructure Steel:</a:t>
-            </a:r>
-          </a:p>
-          <a:p>
-            <a:pPr>
-              <a:defRPr sz="850">
-                <a:solidFill>
-                  <a:srgbClr val="9CA3AF"/>
-                </a:solidFill>
-              </a:defRPr>
-            </a:pPr>
-            <a:r>
-              <a:t>ASTM A992 structural wide-flange columns and cold-formed C-channel purlins with hot-dip galvanized coating (ASTM A123).</a:t>
+              <a:defRPr sz="1000">
+                <a:solidFill>
+                  <a:srgbClr val="A0AEC0"/>
+                </a:solidFill>
+              </a:defRPr>
+            </a:pPr>
+            <a:r>
+              <a:t>- Cuts vehicle interior temperatures by up to 40°F</a:t>
             </a:r>
           </a:p>
           <a:p>
@@ -12160,26 +12378,14 @@
               <a:spcBef>
                 <a:spcPts val="600"/>
               </a:spcBef>
-              <a:defRPr sz="900" b="1">
-                <a:solidFill>
-                  <a:srgbClr val="F3F4F6"/>
-                </a:solidFill>
-              </a:defRPr>
-            </a:pPr>
-            <a:r>
-              <a:t>Foundation System:</a:t>
-            </a:r>
-          </a:p>
-          <a:p>
-            <a:pPr>
-              <a:defRPr sz="850">
-                <a:solidFill>
-                  <a:srgbClr val="9CA3AF"/>
-                </a:solidFill>
-              </a:defRPr>
-            </a:pPr>
-            <a:r>
-              <a:t>Cast-in-drilled-hole (CIDH) reinforced concrete cylindrical piers (30–36 in diameter, 8–12 ft depth) resisting lateral soil overturning.</a:t>
+              <a:defRPr sz="1000">
+                <a:solidFill>
+                  <a:srgbClr val="A0AEC0"/>
+                </a:solidFill>
+              </a:defRPr>
+            </a:pPr>
+            <a:r>
+              <a:t>- Keeps cars cool for teachers and high school drivers</a:t>
             </a:r>
           </a:p>
           <a:p>
@@ -12187,26 +12393,14 @@
               <a:spcBef>
                 <a:spcPts val="600"/>
               </a:spcBef>
-              <a:defRPr sz="900" b="1">
-                <a:solidFill>
-                  <a:srgbClr val="F3F4F6"/>
-                </a:solidFill>
-              </a:defRPr>
-            </a:pPr>
-            <a:r>
-              <a:t>Vertical Clearance:</a:t>
-            </a:r>
-          </a:p>
-          <a:p>
-            <a:pPr>
-              <a:defRPr sz="850">
-                <a:solidFill>
-                  <a:srgbClr val="9CA3AF"/>
-                </a:solidFill>
-              </a:defRPr>
-            </a:pPr>
-            <a:r>
-              <a:t>14.0 ft minimum vertical clearance under lowest purlin to permit school bus and emergency apparatus transit (CA Fire Code Title 24 § 503).</a:t>
+              <a:defRPr sz="1000">
+                <a:solidFill>
+                  <a:srgbClr val="A0AEC0"/>
+                </a:solidFill>
+              </a:defRPr>
+            </a:pPr>
+            <a:r>
+              <a:t>- Shades elementary and middle school play blacktops</a:t>
             </a:r>
           </a:p>
           <a:p>
@@ -12214,53 +12408,14 @@
               <a:spcBef>
                 <a:spcPts val="600"/>
               </a:spcBef>
-              <a:defRPr sz="900" b="1">
-                <a:solidFill>
-                  <a:srgbClr val="F3F4F6"/>
-                </a:solidFill>
-              </a:defRPr>
-            </a:pPr>
-            <a:r>
-              <a:t>Wind &amp; Seismic Rating:</a:t>
-            </a:r>
-          </a:p>
-          <a:p>
-            <a:pPr>
-              <a:defRPr sz="850">
-                <a:solidFill>
-                  <a:srgbClr val="9CA3AF"/>
-                </a:solidFill>
-              </a:defRPr>
-            </a:pPr>
-            <a:r>
-              <a:t>ASCE 7-16 structural engineering compliance rated for 110 mph basic wind speed and CBC Seismic Design Category D.</a:t>
-            </a:r>
-          </a:p>
-          <a:p>
-            <a:pPr>
-              <a:spcBef>
-                <a:spcPts val="600"/>
-              </a:spcBef>
-              <a:defRPr sz="900" b="1">
-                <a:solidFill>
-                  <a:srgbClr val="F3F4F6"/>
-                </a:solidFill>
-              </a:defRPr>
-            </a:pPr>
-            <a:r>
-              <a:t>Stormwater Drainage:</a:t>
-            </a:r>
-          </a:p>
-          <a:p>
-            <a:pPr>
-              <a:defRPr sz="850">
-                <a:solidFill>
-                  <a:srgbClr val="9CA3AF"/>
-                </a:solidFill>
-              </a:defRPr>
-            </a:pPr>
-            <a:r>
-              <a:t>Integrated gutter collectors and internal column downspouts preventing sheet flow across walking aisles.</a:t>
+              <a:defRPr sz="1000">
+                <a:solidFill>
+                  <a:srgbClr val="A0AEC0"/>
+                </a:solidFill>
+              </a:defRPr>
+            </a:pPr>
+            <a:r>
+              <a:t>- Combats urban heat waves during California autumns</a:t>
             </a:r>
           </a:p>
         </p:txBody>
@@ -12273,18 +12428,18 @@
         </p:nvSpPr>
         <p:spPr>
           <a:xfrm>
-            <a:off x="6217920" y="1737360"/>
-            <a:ext cx="5394960" cy="4663440"/>
+            <a:off x="4343400" y="1737360"/>
+            <a:ext cx="3474720" cy="3657600"/>
           </a:xfrm>
           <a:prstGeom prst="roundRect">
             <a:avLst/>
           </a:prstGeom>
           <a:solidFill>
-            <a:srgbClr val="111827"/>
+            <a:srgbClr val="131A2B"/>
           </a:solidFill>
           <a:ln w="12700">
             <a:solidFill>
-              <a:srgbClr val="1F293D"/>
+              <a:srgbClr val="222E4A"/>
             </a:solidFill>
           </a:ln>
         </p:spPr>
@@ -12318,14 +12473,14 @@
         </p:nvSpPr>
         <p:spPr>
           <a:xfrm>
-            <a:off x="6217920" y="1737360"/>
-            <a:ext cx="5394960" cy="45720"/>
+            <a:off x="4343400" y="1737360"/>
+            <a:ext cx="3474720" cy="54864"/>
           </a:xfrm>
           <a:prstGeom prst="roundRect">
             <a:avLst/>
           </a:prstGeom>
           <a:solidFill>
-            <a:srgbClr val="38BDF8"/>
+            <a:srgbClr val="10B981"/>
           </a:solidFill>
           <a:ln>
             <a:noFill/>
@@ -12361,8 +12516,8 @@
         </p:nvSpPr>
         <p:spPr>
           <a:xfrm>
-            <a:off x="6446520" y="1874519"/>
-            <a:ext cx="4937760" cy="4389120"/>
+            <a:off x="4526280" y="1901952"/>
+            <a:ext cx="3108960" cy="3328416"/>
           </a:xfrm>
           <a:prstGeom prst="rect">
             <a:avLst/>
@@ -12376,149 +12531,382 @@
           <a:lstStyle/>
           <a:p>
             <a:pPr>
-              <a:defRPr sz="1100" b="1">
+              <a:defRPr sz="3200" b="1">
+                <a:solidFill>
+                  <a:srgbClr val="10B981"/>
+                </a:solidFill>
+              </a:defRPr>
+            </a:pPr>
+            <a:r>
+              <a:t>Clean EVs</a:t>
+            </a:r>
+          </a:p>
+          <a:p>
+            <a:pPr>
+              <a:spcBef>
+                <a:spcPts val="200"/>
+              </a:spcBef>
+              <a:defRPr sz="900" b="1">
+                <a:solidFill>
+                  <a:srgbClr val="F8FAFC"/>
+                </a:solidFill>
+              </a:defRPr>
+            </a:pPr>
+            <a:r>
+              <a:t>POWERING OUR TEACHERS</a:t>
+            </a:r>
+          </a:p>
+          <a:p>
+            <a:pPr>
+              <a:spcBef>
+                <a:spcPts val="600"/>
+              </a:spcBef>
+              <a:defRPr sz="1000">
+                <a:solidFill>
+                  <a:srgbClr val="A0AEC0"/>
+                </a:solidFill>
+              </a:defRPr>
+            </a:pPr>
+            <a:r>
+              <a:t>- Built-in Level 2 EV charging stations under the canopies</a:t>
+            </a:r>
+          </a:p>
+          <a:p>
+            <a:pPr>
+              <a:spcBef>
+                <a:spcPts val="600"/>
+              </a:spcBef>
+              <a:defRPr sz="1000">
+                <a:solidFill>
+                  <a:srgbClr val="A0AEC0"/>
+                </a:solidFill>
+              </a:defRPr>
+            </a:pPr>
+            <a:r>
+              <a:t>- Powers teachers' daily commute with 100% clean sunshine</a:t>
+            </a:r>
+          </a:p>
+          <a:p>
+            <a:pPr>
+              <a:spcBef>
+                <a:spcPts val="600"/>
+              </a:spcBef>
+              <a:defRPr sz="1000">
+                <a:solidFill>
+                  <a:srgbClr val="A0AEC0"/>
+                </a:solidFill>
+              </a:defRPr>
+            </a:pPr>
+            <a:r>
+              <a:t>- Ready to charge future electric yellow school buses</a:t>
+            </a:r>
+          </a:p>
+          <a:p>
+            <a:pPr>
+              <a:spcBef>
+                <a:spcPts val="600"/>
+              </a:spcBef>
+              <a:defRPr sz="1000">
+                <a:solidFill>
+                  <a:srgbClr val="A0AEC0"/>
+                </a:solidFill>
+              </a:defRPr>
+            </a:pPr>
+            <a:r>
+              <a:t>- Reduces local car exhaust around campus drop-off zones</a:t>
+            </a:r>
+          </a:p>
+        </p:txBody>
+      </p:sp>
+      <p:sp>
+        <p:nvSpPr>
+          <p:cNvPr id="15" name="Rounded Rectangle 14"/>
+          <p:cNvSpPr/>
+          <p:nvPr/>
+        </p:nvSpPr>
+        <p:spPr>
+          <a:xfrm>
+            <a:off x="8138160" y="1737360"/>
+            <a:ext cx="3474720" cy="3657600"/>
+          </a:xfrm>
+          <a:prstGeom prst="roundRect">
+            <a:avLst/>
+          </a:prstGeom>
+          <a:solidFill>
+            <a:srgbClr val="131A2B"/>
+          </a:solidFill>
+          <a:ln w="12700">
+            <a:solidFill>
+              <a:srgbClr val="222E4A"/>
+            </a:solidFill>
+          </a:ln>
+        </p:spPr>
+        <p:style>
+          <a:lnRef idx="1">
+            <a:schemeClr val="accent1"/>
+          </a:lnRef>
+          <a:fillRef idx="3">
+            <a:schemeClr val="accent1"/>
+          </a:fillRef>
+          <a:effectRef idx="2">
+            <a:schemeClr val="accent1"/>
+          </a:effectRef>
+          <a:fontRef idx="minor">
+            <a:schemeClr val="lt1"/>
+          </a:fontRef>
+        </p:style>
+        <p:txBody>
+          <a:bodyPr rtlCol="0" anchor="ctr"/>
+          <a:lstStyle/>
+          <a:p>
+            <a:pPr algn="ctr"/>
+          </a:p>
+        </p:txBody>
+      </p:sp>
+      <p:sp>
+        <p:nvSpPr>
+          <p:cNvPr id="16" name="Rounded Rectangle 15"/>
+          <p:cNvSpPr/>
+          <p:nvPr/>
+        </p:nvSpPr>
+        <p:spPr>
+          <a:xfrm>
+            <a:off x="8138160" y="1737360"/>
+            <a:ext cx="3474720" cy="54864"/>
+          </a:xfrm>
+          <a:prstGeom prst="roundRect">
+            <a:avLst/>
+          </a:prstGeom>
+          <a:solidFill>
+            <a:srgbClr val="F59E0B"/>
+          </a:solidFill>
+          <a:ln>
+            <a:noFill/>
+          </a:ln>
+        </p:spPr>
+        <p:style>
+          <a:lnRef idx="1">
+            <a:schemeClr val="accent1"/>
+          </a:lnRef>
+          <a:fillRef idx="3">
+            <a:schemeClr val="accent1"/>
+          </a:fillRef>
+          <a:effectRef idx="2">
+            <a:schemeClr val="accent1"/>
+          </a:effectRef>
+          <a:fontRef idx="minor">
+            <a:schemeClr val="lt1"/>
+          </a:fontRef>
+        </p:style>
+        <p:txBody>
+          <a:bodyPr rtlCol="0" anchor="ctr"/>
+          <a:lstStyle/>
+          <a:p>
+            <a:pPr algn="ctr"/>
+          </a:p>
+        </p:txBody>
+      </p:sp>
+      <p:sp>
+        <p:nvSpPr>
+          <p:cNvPr id="17" name="TextBox 16"/>
+          <p:cNvSpPr txBox="1"/>
+          <p:nvPr/>
+        </p:nvSpPr>
+        <p:spPr>
+          <a:xfrm>
+            <a:off x="8321040" y="1901952"/>
+            <a:ext cx="3108960" cy="3328416"/>
+          </a:xfrm>
+          <a:prstGeom prst="rect">
+            <a:avLst/>
+          </a:prstGeom>
+          <a:noFill/>
+        </p:spPr>
+        <p:txBody>
+          <a:bodyPr wrap="square">
+            <a:spAutoFit/>
+          </a:bodyPr>
+          <a:lstStyle/>
+          <a:p>
+            <a:pPr>
+              <a:defRPr sz="3200" b="1">
+                <a:solidFill>
+                  <a:srgbClr val="F59E0B"/>
+                </a:solidFill>
+              </a:defRPr>
+            </a:pPr>
+            <a:r>
+              <a:t>Resilient</a:t>
+            </a:r>
+          </a:p>
+          <a:p>
+            <a:pPr>
+              <a:spcBef>
+                <a:spcPts val="200"/>
+              </a:spcBef>
+              <a:defRPr sz="900" b="1">
+                <a:solidFill>
+                  <a:srgbClr val="F8FAFC"/>
+                </a:solidFill>
+              </a:defRPr>
+            </a:pPr>
+            <a:r>
+              <a:t>CAMPUS EMERGENCY POWER</a:t>
+            </a:r>
+          </a:p>
+          <a:p>
+            <a:pPr>
+              <a:spcBef>
+                <a:spcPts val="600"/>
+              </a:spcBef>
+              <a:defRPr sz="1000">
+                <a:solidFill>
+                  <a:srgbClr val="A0AEC0"/>
+                </a:solidFill>
+              </a:defRPr>
+            </a:pPr>
+            <a:r>
+              <a:t>- Microgrid-ready for future battery storage</a:t>
+            </a:r>
+          </a:p>
+          <a:p>
+            <a:pPr>
+              <a:spcBef>
+                <a:spcPts val="600"/>
+              </a:spcBef>
+              <a:defRPr sz="1000">
+                <a:solidFill>
+                  <a:srgbClr val="A0AEC0"/>
+                </a:solidFill>
+              </a:defRPr>
+            </a:pPr>
+            <a:r>
+              <a:t>- Can keep lights, Wi-Fi, and refrigeration on during outages</a:t>
+            </a:r>
+          </a:p>
+          <a:p>
+            <a:pPr>
+              <a:spcBef>
+                <a:spcPts val="600"/>
+              </a:spcBef>
+              <a:defRPr sz="1000">
+                <a:solidFill>
+                  <a:srgbClr val="A0AEC0"/>
+                </a:solidFill>
+              </a:defRPr>
+            </a:pPr>
+            <a:r>
+              <a:t>- Turns public schools into neighborhood emergency hubs</a:t>
+            </a:r>
+          </a:p>
+          <a:p>
+            <a:pPr>
+              <a:spcBef>
+                <a:spcPts val="600"/>
+              </a:spcBef>
+              <a:defRPr sz="1000">
+                <a:solidFill>
+                  <a:srgbClr val="A0AEC0"/>
+                </a:solidFill>
+              </a:defRPr>
+            </a:pPr>
+            <a:r>
+              <a:t>- Provides student science dashboards with live solar data</a:t>
+            </a:r>
+          </a:p>
+        </p:txBody>
+      </p:sp>
+      <p:sp>
+        <p:nvSpPr>
+          <p:cNvPr id="18" name="Rounded Rectangle 17"/>
+          <p:cNvSpPr/>
+          <p:nvPr/>
+        </p:nvSpPr>
+        <p:spPr>
+          <a:xfrm>
+            <a:off x="548640" y="5577840"/>
+            <a:ext cx="11094415" cy="777240"/>
+          </a:xfrm>
+          <a:prstGeom prst="roundRect">
+            <a:avLst/>
+          </a:prstGeom>
+          <a:solidFill>
+            <a:srgbClr val="131A2B"/>
+          </a:solidFill>
+          <a:ln w="12700">
+            <a:solidFill>
+              <a:srgbClr val="38BDF8"/>
+            </a:solidFill>
+          </a:ln>
+        </p:spPr>
+        <p:style>
+          <a:lnRef idx="1">
+            <a:schemeClr val="accent1"/>
+          </a:lnRef>
+          <a:fillRef idx="3">
+            <a:schemeClr val="accent1"/>
+          </a:fillRef>
+          <a:effectRef idx="2">
+            <a:schemeClr val="accent1"/>
+          </a:effectRef>
+          <a:fontRef idx="minor">
+            <a:schemeClr val="lt1"/>
+          </a:fontRef>
+        </p:style>
+        <p:txBody>
+          <a:bodyPr rtlCol="0" anchor="ctr"/>
+          <a:lstStyle/>
+          <a:p>
+            <a:pPr algn="ctr"/>
+          </a:p>
+        </p:txBody>
+      </p:sp>
+      <p:sp>
+        <p:nvSpPr>
+          <p:cNvPr id="19" name="TextBox 18"/>
+          <p:cNvSpPr txBox="1"/>
+          <p:nvPr/>
+        </p:nvSpPr>
+        <p:spPr>
+          <a:xfrm>
+            <a:off x="731520" y="5623560"/>
+            <a:ext cx="10698480" cy="685800"/>
+          </a:xfrm>
+          <a:prstGeom prst="rect">
+            <a:avLst/>
+          </a:prstGeom>
+          <a:noFill/>
+        </p:spPr>
+        <p:txBody>
+          <a:bodyPr wrap="square">
+            <a:spAutoFit/>
+          </a:bodyPr>
+          <a:lstStyle/>
+          <a:p>
+            <a:pPr>
+              <a:defRPr sz="900" b="1">
                 <a:solidFill>
                   <a:srgbClr val="38BDF8"/>
                 </a:solidFill>
               </a:defRPr>
             </a:pPr>
             <a:r>
-              <a:t>ELECTRICAL &amp; GRID INTERCONNECTION SPECIFICATIONS</a:t>
-            </a:r>
-          </a:p>
-          <a:p>
-            <a:pPr>
-              <a:spcBef>
-                <a:spcPts val="600"/>
-              </a:spcBef>
-              <a:defRPr sz="900" b="1">
-                <a:solidFill>
-                  <a:srgbClr val="F3F4F6"/>
-                </a:solidFill>
-              </a:defRPr>
-            </a:pPr>
-            <a:r>
-              <a:t>Interconnection Voltage:</a:t>
-            </a:r>
-          </a:p>
-          <a:p>
-            <a:pPr>
-              <a:defRPr sz="850">
-                <a:solidFill>
-                  <a:srgbClr val="9CA3AF"/>
-                </a:solidFill>
-              </a:defRPr>
-            </a:pPr>
-            <a:r>
-              <a:t>480V / 277V, 3-Phase, 4-Wire Wye utility distribution interconnection at campus main switchgear (MSB).</a:t>
-            </a:r>
-          </a:p>
-          <a:p>
-            <a:pPr>
-              <a:spcBef>
-                <a:spcPts val="600"/>
-              </a:spcBef>
-              <a:defRPr sz="900" b="1">
-                <a:solidFill>
-                  <a:srgbClr val="F3F4F6"/>
-                </a:solidFill>
-              </a:defRPr>
-            </a:pPr>
-            <a:r>
-              <a:t>Smart Inverter Standards:</a:t>
-            </a:r>
-          </a:p>
-          <a:p>
-            <a:pPr>
-              <a:defRPr sz="850">
-                <a:solidFill>
-                  <a:srgbClr val="9CA3AF"/>
-                </a:solidFill>
-              </a:defRPr>
-            </a:pPr>
-            <a:r>
-              <a:t>IEEE 1547-2018 and California Rule 21 compliant with advanced Volt-VAR and Volt-Watt dynamic grid stabilization functions.</a:t>
-            </a:r>
-          </a:p>
-          <a:p>
-            <a:pPr>
-              <a:spcBef>
-                <a:spcPts val="600"/>
-              </a:spcBef>
-              <a:defRPr sz="900" b="1">
-                <a:solidFill>
-                  <a:srgbClr val="F3F4F6"/>
-                </a:solidFill>
-              </a:defRPr>
-            </a:pPr>
-            <a:r>
-              <a:t>Underground Feeders:</a:t>
-            </a:r>
-          </a:p>
-          <a:p>
-            <a:pPr>
-              <a:defRPr sz="850">
-                <a:solidFill>
-                  <a:srgbClr val="9CA3AF"/>
-                </a:solidFill>
-              </a:defRPr>
-            </a:pPr>
-            <a:r>
-              <a:t>Schedule 40 PVC electrical conduit encased in concrete duct bank with 24-inch minimum burial depth under asphalt.</a:t>
-            </a:r>
-          </a:p>
-          <a:p>
-            <a:pPr>
-              <a:spcBef>
-                <a:spcPts val="600"/>
-              </a:spcBef>
-              <a:defRPr sz="900" b="1">
-                <a:solidFill>
-                  <a:srgbClr val="F3F4F6"/>
-                </a:solidFill>
-              </a:defRPr>
-            </a:pPr>
-            <a:r>
-              <a:t>Fleet Electrification Ready:</a:t>
-            </a:r>
-          </a:p>
-          <a:p>
-            <a:pPr>
-              <a:defRPr sz="850">
-                <a:solidFill>
-                  <a:srgbClr val="9CA3AF"/>
-                </a:solidFill>
-              </a:defRPr>
-            </a:pPr>
-            <a:r>
-              <a:t>Dedicated 200A 480V distribution subpanel feeding integrated Level 2 EV charging pedestals for staff and overnight fleet charging.</a:t>
-            </a:r>
-          </a:p>
-          <a:p>
-            <a:pPr>
-              <a:spcBef>
-                <a:spcPts val="600"/>
-              </a:spcBef>
-              <a:defRPr sz="900" b="1">
-                <a:solidFill>
-                  <a:srgbClr val="F3F4F6"/>
-                </a:solidFill>
-              </a:defRPr>
-            </a:pPr>
-            <a:r>
-              <a:t>Telemetry &amp; Monitoring:</a:t>
-            </a:r>
-          </a:p>
-          <a:p>
-            <a:pPr>
-              <a:defRPr sz="850">
-                <a:solidFill>
-                  <a:srgbClr val="9CA3AF"/>
-                </a:solidFill>
-              </a:defRPr>
-            </a:pPr>
-            <a:r>
-              <a:t>Revenue-grade bidirectional utility interval meter with cellular telemetry transmitting generation data to student science dashboards.</a:t>
+              <a:t>BUILT WITH STUDENT SAFETY IN MIND</a:t>
+            </a:r>
+          </a:p>
+          <a:p>
+            <a:pPr>
+              <a:spcBef>
+                <a:spcPts val="200"/>
+              </a:spcBef>
+              <a:defRPr sz="1050" b="1">
+                <a:solidFill>
+                  <a:srgbClr val="F8FAFC"/>
+                </a:solidFill>
+              </a:defRPr>
+            </a:pPr>
+            <a:r>
+              <a:t>Commercial steel canopies provide covered walkways during winter rainstorms, night lighting for safer athletic events, and clean EV plugs.</a:t>
             </a:r>
           </a:p>
         </p:txBody>
@@ -12556,7 +12944,7 @@
             <a:avLst/>
           </a:prstGeom>
           <a:solidFill>
-            <a:srgbClr val="090D16"/>
+            <a:srgbClr val="0B0F19"/>
           </a:solidFill>
           <a:ln>
             <a:noFill/>
@@ -12635,7 +13023,7 @@
         </p:nvSpPr>
         <p:spPr>
           <a:xfrm>
-            <a:off x="457200" y="109728"/>
+            <a:off x="548640" y="109728"/>
             <a:ext cx="2011680" cy="292608"/>
           </a:xfrm>
           <a:prstGeom prst="roundRect">
@@ -12687,7 +13075,7 @@
         </p:nvSpPr>
         <p:spPr>
           <a:xfrm>
-            <a:off x="2606040" y="73152"/>
+            <a:off x="2697480" y="73152"/>
             <a:ext cx="5943600" cy="365760"/>
           </a:xfrm>
           <a:prstGeom prst="rect">
@@ -12704,12 +13092,12 @@
             <a:pPr>
               <a:defRPr sz="950">
                 <a:solidFill>
-                  <a:srgbClr val="9CA3AF"/>
-                </a:solidFill>
-              </a:defRPr>
-            </a:pPr>
-            <a:r>
-              <a:t>SVYCA Youth For Earth Hackathon | Systems Architecture &amp; Climate Finance</a:t>
+                  <a:srgbClr val="A0AEC0"/>
+                </a:solidFill>
+              </a:defRPr>
+            </a:pPr>
+            <a:r>
+              <a:t>SVYCA Youth For Earth Hackathon  |  Clean Energy &amp; School Climate Action</a:t>
             </a:r>
           </a:p>
         </p:txBody>
@@ -12723,7 +13111,7 @@
         <p:spPr>
           <a:xfrm>
             <a:off x="10241280" y="73152"/>
-            <a:ext cx="1463040" cy="365760"/>
+            <a:ext cx="1371600" cy="365760"/>
           </a:xfrm>
           <a:prstGeom prst="rect">
             <a:avLst/>
@@ -12758,7 +13146,7 @@
         <p:spPr>
           <a:xfrm>
             <a:off x="0" y="493776"/>
-            <a:ext cx="10972525" cy="27432"/>
+            <a:ext cx="10972525" cy="22860"/>
           </a:xfrm>
           <a:prstGeom prst="rect">
             <a:avLst/>
@@ -12801,7 +13189,7 @@
         <p:spPr>
           <a:xfrm>
             <a:off x="548640" y="621792"/>
-            <a:ext cx="11091672" cy="1005840"/>
+            <a:ext cx="11091672" cy="1051560"/>
           </a:xfrm>
           <a:prstGeom prst="rect">
             <a:avLst/>
@@ -12822,7 +13210,7 @@
               </a:defRPr>
             </a:pPr>
             <a:r>
-              <a:t>GEOSPATIAL EXPANSION &amp; ENVIRONMENTAL JUSTICE</a:t>
+              <a:t>THE VISION</a:t>
             </a:r>
           </a:p>
           <a:p>
@@ -12830,14 +13218,14 @@
               <a:spcBef>
                 <a:spcPts val="200"/>
               </a:spcBef>
-              <a:defRPr sz="2100" b="1">
-                <a:solidFill>
-                  <a:srgbClr val="F3F4F6"/>
-                </a:solidFill>
-              </a:defRPr>
-            </a:pPr>
-            <a:r>
-              <a:t>3-Phase Scalability &amp; Environmental Justice</a:t>
+              <a:defRPr sz="2200" b="1">
+                <a:solidFill>
+                  <a:srgbClr val="F8FAFC"/>
+                </a:solidFill>
+              </a:defRPr>
+            </a:pPr>
+            <a:r>
+              <a:t>Phase 1 is Live. Here's Where We Go Next.</a:t>
             </a:r>
           </a:p>
           <a:p>
@@ -12847,12 +13235,12 @@
               </a:spcBef>
               <a:defRPr sz="1100">
                 <a:solidFill>
-                  <a:srgbClr val="9CA3AF"/>
-                </a:solidFill>
-              </a:defRPr>
-            </a:pPr>
-            <a:r>
-              <a:t>Structured data architecture scaling from local Silicon Valley calibration to all 100,000+ US public campuses.</a:t>
+                  <a:srgbClr val="A0AEC0"/>
+                </a:solidFill>
+              </a:defRPr>
+            </a:pPr>
+            <a:r>
+              <a:t>How one student project scales to 100,000 public schools across the United States.</a:t>
             </a:r>
           </a:p>
         </p:txBody>
@@ -12866,17 +13254,17 @@
         <p:spPr>
           <a:xfrm>
             <a:off x="548640" y="1737360"/>
-            <a:ext cx="3474720" cy="3291840"/>
+            <a:ext cx="3474720" cy="3657600"/>
           </a:xfrm>
           <a:prstGeom prst="roundRect">
             <a:avLst/>
           </a:prstGeom>
           <a:solidFill>
-            <a:srgbClr val="111827"/>
+            <a:srgbClr val="131A2B"/>
           </a:solidFill>
           <a:ln w="12700">
             <a:solidFill>
-              <a:srgbClr val="1F293D"/>
+              <a:srgbClr val="222E4A"/>
             </a:solidFill>
           </a:ln>
         </p:spPr>
@@ -12911,7 +13299,7 @@
         <p:spPr>
           <a:xfrm>
             <a:off x="548640" y="1737360"/>
-            <a:ext cx="3474720" cy="45720"/>
+            <a:ext cx="3474720" cy="54864"/>
           </a:xfrm>
           <a:prstGeom prst="roundRect">
             <a:avLst/>
@@ -12953,8 +13341,8 @@
         </p:nvSpPr>
         <p:spPr>
           <a:xfrm>
-            <a:off x="731520" y="1874519"/>
-            <a:ext cx="3108960" cy="3017520"/>
+            <a:off x="731520" y="1901952"/>
+            <a:ext cx="3108960" cy="3328416"/>
           </a:xfrm>
           <a:prstGeom prst="rect">
             <a:avLst/>
@@ -12981,51 +13369,76 @@
           <a:p>
             <a:pPr>
               <a:spcBef>
-                <a:spcPts val="300"/>
-              </a:spcBef>
-              <a:defRPr sz="1050" b="1">
-                <a:solidFill>
-                  <a:srgbClr val="F3F4F6"/>
-                </a:solidFill>
-              </a:defRPr>
-            </a:pPr>
-            <a:r>
-              <a:t>SAN FRANCISCO BAY AREA</a:t>
-            </a:r>
-          </a:p>
-          <a:p>
-            <a:pPr>
-              <a:spcBef>
-                <a:spcPts val="300"/>
+                <a:spcPts val="200"/>
               </a:spcBef>
               <a:defRPr sz="900" b="1">
                 <a:solidFill>
-                  <a:srgbClr val="38BDF8"/>
-                </a:solidFill>
-              </a:defRPr>
-            </a:pPr>
-            <a:r>
-              <a:t>9 Counties &amp; 18 Campuses</a:t>
-            </a:r>
-          </a:p>
-          <a:p>
-            <a:pPr>
-              <a:spcBef>
-                <a:spcPts val="800"/>
-              </a:spcBef>
-              <a:defRPr sz="900">
-                <a:solidFill>
-                  <a:srgbClr val="9CA3AF"/>
-                </a:solidFill>
-              </a:defRPr>
-            </a:pPr>
-            <a:r>
-              <a:t>Calibrated against active arrays in Cupertino Union (5.2 MW) and Fremont Union High School District under PG&amp;E Schedule B-19.</a:t>
-            </a:r>
-            <a:br/>
-            <a:br/>
-            <a:r>
-              <a:t>Status: Verified &amp; Ground-Truthed</a:t>
+                  <a:srgbClr val="F8FAFC"/>
+                </a:solidFill>
+              </a:defRPr>
+            </a:pPr>
+            <a:r>
+              <a:t>BAY AREA PILOT (LIVE)</a:t>
+            </a:r>
+          </a:p>
+          <a:p>
+            <a:pPr>
+              <a:spcBef>
+                <a:spcPts val="600"/>
+              </a:spcBef>
+              <a:defRPr sz="1000">
+                <a:solidFill>
+                  <a:srgbClr val="A0AEC0"/>
+                </a:solidFill>
+              </a:defRPr>
+            </a:pPr>
+            <a:r>
+              <a:t>- 18 local campuses mapped &amp; verified today</a:t>
+            </a:r>
+          </a:p>
+          <a:p>
+            <a:pPr>
+              <a:spcBef>
+                <a:spcPts val="600"/>
+              </a:spcBef>
+              <a:defRPr sz="1000">
+                <a:solidFill>
+                  <a:srgbClr val="A0AEC0"/>
+                </a:solidFill>
+              </a:defRPr>
+            </a:pPr>
+            <a:r>
+              <a:t>- Covers Cupertino, Palo Alto, San Jose &amp; Sunnyvale</a:t>
+            </a:r>
+          </a:p>
+          <a:p>
+            <a:pPr>
+              <a:spcBef>
+                <a:spcPts val="600"/>
+              </a:spcBef>
+              <a:defRPr sz="1000">
+                <a:solidFill>
+                  <a:srgbClr val="A0AEC0"/>
+                </a:solidFill>
+              </a:defRPr>
+            </a:pPr>
+            <a:r>
+              <a:t>- High Schools, Middle Schools, and Elementary</a:t>
+            </a:r>
+          </a:p>
+          <a:p>
+            <a:pPr>
+              <a:spcBef>
+                <a:spcPts val="600"/>
+              </a:spcBef>
+              <a:defRPr sz="1000">
+                <a:solidFill>
+                  <a:srgbClr val="A0AEC0"/>
+                </a:solidFill>
+              </a:defRPr>
+            </a:pPr>
+            <a:r>
+              <a:t>- 100% verified against real utility rates</a:t>
             </a:r>
           </a:p>
         </p:txBody>
@@ -13039,17 +13452,17 @@
         <p:spPr>
           <a:xfrm>
             <a:off x="4343400" y="1737360"/>
-            <a:ext cx="3474720" cy="3291840"/>
+            <a:ext cx="3474720" cy="3657600"/>
           </a:xfrm>
           <a:prstGeom prst="roundRect">
             <a:avLst/>
           </a:prstGeom>
           <a:solidFill>
-            <a:srgbClr val="111827"/>
+            <a:srgbClr val="131A2B"/>
           </a:solidFill>
           <a:ln w="12700">
             <a:solidFill>
-              <a:srgbClr val="1F293D"/>
+              <a:srgbClr val="222E4A"/>
             </a:solidFill>
           </a:ln>
         </p:spPr>
@@ -13084,180 +13497,7 @@
         <p:spPr>
           <a:xfrm>
             <a:off x="4343400" y="1737360"/>
-            <a:ext cx="3474720" cy="45720"/>
-          </a:xfrm>
-          <a:prstGeom prst="roundRect">
-            <a:avLst/>
-          </a:prstGeom>
-          <a:solidFill>
-            <a:srgbClr val="38BDF8"/>
-          </a:solidFill>
-          <a:ln>
-            <a:noFill/>
-          </a:ln>
-        </p:spPr>
-        <p:style>
-          <a:lnRef idx="1">
-            <a:schemeClr val="accent1"/>
-          </a:lnRef>
-          <a:fillRef idx="3">
-            <a:schemeClr val="accent1"/>
-          </a:fillRef>
-          <a:effectRef idx="2">
-            <a:schemeClr val="accent1"/>
-          </a:effectRef>
-          <a:fontRef idx="minor">
-            <a:schemeClr val="lt1"/>
-          </a:fontRef>
-        </p:style>
-        <p:txBody>
-          <a:bodyPr rtlCol="0" anchor="ctr"/>
-          <a:lstStyle/>
-          <a:p>
-            <a:pPr algn="ctr"/>
-          </a:p>
-        </p:txBody>
-      </p:sp>
-      <p:sp>
-        <p:nvSpPr>
-          <p:cNvPr id="14" name="TextBox 13"/>
-          <p:cNvSpPr txBox="1"/>
-          <p:nvPr/>
-        </p:nvSpPr>
-        <p:spPr>
-          <a:xfrm>
-            <a:off x="4526280" y="1874519"/>
-            <a:ext cx="3108960" cy="3017520"/>
-          </a:xfrm>
-          <a:prstGeom prst="rect">
-            <a:avLst/>
-          </a:prstGeom>
-          <a:noFill/>
-        </p:spPr>
-        <p:txBody>
-          <a:bodyPr wrap="square">
-            <a:spAutoFit/>
-          </a:bodyPr>
-          <a:lstStyle/>
-          <a:p>
-            <a:pPr>
-              <a:defRPr sz="2600" b="1">
-                <a:solidFill>
-                  <a:srgbClr val="38BDF8"/>
-                </a:solidFill>
-              </a:defRPr>
-            </a:pPr>
-            <a:r>
-              <a:t>Phase 2</a:t>
-            </a:r>
-          </a:p>
-          <a:p>
-            <a:pPr>
-              <a:spcBef>
-                <a:spcPts val="300"/>
-              </a:spcBef>
-              <a:defRPr sz="1050" b="1">
-                <a:solidFill>
-                  <a:srgbClr val="F3F4F6"/>
-                </a:solidFill>
-              </a:defRPr>
-            </a:pPr>
-            <a:r>
-              <a:t>CALIFORNIA STATEWIDE</a:t>
-            </a:r>
-          </a:p>
-          <a:p>
-            <a:pPr>
-              <a:spcBef>
-                <a:spcPts val="300"/>
-              </a:spcBef>
-              <a:defRPr sz="900" b="1">
-                <a:solidFill>
-                  <a:srgbClr val="38BDF8"/>
-                </a:solidFill>
-              </a:defRPr>
-            </a:pPr>
-            <a:r>
-              <a:t>58 Counties &amp; 10,000 Schools</a:t>
-            </a:r>
-          </a:p>
-          <a:p>
-            <a:pPr>
-              <a:spcBef>
-                <a:spcPts val="800"/>
-              </a:spcBef>
-              <a:defRPr sz="900">
-                <a:solidFill>
-                  <a:srgbClr val="9CA3AF"/>
-                </a:solidFill>
-              </a:defRPr>
-            </a:pPr>
-            <a:r>
-              <a:t>Ingests California Department of Education directory. Integrates CalEnviroScreen 4.0 equity scoring, Title 24 solar mandates, and SCE/SDG&amp;E/SMUD commercial utility rates.</a:t>
-            </a:r>
-            <a:br/>
-            <a:br/>
-            <a:r>
-              <a:t>Status: Architecture Specified</a:t>
-            </a:r>
-          </a:p>
-        </p:txBody>
-      </p:sp>
-      <p:sp>
-        <p:nvSpPr>
-          <p:cNvPr id="15" name="Rounded Rectangle 14"/>
-          <p:cNvSpPr/>
-          <p:nvPr/>
-        </p:nvSpPr>
-        <p:spPr>
-          <a:xfrm>
-            <a:off x="8138160" y="1737360"/>
-            <a:ext cx="3474720" cy="3291840"/>
-          </a:xfrm>
-          <a:prstGeom prst="roundRect">
-            <a:avLst/>
-          </a:prstGeom>
-          <a:solidFill>
-            <a:srgbClr val="111827"/>
-          </a:solidFill>
-          <a:ln w="12700">
-            <a:solidFill>
-              <a:srgbClr val="1F293D"/>
-            </a:solidFill>
-          </a:ln>
-        </p:spPr>
-        <p:style>
-          <a:lnRef idx="1">
-            <a:schemeClr val="accent1"/>
-          </a:lnRef>
-          <a:fillRef idx="3">
-            <a:schemeClr val="accent1"/>
-          </a:fillRef>
-          <a:effectRef idx="2">
-            <a:schemeClr val="accent1"/>
-          </a:effectRef>
-          <a:fontRef idx="minor">
-            <a:schemeClr val="lt1"/>
-          </a:fontRef>
-        </p:style>
-        <p:txBody>
-          <a:bodyPr rtlCol="0" anchor="ctr"/>
-          <a:lstStyle/>
-          <a:p>
-            <a:pPr algn="ctr"/>
-          </a:p>
-        </p:txBody>
-      </p:sp>
-      <p:sp>
-        <p:nvSpPr>
-          <p:cNvPr id="16" name="Rounded Rectangle 15"/>
-          <p:cNvSpPr/>
-          <p:nvPr/>
-        </p:nvSpPr>
-        <p:spPr>
-          <a:xfrm>
-            <a:off x="8138160" y="1737360"/>
-            <a:ext cx="3474720" cy="45720"/>
+            <a:ext cx="3474720" cy="54864"/>
           </a:xfrm>
           <a:prstGeom prst="roundRect">
             <a:avLst/>
@@ -13293,14 +13533,14 @@
       </p:sp>
       <p:sp>
         <p:nvSpPr>
-          <p:cNvPr id="17" name="TextBox 16"/>
+          <p:cNvPr id="14" name="TextBox 13"/>
           <p:cNvSpPr txBox="1"/>
           <p:nvPr/>
         </p:nvSpPr>
         <p:spPr>
           <a:xfrm>
-            <a:off x="8321040" y="1874519"/>
-            <a:ext cx="3108960" cy="3017520"/>
+            <a:off x="4526280" y="1901952"/>
+            <a:ext cx="3108960" cy="3328416"/>
           </a:xfrm>
           <a:prstGeom prst="rect">
             <a:avLst/>
@@ -13321,81 +13561,106 @@
               </a:defRPr>
             </a:pPr>
             <a:r>
-              <a:t>Phase 3</a:t>
-            </a:r>
-          </a:p>
-          <a:p>
-            <a:pPr>
-              <a:spcBef>
-                <a:spcPts val="300"/>
-              </a:spcBef>
-              <a:defRPr sz="1050" b="1">
-                <a:solidFill>
-                  <a:srgbClr val="F3F4F6"/>
-                </a:solidFill>
-              </a:defRPr>
-            </a:pPr>
-            <a:r>
-              <a:t>NATIONWIDE USA</a:t>
-            </a:r>
-          </a:p>
-          <a:p>
-            <a:pPr>
-              <a:spcBef>
-                <a:spcPts val="300"/>
+              <a:t>Phase 2</a:t>
+            </a:r>
+          </a:p>
+          <a:p>
+            <a:pPr>
+              <a:spcBef>
+                <a:spcPts val="200"/>
               </a:spcBef>
               <a:defRPr sz="900" b="1">
                 <a:solidFill>
-                  <a:srgbClr val="38BDF8"/>
-                </a:solidFill>
-              </a:defRPr>
-            </a:pPr>
-            <a:r>
-              <a:t>50 States &amp; 100,000+ Schools</a:t>
-            </a:r>
-          </a:p>
-          <a:p>
-            <a:pPr>
-              <a:spcBef>
-                <a:spcPts val="800"/>
-              </a:spcBef>
-              <a:defRPr sz="900">
-                <a:solidFill>
-                  <a:srgbClr val="9CA3AF"/>
-                </a:solidFill>
-              </a:defRPr>
-            </a:pPr>
-            <a:r>
-              <a:t>Scales via National Center for Education Statistics (NCES) directory, state EIA commercial electricity rates, and EPA eGRID subregion carbon intensity factors.</a:t>
-            </a:r>
-            <a:br/>
-            <a:br/>
-            <a:r>
-              <a:t>Status: National Architecture</a:t>
-            </a:r>
-          </a:p>
-        </p:txBody>
-      </p:sp>
-      <p:sp>
-        <p:nvSpPr>
-          <p:cNvPr id="18" name="Rounded Rectangle 17"/>
+                  <a:srgbClr val="F8FAFC"/>
+                </a:solidFill>
+              </a:defRPr>
+            </a:pPr>
+            <a:r>
+              <a:t>CALIFORNIA STATEWIDE</a:t>
+            </a:r>
+          </a:p>
+          <a:p>
+            <a:pPr>
+              <a:spcBef>
+                <a:spcPts val="600"/>
+              </a:spcBef>
+              <a:defRPr sz="1000">
+                <a:solidFill>
+                  <a:srgbClr val="A0AEC0"/>
+                </a:solidFill>
+              </a:defRPr>
+            </a:pPr>
+            <a:r>
+              <a:t>- Expanding to 10,000 public schools across CA</a:t>
+            </a:r>
+          </a:p>
+          <a:p>
+            <a:pPr>
+              <a:spcBef>
+                <a:spcPts val="600"/>
+              </a:spcBef>
+              <a:defRPr sz="1000">
+                <a:solidFill>
+                  <a:srgbClr val="A0AEC0"/>
+                </a:solidFill>
+              </a:defRPr>
+            </a:pPr>
+            <a:r>
+              <a:t>- Focusing on hot Central Valley school districts</a:t>
+            </a:r>
+          </a:p>
+          <a:p>
+            <a:pPr>
+              <a:spcBef>
+                <a:spcPts val="600"/>
+              </a:spcBef>
+              <a:defRPr sz="1000">
+                <a:solidFill>
+                  <a:srgbClr val="A0AEC0"/>
+                </a:solidFill>
+              </a:defRPr>
+            </a:pPr>
+            <a:r>
+              <a:t>- Targeting Title I low-income schools for max federal cash</a:t>
+            </a:r>
+          </a:p>
+          <a:p>
+            <a:pPr>
+              <a:spcBef>
+                <a:spcPts val="600"/>
+              </a:spcBef>
+              <a:defRPr sz="1000">
+                <a:solidFill>
+                  <a:srgbClr val="A0AEC0"/>
+                </a:solidFill>
+              </a:defRPr>
+            </a:pPr>
+            <a:r>
+              <a:t>- Supports California's clean energy school mandates</a:t>
+            </a:r>
+          </a:p>
+        </p:txBody>
+      </p:sp>
+      <p:sp>
+        <p:nvSpPr>
+          <p:cNvPr id="15" name="Rounded Rectangle 14"/>
           <p:cNvSpPr/>
           <p:nvPr/>
         </p:nvSpPr>
         <p:spPr>
           <a:xfrm>
-            <a:off x="548640" y="5212080"/>
-            <a:ext cx="11094415" cy="1188720"/>
+            <a:off x="8138160" y="1737360"/>
+            <a:ext cx="3474720" cy="3657600"/>
           </a:xfrm>
           <a:prstGeom prst="roundRect">
             <a:avLst/>
           </a:prstGeom>
           <a:solidFill>
-            <a:srgbClr val="111827"/>
+            <a:srgbClr val="131A2B"/>
           </a:solidFill>
           <a:ln w="12700">
             <a:solidFill>
-              <a:srgbClr val="1F293D"/>
+              <a:srgbClr val="222E4A"/>
             </a:solidFill>
           </a:ln>
         </p:spPr>
@@ -13423,20 +13688,20 @@
       </p:sp>
       <p:sp>
         <p:nvSpPr>
-          <p:cNvPr id="19" name="Rounded Rectangle 18"/>
+          <p:cNvPr id="16" name="Rounded Rectangle 15"/>
           <p:cNvSpPr/>
           <p:nvPr/>
         </p:nvSpPr>
         <p:spPr>
           <a:xfrm>
-            <a:off x="548640" y="5212080"/>
-            <a:ext cx="11094415" cy="45720"/>
+            <a:off x="8138160" y="1737360"/>
+            <a:ext cx="3474720" cy="54864"/>
           </a:xfrm>
           <a:prstGeom prst="roundRect">
             <a:avLst/>
           </a:prstGeom>
           <a:solidFill>
-            <a:srgbClr val="10B981"/>
+            <a:srgbClr val="F59E0B"/>
           </a:solidFill>
           <a:ln>
             <a:noFill/>
@@ -13466,14 +13731,14 @@
       </p:sp>
       <p:sp>
         <p:nvSpPr>
-          <p:cNvPr id="20" name="TextBox 19"/>
+          <p:cNvPr id="17" name="TextBox 16"/>
           <p:cNvSpPr txBox="1"/>
           <p:nvPr/>
         </p:nvSpPr>
         <p:spPr>
           <a:xfrm>
-            <a:off x="777240" y="5285232"/>
-            <a:ext cx="10607040" cy="1005840"/>
+            <a:off x="8321040" y="1901952"/>
+            <a:ext cx="3108960" cy="3328416"/>
           </a:xfrm>
           <a:prstGeom prst="rect">
             <a:avLst/>
@@ -13487,33 +13752,184 @@
           <a:lstStyle/>
           <a:p>
             <a:pPr>
-              <a:defRPr sz="950" b="1">
+              <a:defRPr sz="2600" b="1">
+                <a:solidFill>
+                  <a:srgbClr val="F59E0B"/>
+                </a:solidFill>
+              </a:defRPr>
+            </a:pPr>
+            <a:r>
+              <a:t>Phase 3</a:t>
+            </a:r>
+          </a:p>
+          <a:p>
+            <a:pPr>
+              <a:spcBef>
+                <a:spcPts val="200"/>
+              </a:spcBef>
+              <a:defRPr sz="900" b="1">
+                <a:solidFill>
+                  <a:srgbClr val="F8FAFC"/>
+                </a:solidFill>
+              </a:defRPr>
+            </a:pPr>
+            <a:r>
+              <a:t>NATIONWIDE EXPANSION</a:t>
+            </a:r>
+          </a:p>
+          <a:p>
+            <a:pPr>
+              <a:spcBef>
+                <a:spcPts val="600"/>
+              </a:spcBef>
+              <a:defRPr sz="1000">
+                <a:solidFill>
+                  <a:srgbClr val="A0AEC0"/>
+                </a:solidFill>
+              </a:defRPr>
+            </a:pPr>
+            <a:r>
+              <a:t>- Scaling to 100,000 public campuses across 50 states</a:t>
+            </a:r>
+          </a:p>
+          <a:p>
+            <a:pPr>
+              <a:spcBef>
+                <a:spcPts val="600"/>
+              </a:spcBef>
+              <a:defRPr sz="1000">
+                <a:solidFill>
+                  <a:srgbClr val="A0AEC0"/>
+                </a:solidFill>
+              </a:defRPr>
+            </a:pPr>
+            <a:r>
+              <a:t>- Targeting Midwest &amp; Sunbelt coal-heavy power grids</a:t>
+            </a:r>
+          </a:p>
+          <a:p>
+            <a:pPr>
+              <a:spcBef>
+                <a:spcPts val="600"/>
+              </a:spcBef>
+              <a:defRPr sz="1000">
+                <a:solidFill>
+                  <a:srgbClr val="A0AEC0"/>
+                </a:solidFill>
+              </a:defRPr>
+            </a:pPr>
+            <a:r>
+              <a:t>- Replacing dirty coal power gives 2.5x more carbon cut per watt!</a:t>
+            </a:r>
+          </a:p>
+          <a:p>
+            <a:pPr>
+              <a:spcBef>
+                <a:spcPts val="600"/>
+              </a:spcBef>
+              <a:defRPr sz="1000">
+                <a:solidFill>
+                  <a:srgbClr val="A0AEC0"/>
+                </a:solidFill>
+              </a:defRPr>
+            </a:pPr>
+            <a:r>
+              <a:t>- Empowers youth climate clubs in every state</a:t>
+            </a:r>
+          </a:p>
+        </p:txBody>
+      </p:sp>
+      <p:sp>
+        <p:nvSpPr>
+          <p:cNvPr id="18" name="Rounded Rectangle 17"/>
+          <p:cNvSpPr/>
+          <p:nvPr/>
+        </p:nvSpPr>
+        <p:spPr>
+          <a:xfrm>
+            <a:off x="548640" y="5577840"/>
+            <a:ext cx="11094415" cy="777240"/>
+          </a:xfrm>
+          <a:prstGeom prst="roundRect">
+            <a:avLst/>
+          </a:prstGeom>
+          <a:solidFill>
+            <a:srgbClr val="131A2B"/>
+          </a:solidFill>
+          <a:ln w="12700">
+            <a:solidFill>
+              <a:srgbClr val="10B981"/>
+            </a:solidFill>
+          </a:ln>
+        </p:spPr>
+        <p:style>
+          <a:lnRef idx="1">
+            <a:schemeClr val="accent1"/>
+          </a:lnRef>
+          <a:fillRef idx="3">
+            <a:schemeClr val="accent1"/>
+          </a:fillRef>
+          <a:effectRef idx="2">
+            <a:schemeClr val="accent1"/>
+          </a:effectRef>
+          <a:fontRef idx="minor">
+            <a:schemeClr val="lt1"/>
+          </a:fontRef>
+        </p:style>
+        <p:txBody>
+          <a:bodyPr rtlCol="0" anchor="ctr"/>
+          <a:lstStyle/>
+          <a:p>
+            <a:pPr algn="ctr"/>
+          </a:p>
+        </p:txBody>
+      </p:sp>
+      <p:sp>
+        <p:nvSpPr>
+          <p:cNvPr id="19" name="TextBox 18"/>
+          <p:cNvSpPr txBox="1"/>
+          <p:nvPr/>
+        </p:nvSpPr>
+        <p:spPr>
+          <a:xfrm>
+            <a:off x="731520" y="5623560"/>
+            <a:ext cx="10698480" cy="685800"/>
+          </a:xfrm>
+          <a:prstGeom prst="rect">
+            <a:avLst/>
+          </a:prstGeom>
+          <a:noFill/>
+        </p:spPr>
+        <p:txBody>
+          <a:bodyPr wrap="square">
+            <a:spAutoFit/>
+          </a:bodyPr>
+          <a:lstStyle/>
+          <a:p>
+            <a:pPr>
+              <a:defRPr sz="900" b="1">
                 <a:solidFill>
                   <a:srgbClr val="10B981"/>
                 </a:solidFill>
               </a:defRPr>
             </a:pPr>
             <a:r>
-              <a:t>EPA eGRID REGIONAL GRID CARBON INTENSITY FACTORS (Scope 2 GHG Avoidance)</a:t>
-            </a:r>
-          </a:p>
-          <a:p>
-            <a:pPr>
-              <a:spcBef>
-                <a:spcPts val="300"/>
-              </a:spcBef>
-              <a:defRPr sz="900">
-                <a:solidFill>
-                  <a:srgbClr val="F3F4F6"/>
-                </a:solidFill>
-              </a:defRPr>
-            </a:pPr>
-            <a:r>
-              <a:t>CAMX (California / WECC): 0.45 lbs CO2 / kWh  |  ERCOT (Texas): 0.88 lbs CO2 / kWh  |  RFCW (Midwest): 1.12 lbs CO2 / kWh</a:t>
-            </a:r>
-            <a:br/>
-            <a:r>
-              <a:t>Key Environmental Justice Finding: Installing a solar canopy in coal-heavy Midwest grids yields 2.5x higher carbon avoidance per watt than in California.</a:t>
+              <a:t>THE NATIONAL IMPACT</a:t>
+            </a:r>
+          </a:p>
+          <a:p>
+            <a:pPr>
+              <a:spcBef>
+                <a:spcPts val="200"/>
+              </a:spcBef>
+              <a:defRPr sz="1050" b="1">
+                <a:solidFill>
+                  <a:srgbClr val="F8FAFC"/>
+                </a:solidFill>
+              </a:defRPr>
+            </a:pPr>
+            <a:r>
+              <a:t>If just 10% of America's schools install solar parking canopies, we save school districts over $800M every single year and eliminate millions of tons of emissions.</a:t>
             </a:r>
           </a:p>
         </p:txBody>

--- a/SolarSchoolsUSA_PitchDeck.pptx
+++ b/SolarSchoolsUSA_PitchDeck.pptx
@@ -511,7 +511,7 @@
           <a:lstStyle/>
           <a:p>
             <a:r>
-              <a:t>[0:00 - 0:25] 'Hi everyone, my name is Pranav Balaji, and I am a 10th grader. Every single morning when we arrive at school, our parking lots sit empty under the blazing sun. At the same time, our school districts spend millions of dollars every year on electric bills. Today I want to show you SolarSchools USA: a web platform I built so any student or school board member can map their school parking lot, calculate solar energy, and download a ready-to-use board proposal in just 10 seconds.'</a:t>
+              <a:t>[0:00 - 0:25] 'Hi everyone, my name is Pranav Balaji, and I am a 10th grader. I want to start with a simple question: why are our school parking lots baking under the sun, while our districts bleed billions on power? Every single morning, our cars sit on 140-degree asphalt. Meanwhile, public schools spend 8 billion dollars every year on electricity bills! And the craziest part? The federal government now offers cash checks covering up to 50% of solar canopy costs, but over 90% of school boards have never heard of it. That is the exact problem we are solving with SolarSchools USA.'</a:t>
             </a:r>
           </a:p>
         </p:txBody>
@@ -651,7 +651,7 @@
           <a:lstStyle/>
           <a:p>
             <a:r>
-              <a:t>[0:25 - 0:50] 'Think about what school feels like in August or September. Our parking lots are black asphalt that reaches 140 degrees. Cars turn into ovens, and playgrounds bake. Meanwhile, public schools across the country spend over 8 billion dollars every year on electric bills. Electricity is the second-largest bill a school district pays, right after teacher salaries! And when school boards try to fix this, private consultants charge up to $25,000 just to do an initial study. Most schools give up before they even start.'</a:t>
+              <a:t>[0:25 - 0:50] 'Why hasn't every school built solar canopies already? Two reasons. First, because public schools don't pay taxes, they historically couldn't use solar tax credits. Second, private engineering consultants charge $25,000 just to do a feasibility study! Most public school districts simply don't have that cash lying around. So they wait. But every year a typical high school delays, they lose $140,000 to the utility company. That is two full-time teacher salaries lost every single year.'</a:t>
             </a:r>
           </a:p>
         </p:txBody>
@@ -721,7 +721,7 @@
           <a:lstStyle/>
           <a:p>
             <a:r>
-              <a:t>[0:50 - 1:15] 'Here is the exciting part that almost nobody knows. In 2022, a new federal law called 'Direct Pay' was passed. Historically, public schools couldn't get solar tax credits because schools don't pay taxes. Now, under Section 6417, the IRS will literally write an actual CASH check directly to public school districts! They pay a 30% base grant, plus an extra 10% for American steel and 10% for Title I schools. That means the federal government can cover up to 50% of the entire solar canopy! The problem? Over 90% of school boards have no idea this money exists.'</a:t>
+              <a:t>[0:50 - 1:15] 'Here is the breakthrough. In 2022, Congress passed a new law called 'Direct Pay' under Section 6417. For the first time in history, the IRS writes an actual, uncapped CASH reimbursement check directly to public schools! They pay a 30% base grant, plus an extra 10% for American steel and 10% for Title I schools. That means the federal government covers up to 50% of the entire project! All the district has to do is claim it. But almost no school board knows how.'</a:t>
             </a:r>
           </a:p>
         </p:txBody>
@@ -791,7 +791,7 @@
           <a:lstStyle/>
           <a:p>
             <a:r>
-              <a:t>[1:15 - 1:40] 'So I decided to build a solution: SolarSchools USA. It is a web application designed so any high school student or parent can use it. Step 1: you select your school from our database of 18 Bay Area campuses. It zooms right onto the parking lot. Step 2: in real time, it connects to the Department of Energy's solar engine and calculates how many panels fit, how much electricity they generate, and how much money the school saves. Step 3: with one click, you download a complete School Board Action Brief with the exact financial breakdown and a template resolution ready to present to school board trustees.'</a:t>
+              <a:t>[1:15 - 1:40] 'So I built SolarSchools USA to democratize this data. Step 1: choose any campus from our 18 Bay Area pilot schools. It zooms right onto the parking lot. Step 2: it runs live Department of Energy solar physics in real time to calculate panel count, kilowatt capacity, and power output. Step 3: click one button, and you get an executive action brief with a 25-year cashflow schedule and a draft board resolution. Any student can hand this directly to their school board trustees.'</a:t>
             </a:r>
           </a:p>
         </p:txBody>
@@ -861,7 +861,7 @@
           <a:lstStyle/>
           <a:p>
             <a:r>
-              <a:t>[1:40 - 2:05] 'We made sure the numbers are rock-solid. We don't assume the entire parking lot is covered in solar. We use an empirical 65% coverage factor, which reserves 24-foot driving aisles, ADA handicap spots, and a full 14-foot vertical clearance for yellow school buses. Then, we connect directly to the Department of Energy's NREL database to pull exact satellite sunshine numbers for the school's precise coordinates, accounting for summer heat, dust, and winter sun angles. It's the same math that professional engineering firms use, but packaged so anyone can run it in seconds.'</a:t>
+              <a:t>[1:40 - 2:05] 'We made sure the numbers are rock-solid. We don't assume the entire parking lot is covered in solar. We apply an empirical 65% packing factor, which reserves driving lanes, ADA spots, and a 14-foot vertical clearance for yellow school buses. Then, we query the Department of Energy's satellite database to calculate exact sunshine, temperature derates, and seasonal loss. It's the same math that engineering firms use, but packaged so anyone can run it in seconds.'</a:t>
             </a:r>
           </a:p>
         </p:txBody>
@@ -931,7 +931,7 @@
           <a:lstStyle/>
           <a:p>
             <a:r>
-              <a:t>[2:05 - 2:35] 'Let's look at real-world proof right here in Silicon Valley. At Monta Vista High in Cupertino, they installed 550 kW of solar carports in 2021. Our software modeled that they would save $145,000 a year. When we checked the district's actual published utility bills, they saved $139,200. That's a 4% match with real life! Now look just 10 miles away at Palo Alto High. They have a massive parking lot baking in the sun, paying $140,000 a year to the power company that they don't need to pay. And there is a $754,000 cash grant from the federal government waiting for them. That $140,000 every year could pay for two full-time teachers or hundreds of laptops!'</a:t>
+              <a:t>[2:05 - 2:35] 'Look at real proof right here in Silicon Valley. At Monta Vista High in Cupertino, they installed solar carports in 2021. Our software modeled $145,000 in annual savings. Their actual published bills showed $139,200—within 4%! Now look 10 miles away at Palo Alto High. They have a massive unshaded parking lot losing $140,000 every year. And there is a $754,000 check from the federal government sitting on the table unclaimed. That $140,000 lost every single year could hire two full-time teachers!'</a:t>
             </a:r>
           </a:p>
         </p:txBody>
@@ -1001,7 +1001,7 @@
           <a:lstStyle/>
           <a:p>
             <a:r>
-              <a:t>[2:35 - 3:00] 'When you look at the financials, it's an absolute no-brainer. Normally, a solar canopy might take 6 to 7 years to pay back. With the federal Direct Pay check covering up to 40% or 50% upfront, the payback period drops to just 3.7 years! After year four, all that electricity is pure profit for the school district. Over the 25-year lifespan of the panels, even after paying for washing and maintenance, a single high school generates nearly 10 million dollars in net savings. That's permanent money for science labs, clubs, and teachers without raising local property taxes.'</a:t>
+              <a:t>[2:35 - 3:00] 'When you look at the economics, it is an absolute no-brainer. With the federal Direct Pay check covering up to 40% or 50% upfront, the payback period drops to just 3.7 years! After year four, all that electricity is pure savings for the school district. Over the 25-year lifespan of the panels, a single high school generates nearly 10 million dollars in net savings. That is permanent money for teachers, science labs, and student mental health counselors.'</a:t>
             </a:r>
           </a:p>
         </p:txBody>
@@ -4162,7 +4162,7 @@
             <a:avLst/>
           </a:prstGeom>
           <a:solidFill>
-            <a:srgbClr val="0B0F19"/>
+            <a:srgbClr val="F8FAFC"/>
           </a:solidFill>
           <a:ln>
             <a:noFill/>
@@ -4205,10 +4205,12 @@
             <a:avLst/>
           </a:prstGeom>
           <a:solidFill>
-            <a:srgbClr val="0F172A"/>
+            <a:srgbClr val="F1F5F9"/>
           </a:solidFill>
-          <a:ln>
-            <a:noFill/>
+          <a:ln w="12700">
+            <a:solidFill>
+              <a:srgbClr val="E2E8F0"/>
+            </a:solidFill>
           </a:ln>
         </p:spPr>
         <p:style>
@@ -4310,7 +4312,7 @@
             <a:pPr>
               <a:defRPr sz="950">
                 <a:solidFill>
-                  <a:srgbClr val="A0AEC0"/>
+                  <a:srgbClr val="475569"/>
                 </a:solidFill>
               </a:defRPr>
             </a:pPr>
@@ -4345,7 +4347,7 @@
             <a:pPr algn="r">
               <a:defRPr sz="1000" b="1">
                 <a:solidFill>
-                  <a:srgbClr val="38BDF8"/>
+                  <a:srgbClr val="0284C7"/>
                 </a:solidFill>
               </a:defRPr>
             </a:pPr>
@@ -4370,7 +4372,7 @@
             <a:avLst/>
           </a:prstGeom>
           <a:solidFill>
-            <a:srgbClr val="38BDF8"/>
+            <a:srgbClr val="0284C7"/>
           </a:solidFill>
           <a:ln>
             <a:noFill/>
@@ -4406,8 +4408,8 @@
         </p:nvSpPr>
         <p:spPr>
           <a:xfrm>
-            <a:off x="731520" y="1188720"/>
-            <a:ext cx="10698480" cy="2286000"/>
+            <a:off x="731520" y="1051560"/>
+            <a:ext cx="10698480" cy="2103120"/>
           </a:xfrm>
           <a:prstGeom prst="rect">
             <a:avLst/>
@@ -4423,42 +4425,27 @@
             <a:pPr>
               <a:defRPr sz="1000" b="1">
                 <a:solidFill>
-                  <a:srgbClr val="38BDF8"/>
-                </a:solidFill>
-              </a:defRPr>
-            </a:pPr>
-            <a:r>
-              <a:t>SVYCA YOUTH FOR EARTH HACKATHON</a:t>
-            </a:r>
-          </a:p>
-          <a:p>
-            <a:pPr>
-              <a:spcBef>
-                <a:spcPts val="400"/>
-              </a:spcBef>
-              <a:defRPr sz="4400" b="1">
-                <a:solidFill>
-                  <a:srgbClr val="F8FAFC"/>
-                </a:solidFill>
-              </a:defRPr>
-            </a:pPr>
-            <a:r>
-              <a:t>SolarSchools USA</a:t>
-            </a:r>
-          </a:p>
-          <a:p>
-            <a:pPr>
-              <a:spcBef>
-                <a:spcPts val="400"/>
-              </a:spcBef>
-              <a:defRPr sz="1800" b="1">
-                <a:solidFill>
-                  <a:srgbClr val="10B981"/>
-                </a:solidFill>
-              </a:defRPr>
-            </a:pPr>
-            <a:r>
-              <a:t>Turning School Parking Lots into Clean Energy &amp; Classroom Cash</a:t>
+                  <a:srgbClr val="8C1515"/>
+                </a:solidFill>
+              </a:defRPr>
+            </a:pPr>
+            <a:r>
+              <a:t>SOLARSCHOOLS USA  |  SVYCA YOUTH FOR EARTH HACKATHON</a:t>
+            </a:r>
+          </a:p>
+          <a:p>
+            <a:pPr>
+              <a:spcBef>
+                <a:spcPts val="300"/>
+              </a:spcBef>
+              <a:defRPr sz="2600" b="1">
+                <a:solidFill>
+                  <a:srgbClr val="0F172A"/>
+                </a:solidFill>
+              </a:defRPr>
+            </a:pPr>
+            <a:r>
+              <a:t>The Problem: Why Are School Parking Lots Baking in the Sun While Districts Bleed Billions on Power?</a:t>
             </a:r>
           </a:p>
           <a:p>
@@ -4468,12 +4455,12 @@
               </a:spcBef>
               <a:defRPr sz="1200">
                 <a:solidFill>
-                  <a:srgbClr val="A0AEC0"/>
-                </a:solidFill>
-              </a:defRPr>
-            </a:pPr>
-            <a:r>
-              <a:t>A simple platform helping students, teachers, and school boards claim federal solar funding in seconds.</a:t>
+                  <a:srgbClr val="475569"/>
+                </a:solidFill>
+              </a:defRPr>
+            </a:pPr>
+            <a:r>
+              <a:t>Across the U.S., 100,000 public schools sit on unshaded blacktop asphalt, surrendering classroom funds to utility companies while millions in federal clean energy grants sit unclaimed.</a:t>
             </a:r>
           </a:p>
         </p:txBody>
@@ -4486,8 +4473,8 @@
         </p:nvSpPr>
         <p:spPr>
           <a:xfrm>
-            <a:off x="731520" y="3566160"/>
-            <a:ext cx="10698480" cy="411480"/>
+            <a:off x="731520" y="3291840"/>
+            <a:ext cx="10698480" cy="365760"/>
           </a:xfrm>
           <a:prstGeom prst="rect">
             <a:avLst/>
@@ -4501,9 +4488,9 @@
           <a:lstStyle/>
           <a:p>
             <a:pPr>
-              <a:defRPr sz="1100" b="1">
-                <a:solidFill>
-                  <a:srgbClr val="F8FAFC"/>
+              <a:defRPr sz="1050" b="1">
+                <a:solidFill>
+                  <a:srgbClr val="0F172A"/>
                 </a:solidFill>
               </a:defRPr>
             </a:pPr>
@@ -4521,18 +4508,18 @@
         </p:nvSpPr>
         <p:spPr>
           <a:xfrm>
-            <a:off x="548640" y="4160520"/>
-            <a:ext cx="3474720" cy="2194560"/>
+            <a:off x="548640" y="3886200"/>
+            <a:ext cx="3474720" cy="2468880"/>
           </a:xfrm>
           <a:prstGeom prst="roundRect">
             <a:avLst/>
           </a:prstGeom>
           <a:solidFill>
-            <a:srgbClr val="131A2B"/>
+            <a:srgbClr val="FFFFFF"/>
           </a:solidFill>
           <a:ln w="12700">
             <a:solidFill>
-              <a:srgbClr val="222E4A"/>
+              <a:srgbClr val="E2E8F0"/>
             </a:solidFill>
           </a:ln>
         </p:spPr>
@@ -4566,14 +4553,14 @@
         </p:nvSpPr>
         <p:spPr>
           <a:xfrm>
-            <a:off x="548640" y="4160520"/>
+            <a:off x="548640" y="3886200"/>
             <a:ext cx="3474720" cy="54864"/>
           </a:xfrm>
           <a:prstGeom prst="roundRect">
             <a:avLst/>
           </a:prstGeom>
           <a:solidFill>
-            <a:srgbClr val="38BDF8"/>
+            <a:srgbClr val="DC2626"/>
           </a:solidFill>
           <a:ln>
             <a:noFill/>
@@ -4609,8 +4596,8 @@
         </p:nvSpPr>
         <p:spPr>
           <a:xfrm>
-            <a:off x="731520" y="4270248"/>
-            <a:ext cx="3108960" cy="1975104"/>
+            <a:off x="731520" y="3995928"/>
+            <a:ext cx="3108960" cy="2249424"/>
           </a:xfrm>
           <a:prstGeom prst="rect">
             <a:avLst/>
@@ -4626,72 +4613,72 @@
             <a:pPr>
               <a:defRPr sz="850" b="1">
                 <a:solidFill>
-                  <a:srgbClr val="38BDF8"/>
-                </a:solidFill>
-              </a:defRPr>
-            </a:pPr>
-            <a:r>
-              <a:t>18 LOCAL SCHOOLS MAPPED</a:t>
-            </a:r>
-          </a:p>
-          <a:p>
-            <a:pPr>
-              <a:spcBef>
-                <a:spcPts val="300"/>
-              </a:spcBef>
-              <a:defRPr sz="1200" b="1">
-                <a:solidFill>
-                  <a:srgbClr val="F8FAFC"/>
-                </a:solidFill>
-              </a:defRPr>
-            </a:pPr>
-            <a:r>
-              <a:t>High-Resolution Campus Data</a:t>
-            </a:r>
-          </a:p>
-          <a:p>
-            <a:pPr>
-              <a:spcBef>
-                <a:spcPts val="300"/>
-              </a:spcBef>
-              <a:defRPr sz="950">
-                <a:solidFill>
-                  <a:srgbClr val="A0AEC0"/>
-                </a:solidFill>
-              </a:defRPr>
-            </a:pPr>
-            <a:r>
-              <a:t>- High, Middle &amp; Elementary schools mapped</a:t>
-            </a:r>
-          </a:p>
-          <a:p>
-            <a:pPr>
-              <a:spcBef>
-                <a:spcPts val="300"/>
-              </a:spcBef>
-              <a:defRPr sz="950">
-                <a:solidFill>
-                  <a:srgbClr val="A0AEC0"/>
-                </a:solidFill>
-              </a:defRPr>
-            </a:pPr>
-            <a:r>
-              <a:t>- Exact parking lots ground-truthed on satellite</a:t>
-            </a:r>
-          </a:p>
-          <a:p>
-            <a:pPr>
-              <a:spcBef>
-                <a:spcPts val="300"/>
-              </a:spcBef>
-              <a:defRPr sz="950">
-                <a:solidFill>
-                  <a:srgbClr val="A0AEC0"/>
-                </a:solidFill>
-              </a:defRPr>
-            </a:pPr>
-            <a:r>
-              <a:t>- Zero manual measuring needed</a:t>
+                  <a:srgbClr val="DC2626"/>
+                </a:solidFill>
+              </a:defRPr>
+            </a:pPr>
+            <a:r>
+              <a:t>PROBLEM 1: EXTREME HEAT</a:t>
+            </a:r>
+          </a:p>
+          <a:p>
+            <a:pPr>
+              <a:spcBef>
+                <a:spcPts val="200"/>
+              </a:spcBef>
+              <a:defRPr sz="1500" b="1">
+                <a:solidFill>
+                  <a:srgbClr val="0F172A"/>
+                </a:solidFill>
+              </a:defRPr>
+            </a:pPr>
+            <a:r>
+              <a:t>140°F Baking Asphalt</a:t>
+            </a:r>
+          </a:p>
+          <a:p>
+            <a:pPr>
+              <a:spcBef>
+                <a:spcPts val="400"/>
+              </a:spcBef>
+              <a:defRPr sz="1000">
+                <a:solidFill>
+                  <a:srgbClr val="475569"/>
+                </a:solidFill>
+              </a:defRPr>
+            </a:pPr>
+            <a:r>
+              <a:t>- Empty blacktop bakes student and staff cars</a:t>
+            </a:r>
+          </a:p>
+          <a:p>
+            <a:pPr>
+              <a:spcBef>
+                <a:spcPts val="400"/>
+              </a:spcBef>
+              <a:defRPr sz="1000">
+                <a:solidFill>
+                  <a:srgbClr val="475569"/>
+                </a:solidFill>
+              </a:defRPr>
+            </a:pPr>
+            <a:r>
+              <a:t>- Creates campus heat islands in hot months</a:t>
+            </a:r>
+          </a:p>
+          <a:p>
+            <a:pPr>
+              <a:spcBef>
+                <a:spcPts val="400"/>
+              </a:spcBef>
+              <a:defRPr sz="1000">
+                <a:solidFill>
+                  <a:srgbClr val="475569"/>
+                </a:solidFill>
+              </a:defRPr>
+            </a:pPr>
+            <a:r>
+              <a:t>- Playground asphalt gets too hot for students</a:t>
             </a:r>
           </a:p>
         </p:txBody>
@@ -4704,18 +4691,18 @@
         </p:nvSpPr>
         <p:spPr>
           <a:xfrm>
-            <a:off x="4343400" y="4160520"/>
-            <a:ext cx="3474720" cy="2194560"/>
+            <a:off x="4343400" y="3886200"/>
+            <a:ext cx="3474720" cy="2468880"/>
           </a:xfrm>
           <a:prstGeom prst="roundRect">
             <a:avLst/>
           </a:prstGeom>
           <a:solidFill>
-            <a:srgbClr val="131A2B"/>
+            <a:srgbClr val="FFFFFF"/>
           </a:solidFill>
           <a:ln w="12700">
             <a:solidFill>
-              <a:srgbClr val="222E4A"/>
+              <a:srgbClr val="E2E8F0"/>
             </a:solidFill>
           </a:ln>
         </p:spPr>
@@ -4749,14 +4736,14 @@
         </p:nvSpPr>
         <p:spPr>
           <a:xfrm>
-            <a:off x="4343400" y="4160520"/>
+            <a:off x="4343400" y="3886200"/>
             <a:ext cx="3474720" cy="54864"/>
           </a:xfrm>
           <a:prstGeom prst="roundRect">
             <a:avLst/>
           </a:prstGeom>
           <a:solidFill>
-            <a:srgbClr val="10B981"/>
+            <a:srgbClr val="DC2626"/>
           </a:solidFill>
           <a:ln>
             <a:noFill/>
@@ -4792,8 +4779,8 @@
         </p:nvSpPr>
         <p:spPr>
           <a:xfrm>
-            <a:off x="4526280" y="4270248"/>
-            <a:ext cx="3108960" cy="1975104"/>
+            <a:off x="4526280" y="3995928"/>
+            <a:ext cx="3108960" cy="2249424"/>
           </a:xfrm>
           <a:prstGeom prst="rect">
             <a:avLst/>
@@ -4809,72 +4796,72 @@
             <a:pPr>
               <a:defRPr sz="850" b="1">
                 <a:solidFill>
-                  <a:srgbClr val="10B981"/>
-                </a:solidFill>
-              </a:defRPr>
-            </a:pPr>
-            <a:r>
-              <a:t>REAL SOLAR PHYSICS (NREL)</a:t>
-            </a:r>
-          </a:p>
-          <a:p>
-            <a:pPr>
-              <a:spcBef>
-                <a:spcPts val="300"/>
-              </a:spcBef>
-              <a:defRPr sz="1200" b="1">
-                <a:solidFill>
-                  <a:srgbClr val="F8FAFC"/>
-                </a:solidFill>
-              </a:defRPr>
-            </a:pPr>
-            <a:r>
-              <a:t>Department of Energy Engine</a:t>
-            </a:r>
-          </a:p>
-          <a:p>
-            <a:pPr>
-              <a:spcBef>
-                <a:spcPts val="300"/>
-              </a:spcBef>
-              <a:defRPr sz="950">
-                <a:solidFill>
-                  <a:srgbClr val="A0AEC0"/>
-                </a:solidFill>
-              </a:defRPr>
-            </a:pPr>
-            <a:r>
-              <a:t>- Uses official PVWatts v8 solar calculations</a:t>
-            </a:r>
-          </a:p>
-          <a:p>
-            <a:pPr>
-              <a:spcBef>
-                <a:spcPts val="300"/>
-              </a:spcBef>
-              <a:defRPr sz="950">
-                <a:solidFill>
-                  <a:srgbClr val="A0AEC0"/>
-                </a:solidFill>
-              </a:defRPr>
-            </a:pPr>
-            <a:r>
-              <a:t>- Calculates monthly power generation</a:t>
-            </a:r>
-          </a:p>
-          <a:p>
-            <a:pPr>
-              <a:spcBef>
-                <a:spcPts val="300"/>
-              </a:spcBef>
-              <a:defRPr sz="950">
-                <a:solidFill>
-                  <a:srgbClr val="A0AEC0"/>
-                </a:solidFill>
-              </a:defRPr>
-            </a:pPr>
-            <a:r>
-              <a:t>- Calibrated against active Silicon Valley arrays</a:t>
+                  <a:srgbClr val="DC2626"/>
+                </a:solidFill>
+              </a:defRPr>
+            </a:pPr>
+            <a:r>
+              <a:t>PROBLEM 2: BUDGET DRAIN</a:t>
+            </a:r>
+          </a:p>
+          <a:p>
+            <a:pPr>
+              <a:spcBef>
+                <a:spcPts val="200"/>
+              </a:spcBef>
+              <a:defRPr sz="1500" b="1">
+                <a:solidFill>
+                  <a:srgbClr val="0F172A"/>
+                </a:solidFill>
+              </a:defRPr>
+            </a:pPr>
+            <a:r>
+              <a:t>$8.0 Billion Wasted</a:t>
+            </a:r>
+          </a:p>
+          <a:p>
+            <a:pPr>
+              <a:spcBef>
+                <a:spcPts val="400"/>
+              </a:spcBef>
+              <a:defRPr sz="1000">
+                <a:solidFill>
+                  <a:srgbClr val="475569"/>
+                </a:solidFill>
+              </a:defRPr>
+            </a:pPr>
+            <a:r>
+              <a:t>- Electricity is schools' #2 cost after teachers</a:t>
+            </a:r>
+          </a:p>
+          <a:p>
+            <a:pPr>
+              <a:spcBef>
+                <a:spcPts val="400"/>
+              </a:spcBef>
+              <a:defRPr sz="1000">
+                <a:solidFill>
+                  <a:srgbClr val="475569"/>
+                </a:solidFill>
+              </a:defRPr>
+            </a:pPr>
+            <a:r>
+              <a:t>- Monopoly utility bills drain classroom funds</a:t>
+            </a:r>
+          </a:p>
+          <a:p>
+            <a:pPr>
+              <a:spcBef>
+                <a:spcPts val="400"/>
+              </a:spcBef>
+              <a:defRPr sz="1000">
+                <a:solidFill>
+                  <a:srgbClr val="475569"/>
+                </a:solidFill>
+              </a:defRPr>
+            </a:pPr>
+            <a:r>
+              <a:t>- Schools lose cash that should fund education</a:t>
             </a:r>
           </a:p>
         </p:txBody>
@@ -4887,18 +4874,18 @@
         </p:nvSpPr>
         <p:spPr>
           <a:xfrm>
-            <a:off x="8138160" y="4160520"/>
-            <a:ext cx="3474720" cy="2194560"/>
+            <a:off x="8138160" y="3886200"/>
+            <a:ext cx="3474720" cy="2468880"/>
           </a:xfrm>
           <a:prstGeom prst="roundRect">
             <a:avLst/>
           </a:prstGeom>
           <a:solidFill>
-            <a:srgbClr val="131A2B"/>
+            <a:srgbClr val="FFFFFF"/>
           </a:solidFill>
           <a:ln w="12700">
             <a:solidFill>
-              <a:srgbClr val="222E4A"/>
+              <a:srgbClr val="E2E8F0"/>
             </a:solidFill>
           </a:ln>
         </p:spPr>
@@ -4932,14 +4919,14 @@
         </p:nvSpPr>
         <p:spPr>
           <a:xfrm>
-            <a:off x="8138160" y="4160520"/>
+            <a:off x="8138160" y="3886200"/>
             <a:ext cx="3474720" cy="54864"/>
           </a:xfrm>
           <a:prstGeom prst="roundRect">
             <a:avLst/>
           </a:prstGeom>
           <a:solidFill>
-            <a:srgbClr val="8C1515"/>
+            <a:srgbClr val="D97706"/>
           </a:solidFill>
           <a:ln>
             <a:noFill/>
@@ -4975,8 +4962,8 @@
         </p:nvSpPr>
         <p:spPr>
           <a:xfrm>
-            <a:off x="8321040" y="4270248"/>
-            <a:ext cx="3108960" cy="1975104"/>
+            <a:off x="8321040" y="3995928"/>
+            <a:ext cx="3108960" cy="2249424"/>
           </a:xfrm>
           <a:prstGeom prst="rect">
             <a:avLst/>
@@ -4992,72 +4979,72 @@
             <a:pPr>
               <a:defRPr sz="850" b="1">
                 <a:solidFill>
-                  <a:srgbClr val="8C1515"/>
-                </a:solidFill>
-              </a:defRPr>
-            </a:pPr>
-            <a:r>
-              <a:t>1-CLICK SCHOOL BOARD BRIEF</a:t>
-            </a:r>
-          </a:p>
-          <a:p>
-            <a:pPr>
-              <a:spcBef>
-                <a:spcPts val="300"/>
-              </a:spcBef>
-              <a:defRPr sz="1200" b="1">
-                <a:solidFill>
-                  <a:srgbClr val="F8FAFC"/>
-                </a:solidFill>
-              </a:defRPr>
-            </a:pPr>
-            <a:r>
-              <a:t>Instant Action for Students</a:t>
-            </a:r>
-          </a:p>
-          <a:p>
-            <a:pPr>
-              <a:spcBef>
-                <a:spcPts val="300"/>
-              </a:spcBef>
-              <a:defRPr sz="950">
-                <a:solidFill>
-                  <a:srgbClr val="A0AEC0"/>
-                </a:solidFill>
-              </a:defRPr>
-            </a:pPr>
-            <a:r>
-              <a:t>- Generates 1-page financial summary</a:t>
-            </a:r>
-          </a:p>
-          <a:p>
-            <a:pPr>
-              <a:spcBef>
-                <a:spcPts val="300"/>
-              </a:spcBef>
-              <a:defRPr sz="950">
-                <a:solidFill>
-                  <a:srgbClr val="A0AEC0"/>
-                </a:solidFill>
-              </a:defRPr>
-            </a:pPr>
-            <a:r>
-              <a:t>- Includes ready-to-vote board resolution</a:t>
-            </a:r>
-          </a:p>
-          <a:p>
-            <a:pPr>
-              <a:spcBef>
-                <a:spcPts val="300"/>
-              </a:spcBef>
-              <a:defRPr sz="950">
-                <a:solidFill>
-                  <a:srgbClr val="A0AEC0"/>
-                </a:solidFill>
-              </a:defRPr>
-            </a:pPr>
-            <a:r>
-              <a:t>- Gives students the tools to speak to trustees</a:t>
+                  <a:srgbClr val="D97706"/>
+                </a:solidFill>
+              </a:defRPr>
+            </a:pPr>
+            <a:r>
+              <a:t>PROBLEM 3: THE GAP</a:t>
+            </a:r>
+          </a:p>
+          <a:p>
+            <a:pPr>
+              <a:spcBef>
+                <a:spcPts val="200"/>
+              </a:spcBef>
+              <a:defRPr sz="1500" b="1">
+                <a:solidFill>
+                  <a:srgbClr val="0F172A"/>
+                </a:solidFill>
+              </a:defRPr>
+            </a:pPr>
+            <a:r>
+              <a:t>$750K Grant Sitting Idle</a:t>
+            </a:r>
+          </a:p>
+          <a:p>
+            <a:pPr>
+              <a:spcBef>
+                <a:spcPts val="400"/>
+              </a:spcBef>
+              <a:defRPr sz="1000">
+                <a:solidFill>
+                  <a:srgbClr val="475569"/>
+                </a:solidFill>
+              </a:defRPr>
+            </a:pPr>
+            <a:r>
+              <a:t>- Federal IRA Direct Pay pays 30% to 50% in cash</a:t>
+            </a:r>
+          </a:p>
+          <a:p>
+            <a:pPr>
+              <a:spcBef>
+                <a:spcPts val="400"/>
+              </a:spcBef>
+              <a:defRPr sz="1000">
+                <a:solidFill>
+                  <a:srgbClr val="475569"/>
+                </a:solidFill>
+              </a:defRPr>
+            </a:pPr>
+            <a:r>
+              <a:t>- Over 90% of school boards don't know it exists!</a:t>
+            </a:r>
+          </a:p>
+          <a:p>
+            <a:pPr>
+              <a:spcBef>
+                <a:spcPts val="400"/>
+              </a:spcBef>
+              <a:defRPr sz="1000">
+                <a:solidFill>
+                  <a:srgbClr val="475569"/>
+                </a:solidFill>
+              </a:defRPr>
+            </a:pPr>
+            <a:r>
+              <a:t>- Private consultant studies cost $25K and take a year</a:t>
             </a:r>
           </a:p>
         </p:txBody>
@@ -5095,7 +5082,7 @@
             <a:avLst/>
           </a:prstGeom>
           <a:solidFill>
-            <a:srgbClr val="0B0F19"/>
+            <a:srgbClr val="F8FAFC"/>
           </a:solidFill>
           <a:ln>
             <a:noFill/>
@@ -5138,10 +5125,12 @@
             <a:avLst/>
           </a:prstGeom>
           <a:solidFill>
-            <a:srgbClr val="0F172A"/>
+            <a:srgbClr val="F1F5F9"/>
           </a:solidFill>
-          <a:ln>
-            <a:noFill/>
+          <a:ln w="12700">
+            <a:solidFill>
+              <a:srgbClr val="E2E8F0"/>
+            </a:solidFill>
           </a:ln>
         </p:spPr>
         <p:style>
@@ -5243,7 +5232,7 @@
             <a:pPr>
               <a:defRPr sz="950">
                 <a:solidFill>
-                  <a:srgbClr val="A0AEC0"/>
+                  <a:srgbClr val="475569"/>
                 </a:solidFill>
               </a:defRPr>
             </a:pPr>
@@ -5278,7 +5267,7 @@
             <a:pPr algn="r">
               <a:defRPr sz="1000" b="1">
                 <a:solidFill>
-                  <a:srgbClr val="38BDF8"/>
+                  <a:srgbClr val="0284C7"/>
                 </a:solidFill>
               </a:defRPr>
             </a:pPr>
@@ -5303,7 +5292,7 @@
             <a:avLst/>
           </a:prstGeom>
           <a:solidFill>
-            <a:srgbClr val="38BDF8"/>
+            <a:srgbClr val="0284C7"/>
           </a:solidFill>
           <a:ln>
             <a:noFill/>
@@ -5356,7 +5345,7 @@
             <a:pPr>
               <a:defRPr sz="900" b="1">
                 <a:solidFill>
-                  <a:srgbClr val="38BDF8"/>
+                  <a:srgbClr val="0284C7"/>
                 </a:solidFill>
               </a:defRPr>
             </a:pPr>
@@ -5371,7 +5360,7 @@
               </a:spcBef>
               <a:defRPr sz="2200" b="1">
                 <a:solidFill>
-                  <a:srgbClr val="F8FAFC"/>
+                  <a:srgbClr val="0F172A"/>
                 </a:solidFill>
               </a:defRPr>
             </a:pPr>
@@ -5386,7 +5375,7 @@
               </a:spcBef>
               <a:defRPr sz="1100">
                 <a:solidFill>
-                  <a:srgbClr val="A0AEC0"/>
+                  <a:srgbClr val="475569"/>
                 </a:solidFill>
               </a:defRPr>
             </a:pPr>
@@ -5411,11 +5400,11 @@
             <a:avLst/>
           </a:prstGeom>
           <a:solidFill>
-            <a:srgbClr val="131A2B"/>
+            <a:srgbClr val="FFFFFF"/>
           </a:solidFill>
           <a:ln w="12700">
             <a:solidFill>
-              <a:srgbClr val="222E4A"/>
+              <a:srgbClr val="E2E8F0"/>
             </a:solidFill>
           </a:ln>
         </p:spPr>
@@ -5456,7 +5445,7 @@
             <a:avLst/>
           </a:prstGeom>
           <a:solidFill>
-            <a:srgbClr val="38BDF8"/>
+            <a:srgbClr val="0284C7"/>
           </a:solidFill>
           <a:ln>
             <a:noFill/>
@@ -5507,9 +5496,9 @@
           <a:lstStyle/>
           <a:p>
             <a:pPr>
-              <a:defRPr sz="2600" b="1">
-                <a:solidFill>
-                  <a:srgbClr val="38BDF8"/>
+              <a:defRPr sz="2400" b="1">
+                <a:solidFill>
+                  <a:srgbClr val="0284C7"/>
                 </a:solidFill>
               </a:defRPr>
             </a:pPr>
@@ -5524,7 +5513,7 @@
               </a:spcBef>
               <a:defRPr sz="900" b="1">
                 <a:solidFill>
-                  <a:srgbClr val="F8FAFC"/>
+                  <a:srgbClr val="0F172A"/>
                 </a:solidFill>
               </a:defRPr>
             </a:pPr>
@@ -5539,7 +5528,7 @@
               </a:spcBef>
               <a:defRPr sz="1000">
                 <a:solidFill>
-                  <a:srgbClr val="A0AEC0"/>
+                  <a:srgbClr val="475569"/>
                 </a:solidFill>
               </a:defRPr>
             </a:pPr>
@@ -5554,7 +5543,7 @@
               </a:spcBef>
               <a:defRPr sz="1000">
                 <a:solidFill>
-                  <a:srgbClr val="A0AEC0"/>
+                  <a:srgbClr val="475569"/>
                 </a:solidFill>
               </a:defRPr>
             </a:pPr>
@@ -5569,12 +5558,27 @@
               </a:spcBef>
               <a:defRPr sz="1000">
                 <a:solidFill>
-                  <a:srgbClr val="A0AEC0"/>
-                </a:solidFill>
-              </a:defRPr>
-            </a:pPr>
-            <a:r>
-              <a:t>- See your school's exact energy and savings in 5 seconds</a:t>
+                  <a:srgbClr val="475569"/>
+                </a:solidFill>
+              </a:defRPr>
+            </a:pPr>
+            <a:r>
+              <a:t>- See your school's exact savings in 5 seconds</a:t>
+            </a:r>
+          </a:p>
+          <a:p>
+            <a:pPr>
+              <a:spcBef>
+                <a:spcPts val="600"/>
+              </a:spcBef>
+              <a:defRPr sz="1000">
+                <a:solidFill>
+                  <a:srgbClr val="475569"/>
+                </a:solidFill>
+              </a:defRPr>
+            </a:pPr>
+            <a:r>
+              <a:t>- Completely free for students, parents &amp; staff</a:t>
             </a:r>
           </a:p>
         </p:txBody>
@@ -5594,11 +5598,11 @@
             <a:avLst/>
           </a:prstGeom>
           <a:solidFill>
-            <a:srgbClr val="131A2B"/>
+            <a:srgbClr val="FFFFFF"/>
           </a:solidFill>
           <a:ln w="12700">
             <a:solidFill>
-              <a:srgbClr val="222E4A"/>
+              <a:srgbClr val="E2E8F0"/>
             </a:solidFill>
           </a:ln>
         </p:spPr>
@@ -5639,7 +5643,7 @@
             <a:avLst/>
           </a:prstGeom>
           <a:solidFill>
-            <a:srgbClr val="10B981"/>
+            <a:srgbClr val="059669"/>
           </a:solidFill>
           <a:ln>
             <a:noFill/>
@@ -5690,9 +5694,9 @@
           <a:lstStyle/>
           <a:p>
             <a:pPr>
-              <a:defRPr sz="2600" b="1">
-                <a:solidFill>
-                  <a:srgbClr val="10B981"/>
+              <a:defRPr sz="2400" b="1">
+                <a:solidFill>
+                  <a:srgbClr val="059669"/>
                 </a:solidFill>
               </a:defRPr>
             </a:pPr>
@@ -5707,7 +5711,7 @@
               </a:spcBef>
               <a:defRPr sz="900" b="1">
                 <a:solidFill>
-                  <a:srgbClr val="F8FAFC"/>
+                  <a:srgbClr val="0F172A"/>
                 </a:solidFill>
               </a:defRPr>
             </a:pPr>
@@ -5722,7 +5726,7 @@
               </a:spcBef>
               <a:defRPr sz="1000">
                 <a:solidFill>
-                  <a:srgbClr val="A0AEC0"/>
+                  <a:srgbClr val="475569"/>
                 </a:solidFill>
               </a:defRPr>
             </a:pPr>
@@ -5737,7 +5741,7 @@
               </a:spcBef>
               <a:defRPr sz="1000">
                 <a:solidFill>
-                  <a:srgbClr val="A0AEC0"/>
+                  <a:srgbClr val="475569"/>
                 </a:solidFill>
               </a:defRPr>
             </a:pPr>
@@ -5752,12 +5756,27 @@
               </a:spcBef>
               <a:defRPr sz="1000">
                 <a:solidFill>
-                  <a:srgbClr val="A0AEC0"/>
-                </a:solidFill>
-              </a:defRPr>
-            </a:pPr>
-            <a:r>
-              <a:t>- Share it with your principal, teachers, and student council</a:t>
+                  <a:srgbClr val="475569"/>
+                </a:solidFill>
+              </a:defRPr>
+            </a:pPr>
+            <a:r>
+              <a:t>- Share it with your principal, teachers, and council</a:t>
+            </a:r>
+          </a:p>
+          <a:p>
+            <a:pPr>
+              <a:spcBef>
+                <a:spcPts val="600"/>
+              </a:spcBef>
+              <a:defRPr sz="1000">
+                <a:solidFill>
+                  <a:srgbClr val="475569"/>
+                </a:solidFill>
+              </a:defRPr>
+            </a:pPr>
+            <a:r>
+              <a:t>- Backed by real Department of Energy calculations</a:t>
             </a:r>
           </a:p>
         </p:txBody>
@@ -5777,11 +5796,11 @@
             <a:avLst/>
           </a:prstGeom>
           <a:solidFill>
-            <a:srgbClr val="131A2B"/>
+            <a:srgbClr val="FFFFFF"/>
           </a:solidFill>
           <a:ln w="12700">
             <a:solidFill>
-              <a:srgbClr val="222E4A"/>
+              <a:srgbClr val="E2E8F0"/>
             </a:solidFill>
           </a:ln>
         </p:spPr>
@@ -5873,7 +5892,7 @@
           <a:lstStyle/>
           <a:p>
             <a:pPr>
-              <a:defRPr sz="2600" b="1">
+              <a:defRPr sz="2400" b="1">
                 <a:solidFill>
                   <a:srgbClr val="8C1515"/>
                 </a:solidFill>
@@ -5890,7 +5909,7 @@
               </a:spcBef>
               <a:defRPr sz="900" b="1">
                 <a:solidFill>
-                  <a:srgbClr val="F8FAFC"/>
+                  <a:srgbClr val="0F172A"/>
                 </a:solidFill>
               </a:defRPr>
             </a:pPr>
@@ -5905,7 +5924,7 @@
               </a:spcBef>
               <a:defRPr sz="1000">
                 <a:solidFill>
-                  <a:srgbClr val="A0AEC0"/>
+                  <a:srgbClr val="475569"/>
                 </a:solidFill>
               </a:defRPr>
             </a:pPr>
@@ -5920,12 +5939,12 @@
               </a:spcBef>
               <a:defRPr sz="1000">
                 <a:solidFill>
-                  <a:srgbClr val="A0AEC0"/>
-                </a:solidFill>
-              </a:defRPr>
-            </a:pPr>
-            <a:r>
-              <a:t>- Show trustees how to claim federal cash before it expires</a:t>
+                  <a:srgbClr val="475569"/>
+                </a:solidFill>
+              </a:defRPr>
+            </a:pPr>
+            <a:r>
+              <a:t>- Show trustees how to claim federal cash now</a:t>
             </a:r>
           </a:p>
           <a:p>
@@ -5935,12 +5954,27 @@
               </a:spcBef>
               <a:defRPr sz="1000">
                 <a:solidFill>
-                  <a:srgbClr val="A0AEC0"/>
-                </a:solidFill>
-              </a:defRPr>
-            </a:pPr>
-            <a:r>
-              <a:t>- Turn student climate advocacy into real, funded infrastructure</a:t>
+                  <a:srgbClr val="475569"/>
+                </a:solidFill>
+              </a:defRPr>
+            </a:pPr>
+            <a:r>
+              <a:t>- Turn student climate advocacy into real infrastructure</a:t>
+            </a:r>
+          </a:p>
+          <a:p>
+            <a:pPr>
+              <a:spcBef>
+                <a:spcPts val="600"/>
+              </a:spcBef>
+              <a:defRPr sz="1000">
+                <a:solidFill>
+                  <a:srgbClr val="475569"/>
+                </a:solidFill>
+              </a:defRPr>
+            </a:pPr>
+            <a:r>
+              <a:t>- Leave the microphone with a concrete proposal</a:t>
             </a:r>
           </a:p>
         </p:txBody>
@@ -5960,7 +5994,7 @@
             <a:avLst/>
           </a:prstGeom>
           <a:solidFill>
-            <a:srgbClr val="131A2B"/>
+            <a:srgbClr val="FFFFFF"/>
           </a:solidFill>
           <a:ln w="12700">
             <a:solidFill>
@@ -6015,7 +6049,7 @@
             <a:pPr>
               <a:defRPr sz="900" b="1">
                 <a:solidFill>
-                  <a:srgbClr val="38BDF8"/>
+                  <a:srgbClr val="8C1515"/>
                 </a:solidFill>
               </a:defRPr>
             </a:pPr>
@@ -6030,7 +6064,7 @@
               </a:spcBef>
               <a:defRPr sz="1100" b="1">
                 <a:solidFill>
-                  <a:srgbClr val="F8FAFC"/>
+                  <a:srgbClr val="0F172A"/>
                 </a:solidFill>
               </a:defRPr>
             </a:pPr>
@@ -6073,7 +6107,7 @@
             <a:avLst/>
           </a:prstGeom>
           <a:solidFill>
-            <a:srgbClr val="0B0F19"/>
+            <a:srgbClr val="F8FAFC"/>
           </a:solidFill>
           <a:ln>
             <a:noFill/>
@@ -6116,10 +6150,12 @@
             <a:avLst/>
           </a:prstGeom>
           <a:solidFill>
-            <a:srgbClr val="0F172A"/>
+            <a:srgbClr val="F1F5F9"/>
           </a:solidFill>
-          <a:ln>
-            <a:noFill/>
+          <a:ln w="12700">
+            <a:solidFill>
+              <a:srgbClr val="E2E8F0"/>
+            </a:solidFill>
           </a:ln>
         </p:spPr>
         <p:style>
@@ -6221,7 +6257,7 @@
             <a:pPr>
               <a:defRPr sz="950">
                 <a:solidFill>
-                  <a:srgbClr val="A0AEC0"/>
+                  <a:srgbClr val="475569"/>
                 </a:solidFill>
               </a:defRPr>
             </a:pPr>
@@ -6256,7 +6292,7 @@
             <a:pPr algn="r">
               <a:defRPr sz="1000" b="1">
                 <a:solidFill>
-                  <a:srgbClr val="38BDF8"/>
+                  <a:srgbClr val="0284C7"/>
                 </a:solidFill>
               </a:defRPr>
             </a:pPr>
@@ -6281,7 +6317,7 @@
             <a:avLst/>
           </a:prstGeom>
           <a:solidFill>
-            <a:srgbClr val="38BDF8"/>
+            <a:srgbClr val="0284C7"/>
           </a:solidFill>
           <a:ln>
             <a:noFill/>
@@ -6334,12 +6370,12 @@
             <a:pPr>
               <a:defRPr sz="900" b="1">
                 <a:solidFill>
-                  <a:srgbClr val="38BDF8"/>
-                </a:solidFill>
-              </a:defRPr>
-            </a:pPr>
-            <a:r>
-              <a:t>THE REAL PROBLEM</a:t>
+                  <a:srgbClr val="0284C7"/>
+                </a:solidFill>
+              </a:defRPr>
+            </a:pPr>
+            <a:r>
+              <a:t>THE ROADBLOCKS</a:t>
             </a:r>
           </a:p>
           <a:p>
@@ -6349,12 +6385,12 @@
               </a:spcBef>
               <a:defRPr sz="2200" b="1">
                 <a:solidFill>
-                  <a:srgbClr val="F8FAFC"/>
-                </a:solidFill>
-              </a:defRPr>
-            </a:pPr>
-            <a:r>
-              <a:t>Our Parking Lots Are Baking. Our Schools Are Bleeding Cash.</a:t>
+                  <a:srgbClr val="0F172A"/>
+                </a:solidFill>
+              </a:defRPr>
+            </a:pPr>
+            <a:r>
+              <a:t>Why Haven't Schools Solved This Already?</a:t>
             </a:r>
           </a:p>
           <a:p>
@@ -6364,12 +6400,12 @@
               </a:spcBef>
               <a:defRPr sz="1100">
                 <a:solidFill>
-                  <a:srgbClr val="A0AEC0"/>
-                </a:solidFill>
-              </a:defRPr>
-            </a:pPr>
-            <a:r>
-              <a:t>Millions of square feet of black asphalt are absorbing heat and draining school budgets.</a:t>
+                  <a:srgbClr val="475569"/>
+                </a:solidFill>
+              </a:defRPr>
+            </a:pPr>
+            <a:r>
+              <a:t>Two major institutional barriers have kept clean energy out of public school parking lots.</a:t>
             </a:r>
           </a:p>
         </p:txBody>
@@ -6389,11 +6425,11 @@
             <a:avLst/>
           </a:prstGeom>
           <a:solidFill>
-            <a:srgbClr val="131A2B"/>
+            <a:srgbClr val="FFFFFF"/>
           </a:solidFill>
           <a:ln w="12700">
             <a:solidFill>
-              <a:srgbClr val="222E4A"/>
+              <a:srgbClr val="E2E8F0"/>
             </a:solidFill>
           </a:ln>
         </p:spPr>
@@ -6434,7 +6470,7 @@
             <a:avLst/>
           </a:prstGeom>
           <a:solidFill>
-            <a:srgbClr val="EF4444"/>
+            <a:srgbClr val="DC2626"/>
           </a:solidFill>
           <a:ln>
             <a:noFill/>
@@ -6485,14 +6521,14 @@
           <a:lstStyle/>
           <a:p>
             <a:pPr>
-              <a:defRPr sz="3800" b="1">
-                <a:solidFill>
-                  <a:srgbClr val="EF4444"/>
-                </a:solidFill>
-              </a:defRPr>
-            </a:pPr>
-            <a:r>
-              <a:t>140°F</a:t>
+              <a:defRPr sz="2200" b="1">
+                <a:solidFill>
+                  <a:srgbClr val="DC2626"/>
+                </a:solidFill>
+              </a:defRPr>
+            </a:pPr>
+            <a:r>
+              <a:t>Barrier 1</a:t>
             </a:r>
           </a:p>
           <a:p>
@@ -6500,14 +6536,14 @@
               <a:spcBef>
                 <a:spcPts val="200"/>
               </a:spcBef>
-              <a:defRPr sz="900" b="1">
-                <a:solidFill>
-                  <a:srgbClr val="F8FAFC"/>
-                </a:solidFill>
-              </a:defRPr>
-            </a:pPr>
-            <a:r>
-              <a:t>BLAZING ASPHALT</a:t>
+              <a:defRPr sz="1100" b="1">
+                <a:solidFill>
+                  <a:srgbClr val="0F172A"/>
+                </a:solidFill>
+              </a:defRPr>
+            </a:pPr>
+            <a:r>
+              <a:t>TAX-EXEMPT LOCKOUT</a:t>
             </a:r>
           </a:p>
           <a:p>
@@ -6517,12 +6553,12 @@
               </a:spcBef>
               <a:defRPr sz="1000">
                 <a:solidFill>
-                  <a:srgbClr val="A0AEC0"/>
-                </a:solidFill>
-              </a:defRPr>
-            </a:pPr>
-            <a:r>
-              <a:t>- Empty blacktop bakes student and staff cars</a:t>
+                  <a:srgbClr val="475569"/>
+                </a:solidFill>
+              </a:defRPr>
+            </a:pPr>
+            <a:r>
+              <a:t>- Schools don't pay federal income taxes</a:t>
             </a:r>
           </a:p>
           <a:p>
@@ -6532,12 +6568,12 @@
               </a:spcBef>
               <a:defRPr sz="1000">
                 <a:solidFill>
-                  <a:srgbClr val="A0AEC0"/>
-                </a:solidFill>
-              </a:defRPr>
-            </a:pPr>
-            <a:r>
-              <a:t>- Creates campus heat islands in hot months</a:t>
+                  <a:srgbClr val="475569"/>
+                </a:solidFill>
+              </a:defRPr>
+            </a:pPr>
+            <a:r>
+              <a:t>- Historically locked out of traditional solar tax credits</a:t>
             </a:r>
           </a:p>
           <a:p>
@@ -6547,12 +6583,27 @@
               </a:spcBef>
               <a:defRPr sz="1000">
                 <a:solidFill>
-                  <a:srgbClr val="A0AEC0"/>
-                </a:solidFill>
-              </a:defRPr>
-            </a:pPr>
-            <a:r>
-              <a:t>- Playground asphalt gets too hot to use safely</a:t>
+                  <a:srgbClr val="475569"/>
+                </a:solidFill>
+              </a:defRPr>
+            </a:pPr>
+            <a:r>
+              <a:t>- Forced into predatory third-party lease deals</a:t>
+            </a:r>
+          </a:p>
+          <a:p>
+            <a:pPr>
+              <a:spcBef>
+                <a:spcPts val="600"/>
+              </a:spcBef>
+              <a:defRPr sz="1000">
+                <a:solidFill>
+                  <a:srgbClr val="475569"/>
+                </a:solidFill>
+              </a:defRPr>
+            </a:pPr>
+            <a:r>
+              <a:t>- Left public districts waiting on the sidelines</a:t>
             </a:r>
           </a:p>
         </p:txBody>
@@ -6572,11 +6623,11 @@
             <a:avLst/>
           </a:prstGeom>
           <a:solidFill>
-            <a:srgbClr val="131A2B"/>
+            <a:srgbClr val="FFFFFF"/>
           </a:solidFill>
           <a:ln w="12700">
             <a:solidFill>
-              <a:srgbClr val="222E4A"/>
+              <a:srgbClr val="E2E8F0"/>
             </a:solidFill>
           </a:ln>
         </p:spPr>
@@ -6617,7 +6668,7 @@
             <a:avLst/>
           </a:prstGeom>
           <a:solidFill>
-            <a:srgbClr val="EF4444"/>
+            <a:srgbClr val="DC2626"/>
           </a:solidFill>
           <a:ln>
             <a:noFill/>
@@ -6668,14 +6719,14 @@
           <a:lstStyle/>
           <a:p>
             <a:pPr>
-              <a:defRPr sz="3800" b="1">
-                <a:solidFill>
-                  <a:srgbClr val="EF4444"/>
-                </a:solidFill>
-              </a:defRPr>
-            </a:pPr>
-            <a:r>
-              <a:t>$8.0 Billion</a:t>
+              <a:defRPr sz="2200" b="1">
+                <a:solidFill>
+                  <a:srgbClr val="DC2626"/>
+                </a:solidFill>
+              </a:defRPr>
+            </a:pPr>
+            <a:r>
+              <a:t>Barrier 2</a:t>
             </a:r>
           </a:p>
           <a:p>
@@ -6683,14 +6734,14 @@
               <a:spcBef>
                 <a:spcPts val="200"/>
               </a:spcBef>
-              <a:defRPr sz="900" b="1">
-                <a:solidFill>
-                  <a:srgbClr val="F8FAFC"/>
-                </a:solidFill>
-              </a:defRPr>
-            </a:pPr>
-            <a:r>
-              <a:t>WASTED POWER BILLS</a:t>
+              <a:defRPr sz="1100" b="1">
+                <a:solidFill>
+                  <a:srgbClr val="0F172A"/>
+                </a:solidFill>
+              </a:defRPr>
+            </a:pPr>
+            <a:r>
+              <a:t>THE $25,000 CONSULTANT WALL</a:t>
             </a:r>
           </a:p>
           <a:p>
@@ -6700,12 +6751,12 @@
               </a:spcBef>
               <a:defRPr sz="1000">
                 <a:solidFill>
-                  <a:srgbClr val="A0AEC0"/>
-                </a:solidFill>
-              </a:defRPr>
-            </a:pPr>
-            <a:r>
-              <a:t>- Schools spend more on electricity than supplies</a:t>
+                  <a:srgbClr val="475569"/>
+                </a:solidFill>
+              </a:defRPr>
+            </a:pPr>
+            <a:r>
+              <a:t>- Private solar studies cost $15,000 to $25,000 per school</a:t>
             </a:r>
           </a:p>
           <a:p>
@@ -6715,12 +6766,12 @@
               </a:spcBef>
               <a:defRPr sz="1000">
                 <a:solidFill>
-                  <a:srgbClr val="A0AEC0"/>
-                </a:solidFill>
-              </a:defRPr>
-            </a:pPr>
-            <a:r>
-              <a:t>- Money flows straight to monopoly power companies</a:t>
+                  <a:srgbClr val="475569"/>
+                </a:solidFill>
+              </a:defRPr>
+            </a:pPr>
+            <a:r>
+              <a:t>- Takes 6 to 12 months just to get an estimate</a:t>
             </a:r>
           </a:p>
           <a:p>
@@ -6730,12 +6781,27 @@
               </a:spcBef>
               <a:defRPr sz="1000">
                 <a:solidFill>
-                  <a:srgbClr val="A0AEC0"/>
-                </a:solidFill>
-              </a:defRPr>
-            </a:pPr>
-            <a:r>
-              <a:t>- Funds that could hire teachers are lost every year</a:t>
+                  <a:srgbClr val="475569"/>
+                </a:solidFill>
+              </a:defRPr>
+            </a:pPr>
+            <a:r>
+              <a:t>- Under-funded schools cannot afford upfront studies</a:t>
+            </a:r>
+          </a:p>
+          <a:p>
+            <a:pPr>
+              <a:spcBef>
+                <a:spcPts val="600"/>
+              </a:spcBef>
+              <a:defRPr sz="1000">
+                <a:solidFill>
+                  <a:srgbClr val="475569"/>
+                </a:solidFill>
+              </a:defRPr>
+            </a:pPr>
+            <a:r>
+              <a:t>- Stalls school board action indefinitely</a:t>
             </a:r>
           </a:p>
         </p:txBody>
@@ -6755,11 +6821,11 @@
             <a:avLst/>
           </a:prstGeom>
           <a:solidFill>
-            <a:srgbClr val="131A2B"/>
+            <a:srgbClr val="FFFFFF"/>
           </a:solidFill>
           <a:ln w="12700">
             <a:solidFill>
-              <a:srgbClr val="222E4A"/>
+              <a:srgbClr val="E2E8F0"/>
             </a:solidFill>
           </a:ln>
         </p:spPr>
@@ -6800,7 +6866,7 @@
             <a:avLst/>
           </a:prstGeom>
           <a:solidFill>
-            <a:srgbClr val="EF4444"/>
+            <a:srgbClr val="D97706"/>
           </a:solidFill>
           <a:ln>
             <a:noFill/>
@@ -6851,14 +6917,14 @@
           <a:lstStyle/>
           <a:p>
             <a:pPr>
-              <a:defRPr sz="3800" b="1">
-                <a:solidFill>
-                  <a:srgbClr val="EF4444"/>
-                </a:solidFill>
-              </a:defRPr>
-            </a:pPr>
-            <a:r>
-              <a:t>$25,000</a:t>
+              <a:defRPr sz="2200" b="1">
+                <a:solidFill>
+                  <a:srgbClr val="D97706"/>
+                </a:solidFill>
+              </a:defRPr>
+            </a:pPr>
+            <a:r>
+              <a:t>The Cost</a:t>
             </a:r>
           </a:p>
           <a:p>
@@ -6866,14 +6932,14 @@
               <a:spcBef>
                 <a:spcPts val="200"/>
               </a:spcBef>
-              <a:defRPr sz="900" b="1">
-                <a:solidFill>
-                  <a:srgbClr val="F8FAFC"/>
-                </a:solidFill>
-              </a:defRPr>
-            </a:pPr>
-            <a:r>
-              <a:t>THE CONSULTANT WALL</a:t>
+              <a:defRPr sz="1100" b="1">
+                <a:solidFill>
+                  <a:srgbClr val="0F172A"/>
+                </a:solidFill>
+              </a:defRPr>
+            </a:pPr>
+            <a:r>
+              <a:t>$140,000 LOST EVERY YEAR</a:t>
             </a:r>
           </a:p>
           <a:p>
@@ -6883,12 +6949,12 @@
               </a:spcBef>
               <a:defRPr sz="1000">
                 <a:solidFill>
-                  <a:srgbClr val="A0AEC0"/>
-                </a:solidFill>
-              </a:defRPr>
-            </a:pPr>
-            <a:r>
-              <a:t>- Engineering feasibility studies cost thousands</a:t>
+                  <a:srgbClr val="475569"/>
+                </a:solidFill>
+              </a:defRPr>
+            </a:pPr>
+            <a:r>
+              <a:t>- Every single year a high school waits is $140K lost</a:t>
             </a:r>
           </a:p>
           <a:p>
@@ -6898,12 +6964,12 @@
               </a:spcBef>
               <a:defRPr sz="1000">
                 <a:solidFill>
-                  <a:srgbClr val="A0AEC0"/>
-                </a:solidFill>
-              </a:defRPr>
-            </a:pPr>
-            <a:r>
-              <a:t>- Takes 6 to 12 months just to get an estimate</a:t>
+                  <a:srgbClr val="475569"/>
+                </a:solidFill>
+              </a:defRPr>
+            </a:pPr>
+            <a:r>
+              <a:t>- That is enough to fund 2 full-time teacher salaries!</a:t>
             </a:r>
           </a:p>
           <a:p>
@@ -6913,12 +6979,27 @@
               </a:spcBef>
               <a:defRPr sz="1000">
                 <a:solidFill>
-                  <a:srgbClr val="A0AEC0"/>
-                </a:solidFill>
-              </a:defRPr>
-            </a:pPr>
-            <a:r>
-              <a:t>- Leaves under-resourced schools completely locked out</a:t>
+                  <a:srgbClr val="475569"/>
+                </a:solidFill>
+              </a:defRPr>
+            </a:pPr>
+            <a:r>
+              <a:t>- Over 5 years, delay costs a school over $700,000</a:t>
+            </a:r>
+          </a:p>
+          <a:p>
+            <a:pPr>
+              <a:spcBef>
+                <a:spcPts val="600"/>
+              </a:spcBef>
+              <a:defRPr sz="1000">
+                <a:solidFill>
+                  <a:srgbClr val="475569"/>
+                </a:solidFill>
+              </a:defRPr>
+            </a:pPr>
+            <a:r>
+              <a:t>- Students lose out on classroom resources</a:t>
             </a:r>
           </a:p>
         </p:txBody>
@@ -6938,11 +7019,11 @@
             <a:avLst/>
           </a:prstGeom>
           <a:solidFill>
-            <a:srgbClr val="131A2B"/>
+            <a:srgbClr val="FFFFFF"/>
           </a:solidFill>
           <a:ln w="12700">
             <a:solidFill>
-              <a:srgbClr val="EF4444"/>
+              <a:srgbClr val="DC2626"/>
             </a:solidFill>
           </a:ln>
         </p:spPr>
@@ -6993,7 +7074,7 @@
             <a:pPr>
               <a:defRPr sz="900" b="1">
                 <a:solidFill>
-                  <a:srgbClr val="EF4444"/>
+                  <a:srgbClr val="DC2626"/>
                 </a:solidFill>
               </a:defRPr>
             </a:pPr>
@@ -7006,14 +7087,14 @@
               <a:spcBef>
                 <a:spcPts val="200"/>
               </a:spcBef>
-              <a:defRPr sz="1100" b="1">
-                <a:solidFill>
-                  <a:srgbClr val="F8FAFC"/>
-                </a:solidFill>
-              </a:defRPr>
-            </a:pPr>
-            <a:r>
-              <a:t>Every dollar our school district pays to utility companies is a dollar taken away from teachers, arts, and classrooms.</a:t>
+              <a:defRPr sz="1050" b="1">
+                <a:solidFill>
+                  <a:srgbClr val="0F172A"/>
+                </a:solidFill>
+              </a:defRPr>
+            </a:pPr>
+            <a:r>
+              <a:t>School boards want to go green, but expensive consultants and confusing tax laws hold them back. We need a free tool that gives them answers instantly.</a:t>
             </a:r>
           </a:p>
         </p:txBody>
@@ -7051,7 +7132,7 @@
             <a:avLst/>
           </a:prstGeom>
           <a:solidFill>
-            <a:srgbClr val="0B0F19"/>
+            <a:srgbClr val="F8FAFC"/>
           </a:solidFill>
           <a:ln>
             <a:noFill/>
@@ -7094,10 +7175,12 @@
             <a:avLst/>
           </a:prstGeom>
           <a:solidFill>
-            <a:srgbClr val="0F172A"/>
+            <a:srgbClr val="F1F5F9"/>
           </a:solidFill>
-          <a:ln>
-            <a:noFill/>
+          <a:ln w="12700">
+            <a:solidFill>
+              <a:srgbClr val="E2E8F0"/>
+            </a:solidFill>
           </a:ln>
         </p:spPr>
         <p:style>
@@ -7199,7 +7282,7 @@
             <a:pPr>
               <a:defRPr sz="950">
                 <a:solidFill>
-                  <a:srgbClr val="A0AEC0"/>
+                  <a:srgbClr val="475569"/>
                 </a:solidFill>
               </a:defRPr>
             </a:pPr>
@@ -7234,7 +7317,7 @@
             <a:pPr algn="r">
               <a:defRPr sz="1000" b="1">
                 <a:solidFill>
-                  <a:srgbClr val="38BDF8"/>
+                  <a:srgbClr val="0284C7"/>
                 </a:solidFill>
               </a:defRPr>
             </a:pPr>
@@ -7259,7 +7342,7 @@
             <a:avLst/>
           </a:prstGeom>
           <a:solidFill>
-            <a:srgbClr val="38BDF8"/>
+            <a:srgbClr val="0284C7"/>
           </a:solidFill>
           <a:ln>
             <a:noFill/>
@@ -7312,7 +7395,7 @@
             <a:pPr>
               <a:defRPr sz="900" b="1">
                 <a:solidFill>
-                  <a:srgbClr val="38BDF8"/>
+                  <a:srgbClr val="0284C7"/>
                 </a:solidFill>
               </a:defRPr>
             </a:pPr>
@@ -7327,7 +7410,7 @@
               </a:spcBef>
               <a:defRPr sz="2200" b="1">
                 <a:solidFill>
-                  <a:srgbClr val="F8FAFC"/>
+                  <a:srgbClr val="0F172A"/>
                 </a:solidFill>
               </a:defRPr>
             </a:pPr>
@@ -7342,7 +7425,7 @@
               </a:spcBef>
               <a:defRPr sz="1100">
                 <a:solidFill>
-                  <a:srgbClr val="A0AEC0"/>
+                  <a:srgbClr val="475569"/>
                 </a:solidFill>
               </a:defRPr>
             </a:pPr>
@@ -7367,11 +7450,11 @@
             <a:avLst/>
           </a:prstGeom>
           <a:solidFill>
-            <a:srgbClr val="131A2B"/>
+            <a:srgbClr val="FFFFFF"/>
           </a:solidFill>
           <a:ln w="12700">
             <a:solidFill>
-              <a:srgbClr val="222E4A"/>
+              <a:srgbClr val="E2E8F0"/>
             </a:solidFill>
           </a:ln>
         </p:spPr>
@@ -7412,7 +7495,7 @@
             <a:avLst/>
           </a:prstGeom>
           <a:solidFill>
-            <a:srgbClr val="10B981"/>
+            <a:srgbClr val="059669"/>
           </a:solidFill>
           <a:ln>
             <a:noFill/>
@@ -7463,9 +7546,9 @@
           <a:lstStyle/>
           <a:p>
             <a:pPr>
-              <a:defRPr sz="3800" b="1">
-                <a:solidFill>
-                  <a:srgbClr val="10B981"/>
+              <a:defRPr sz="3600" b="1">
+                <a:solidFill>
+                  <a:srgbClr val="059669"/>
                 </a:solidFill>
               </a:defRPr>
             </a:pPr>
@@ -7480,7 +7563,7 @@
               </a:spcBef>
               <a:defRPr sz="900" b="1">
                 <a:solidFill>
-                  <a:srgbClr val="F8FAFC"/>
+                  <a:srgbClr val="0F172A"/>
                 </a:solidFill>
               </a:defRPr>
             </a:pPr>
@@ -7491,46 +7574,61 @@
           <a:p>
             <a:pPr>
               <a:spcBef>
-                <a:spcPts val="600"/>
+                <a:spcPts val="500"/>
               </a:spcBef>
               <a:defRPr sz="1000">
                 <a:solidFill>
-                  <a:srgbClr val="A0AEC0"/>
-                </a:solidFill>
-              </a:defRPr>
-            </a:pPr>
-            <a:r>
-              <a:t>- Federal IRS cash check covering 30% of cost</a:t>
-            </a:r>
-          </a:p>
-          <a:p>
-            <a:pPr>
-              <a:spcBef>
-                <a:spcPts val="600"/>
+                  <a:srgbClr val="475569"/>
+                </a:solidFill>
+              </a:defRPr>
+            </a:pPr>
+            <a:r>
+              <a:t>- Direct cash payment from the IRS to the district</a:t>
+            </a:r>
+          </a:p>
+          <a:p>
+            <a:pPr>
+              <a:spcBef>
+                <a:spcPts val="500"/>
               </a:spcBef>
               <a:defRPr sz="1000">
                 <a:solidFill>
-                  <a:srgbClr val="A0AEC0"/>
-                </a:solidFill>
-              </a:defRPr>
-            </a:pPr>
-            <a:r>
-              <a:t>- Direct payment to the school district treasury</a:t>
-            </a:r>
-          </a:p>
-          <a:p>
-            <a:pPr>
-              <a:spcBef>
-                <a:spcPts val="600"/>
+                  <a:srgbClr val="475569"/>
+                </a:solidFill>
+              </a:defRPr>
+            </a:pPr>
+            <a:r>
+              <a:t>- Deposited straight into the school treasury</a:t>
+            </a:r>
+          </a:p>
+          <a:p>
+            <a:pPr>
+              <a:spcBef>
+                <a:spcPts val="500"/>
               </a:spcBef>
               <a:defRPr sz="1000">
                 <a:solidFill>
-                  <a:srgbClr val="A0AEC0"/>
-                </a:solidFill>
-              </a:defRPr>
-            </a:pPr>
-            <a:r>
-              <a:t>- No tax liability needed—public schools qualify directly!</a:t>
+                  <a:srgbClr val="475569"/>
+                </a:solidFill>
+              </a:defRPr>
+            </a:pPr>
+            <a:r>
+              <a:t>- No tax liability needed: public schools qualify directly!</a:t>
+            </a:r>
+          </a:p>
+          <a:p>
+            <a:pPr>
+              <a:spcBef>
+                <a:spcPts val="500"/>
+              </a:spcBef>
+              <a:defRPr sz="1000">
+                <a:solidFill>
+                  <a:srgbClr val="475569"/>
+                </a:solidFill>
+              </a:defRPr>
+            </a:pPr>
+            <a:r>
+              <a:t>- Bypasses private tax investors and complicated leases</a:t>
             </a:r>
           </a:p>
         </p:txBody>
@@ -7550,11 +7648,11 @@
             <a:avLst/>
           </a:prstGeom>
           <a:solidFill>
-            <a:srgbClr val="131A2B"/>
+            <a:srgbClr val="FFFFFF"/>
           </a:solidFill>
           <a:ln w="12700">
             <a:solidFill>
-              <a:srgbClr val="222E4A"/>
+              <a:srgbClr val="E2E8F0"/>
             </a:solidFill>
           </a:ln>
         </p:spPr>
@@ -7595,7 +7693,7 @@
             <a:avLst/>
           </a:prstGeom>
           <a:solidFill>
-            <a:srgbClr val="38BDF8"/>
+            <a:srgbClr val="0284C7"/>
           </a:solidFill>
           <a:ln>
             <a:noFill/>
@@ -7646,9 +7744,9 @@
           <a:lstStyle/>
           <a:p>
             <a:pPr>
-              <a:defRPr sz="3800" b="1">
-                <a:solidFill>
-                  <a:srgbClr val="38BDF8"/>
+              <a:defRPr sz="3600" b="1">
+                <a:solidFill>
+                  <a:srgbClr val="0284C7"/>
                 </a:solidFill>
               </a:defRPr>
             </a:pPr>
@@ -7663,7 +7761,7 @@
               </a:spcBef>
               <a:defRPr sz="900" b="1">
                 <a:solidFill>
-                  <a:srgbClr val="F8FAFC"/>
+                  <a:srgbClr val="0F172A"/>
                 </a:solidFill>
               </a:defRPr>
             </a:pPr>
@@ -7674,26 +7772,26 @@
           <a:p>
             <a:pPr>
               <a:spcBef>
-                <a:spcPts val="600"/>
+                <a:spcPts val="500"/>
               </a:spcBef>
               <a:defRPr sz="1000">
                 <a:solidFill>
-                  <a:srgbClr val="A0AEC0"/>
-                </a:solidFill>
-              </a:defRPr>
-            </a:pPr>
-            <a:r>
-              <a:t>- +10% extra bonus for American-made steel &amp; panels</a:t>
-            </a:r>
-          </a:p>
-          <a:p>
-            <a:pPr>
-              <a:spcBef>
-                <a:spcPts val="600"/>
+                  <a:srgbClr val="475569"/>
+                </a:solidFill>
+              </a:defRPr>
+            </a:pPr>
+            <a:r>
+              <a:t>- +10% extra bonus for American-made steel and panels</a:t>
+            </a:r>
+          </a:p>
+          <a:p>
+            <a:pPr>
+              <a:spcBef>
+                <a:spcPts val="500"/>
               </a:spcBef>
               <a:defRPr sz="1000">
                 <a:solidFill>
-                  <a:srgbClr val="A0AEC0"/>
+                  <a:srgbClr val="475569"/>
                 </a:solidFill>
               </a:defRPr>
             </a:pPr>
@@ -7704,16 +7802,31 @@
           <a:p>
             <a:pPr>
               <a:spcBef>
-                <a:spcPts val="600"/>
+                <a:spcPts val="500"/>
               </a:spcBef>
               <a:defRPr sz="1000">
                 <a:solidFill>
-                  <a:srgbClr val="A0AEC0"/>
+                  <a:srgbClr val="475569"/>
                 </a:solidFill>
               </a:defRPr>
             </a:pPr>
             <a:r>
               <a:t>- Puts the biggest grants into communities that need it most</a:t>
+            </a:r>
+          </a:p>
+          <a:p>
+            <a:pPr>
+              <a:spcBef>
+                <a:spcPts val="500"/>
+              </a:spcBef>
+              <a:defRPr sz="1000">
+                <a:solidFill>
+                  <a:srgbClr val="475569"/>
+                </a:solidFill>
+              </a:defRPr>
+            </a:pPr>
+            <a:r>
+              <a:t>- Encourages local jobs and domestic manufacturing</a:t>
             </a:r>
           </a:p>
         </p:txBody>
@@ -7733,11 +7846,11 @@
             <a:avLst/>
           </a:prstGeom>
           <a:solidFill>
-            <a:srgbClr val="131A2B"/>
+            <a:srgbClr val="FFFFFF"/>
           </a:solidFill>
           <a:ln w="12700">
             <a:solidFill>
-              <a:srgbClr val="222E4A"/>
+              <a:srgbClr val="E2E8F0"/>
             </a:solidFill>
           </a:ln>
         </p:spPr>
@@ -7778,7 +7891,7 @@
             <a:avLst/>
           </a:prstGeom>
           <a:solidFill>
-            <a:srgbClr val="10B981"/>
+            <a:srgbClr val="059669"/>
           </a:solidFill>
           <a:ln>
             <a:noFill/>
@@ -7829,9 +7942,9 @@
           <a:lstStyle/>
           <a:p>
             <a:pPr>
-              <a:defRPr sz="3800" b="1">
-                <a:solidFill>
-                  <a:srgbClr val="10B981"/>
+              <a:defRPr sz="3600" b="1">
+                <a:solidFill>
+                  <a:srgbClr val="059669"/>
                 </a:solidFill>
               </a:defRPr>
             </a:pPr>
@@ -7846,7 +7959,7 @@
               </a:spcBef>
               <a:defRPr sz="900" b="1">
                 <a:solidFill>
-                  <a:srgbClr val="F8FAFC"/>
+                  <a:srgbClr val="0F172A"/>
                 </a:solidFill>
               </a:defRPr>
             </a:pPr>
@@ -7857,46 +7970,61 @@
           <a:p>
             <a:pPr>
               <a:spcBef>
-                <a:spcPts val="600"/>
+                <a:spcPts val="500"/>
               </a:spcBef>
               <a:defRPr sz="1000">
                 <a:solidFill>
-                  <a:srgbClr val="A0AEC0"/>
-                </a:solidFill>
-              </a:defRPr>
-            </a:pPr>
-            <a:r>
-              <a:t>- Up to half the solar canopy is paid by the government</a:t>
-            </a:r>
-          </a:p>
-          <a:p>
-            <a:pPr>
-              <a:spcBef>
-                <a:spcPts val="600"/>
+                  <a:srgbClr val="475569"/>
+                </a:solidFill>
+              </a:defRPr>
+            </a:pPr>
+            <a:r>
+              <a:t>- Up to half the solar canopy paid by the government</a:t>
+            </a:r>
+          </a:p>
+          <a:p>
+            <a:pPr>
+              <a:spcBef>
+                <a:spcPts val="500"/>
               </a:spcBef>
               <a:defRPr sz="1000">
                 <a:solidFill>
-                  <a:srgbClr val="A0AEC0"/>
-                </a:solidFill>
-              </a:defRPr>
-            </a:pPr>
-            <a:r>
-              <a:t>- Districts pay only the remaining net balance</a:t>
-            </a:r>
-          </a:p>
-          <a:p>
-            <a:pPr>
-              <a:spcBef>
-                <a:spcPts val="600"/>
+                  <a:srgbClr val="475569"/>
+                </a:solidFill>
+              </a:defRPr>
+            </a:pPr>
+            <a:r>
+              <a:t>- School districts pay only the remaining balance</a:t>
+            </a:r>
+          </a:p>
+          <a:p>
+            <a:pPr>
+              <a:spcBef>
+                <a:spcPts val="500"/>
               </a:spcBef>
               <a:defRPr sz="1000">
                 <a:solidFill>
-                  <a:srgbClr val="A0AEC0"/>
+                  <a:srgbClr val="475569"/>
                 </a:solidFill>
               </a:defRPr>
             </a:pPr>
             <a:r>
               <a:t>- Yet over 90% of school boards have never heard of it!</a:t>
+            </a:r>
+          </a:p>
+          <a:p>
+            <a:pPr>
+              <a:spcBef>
+                <a:spcPts val="500"/>
+              </a:spcBef>
+              <a:defRPr sz="1000">
+                <a:solidFill>
+                  <a:srgbClr val="475569"/>
+                </a:solidFill>
+              </a:defRPr>
+            </a:pPr>
+            <a:r>
+              <a:t>- Zero school bond tax hikes required</a:t>
             </a:r>
           </a:p>
         </p:txBody>
@@ -7916,11 +8044,11 @@
             <a:avLst/>
           </a:prstGeom>
           <a:solidFill>
-            <a:srgbClr val="131A2B"/>
+            <a:srgbClr val="FFFFFF"/>
           </a:solidFill>
           <a:ln w="12700">
             <a:solidFill>
-              <a:srgbClr val="10B981"/>
+              <a:srgbClr val="059669"/>
             </a:solidFill>
           </a:ln>
         </p:spPr>
@@ -7971,7 +8099,7 @@
             <a:pPr>
               <a:defRPr sz="900" b="1">
                 <a:solidFill>
-                  <a:srgbClr val="10B981"/>
+                  <a:srgbClr val="059669"/>
                 </a:solidFill>
               </a:defRPr>
             </a:pPr>
@@ -7984,9 +8112,9 @@
               <a:spcBef>
                 <a:spcPts val="200"/>
               </a:spcBef>
-              <a:defRPr sz="1050">
-                <a:solidFill>
-                  <a:srgbClr val="F8FAFC"/>
+              <a:defRPr sz="1050" b="1">
+                <a:solidFill>
+                  <a:srgbClr val="0F172A"/>
                 </a:solidFill>
               </a:defRPr>
             </a:pPr>
@@ -8029,7 +8157,7 @@
             <a:avLst/>
           </a:prstGeom>
           <a:solidFill>
-            <a:srgbClr val="0B0F19"/>
+            <a:srgbClr val="F8FAFC"/>
           </a:solidFill>
           <a:ln>
             <a:noFill/>
@@ -8072,10 +8200,12 @@
             <a:avLst/>
           </a:prstGeom>
           <a:solidFill>
-            <a:srgbClr val="0F172A"/>
+            <a:srgbClr val="F1F5F9"/>
           </a:solidFill>
-          <a:ln>
-            <a:noFill/>
+          <a:ln w="12700">
+            <a:solidFill>
+              <a:srgbClr val="E2E8F0"/>
+            </a:solidFill>
           </a:ln>
         </p:spPr>
         <p:style>
@@ -8177,7 +8307,7 @@
             <a:pPr>
               <a:defRPr sz="950">
                 <a:solidFill>
-                  <a:srgbClr val="A0AEC0"/>
+                  <a:srgbClr val="475569"/>
                 </a:solidFill>
               </a:defRPr>
             </a:pPr>
@@ -8212,7 +8342,7 @@
             <a:pPr algn="r">
               <a:defRPr sz="1000" b="1">
                 <a:solidFill>
-                  <a:srgbClr val="38BDF8"/>
+                  <a:srgbClr val="0284C7"/>
                 </a:solidFill>
               </a:defRPr>
             </a:pPr>
@@ -8237,7 +8367,7 @@
             <a:avLst/>
           </a:prstGeom>
           <a:solidFill>
-            <a:srgbClr val="38BDF8"/>
+            <a:srgbClr val="0284C7"/>
           </a:solidFill>
           <a:ln>
             <a:noFill/>
@@ -8290,7 +8420,7 @@
             <a:pPr>
               <a:defRPr sz="900" b="1">
                 <a:solidFill>
-                  <a:srgbClr val="38BDF8"/>
+                  <a:srgbClr val="0284C7"/>
                 </a:solidFill>
               </a:defRPr>
             </a:pPr>
@@ -8305,7 +8435,7 @@
               </a:spcBef>
               <a:defRPr sz="2200" b="1">
                 <a:solidFill>
-                  <a:srgbClr val="F8FAFC"/>
+                  <a:srgbClr val="0F172A"/>
                 </a:solidFill>
               </a:defRPr>
             </a:pPr>
@@ -8320,7 +8450,7 @@
               </a:spcBef>
               <a:defRPr sz="1100">
                 <a:solidFill>
-                  <a:srgbClr val="A0AEC0"/>
+                  <a:srgbClr val="475569"/>
                 </a:solidFill>
               </a:defRPr>
             </a:pPr>
@@ -8345,11 +8475,11 @@
             <a:avLst/>
           </a:prstGeom>
           <a:solidFill>
-            <a:srgbClr val="131A2B"/>
+            <a:srgbClr val="FFFFFF"/>
           </a:solidFill>
           <a:ln w="12700">
             <a:solidFill>
-              <a:srgbClr val="222E4A"/>
+              <a:srgbClr val="E2E8F0"/>
             </a:solidFill>
           </a:ln>
         </p:spPr>
@@ -8390,7 +8520,7 @@
             <a:avLst/>
           </a:prstGeom>
           <a:solidFill>
-            <a:srgbClr val="38BDF8"/>
+            <a:srgbClr val="0284C7"/>
           </a:solidFill>
           <a:ln>
             <a:noFill/>
@@ -8441,9 +8571,9 @@
           <a:lstStyle/>
           <a:p>
             <a:pPr>
-              <a:defRPr sz="2400" b="1">
-                <a:solidFill>
-                  <a:srgbClr val="38BDF8"/>
+              <a:defRPr sz="2200" b="1">
+                <a:solidFill>
+                  <a:srgbClr val="0284C7"/>
                 </a:solidFill>
               </a:defRPr>
             </a:pPr>
@@ -8458,7 +8588,7 @@
               </a:spcBef>
               <a:defRPr sz="1100" b="1">
                 <a:solidFill>
-                  <a:srgbClr val="F8FAFC"/>
+                  <a:srgbClr val="0F172A"/>
                 </a:solidFill>
               </a:defRPr>
             </a:pPr>
@@ -8469,11 +8599,11 @@
           <a:p>
             <a:pPr>
               <a:spcBef>
-                <a:spcPts val="600"/>
+                <a:spcPts val="500"/>
               </a:spcBef>
               <a:defRPr sz="1000">
                 <a:solidFill>
-                  <a:srgbClr val="A0AEC0"/>
+                  <a:srgbClr val="475569"/>
                 </a:solidFill>
               </a:defRPr>
             </a:pPr>
@@ -8484,11 +8614,11 @@
           <a:p>
             <a:pPr>
               <a:spcBef>
-                <a:spcPts val="600"/>
+                <a:spcPts val="500"/>
               </a:spcBef>
               <a:defRPr sz="1000">
                 <a:solidFill>
-                  <a:srgbClr val="A0AEC0"/>
+                  <a:srgbClr val="475569"/>
                 </a:solidFill>
               </a:defRPr>
             </a:pPr>
@@ -8499,16 +8629,31 @@
           <a:p>
             <a:pPr>
               <a:spcBef>
-                <a:spcPts val="600"/>
+                <a:spcPts val="500"/>
               </a:spcBef>
               <a:defRPr sz="1000">
                 <a:solidFill>
-                  <a:srgbClr val="A0AEC0"/>
+                  <a:srgbClr val="475569"/>
                 </a:solidFill>
               </a:defRPr>
             </a:pPr>
             <a:r>
               <a:t>- Covers High Schools, Middle Schools &amp; Elementary</a:t>
+            </a:r>
+          </a:p>
+          <a:p>
+            <a:pPr>
+              <a:spcBef>
+                <a:spcPts val="500"/>
+              </a:spcBef>
+              <a:defRPr sz="1000">
+                <a:solidFill>
+                  <a:srgbClr val="475569"/>
+                </a:solidFill>
+              </a:defRPr>
+            </a:pPr>
+            <a:r>
+              <a:t>- Zero manual site measuring required</a:t>
             </a:r>
           </a:p>
         </p:txBody>
@@ -8528,11 +8673,11 @@
             <a:avLst/>
           </a:prstGeom>
           <a:solidFill>
-            <a:srgbClr val="131A2B"/>
+            <a:srgbClr val="FFFFFF"/>
           </a:solidFill>
           <a:ln w="12700">
             <a:solidFill>
-              <a:srgbClr val="222E4A"/>
+              <a:srgbClr val="E2E8F0"/>
             </a:solidFill>
           </a:ln>
         </p:spPr>
@@ -8573,7 +8718,7 @@
             <a:avLst/>
           </a:prstGeom>
           <a:solidFill>
-            <a:srgbClr val="10B981"/>
+            <a:srgbClr val="059669"/>
           </a:solidFill>
           <a:ln>
             <a:noFill/>
@@ -8624,9 +8769,9 @@
           <a:lstStyle/>
           <a:p>
             <a:pPr>
-              <a:defRPr sz="2400" b="1">
-                <a:solidFill>
-                  <a:srgbClr val="10B981"/>
+              <a:defRPr sz="2200" b="1">
+                <a:solidFill>
+                  <a:srgbClr val="059669"/>
                 </a:solidFill>
               </a:defRPr>
             </a:pPr>
@@ -8641,7 +8786,7 @@
               </a:spcBef>
               <a:defRPr sz="1100" b="1">
                 <a:solidFill>
-                  <a:srgbClr val="F8FAFC"/>
+                  <a:srgbClr val="0F172A"/>
                 </a:solidFill>
               </a:defRPr>
             </a:pPr>
@@ -8652,11 +8797,11 @@
           <a:p>
             <a:pPr>
               <a:spcBef>
-                <a:spcPts val="600"/>
+                <a:spcPts val="500"/>
               </a:spcBef>
               <a:defRPr sz="1000">
                 <a:solidFill>
-                  <a:srgbClr val="A0AEC0"/>
+                  <a:srgbClr val="475569"/>
                 </a:solidFill>
               </a:defRPr>
             </a:pPr>
@@ -8667,11 +8812,11 @@
           <a:p>
             <a:pPr>
               <a:spcBef>
-                <a:spcPts val="600"/>
+                <a:spcPts val="500"/>
               </a:spcBef>
               <a:defRPr sz="1000">
                 <a:solidFill>
-                  <a:srgbClr val="A0AEC0"/>
+                  <a:srgbClr val="475569"/>
                 </a:solidFill>
               </a:defRPr>
             </a:pPr>
@@ -8682,16 +8827,31 @@
           <a:p>
             <a:pPr>
               <a:spcBef>
-                <a:spcPts val="600"/>
+                <a:spcPts val="500"/>
               </a:spcBef>
               <a:defRPr sz="1000">
                 <a:solidFill>
-                  <a:srgbClr val="A0AEC0"/>
+                  <a:srgbClr val="475569"/>
                 </a:solidFill>
               </a:defRPr>
             </a:pPr>
             <a:r>
               <a:t>- Applies real local commercial electricity rates</a:t>
+            </a:r>
+          </a:p>
+          <a:p>
+            <a:pPr>
+              <a:spcBef>
+                <a:spcPts val="500"/>
+              </a:spcBef>
+              <a:defRPr sz="1000">
+                <a:solidFill>
+                  <a:srgbClr val="475569"/>
+                </a:solidFill>
+              </a:defRPr>
+            </a:pPr>
+            <a:r>
+              <a:t>- Calculates the exact federal cash reimbursement</a:t>
             </a:r>
           </a:p>
         </p:txBody>
@@ -8711,11 +8871,11 @@
             <a:avLst/>
           </a:prstGeom>
           <a:solidFill>
-            <a:srgbClr val="131A2B"/>
+            <a:srgbClr val="FFFFFF"/>
           </a:solidFill>
           <a:ln w="12700">
             <a:solidFill>
-              <a:srgbClr val="222E4A"/>
+              <a:srgbClr val="E2E8F0"/>
             </a:solidFill>
           </a:ln>
         </p:spPr>
@@ -8807,7 +8967,7 @@
           <a:lstStyle/>
           <a:p>
             <a:pPr>
-              <a:defRPr sz="2400" b="1">
+              <a:defRPr sz="2200" b="1">
                 <a:solidFill>
                   <a:srgbClr val="8C1515"/>
                 </a:solidFill>
@@ -8824,7 +8984,7 @@
               </a:spcBef>
               <a:defRPr sz="1100" b="1">
                 <a:solidFill>
-                  <a:srgbClr val="F8FAFC"/>
+                  <a:srgbClr val="0F172A"/>
                 </a:solidFill>
               </a:defRPr>
             </a:pPr>
@@ -8835,11 +8995,11 @@
           <a:p>
             <a:pPr>
               <a:spcBef>
-                <a:spcPts val="600"/>
+                <a:spcPts val="500"/>
               </a:spcBef>
               <a:defRPr sz="1000">
                 <a:solidFill>
-                  <a:srgbClr val="A0AEC0"/>
+                  <a:srgbClr val="475569"/>
                 </a:solidFill>
               </a:defRPr>
             </a:pPr>
@@ -8850,31 +9010,46 @@
           <a:p>
             <a:pPr>
               <a:spcBef>
-                <a:spcPts val="600"/>
+                <a:spcPts val="500"/>
               </a:spcBef>
               <a:defRPr sz="1000">
                 <a:solidFill>
-                  <a:srgbClr val="A0AEC0"/>
-                </a:solidFill>
-              </a:defRPr>
-            </a:pPr>
-            <a:r>
-              <a:t>- Calculates the exact federal cash grant</a:t>
-            </a:r>
-          </a:p>
-          <a:p>
-            <a:pPr>
-              <a:spcBef>
-                <a:spcPts val="600"/>
+                  <a:srgbClr val="475569"/>
+                </a:solidFill>
+              </a:defRPr>
+            </a:pPr>
+            <a:r>
+              <a:t>- Shows 25-year savings and simple payback</a:t>
+            </a:r>
+          </a:p>
+          <a:p>
+            <a:pPr>
+              <a:spcBef>
+                <a:spcPts val="500"/>
               </a:spcBef>
               <a:defRPr sz="1000">
                 <a:solidFill>
-                  <a:srgbClr val="A0AEC0"/>
+                  <a:srgbClr val="475569"/>
                 </a:solidFill>
               </a:defRPr>
             </a:pPr>
             <a:r>
               <a:t>- Includes a draft resolution ready for board votes</a:t>
+            </a:r>
+          </a:p>
+          <a:p>
+            <a:pPr>
+              <a:spcBef>
+                <a:spcPts val="500"/>
+              </a:spcBef>
+              <a:defRPr sz="1000">
+                <a:solidFill>
+                  <a:srgbClr val="475569"/>
+                </a:solidFill>
+              </a:defRPr>
+            </a:pPr>
+            <a:r>
+              <a:t>- Walk into your next school board meeting prepared</a:t>
             </a:r>
           </a:p>
         </p:txBody>
@@ -8894,11 +9069,11 @@
             <a:avLst/>
           </a:prstGeom>
           <a:solidFill>
-            <a:srgbClr val="131A2B"/>
+            <a:srgbClr val="FFFFFF"/>
           </a:solidFill>
           <a:ln w="12700">
             <a:solidFill>
-              <a:srgbClr val="38BDF8"/>
+              <a:srgbClr val="0284C7"/>
             </a:solidFill>
           </a:ln>
         </p:spPr>
@@ -8949,7 +9124,7 @@
             <a:pPr>
               <a:defRPr sz="900" b="1">
                 <a:solidFill>
-                  <a:srgbClr val="38BDF8"/>
+                  <a:srgbClr val="0284C7"/>
                 </a:solidFill>
               </a:defRPr>
             </a:pPr>
@@ -8964,7 +9139,7 @@
               </a:spcBef>
               <a:defRPr sz="1050" b="1">
                 <a:solidFill>
-                  <a:srgbClr val="F8FAFC"/>
+                  <a:srgbClr val="0F172A"/>
                 </a:solidFill>
               </a:defRPr>
             </a:pPr>
@@ -9007,7 +9182,7 @@
             <a:avLst/>
           </a:prstGeom>
           <a:solidFill>
-            <a:srgbClr val="0B0F19"/>
+            <a:srgbClr val="F8FAFC"/>
           </a:solidFill>
           <a:ln>
             <a:noFill/>
@@ -9050,10 +9225,12 @@
             <a:avLst/>
           </a:prstGeom>
           <a:solidFill>
-            <a:srgbClr val="0F172A"/>
+            <a:srgbClr val="F1F5F9"/>
           </a:solidFill>
-          <a:ln>
-            <a:noFill/>
+          <a:ln w="12700">
+            <a:solidFill>
+              <a:srgbClr val="E2E8F0"/>
+            </a:solidFill>
           </a:ln>
         </p:spPr>
         <p:style>
@@ -9155,7 +9332,7 @@
             <a:pPr>
               <a:defRPr sz="950">
                 <a:solidFill>
-                  <a:srgbClr val="A0AEC0"/>
+                  <a:srgbClr val="475569"/>
                 </a:solidFill>
               </a:defRPr>
             </a:pPr>
@@ -9190,7 +9367,7 @@
             <a:pPr algn="r">
               <a:defRPr sz="1000" b="1">
                 <a:solidFill>
-                  <a:srgbClr val="38BDF8"/>
+                  <a:srgbClr val="0284C7"/>
                 </a:solidFill>
               </a:defRPr>
             </a:pPr>
@@ -9215,7 +9392,7 @@
             <a:avLst/>
           </a:prstGeom>
           <a:solidFill>
-            <a:srgbClr val="38BDF8"/>
+            <a:srgbClr val="0284C7"/>
           </a:solidFill>
           <a:ln>
             <a:noFill/>
@@ -9268,7 +9445,7 @@
             <a:pPr>
               <a:defRPr sz="900" b="1">
                 <a:solidFill>
-                  <a:srgbClr val="38BDF8"/>
+                  <a:srgbClr val="0284C7"/>
                 </a:solidFill>
               </a:defRPr>
             </a:pPr>
@@ -9283,7 +9460,7 @@
               </a:spcBef>
               <a:defRPr sz="2200" b="1">
                 <a:solidFill>
-                  <a:srgbClr val="F8FAFC"/>
+                  <a:srgbClr val="0F172A"/>
                 </a:solidFill>
               </a:defRPr>
             </a:pPr>
@@ -9298,7 +9475,7 @@
               </a:spcBef>
               <a:defRPr sz="1100">
                 <a:solidFill>
-                  <a:srgbClr val="A0AEC0"/>
+                  <a:srgbClr val="475569"/>
                 </a:solidFill>
               </a:defRPr>
             </a:pPr>
@@ -9323,11 +9500,11 @@
             <a:avLst/>
           </a:prstGeom>
           <a:solidFill>
-            <a:srgbClr val="131A2B"/>
+            <a:srgbClr val="FFFFFF"/>
           </a:solidFill>
           <a:ln w="12700">
             <a:solidFill>
-              <a:srgbClr val="222E4A"/>
+              <a:srgbClr val="E2E8F0"/>
             </a:solidFill>
           </a:ln>
         </p:spPr>
@@ -9368,7 +9545,7 @@
             <a:avLst/>
           </a:prstGeom>
           <a:solidFill>
-            <a:srgbClr val="38BDF8"/>
+            <a:srgbClr val="0284C7"/>
           </a:solidFill>
           <a:ln>
             <a:noFill/>
@@ -9421,7 +9598,7 @@
             <a:pPr>
               <a:defRPr sz="3200" b="1">
                 <a:solidFill>
-                  <a:srgbClr val="38BDF8"/>
+                  <a:srgbClr val="0284C7"/>
                 </a:solidFill>
               </a:defRPr>
             </a:pPr>
@@ -9436,7 +9613,7 @@
               </a:spcBef>
               <a:defRPr sz="900" b="1">
                 <a:solidFill>
-                  <a:srgbClr val="F8FAFC"/>
+                  <a:srgbClr val="0F172A"/>
                 </a:solidFill>
               </a:defRPr>
             </a:pPr>
@@ -9447,11 +9624,11 @@
           <a:p>
             <a:pPr>
               <a:spcBef>
-                <a:spcPts val="600"/>
+                <a:spcPts val="500"/>
               </a:spcBef>
               <a:defRPr sz="1000">
                 <a:solidFill>
-                  <a:srgbClr val="A0AEC0"/>
+                  <a:srgbClr val="475569"/>
                 </a:solidFill>
               </a:defRPr>
             </a:pPr>
@@ -9462,11 +9639,11 @@
           <a:p>
             <a:pPr>
               <a:spcBef>
-                <a:spcPts val="600"/>
+                <a:spcPts val="500"/>
               </a:spcBef>
               <a:defRPr sz="1000">
                 <a:solidFill>
-                  <a:srgbClr val="A0AEC0"/>
+                  <a:srgbClr val="475569"/>
                 </a:solidFill>
               </a:defRPr>
             </a:pPr>
@@ -9477,16 +9654,31 @@
           <a:p>
             <a:pPr>
               <a:spcBef>
-                <a:spcPts val="600"/>
+                <a:spcPts val="500"/>
               </a:spcBef>
               <a:defRPr sz="1000">
                 <a:solidFill>
-                  <a:srgbClr val="A0AEC0"/>
+                  <a:srgbClr val="475569"/>
                 </a:solidFill>
               </a:defRPr>
             </a:pPr>
             <a:r>
               <a:t>- Preserves ADA accessible pathways and fire lanes</a:t>
+            </a:r>
+          </a:p>
+          <a:p>
+            <a:pPr>
+              <a:spcBef>
+                <a:spcPts val="500"/>
+              </a:spcBef>
+              <a:defRPr sz="1000">
+                <a:solidFill>
+                  <a:srgbClr val="475569"/>
+                </a:solidFill>
+              </a:defRPr>
+            </a:pPr>
+            <a:r>
+              <a:t>- Ensures parking remains convenient and functional</a:t>
             </a:r>
           </a:p>
         </p:txBody>
@@ -9506,11 +9698,11 @@
             <a:avLst/>
           </a:prstGeom>
           <a:solidFill>
-            <a:srgbClr val="131A2B"/>
+            <a:srgbClr val="FFFFFF"/>
           </a:solidFill>
           <a:ln w="12700">
             <a:solidFill>
-              <a:srgbClr val="222E4A"/>
+              <a:srgbClr val="E2E8F0"/>
             </a:solidFill>
           </a:ln>
         </p:spPr>
@@ -9551,7 +9743,7 @@
             <a:avLst/>
           </a:prstGeom>
           <a:solidFill>
-            <a:srgbClr val="38BDF8"/>
+            <a:srgbClr val="0284C7"/>
           </a:solidFill>
           <a:ln>
             <a:noFill/>
@@ -9604,7 +9796,7 @@
             <a:pPr>
               <a:defRPr sz="3200" b="1">
                 <a:solidFill>
-                  <a:srgbClr val="38BDF8"/>
+                  <a:srgbClr val="0284C7"/>
                 </a:solidFill>
               </a:defRPr>
             </a:pPr>
@@ -9619,7 +9811,7 @@
               </a:spcBef>
               <a:defRPr sz="900" b="1">
                 <a:solidFill>
-                  <a:srgbClr val="F8FAFC"/>
+                  <a:srgbClr val="0F172A"/>
                 </a:solidFill>
               </a:defRPr>
             </a:pPr>
@@ -9630,11 +9822,11 @@
           <a:p>
             <a:pPr>
               <a:spcBef>
-                <a:spcPts val="600"/>
+                <a:spcPts val="500"/>
               </a:spcBef>
               <a:defRPr sz="1000">
                 <a:solidFill>
-                  <a:srgbClr val="A0AEC0"/>
+                  <a:srgbClr val="475569"/>
                 </a:solidFill>
               </a:defRPr>
             </a:pPr>
@@ -9645,11 +9837,11 @@
           <a:p>
             <a:pPr>
               <a:spcBef>
-                <a:spcPts val="600"/>
+                <a:spcPts val="500"/>
               </a:spcBef>
               <a:defRPr sz="1000">
                 <a:solidFill>
-                  <a:srgbClr val="A0AEC0"/>
+                  <a:srgbClr val="475569"/>
                 </a:solidFill>
               </a:defRPr>
             </a:pPr>
@@ -9660,16 +9852,31 @@
           <a:p>
             <a:pPr>
               <a:spcBef>
-                <a:spcPts val="600"/>
+                <a:spcPts val="500"/>
               </a:spcBef>
               <a:defRPr sz="1000">
                 <a:solidFill>
-                  <a:srgbClr val="A0AEC0"/>
+                  <a:srgbClr val="475569"/>
                 </a:solidFill>
               </a:defRPr>
             </a:pPr>
             <a:r>
               <a:t>- Calibrated against active school arrays in Cupertino</a:t>
+            </a:r>
+          </a:p>
+          <a:p>
+            <a:pPr>
+              <a:spcBef>
+                <a:spcPts val="500"/>
+              </a:spcBef>
+              <a:defRPr sz="1000">
+                <a:solidFill>
+                  <a:srgbClr val="475569"/>
+                </a:solidFill>
+              </a:defRPr>
+            </a:pPr>
+            <a:r>
+              <a:t>- Uses industry-standard tier-1 monocrystalline panels</a:t>
             </a:r>
           </a:p>
         </p:txBody>
@@ -9689,11 +9896,11 @@
             <a:avLst/>
           </a:prstGeom>
           <a:solidFill>
-            <a:srgbClr val="131A2B"/>
+            <a:srgbClr val="FFFFFF"/>
           </a:solidFill>
           <a:ln w="12700">
             <a:solidFill>
-              <a:srgbClr val="222E4A"/>
+              <a:srgbClr val="E2E8F0"/>
             </a:solidFill>
           </a:ln>
         </p:spPr>
@@ -9734,7 +9941,7 @@
             <a:avLst/>
           </a:prstGeom>
           <a:solidFill>
-            <a:srgbClr val="10B981"/>
+            <a:srgbClr val="059669"/>
           </a:solidFill>
           <a:ln>
             <a:noFill/>
@@ -9787,7 +9994,7 @@
             <a:pPr>
               <a:defRPr sz="3200" b="1">
                 <a:solidFill>
-                  <a:srgbClr val="10B981"/>
+                  <a:srgbClr val="059669"/>
                 </a:solidFill>
               </a:defRPr>
             </a:pPr>
@@ -9802,7 +10009,7 @@
               </a:spcBef>
               <a:defRPr sz="900" b="1">
                 <a:solidFill>
-                  <a:srgbClr val="F8FAFC"/>
+                  <a:srgbClr val="0F172A"/>
                 </a:solidFill>
               </a:defRPr>
             </a:pPr>
@@ -9813,11 +10020,11 @@
           <a:p>
             <a:pPr>
               <a:spcBef>
-                <a:spcPts val="600"/>
+                <a:spcPts val="500"/>
               </a:spcBef>
               <a:defRPr sz="1000">
                 <a:solidFill>
-                  <a:srgbClr val="A0AEC0"/>
+                  <a:srgbClr val="475569"/>
                 </a:solidFill>
               </a:defRPr>
             </a:pPr>
@@ -9828,11 +10035,11 @@
           <a:p>
             <a:pPr>
               <a:spcBef>
-                <a:spcPts val="600"/>
+                <a:spcPts val="500"/>
               </a:spcBef>
               <a:defRPr sz="1000">
                 <a:solidFill>
-                  <a:srgbClr val="A0AEC0"/>
+                  <a:srgbClr val="475569"/>
                 </a:solidFill>
               </a:defRPr>
             </a:pPr>
@@ -9843,16 +10050,31 @@
           <a:p>
             <a:pPr>
               <a:spcBef>
-                <a:spcPts val="600"/>
+                <a:spcPts val="500"/>
               </a:spcBef>
               <a:defRPr sz="1000">
                 <a:solidFill>
-                  <a:srgbClr val="A0AEC0"/>
+                  <a:srgbClr val="475569"/>
                 </a:solidFill>
               </a:defRPr>
             </a:pPr>
             <a:r>
               <a:t>- Includes instant smart backup so it never crashes</a:t>
+            </a:r>
+          </a:p>
+          <a:p>
+            <a:pPr>
+              <a:spcBef>
+                <a:spcPts val="500"/>
+              </a:spcBef>
+              <a:defRPr sz="1000">
+                <a:solidFill>
+                  <a:srgbClr val="475569"/>
+                </a:solidFill>
+              </a:defRPr>
+            </a:pPr>
+            <a:r>
+              <a:t>- Matches professional engineering precision</a:t>
             </a:r>
           </a:p>
         </p:txBody>
@@ -9872,11 +10094,11 @@
             <a:avLst/>
           </a:prstGeom>
           <a:solidFill>
-            <a:srgbClr val="131A2B"/>
+            <a:srgbClr val="FFFFFF"/>
           </a:solidFill>
           <a:ln w="12700">
             <a:solidFill>
-              <a:srgbClr val="38BDF8"/>
+              <a:srgbClr val="0284C7"/>
             </a:solidFill>
           </a:ln>
         </p:spPr>
@@ -9927,7 +10149,7 @@
             <a:pPr>
               <a:defRPr sz="900" b="1">
                 <a:solidFill>
-                  <a:srgbClr val="38BDF8"/>
+                  <a:srgbClr val="0284C7"/>
                 </a:solidFill>
               </a:defRPr>
             </a:pPr>
@@ -9942,7 +10164,7 @@
               </a:spcBef>
               <a:defRPr sz="1050" b="1">
                 <a:solidFill>
-                  <a:srgbClr val="F8FAFC"/>
+                  <a:srgbClr val="0F172A"/>
                 </a:solidFill>
               </a:defRPr>
             </a:pPr>
@@ -9985,7 +10207,7 @@
             <a:avLst/>
           </a:prstGeom>
           <a:solidFill>
-            <a:srgbClr val="0B0F19"/>
+            <a:srgbClr val="F8FAFC"/>
           </a:solidFill>
           <a:ln>
             <a:noFill/>
@@ -10028,10 +10250,12 @@
             <a:avLst/>
           </a:prstGeom>
           <a:solidFill>
-            <a:srgbClr val="0F172A"/>
+            <a:srgbClr val="F1F5F9"/>
           </a:solidFill>
-          <a:ln>
-            <a:noFill/>
+          <a:ln w="12700">
+            <a:solidFill>
+              <a:srgbClr val="E2E8F0"/>
+            </a:solidFill>
           </a:ln>
         </p:spPr>
         <p:style>
@@ -10133,7 +10357,7 @@
             <a:pPr>
               <a:defRPr sz="950">
                 <a:solidFill>
-                  <a:srgbClr val="A0AEC0"/>
+                  <a:srgbClr val="475569"/>
                 </a:solidFill>
               </a:defRPr>
             </a:pPr>
@@ -10168,7 +10392,7 @@
             <a:pPr algn="r">
               <a:defRPr sz="1000" b="1">
                 <a:solidFill>
-                  <a:srgbClr val="38BDF8"/>
+                  <a:srgbClr val="0284C7"/>
                 </a:solidFill>
               </a:defRPr>
             </a:pPr>
@@ -10193,7 +10417,7 @@
             <a:avLst/>
           </a:prstGeom>
           <a:solidFill>
-            <a:srgbClr val="38BDF8"/>
+            <a:srgbClr val="0284C7"/>
           </a:solidFill>
           <a:ln>
             <a:noFill/>
@@ -10246,7 +10470,7 @@
             <a:pPr>
               <a:defRPr sz="900" b="1">
                 <a:solidFill>
-                  <a:srgbClr val="38BDF8"/>
+                  <a:srgbClr val="0284C7"/>
                 </a:solidFill>
               </a:defRPr>
             </a:pPr>
@@ -10261,7 +10485,7 @@
               </a:spcBef>
               <a:defRPr sz="2200" b="1">
                 <a:solidFill>
-                  <a:srgbClr val="F8FAFC"/>
+                  <a:srgbClr val="0F172A"/>
                 </a:solidFill>
               </a:defRPr>
             </a:pPr>
@@ -10276,7 +10500,7 @@
               </a:spcBef>
               <a:defRPr sz="1100">
                 <a:solidFill>
-                  <a:srgbClr val="A0AEC0"/>
+                  <a:srgbClr val="475569"/>
                 </a:solidFill>
               </a:defRPr>
             </a:pPr>
@@ -10301,11 +10525,11 @@
             <a:avLst/>
           </a:prstGeom>
           <a:solidFill>
-            <a:srgbClr val="131A2B"/>
+            <a:srgbClr val="FFFFFF"/>
           </a:solidFill>
           <a:ln w="12700">
             <a:solidFill>
-              <a:srgbClr val="222E4A"/>
+              <a:srgbClr val="E2E8F0"/>
             </a:solidFill>
           </a:ln>
         </p:spPr>
@@ -10346,7 +10570,7 @@
             <a:avLst/>
           </a:prstGeom>
           <a:solidFill>
-            <a:srgbClr val="10B981"/>
+            <a:srgbClr val="059669"/>
           </a:solidFill>
           <a:ln>
             <a:noFill/>
@@ -10399,7 +10623,7 @@
             <a:pPr>
               <a:defRPr sz="1100" b="1">
                 <a:solidFill>
-                  <a:srgbClr val="10B981"/>
+                  <a:srgbClr val="059669"/>
                 </a:solidFill>
               </a:defRPr>
             </a:pPr>
@@ -10414,7 +10638,7 @@
               </a:spcBef>
               <a:defRPr sz="900" b="1">
                 <a:solidFill>
-                  <a:srgbClr val="718096"/>
+                  <a:srgbClr val="94A3B8"/>
                 </a:solidFill>
               </a:defRPr>
             </a:pPr>
@@ -10429,12 +10653,12 @@
               </a:spcBef>
               <a:defRPr sz="3600" b="1">
                 <a:solidFill>
-                  <a:srgbClr val="10B981"/>
-                </a:solidFill>
-              </a:defRPr>
-            </a:pPr>
-            <a:r>
-              <a:t>$145,000 / yr</a:t>
+                  <a:srgbClr val="059669"/>
+                </a:solidFill>
+              </a:defRPr>
+            </a:pPr>
+            <a:r>
+              <a:t>+$145,000 / yr</a:t>
             </a:r>
           </a:p>
           <a:p>
@@ -10444,12 +10668,12 @@
               </a:spcBef>
               <a:defRPr sz="1000" b="0">
                 <a:solidFill>
-                  <a:srgbClr val="A0AEC0"/>
-                </a:solidFill>
-              </a:defRPr>
-            </a:pPr>
-            <a:r>
-              <a:t>- Completed 550 kW solar carports across student lot</a:t>
+                  <a:srgbClr val="475569"/>
+                </a:solidFill>
+              </a:defRPr>
+            </a:pPr>
+            <a:r>
+              <a:t>- Completed 550 kW solar carports across student parking</a:t>
             </a:r>
           </a:p>
           <a:p>
@@ -10459,7 +10683,7 @@
               </a:spcBef>
               <a:defRPr sz="1000" b="0">
                 <a:solidFill>
-                  <a:srgbClr val="A0AEC0"/>
+                  <a:srgbClr val="475569"/>
                 </a:solidFill>
               </a:defRPr>
             </a:pPr>
@@ -10474,12 +10698,12 @@
               </a:spcBef>
               <a:defRPr sz="1000" b="0">
                 <a:solidFill>
-                  <a:srgbClr val="A0AEC0"/>
-                </a:solidFill>
-              </a:defRPr>
-            </a:pPr>
-            <a:r>
-              <a:t>- Our model predicted $145K savings; actual FUHSD bill records show $139K!</a:t>
+                  <a:srgbClr val="475569"/>
+                </a:solidFill>
+              </a:defRPr>
+            </a:pPr>
+            <a:r>
+              <a:t>- Our model predicted $145K savings; actual published bills show $139K!</a:t>
             </a:r>
           </a:p>
           <a:p>
@@ -10489,12 +10713,27 @@
               </a:spcBef>
               <a:defRPr sz="1000" b="1">
                 <a:solidFill>
-                  <a:srgbClr val="F8FAFC"/>
+                  <a:srgbClr val="0F172A"/>
                 </a:solidFill>
               </a:defRPr>
             </a:pPr>
             <a:r>
               <a:t>- Empirical accuracy within 4.17% of actual utility bills</a:t>
+            </a:r>
+          </a:p>
+          <a:p>
+            <a:pPr>
+              <a:spcBef>
+                <a:spcPts val="1000"/>
+              </a:spcBef>
+              <a:defRPr sz="950" b="1">
+                <a:solidFill>
+                  <a:srgbClr val="059669"/>
+                </a:solidFill>
+              </a:defRPr>
+            </a:pPr>
+            <a:r>
+              <a:t>VALIDATION PROOF: The software matches real-world utility bills.</a:t>
             </a:r>
           </a:p>
         </p:txBody>
@@ -10514,11 +10753,11 @@
             <a:avLst/>
           </a:prstGeom>
           <a:solidFill>
-            <a:srgbClr val="131A2B"/>
+            <a:srgbClr val="FFFFFF"/>
           </a:solidFill>
           <a:ln w="12700">
             <a:solidFill>
-              <a:srgbClr val="222E4A"/>
+              <a:srgbClr val="E2E8F0"/>
             </a:solidFill>
           </a:ln>
         </p:spPr>
@@ -10559,7 +10798,7 @@
             <a:avLst/>
           </a:prstGeom>
           <a:solidFill>
-            <a:srgbClr val="EF4444"/>
+            <a:srgbClr val="DC2626"/>
           </a:solidFill>
           <a:ln>
             <a:noFill/>
@@ -10612,7 +10851,7 @@
             <a:pPr>
               <a:defRPr sz="1100" b="1">
                 <a:solidFill>
-                  <a:srgbClr val="EF4444"/>
+                  <a:srgbClr val="DC2626"/>
                 </a:solidFill>
               </a:defRPr>
             </a:pPr>
@@ -10627,7 +10866,7 @@
               </a:spcBef>
               <a:defRPr sz="900" b="1">
                 <a:solidFill>
-                  <a:srgbClr val="718096"/>
+                  <a:srgbClr val="94A3B8"/>
                 </a:solidFill>
               </a:defRPr>
             </a:pPr>
@@ -10642,7 +10881,7 @@
               </a:spcBef>
               <a:defRPr sz="3600" b="1">
                 <a:solidFill>
-                  <a:srgbClr val="EF4444"/>
+                  <a:srgbClr val="DC2626"/>
                 </a:solidFill>
               </a:defRPr>
             </a:pPr>
@@ -10657,7 +10896,7 @@
               </a:spcBef>
               <a:defRPr sz="1000" b="0">
                 <a:solidFill>
-                  <a:srgbClr val="A0AEC0"/>
+                  <a:srgbClr val="475569"/>
                 </a:solidFill>
               </a:defRPr>
             </a:pPr>
@@ -10672,7 +10911,7 @@
               </a:spcBef>
               <a:defRPr sz="1000" b="0">
                 <a:solidFill>
-                  <a:srgbClr val="A0AEC0"/>
+                  <a:srgbClr val="475569"/>
                 </a:solidFill>
               </a:defRPr>
             </a:pPr>
@@ -10687,7 +10926,7 @@
               </a:spcBef>
               <a:defRPr sz="1000" b="0">
                 <a:solidFill>
-                  <a:srgbClr val="A0AEC0"/>
+                  <a:srgbClr val="475569"/>
                 </a:solidFill>
               </a:defRPr>
             </a:pPr>
@@ -10702,7 +10941,7 @@
               </a:spcBef>
               <a:defRPr sz="1000" b="1">
                 <a:solidFill>
-                  <a:srgbClr val="F8FAFC"/>
+                  <a:srgbClr val="0F172A"/>
                 </a:solidFill>
               </a:defRPr>
             </a:pPr>
@@ -10717,7 +10956,7 @@
               </a:spcBef>
               <a:defRPr sz="1050" b="1">
                 <a:solidFill>
-                  <a:srgbClr val="F59E0B"/>
+                  <a:srgbClr val="D97706"/>
                 </a:solidFill>
               </a:defRPr>
             </a:pPr>
@@ -10760,7 +10999,7 @@
             <a:avLst/>
           </a:prstGeom>
           <a:solidFill>
-            <a:srgbClr val="0B0F19"/>
+            <a:srgbClr val="F8FAFC"/>
           </a:solidFill>
           <a:ln>
             <a:noFill/>
@@ -10803,10 +11042,12 @@
             <a:avLst/>
           </a:prstGeom>
           <a:solidFill>
-            <a:srgbClr val="0F172A"/>
+            <a:srgbClr val="F1F5F9"/>
           </a:solidFill>
-          <a:ln>
-            <a:noFill/>
+          <a:ln w="12700">
+            <a:solidFill>
+              <a:srgbClr val="E2E8F0"/>
+            </a:solidFill>
           </a:ln>
         </p:spPr>
         <p:style>
@@ -10908,7 +11149,7 @@
             <a:pPr>
               <a:defRPr sz="950">
                 <a:solidFill>
-                  <a:srgbClr val="A0AEC0"/>
+                  <a:srgbClr val="475569"/>
                 </a:solidFill>
               </a:defRPr>
             </a:pPr>
@@ -10943,7 +11184,7 @@
             <a:pPr algn="r">
               <a:defRPr sz="1000" b="1">
                 <a:solidFill>
-                  <a:srgbClr val="38BDF8"/>
+                  <a:srgbClr val="0284C7"/>
                 </a:solidFill>
               </a:defRPr>
             </a:pPr>
@@ -10968,7 +11209,7 @@
             <a:avLst/>
           </a:prstGeom>
           <a:solidFill>
-            <a:srgbClr val="38BDF8"/>
+            <a:srgbClr val="0284C7"/>
           </a:solidFill>
           <a:ln>
             <a:noFill/>
@@ -11021,7 +11262,7 @@
             <a:pPr>
               <a:defRPr sz="900" b="1">
                 <a:solidFill>
-                  <a:srgbClr val="38BDF8"/>
+                  <a:srgbClr val="0284C7"/>
                 </a:solidFill>
               </a:defRPr>
             </a:pPr>
@@ -11036,7 +11277,7 @@
               </a:spcBef>
               <a:defRPr sz="2200" b="1">
                 <a:solidFill>
-                  <a:srgbClr val="F8FAFC"/>
+                  <a:srgbClr val="0F172A"/>
                 </a:solidFill>
               </a:defRPr>
             </a:pPr>
@@ -11051,7 +11292,7 @@
               </a:spcBef>
               <a:defRPr sz="1100">
                 <a:solidFill>
-                  <a:srgbClr val="A0AEC0"/>
+                  <a:srgbClr val="475569"/>
                 </a:solidFill>
               </a:defRPr>
             </a:pPr>
@@ -11076,11 +11317,11 @@
             <a:avLst/>
           </a:prstGeom>
           <a:solidFill>
-            <a:srgbClr val="131A2B"/>
+            <a:srgbClr val="FFFFFF"/>
           </a:solidFill>
           <a:ln w="12700">
             <a:solidFill>
-              <a:srgbClr val="222E4A"/>
+              <a:srgbClr val="E2E8F0"/>
             </a:solidFill>
           </a:ln>
         </p:spPr>
@@ -11121,7 +11362,7 @@
             <a:avLst/>
           </a:prstGeom>
           <a:solidFill>
-            <a:srgbClr val="10B981"/>
+            <a:srgbClr val="059669"/>
           </a:solidFill>
           <a:ln>
             <a:noFill/>
@@ -11172,9 +11413,9 @@
           <a:lstStyle/>
           <a:p>
             <a:pPr>
-              <a:defRPr sz="3000" b="1">
-                <a:solidFill>
-                  <a:srgbClr val="10B981"/>
+              <a:defRPr sz="2800" b="1">
+                <a:solidFill>
+                  <a:srgbClr val="059669"/>
                 </a:solidFill>
               </a:defRPr>
             </a:pPr>
@@ -11189,7 +11430,7 @@
               </a:spcBef>
               <a:defRPr sz="850" b="1">
                 <a:solidFill>
-                  <a:srgbClr val="F8FAFC"/>
+                  <a:srgbClr val="0F172A"/>
                 </a:solidFill>
               </a:defRPr>
             </a:pPr>
@@ -11200,11 +11441,11 @@
           <a:p>
             <a:pPr>
               <a:spcBef>
-                <a:spcPts val="600"/>
+                <a:spcPts val="500"/>
               </a:spcBef>
               <a:defRPr sz="950">
                 <a:solidFill>
-                  <a:srgbClr val="A0AEC0"/>
+                  <a:srgbClr val="475569"/>
                 </a:solidFill>
               </a:defRPr>
             </a:pPr>
@@ -11215,31 +11456,46 @@
           <a:p>
             <a:pPr>
               <a:spcBef>
-                <a:spcPts val="600"/>
+                <a:spcPts val="500"/>
               </a:spcBef>
               <a:defRPr sz="950">
                 <a:solidFill>
-                  <a:srgbClr val="A0AEC0"/>
-                </a:solidFill>
-              </a:defRPr>
-            </a:pPr>
-            <a:r>
-              <a:t>- Drops from 6+ years thanks to Direct Pay</a:t>
-            </a:r>
-          </a:p>
-          <a:p>
-            <a:pPr>
-              <a:spcBef>
-                <a:spcPts val="600"/>
+                  <a:srgbClr val="475569"/>
+                </a:solidFill>
+              </a:defRPr>
+            </a:pPr>
+            <a:r>
+              <a:t>- Drops from 6+ years with Direct Pay</a:t>
+            </a:r>
+          </a:p>
+          <a:p>
+            <a:pPr>
+              <a:spcBef>
+                <a:spcPts val="500"/>
               </a:spcBef>
               <a:defRPr sz="950">
                 <a:solidFill>
-                  <a:srgbClr val="A0AEC0"/>
-                </a:solidFill>
-              </a:defRPr>
-            </a:pPr>
-            <a:r>
-              <a:t>- Faster than almost any school bond project</a:t>
+                  <a:srgbClr val="475569"/>
+                </a:solidFill>
+              </a:defRPr>
+            </a:pPr>
+            <a:r>
+              <a:t>- Faster than school bond projects</a:t>
+            </a:r>
+          </a:p>
+          <a:p>
+            <a:pPr>
+              <a:spcBef>
+                <a:spcPts val="500"/>
+              </a:spcBef>
+              <a:defRPr sz="950">
+                <a:solidFill>
+                  <a:srgbClr val="475569"/>
+                </a:solidFill>
+              </a:defRPr>
+            </a:pPr>
+            <a:r>
+              <a:t>- Delivers net positive cashflow</a:t>
             </a:r>
           </a:p>
         </p:txBody>
@@ -11259,11 +11515,11 @@
             <a:avLst/>
           </a:prstGeom>
           <a:solidFill>
-            <a:srgbClr val="131A2B"/>
+            <a:srgbClr val="FFFFFF"/>
           </a:solidFill>
           <a:ln w="12700">
             <a:solidFill>
-              <a:srgbClr val="222E4A"/>
+              <a:srgbClr val="E2E8F0"/>
             </a:solidFill>
           </a:ln>
         </p:spPr>
@@ -11304,7 +11560,7 @@
             <a:avLst/>
           </a:prstGeom>
           <a:solidFill>
-            <a:srgbClr val="38BDF8"/>
+            <a:srgbClr val="0284C7"/>
           </a:solidFill>
           <a:ln>
             <a:noFill/>
@@ -11355,9 +11611,9 @@
           <a:lstStyle/>
           <a:p>
             <a:pPr>
-              <a:defRPr sz="3000" b="1">
-                <a:solidFill>
-                  <a:srgbClr val="38BDF8"/>
+              <a:defRPr sz="2800" b="1">
+                <a:solidFill>
+                  <a:srgbClr val="0284C7"/>
                 </a:solidFill>
               </a:defRPr>
             </a:pPr>
@@ -11372,7 +11628,7 @@
               </a:spcBef>
               <a:defRPr sz="850" b="1">
                 <a:solidFill>
-                  <a:srgbClr val="F8FAFC"/>
+                  <a:srgbClr val="0F172A"/>
                 </a:solidFill>
               </a:defRPr>
             </a:pPr>
@@ -11383,46 +11639,61 @@
           <a:p>
             <a:pPr>
               <a:spcBef>
-                <a:spcPts val="600"/>
+                <a:spcPts val="500"/>
               </a:spcBef>
               <a:defRPr sz="950">
                 <a:solidFill>
-                  <a:srgbClr val="A0AEC0"/>
-                </a:solidFill>
-              </a:defRPr>
-            </a:pPr>
-            <a:r>
-              <a:t>- Direct cash reimbursement from IRS</a:t>
-            </a:r>
-          </a:p>
-          <a:p>
-            <a:pPr>
-              <a:spcBef>
-                <a:spcPts val="600"/>
+                  <a:srgbClr val="475569"/>
+                </a:solidFill>
+              </a:defRPr>
+            </a:pPr>
+            <a:r>
+              <a:t>- Direct cash grant from the IRS</a:t>
+            </a:r>
+          </a:p>
+          <a:p>
+            <a:pPr>
+              <a:spcBef>
+                <a:spcPts val="500"/>
               </a:spcBef>
               <a:defRPr sz="950">
                 <a:solidFill>
-                  <a:srgbClr val="A0AEC0"/>
-                </a:solidFill>
-              </a:defRPr>
-            </a:pPr>
-            <a:r>
-              <a:t>- Covers 30% to 50% of the total canopy cost</a:t>
-            </a:r>
-          </a:p>
-          <a:p>
-            <a:pPr>
-              <a:spcBef>
-                <a:spcPts val="600"/>
+                  <a:srgbClr val="475569"/>
+                </a:solidFill>
+              </a:defRPr>
+            </a:pPr>
+            <a:r>
+              <a:t>- Covers 30% to 50% of total cost</a:t>
+            </a:r>
+          </a:p>
+          <a:p>
+            <a:pPr>
+              <a:spcBef>
+                <a:spcPts val="500"/>
               </a:spcBef>
               <a:defRPr sz="950">
                 <a:solidFill>
-                  <a:srgbClr val="A0AEC0"/>
-                </a:solidFill>
-              </a:defRPr>
-            </a:pPr>
-            <a:r>
-              <a:t>- Paid directly to the district treasury</a:t>
+                  <a:srgbClr val="475569"/>
+                </a:solidFill>
+              </a:defRPr>
+            </a:pPr>
+            <a:r>
+              <a:t>- Paid to district treasury</a:t>
+            </a:r>
+          </a:p>
+          <a:p>
+            <a:pPr>
+              <a:spcBef>
+                <a:spcPts val="500"/>
+              </a:spcBef>
+              <a:defRPr sz="950">
+                <a:solidFill>
+                  <a:srgbClr val="475569"/>
+                </a:solidFill>
+              </a:defRPr>
+            </a:pPr>
+            <a:r>
+              <a:t>- No bond measure required</a:t>
             </a:r>
           </a:p>
         </p:txBody>
@@ -11442,11 +11713,11 @@
             <a:avLst/>
           </a:prstGeom>
           <a:solidFill>
-            <a:srgbClr val="131A2B"/>
+            <a:srgbClr val="FFFFFF"/>
           </a:solidFill>
           <a:ln w="12700">
             <a:solidFill>
-              <a:srgbClr val="222E4A"/>
+              <a:srgbClr val="E2E8F0"/>
             </a:solidFill>
           </a:ln>
         </p:spPr>
@@ -11487,7 +11758,7 @@
             <a:avLst/>
           </a:prstGeom>
           <a:solidFill>
-            <a:srgbClr val="10B981"/>
+            <a:srgbClr val="059669"/>
           </a:solidFill>
           <a:ln>
             <a:noFill/>
@@ -11538,9 +11809,9 @@
           <a:lstStyle/>
           <a:p>
             <a:pPr>
-              <a:defRPr sz="3000" b="1">
-                <a:solidFill>
-                  <a:srgbClr val="10B981"/>
+              <a:defRPr sz="2800" b="1">
+                <a:solidFill>
+                  <a:srgbClr val="059669"/>
                 </a:solidFill>
               </a:defRPr>
             </a:pPr>
@@ -11555,57 +11826,72 @@
               </a:spcBef>
               <a:defRPr sz="850" b="1">
                 <a:solidFill>
-                  <a:srgbClr val="F8FAFC"/>
-                </a:solidFill>
-              </a:defRPr>
-            </a:pPr>
-            <a:r>
-              <a:t>ANNUAL BILL SAVINGS</a:t>
-            </a:r>
-          </a:p>
-          <a:p>
-            <a:pPr>
-              <a:spcBef>
-                <a:spcPts val="600"/>
+                  <a:srgbClr val="0F172A"/>
+                </a:solidFill>
+              </a:defRPr>
+            </a:pPr>
+            <a:r>
+              <a:t>ANNUAL SAVINGS</a:t>
+            </a:r>
+          </a:p>
+          <a:p>
+            <a:pPr>
+              <a:spcBef>
+                <a:spcPts val="500"/>
               </a:spcBef>
               <a:defRPr sz="950">
                 <a:solidFill>
-                  <a:srgbClr val="A0AEC0"/>
-                </a:solidFill>
-              </a:defRPr>
-            </a:pPr>
-            <a:r>
-              <a:t>- Clean solar power offsets expensive peak grid rates</a:t>
-            </a:r>
-          </a:p>
-          <a:p>
-            <a:pPr>
-              <a:spcBef>
-                <a:spcPts val="600"/>
+                  <a:srgbClr val="475569"/>
+                </a:solidFill>
+              </a:defRPr>
+            </a:pPr>
+            <a:r>
+              <a:t>- Avoided retail power bills</a:t>
+            </a:r>
+          </a:p>
+          <a:p>
+            <a:pPr>
+              <a:spcBef>
+                <a:spcPts val="500"/>
               </a:spcBef>
               <a:defRPr sz="950">
                 <a:solidFill>
-                  <a:srgbClr val="A0AEC0"/>
-                </a:solidFill>
-              </a:defRPr>
-            </a:pPr>
-            <a:r>
-              <a:t>- Protects district from rising utility prices</a:t>
-            </a:r>
-          </a:p>
-          <a:p>
-            <a:pPr>
-              <a:spcBef>
-                <a:spcPts val="600"/>
+                  <a:srgbClr val="475569"/>
+                </a:solidFill>
+              </a:defRPr>
+            </a:pPr>
+            <a:r>
+              <a:t>- Protects against rising PG&amp;E rates</a:t>
+            </a:r>
+          </a:p>
+          <a:p>
+            <a:pPr>
+              <a:spcBef>
+                <a:spcPts val="500"/>
               </a:spcBef>
               <a:defRPr sz="950">
                 <a:solidFill>
-                  <a:srgbClr val="A0AEC0"/>
-                </a:solidFill>
-              </a:defRPr>
-            </a:pPr>
-            <a:r>
-              <a:t>- Savings start the first month it's turned on</a:t>
+                  <a:srgbClr val="475569"/>
+                </a:solidFill>
+              </a:defRPr>
+            </a:pPr>
+            <a:r>
+              <a:t>- Savings start in Month 1</a:t>
+            </a:r>
+          </a:p>
+          <a:p>
+            <a:pPr>
+              <a:spcBef>
+                <a:spcPts val="500"/>
+              </a:spcBef>
+              <a:defRPr sz="950">
+                <a:solidFill>
+                  <a:srgbClr val="475569"/>
+                </a:solidFill>
+              </a:defRPr>
+            </a:pPr>
+            <a:r>
+              <a:t>- Funds instructional resources</a:t>
             </a:r>
           </a:p>
         </p:txBody>
@@ -11625,11 +11911,11 @@
             <a:avLst/>
           </a:prstGeom>
           <a:solidFill>
-            <a:srgbClr val="131A2B"/>
+            <a:srgbClr val="FFFFFF"/>
           </a:solidFill>
           <a:ln w="12700">
             <a:solidFill>
-              <a:srgbClr val="222E4A"/>
+              <a:srgbClr val="E2E8F0"/>
             </a:solidFill>
           </a:ln>
         </p:spPr>
@@ -11670,7 +11956,7 @@
             <a:avLst/>
           </a:prstGeom>
           <a:solidFill>
-            <a:srgbClr val="F59E0B"/>
+            <a:srgbClr val="D97706"/>
           </a:solidFill>
           <a:ln>
             <a:noFill/>
@@ -11721,9 +12007,9 @@
           <a:lstStyle/>
           <a:p>
             <a:pPr>
-              <a:defRPr sz="3000" b="1">
-                <a:solidFill>
-                  <a:srgbClr val="F59E0B"/>
+              <a:defRPr sz="2800" b="1">
+                <a:solidFill>
+                  <a:srgbClr val="D97706"/>
                 </a:solidFill>
               </a:defRPr>
             </a:pPr>
@@ -11738,7 +12024,7 @@
               </a:spcBef>
               <a:defRPr sz="850" b="1">
                 <a:solidFill>
-                  <a:srgbClr val="F8FAFC"/>
+                  <a:srgbClr val="0F172A"/>
                 </a:solidFill>
               </a:defRPr>
             </a:pPr>
@@ -11749,46 +12035,61 @@
           <a:p>
             <a:pPr>
               <a:spcBef>
-                <a:spcPts val="600"/>
+                <a:spcPts val="500"/>
               </a:spcBef>
               <a:defRPr sz="950">
                 <a:solidFill>
-                  <a:srgbClr val="A0AEC0"/>
-                </a:solidFill>
-              </a:defRPr>
-            </a:pPr>
-            <a:r>
-              <a:t>- Total cumulative net savings over 25 years</a:t>
-            </a:r>
-          </a:p>
-          <a:p>
-            <a:pPr>
-              <a:spcBef>
-                <a:spcPts val="600"/>
+                  <a:srgbClr val="475569"/>
+                </a:solidFill>
+              </a:defRPr>
+            </a:pPr>
+            <a:r>
+              <a:t>- Cumulative net savings</a:t>
+            </a:r>
+          </a:p>
+          <a:p>
+            <a:pPr>
+              <a:spcBef>
+                <a:spcPts val="500"/>
               </a:spcBef>
               <a:defRPr sz="950">
                 <a:solidFill>
-                  <a:srgbClr val="A0AEC0"/>
-                </a:solidFill>
-              </a:defRPr>
-            </a:pPr>
-            <a:r>
-              <a:t>- Accounts for panel aging and maintenance costs</a:t>
-            </a:r>
-          </a:p>
-          <a:p>
-            <a:pPr>
-              <a:spcBef>
-                <a:spcPts val="600"/>
+                  <a:srgbClr val="475569"/>
+                </a:solidFill>
+              </a:defRPr>
+            </a:pPr>
+            <a:r>
+              <a:t>- Accounts for maintenance</a:t>
+            </a:r>
+          </a:p>
+          <a:p>
+            <a:pPr>
+              <a:spcBef>
+                <a:spcPts val="500"/>
               </a:spcBef>
               <a:defRPr sz="950">
                 <a:solidFill>
-                  <a:srgbClr val="A0AEC0"/>
-                </a:solidFill>
-              </a:defRPr>
-            </a:pPr>
-            <a:r>
-              <a:t>- Permanent long-term funding for school programs</a:t>
+                  <a:srgbClr val="475569"/>
+                </a:solidFill>
+              </a:defRPr>
+            </a:pPr>
+            <a:r>
+              <a:t>- Permanent classroom cash</a:t>
+            </a:r>
+          </a:p>
+          <a:p>
+            <a:pPr>
+              <a:spcBef>
+                <a:spcPts val="500"/>
+              </a:spcBef>
+              <a:defRPr sz="950">
+                <a:solidFill>
+                  <a:srgbClr val="475569"/>
+                </a:solidFill>
+              </a:defRPr>
+            </a:pPr>
+            <a:r>
+              <a:t>- Zero school bond tax hikes</a:t>
             </a:r>
           </a:p>
         </p:txBody>
@@ -11808,11 +12109,11 @@
             <a:avLst/>
           </a:prstGeom>
           <a:solidFill>
-            <a:srgbClr val="131A2B"/>
+            <a:srgbClr val="FFFFFF"/>
           </a:solidFill>
           <a:ln w="12700">
             <a:solidFill>
-              <a:srgbClr val="10B981"/>
+              <a:srgbClr val="059669"/>
             </a:solidFill>
           </a:ln>
         </p:spPr>
@@ -11863,7 +12164,7 @@
             <a:pPr>
               <a:defRPr sz="900" b="1">
                 <a:solidFill>
-                  <a:srgbClr val="10B981"/>
+                  <a:srgbClr val="059669"/>
                 </a:solidFill>
               </a:defRPr>
             </a:pPr>
@@ -11878,7 +12179,7 @@
               </a:spcBef>
               <a:defRPr sz="1050" b="1">
                 <a:solidFill>
-                  <a:srgbClr val="F8FAFC"/>
+                  <a:srgbClr val="0F172A"/>
                 </a:solidFill>
               </a:defRPr>
             </a:pPr>
@@ -11921,7 +12222,7 @@
             <a:avLst/>
           </a:prstGeom>
           <a:solidFill>
-            <a:srgbClr val="0B0F19"/>
+            <a:srgbClr val="F8FAFC"/>
           </a:solidFill>
           <a:ln>
             <a:noFill/>
@@ -11964,10 +12265,12 @@
             <a:avLst/>
           </a:prstGeom>
           <a:solidFill>
-            <a:srgbClr val="0F172A"/>
+            <a:srgbClr val="F1F5F9"/>
           </a:solidFill>
-          <a:ln>
-            <a:noFill/>
+          <a:ln w="12700">
+            <a:solidFill>
+              <a:srgbClr val="E2E8F0"/>
+            </a:solidFill>
           </a:ln>
         </p:spPr>
         <p:style>
@@ -12069,7 +12372,7 @@
             <a:pPr>
               <a:defRPr sz="950">
                 <a:solidFill>
-                  <a:srgbClr val="A0AEC0"/>
+                  <a:srgbClr val="475569"/>
                 </a:solidFill>
               </a:defRPr>
             </a:pPr>
@@ -12104,7 +12407,7 @@
             <a:pPr algn="r">
               <a:defRPr sz="1000" b="1">
                 <a:solidFill>
-                  <a:srgbClr val="38BDF8"/>
+                  <a:srgbClr val="0284C7"/>
                 </a:solidFill>
               </a:defRPr>
             </a:pPr>
@@ -12129,7 +12432,7 @@
             <a:avLst/>
           </a:prstGeom>
           <a:solidFill>
-            <a:srgbClr val="38BDF8"/>
+            <a:srgbClr val="0284C7"/>
           </a:solidFill>
           <a:ln>
             <a:noFill/>
@@ -12182,7 +12485,7 @@
             <a:pPr>
               <a:defRPr sz="900" b="1">
                 <a:solidFill>
-                  <a:srgbClr val="38BDF8"/>
+                  <a:srgbClr val="0284C7"/>
                 </a:solidFill>
               </a:defRPr>
             </a:pPr>
@@ -12197,7 +12500,7 @@
               </a:spcBef>
               <a:defRPr sz="2200" b="1">
                 <a:solidFill>
-                  <a:srgbClr val="F8FAFC"/>
+                  <a:srgbClr val="0F172A"/>
                 </a:solidFill>
               </a:defRPr>
             </a:pPr>
@@ -12212,7 +12515,7 @@
               </a:spcBef>
               <a:defRPr sz="1100">
                 <a:solidFill>
-                  <a:srgbClr val="A0AEC0"/>
+                  <a:srgbClr val="475569"/>
                 </a:solidFill>
               </a:defRPr>
             </a:pPr>
@@ -12237,11 +12540,11 @@
             <a:avLst/>
           </a:prstGeom>
           <a:solidFill>
-            <a:srgbClr val="131A2B"/>
+            <a:srgbClr val="FFFFFF"/>
           </a:solidFill>
           <a:ln w="12700">
             <a:solidFill>
-              <a:srgbClr val="222E4A"/>
+              <a:srgbClr val="E2E8F0"/>
             </a:solidFill>
           </a:ln>
         </p:spPr>
@@ -12282,7 +12585,7 @@
             <a:avLst/>
           </a:prstGeom>
           <a:solidFill>
-            <a:srgbClr val="38BDF8"/>
+            <a:srgbClr val="0284C7"/>
           </a:solidFill>
           <a:ln>
             <a:noFill/>
@@ -12335,7 +12638,7 @@
             <a:pPr>
               <a:defRPr sz="3200" b="1">
                 <a:solidFill>
-                  <a:srgbClr val="38BDF8"/>
+                  <a:srgbClr val="0284C7"/>
                 </a:solidFill>
               </a:defRPr>
             </a:pPr>
@@ -12350,7 +12653,7 @@
               </a:spcBef>
               <a:defRPr sz="900" b="1">
                 <a:solidFill>
-                  <a:srgbClr val="F8FAFC"/>
+                  <a:srgbClr val="0F172A"/>
                 </a:solidFill>
               </a:defRPr>
             </a:pPr>
@@ -12365,7 +12668,7 @@
               </a:spcBef>
               <a:defRPr sz="1000">
                 <a:solidFill>
-                  <a:srgbClr val="A0AEC0"/>
+                  <a:srgbClr val="475569"/>
                 </a:solidFill>
               </a:defRPr>
             </a:pPr>
@@ -12380,7 +12683,7 @@
               </a:spcBef>
               <a:defRPr sz="1000">
                 <a:solidFill>
-                  <a:srgbClr val="A0AEC0"/>
+                  <a:srgbClr val="475569"/>
                 </a:solidFill>
               </a:defRPr>
             </a:pPr>
@@ -12395,7 +12698,7 @@
               </a:spcBef>
               <a:defRPr sz="1000">
                 <a:solidFill>
-                  <a:srgbClr val="A0AEC0"/>
+                  <a:srgbClr val="475569"/>
                 </a:solidFill>
               </a:defRPr>
             </a:pPr>
@@ -12410,7 +12713,7 @@
               </a:spcBef>
               <a:defRPr sz="1000">
                 <a:solidFill>
-                  <a:srgbClr val="A0AEC0"/>
+                  <a:srgbClr val="475569"/>
                 </a:solidFill>
               </a:defRPr>
             </a:pPr>
@@ -12435,11 +12738,11 @@
             <a:avLst/>
           </a:prstGeom>
           <a:solidFill>
-            <a:srgbClr val="131A2B"/>
+            <a:srgbClr val="FFFFFF"/>
           </a:solidFill>
           <a:ln w="12700">
             <a:solidFill>
-              <a:srgbClr val="222E4A"/>
+              <a:srgbClr val="E2E8F0"/>
             </a:solidFill>
           </a:ln>
         </p:spPr>
@@ -12480,7 +12783,7 @@
             <a:avLst/>
           </a:prstGeom>
           <a:solidFill>
-            <a:srgbClr val="10B981"/>
+            <a:srgbClr val="059669"/>
           </a:solidFill>
           <a:ln>
             <a:noFill/>
@@ -12533,7 +12836,7 @@
             <a:pPr>
               <a:defRPr sz="3200" b="1">
                 <a:solidFill>
-                  <a:srgbClr val="10B981"/>
+                  <a:srgbClr val="059669"/>
                 </a:solidFill>
               </a:defRPr>
             </a:pPr>
@@ -12548,7 +12851,7 @@
               </a:spcBef>
               <a:defRPr sz="900" b="1">
                 <a:solidFill>
-                  <a:srgbClr val="F8FAFC"/>
+                  <a:srgbClr val="0F172A"/>
                 </a:solidFill>
               </a:defRPr>
             </a:pPr>
@@ -12563,7 +12866,7 @@
               </a:spcBef>
               <a:defRPr sz="1000">
                 <a:solidFill>
-                  <a:srgbClr val="A0AEC0"/>
+                  <a:srgbClr val="475569"/>
                 </a:solidFill>
               </a:defRPr>
             </a:pPr>
@@ -12578,12 +12881,12 @@
               </a:spcBef>
               <a:defRPr sz="1000">
                 <a:solidFill>
-                  <a:srgbClr val="A0AEC0"/>
-                </a:solidFill>
-              </a:defRPr>
-            </a:pPr>
-            <a:r>
-              <a:t>- Powers teachers' daily commute with 100% clean sunshine</a:t>
+                  <a:srgbClr val="475569"/>
+                </a:solidFill>
+              </a:defRPr>
+            </a:pPr>
+            <a:r>
+              <a:t>- Powers teachers' daily commute with clean sunshine</a:t>
             </a:r>
           </a:p>
           <a:p>
@@ -12593,7 +12896,7 @@
               </a:spcBef>
               <a:defRPr sz="1000">
                 <a:solidFill>
-                  <a:srgbClr val="A0AEC0"/>
+                  <a:srgbClr val="475569"/>
                 </a:solidFill>
               </a:defRPr>
             </a:pPr>
@@ -12608,7 +12911,7 @@
               </a:spcBef>
               <a:defRPr sz="1000">
                 <a:solidFill>
-                  <a:srgbClr val="A0AEC0"/>
+                  <a:srgbClr val="475569"/>
                 </a:solidFill>
               </a:defRPr>
             </a:pPr>
@@ -12633,11 +12936,11 @@
             <a:avLst/>
           </a:prstGeom>
           <a:solidFill>
-            <a:srgbClr val="131A2B"/>
+            <a:srgbClr val="FFFFFF"/>
           </a:solidFill>
           <a:ln w="12700">
             <a:solidFill>
-              <a:srgbClr val="222E4A"/>
+              <a:srgbClr val="E2E8F0"/>
             </a:solidFill>
           </a:ln>
         </p:spPr>
@@ -12678,7 +12981,7 @@
             <a:avLst/>
           </a:prstGeom>
           <a:solidFill>
-            <a:srgbClr val="F59E0B"/>
+            <a:srgbClr val="D97706"/>
           </a:solidFill>
           <a:ln>
             <a:noFill/>
@@ -12731,7 +13034,7 @@
             <a:pPr>
               <a:defRPr sz="3200" b="1">
                 <a:solidFill>
-                  <a:srgbClr val="F59E0B"/>
+                  <a:srgbClr val="D97706"/>
                 </a:solidFill>
               </a:defRPr>
             </a:pPr>
@@ -12746,7 +13049,7 @@
               </a:spcBef>
               <a:defRPr sz="900" b="1">
                 <a:solidFill>
-                  <a:srgbClr val="F8FAFC"/>
+                  <a:srgbClr val="0F172A"/>
                 </a:solidFill>
               </a:defRPr>
             </a:pPr>
@@ -12761,7 +13064,7 @@
               </a:spcBef>
               <a:defRPr sz="1000">
                 <a:solidFill>
-                  <a:srgbClr val="A0AEC0"/>
+                  <a:srgbClr val="475569"/>
                 </a:solidFill>
               </a:defRPr>
             </a:pPr>
@@ -12776,7 +13079,7 @@
               </a:spcBef>
               <a:defRPr sz="1000">
                 <a:solidFill>
-                  <a:srgbClr val="A0AEC0"/>
+                  <a:srgbClr val="475569"/>
                 </a:solidFill>
               </a:defRPr>
             </a:pPr>
@@ -12791,7 +13094,7 @@
               </a:spcBef>
               <a:defRPr sz="1000">
                 <a:solidFill>
-                  <a:srgbClr val="A0AEC0"/>
+                  <a:srgbClr val="475569"/>
                 </a:solidFill>
               </a:defRPr>
             </a:pPr>
@@ -12806,7 +13109,7 @@
               </a:spcBef>
               <a:defRPr sz="1000">
                 <a:solidFill>
-                  <a:srgbClr val="A0AEC0"/>
+                  <a:srgbClr val="475569"/>
                 </a:solidFill>
               </a:defRPr>
             </a:pPr>
@@ -12831,11 +13134,11 @@
             <a:avLst/>
           </a:prstGeom>
           <a:solidFill>
-            <a:srgbClr val="131A2B"/>
+            <a:srgbClr val="FFFFFF"/>
           </a:solidFill>
           <a:ln w="12700">
             <a:solidFill>
-              <a:srgbClr val="38BDF8"/>
+              <a:srgbClr val="0284C7"/>
             </a:solidFill>
           </a:ln>
         </p:spPr>
@@ -12886,7 +13189,7 @@
             <a:pPr>
               <a:defRPr sz="900" b="1">
                 <a:solidFill>
-                  <a:srgbClr val="38BDF8"/>
+                  <a:srgbClr val="0284C7"/>
                 </a:solidFill>
               </a:defRPr>
             </a:pPr>
@@ -12901,7 +13204,7 @@
               </a:spcBef>
               <a:defRPr sz="1050" b="1">
                 <a:solidFill>
-                  <a:srgbClr val="F8FAFC"/>
+                  <a:srgbClr val="0F172A"/>
                 </a:solidFill>
               </a:defRPr>
             </a:pPr>
@@ -12944,7 +13247,7 @@
             <a:avLst/>
           </a:prstGeom>
           <a:solidFill>
-            <a:srgbClr val="0B0F19"/>
+            <a:srgbClr val="F8FAFC"/>
           </a:solidFill>
           <a:ln>
             <a:noFill/>
@@ -12987,10 +13290,12 @@
             <a:avLst/>
           </a:prstGeom>
           <a:solidFill>
-            <a:srgbClr val="0F172A"/>
+            <a:srgbClr val="F1F5F9"/>
           </a:solidFill>
-          <a:ln>
-            <a:noFill/>
+          <a:ln w="12700">
+            <a:solidFill>
+              <a:srgbClr val="E2E8F0"/>
+            </a:solidFill>
           </a:ln>
         </p:spPr>
         <p:style>
@@ -13092,7 +13397,7 @@
             <a:pPr>
               <a:defRPr sz="950">
                 <a:solidFill>
-                  <a:srgbClr val="A0AEC0"/>
+                  <a:srgbClr val="475569"/>
                 </a:solidFill>
               </a:defRPr>
             </a:pPr>
@@ -13127,7 +13432,7 @@
             <a:pPr algn="r">
               <a:defRPr sz="1000" b="1">
                 <a:solidFill>
-                  <a:srgbClr val="38BDF8"/>
+                  <a:srgbClr val="0284C7"/>
                 </a:solidFill>
               </a:defRPr>
             </a:pPr>
@@ -13152,7 +13457,7 @@
             <a:avLst/>
           </a:prstGeom>
           <a:solidFill>
-            <a:srgbClr val="38BDF8"/>
+            <a:srgbClr val="0284C7"/>
           </a:solidFill>
           <a:ln>
             <a:noFill/>
@@ -13205,7 +13510,7 @@
             <a:pPr>
               <a:defRPr sz="900" b="1">
                 <a:solidFill>
-                  <a:srgbClr val="38BDF8"/>
+                  <a:srgbClr val="0284C7"/>
                 </a:solidFill>
               </a:defRPr>
             </a:pPr>
@@ -13220,7 +13525,7 @@
               </a:spcBef>
               <a:defRPr sz="2200" b="1">
                 <a:solidFill>
-                  <a:srgbClr val="F8FAFC"/>
+                  <a:srgbClr val="0F172A"/>
                 </a:solidFill>
               </a:defRPr>
             </a:pPr>
@@ -13235,7 +13540,7 @@
               </a:spcBef>
               <a:defRPr sz="1100">
                 <a:solidFill>
-                  <a:srgbClr val="A0AEC0"/>
+                  <a:srgbClr val="475569"/>
                 </a:solidFill>
               </a:defRPr>
             </a:pPr>
@@ -13260,11 +13565,11 @@
             <a:avLst/>
           </a:prstGeom>
           <a:solidFill>
-            <a:srgbClr val="131A2B"/>
+            <a:srgbClr val="FFFFFF"/>
           </a:solidFill>
           <a:ln w="12700">
             <a:solidFill>
-              <a:srgbClr val="222E4A"/>
+              <a:srgbClr val="E2E8F0"/>
             </a:solidFill>
           </a:ln>
         </p:spPr>
@@ -13305,7 +13610,7 @@
             <a:avLst/>
           </a:prstGeom>
           <a:solidFill>
-            <a:srgbClr val="38BDF8"/>
+            <a:srgbClr val="0284C7"/>
           </a:solidFill>
           <a:ln>
             <a:noFill/>
@@ -13356,9 +13661,9 @@
           <a:lstStyle/>
           <a:p>
             <a:pPr>
-              <a:defRPr sz="2600" b="1">
-                <a:solidFill>
-                  <a:srgbClr val="38BDF8"/>
+              <a:defRPr sz="2400" b="1">
+                <a:solidFill>
+                  <a:srgbClr val="0284C7"/>
                 </a:solidFill>
               </a:defRPr>
             </a:pPr>
@@ -13373,7 +13678,7 @@
               </a:spcBef>
               <a:defRPr sz="900" b="1">
                 <a:solidFill>
-                  <a:srgbClr val="F8FAFC"/>
+                  <a:srgbClr val="0F172A"/>
                 </a:solidFill>
               </a:defRPr>
             </a:pPr>
@@ -13388,7 +13693,7 @@
               </a:spcBef>
               <a:defRPr sz="1000">
                 <a:solidFill>
-                  <a:srgbClr val="A0AEC0"/>
+                  <a:srgbClr val="475569"/>
                 </a:solidFill>
               </a:defRPr>
             </a:pPr>
@@ -13403,7 +13708,7 @@
               </a:spcBef>
               <a:defRPr sz="1000">
                 <a:solidFill>
-                  <a:srgbClr val="A0AEC0"/>
+                  <a:srgbClr val="475569"/>
                 </a:solidFill>
               </a:defRPr>
             </a:pPr>
@@ -13418,7 +13723,7 @@
               </a:spcBef>
               <a:defRPr sz="1000">
                 <a:solidFill>
-                  <a:srgbClr val="A0AEC0"/>
+                  <a:srgbClr val="475569"/>
                 </a:solidFill>
               </a:defRPr>
             </a:pPr>
@@ -13433,7 +13738,7 @@
               </a:spcBef>
               <a:defRPr sz="1000">
                 <a:solidFill>
-                  <a:srgbClr val="A0AEC0"/>
+                  <a:srgbClr val="475569"/>
                 </a:solidFill>
               </a:defRPr>
             </a:pPr>
@@ -13458,11 +13763,11 @@
             <a:avLst/>
           </a:prstGeom>
           <a:solidFill>
-            <a:srgbClr val="131A2B"/>
+            <a:srgbClr val="FFFFFF"/>
           </a:solidFill>
           <a:ln w="12700">
             <a:solidFill>
-              <a:srgbClr val="222E4A"/>
+              <a:srgbClr val="E2E8F0"/>
             </a:solidFill>
           </a:ln>
         </p:spPr>
@@ -13503,7 +13808,7 @@
             <a:avLst/>
           </a:prstGeom>
           <a:solidFill>
-            <a:srgbClr val="10B981"/>
+            <a:srgbClr val="059669"/>
           </a:solidFill>
           <a:ln>
             <a:noFill/>
@@ -13554,9 +13859,9 @@
           <a:lstStyle/>
           <a:p>
             <a:pPr>
-              <a:defRPr sz="2600" b="1">
-                <a:solidFill>
-                  <a:srgbClr val="10B981"/>
+              <a:defRPr sz="2400" b="1">
+                <a:solidFill>
+                  <a:srgbClr val="059669"/>
                 </a:solidFill>
               </a:defRPr>
             </a:pPr>
@@ -13571,7 +13876,7 @@
               </a:spcBef>
               <a:defRPr sz="900" b="1">
                 <a:solidFill>
-                  <a:srgbClr val="F8FAFC"/>
+                  <a:srgbClr val="0F172A"/>
                 </a:solidFill>
               </a:defRPr>
             </a:pPr>
@@ -13586,7 +13891,7 @@
               </a:spcBef>
               <a:defRPr sz="1000">
                 <a:solidFill>
-                  <a:srgbClr val="A0AEC0"/>
+                  <a:srgbClr val="475569"/>
                 </a:solidFill>
               </a:defRPr>
             </a:pPr>
@@ -13601,7 +13906,7 @@
               </a:spcBef>
               <a:defRPr sz="1000">
                 <a:solidFill>
-                  <a:srgbClr val="A0AEC0"/>
+                  <a:srgbClr val="475569"/>
                 </a:solidFill>
               </a:defRPr>
             </a:pPr>
@@ -13616,7 +13921,7 @@
               </a:spcBef>
               <a:defRPr sz="1000">
                 <a:solidFill>
-                  <a:srgbClr val="A0AEC0"/>
+                  <a:srgbClr val="475569"/>
                 </a:solidFill>
               </a:defRPr>
             </a:pPr>
@@ -13631,7 +13936,7 @@
               </a:spcBef>
               <a:defRPr sz="1000">
                 <a:solidFill>
-                  <a:srgbClr val="A0AEC0"/>
+                  <a:srgbClr val="475569"/>
                 </a:solidFill>
               </a:defRPr>
             </a:pPr>
@@ -13656,11 +13961,11 @@
             <a:avLst/>
           </a:prstGeom>
           <a:solidFill>
-            <a:srgbClr val="131A2B"/>
+            <a:srgbClr val="FFFFFF"/>
           </a:solidFill>
           <a:ln w="12700">
             <a:solidFill>
-              <a:srgbClr val="222E4A"/>
+              <a:srgbClr val="E2E8F0"/>
             </a:solidFill>
           </a:ln>
         </p:spPr>
@@ -13701,7 +14006,7 @@
             <a:avLst/>
           </a:prstGeom>
           <a:solidFill>
-            <a:srgbClr val="F59E0B"/>
+            <a:srgbClr val="D97706"/>
           </a:solidFill>
           <a:ln>
             <a:noFill/>
@@ -13752,9 +14057,9 @@
           <a:lstStyle/>
           <a:p>
             <a:pPr>
-              <a:defRPr sz="2600" b="1">
-                <a:solidFill>
-                  <a:srgbClr val="F59E0B"/>
+              <a:defRPr sz="2400" b="1">
+                <a:solidFill>
+                  <a:srgbClr val="D97706"/>
                 </a:solidFill>
               </a:defRPr>
             </a:pPr>
@@ -13769,7 +14074,7 @@
               </a:spcBef>
               <a:defRPr sz="900" b="1">
                 <a:solidFill>
-                  <a:srgbClr val="F8FAFC"/>
+                  <a:srgbClr val="0F172A"/>
                 </a:solidFill>
               </a:defRPr>
             </a:pPr>
@@ -13784,7 +14089,7 @@
               </a:spcBef>
               <a:defRPr sz="1000">
                 <a:solidFill>
-                  <a:srgbClr val="A0AEC0"/>
+                  <a:srgbClr val="475569"/>
                 </a:solidFill>
               </a:defRPr>
             </a:pPr>
@@ -13799,7 +14104,7 @@
               </a:spcBef>
               <a:defRPr sz="1000">
                 <a:solidFill>
-                  <a:srgbClr val="A0AEC0"/>
+                  <a:srgbClr val="475569"/>
                 </a:solidFill>
               </a:defRPr>
             </a:pPr>
@@ -13814,7 +14119,7 @@
               </a:spcBef>
               <a:defRPr sz="1000">
                 <a:solidFill>
-                  <a:srgbClr val="A0AEC0"/>
+                  <a:srgbClr val="475569"/>
                 </a:solidFill>
               </a:defRPr>
             </a:pPr>
@@ -13829,7 +14134,7 @@
               </a:spcBef>
               <a:defRPr sz="1000">
                 <a:solidFill>
-                  <a:srgbClr val="A0AEC0"/>
+                  <a:srgbClr val="475569"/>
                 </a:solidFill>
               </a:defRPr>
             </a:pPr>
@@ -13854,11 +14159,11 @@
             <a:avLst/>
           </a:prstGeom>
           <a:solidFill>
-            <a:srgbClr val="131A2B"/>
+            <a:srgbClr val="FFFFFF"/>
           </a:solidFill>
           <a:ln w="12700">
             <a:solidFill>
-              <a:srgbClr val="10B981"/>
+              <a:srgbClr val="059669"/>
             </a:solidFill>
           </a:ln>
         </p:spPr>
@@ -13909,7 +14214,7 @@
             <a:pPr>
               <a:defRPr sz="900" b="1">
                 <a:solidFill>
-                  <a:srgbClr val="10B981"/>
+                  <a:srgbClr val="059669"/>
                 </a:solidFill>
               </a:defRPr>
             </a:pPr>
@@ -13924,7 +14229,7 @@
               </a:spcBef>
               <a:defRPr sz="1050" b="1">
                 <a:solidFill>
-                  <a:srgbClr val="F8FAFC"/>
+                  <a:srgbClr val="0F172A"/>
                 </a:solidFill>
               </a:defRPr>
             </a:pPr>
